--- a/SIH2026_Sukobin.pptx
+++ b/SIH2026_Sukobin.pptx
@@ -4649,7 +4649,7 @@
             </a:pPr>
             <a:r>
               <a:rPr sz="950" b="0"/>
-              <a:t>district map and alerts</a:t>
+              <a:t>weak points and forecast</a:t>
             </a:r>
           </a:p>
         </p:txBody>
@@ -4695,7 +4695,7 @@
             </a:pPr>
             <a:r>
               <a:rPr sz="1100" b="1"/>
-              <a:t>Notifications</a:t>
+              <a:t>Alerts</a:t>
             </a:r>
           </a:p>
           <a:p>
@@ -4706,7 +4706,7 @@
             </a:pPr>
             <a:r>
               <a:rPr sz="950" b="0"/>
-              <a:t>drivers, officers, customers</a:t>
+              <a:t>sent in the reader's own language</a:t>
             </a:r>
           </a:p>
         </p:txBody>
@@ -4875,7 +4875,7 @@
             </a:pPr>
             <a:r>
               <a:rPr sz="1100" b="0"/>
-              <a:t>Android apps in Kotlin and XML</a:t>
+              <a:t>Four Android apps in Kotlin and XML</a:t>
             </a:r>
           </a:p>
           <a:p>
@@ -4897,6 +4897,17 @@
             </a:pPr>
             <a:r>
               <a:rPr sz="1100" b="0"/>
+              <a:t>A model trained in plain JavaScript, no add-ons needed</a:t>
+            </a:r>
+          </a:p>
+          <a:p>
+            <a:pPr algn="l">
+              <a:spcAft>
+                <a:spcPts val="600"/>
+              </a:spcAft>
+            </a:pPr>
+            <a:r>
+              <a:rPr sz="1100" b="0"/>
               <a:t>OSRM for real road routes</a:t>
             </a:r>
           </a:p>
@@ -4920,17 +4931,6 @@
             <a:r>
               <a:rPr sz="1100" b="0"/>
               <a:t>React and MapLibre for the dashboard</a:t>
-            </a:r>
-          </a:p>
-          <a:p>
-            <a:pPr algn="l">
-              <a:spcAft>
-                <a:spcPts val="600"/>
-              </a:spcAft>
-            </a:pPr>
-            <a:r>
-              <a:rPr sz="1100" b="0"/>
-              <a:t>Firebase for notifications</a:t>
             </a:r>
           </a:p>
         </p:txBody>
@@ -5025,7 +5025,7 @@
         </p:nvGraphicFramePr>
         <p:xfrm>
           <a:off x="822960" y="1417320"/>
-          <a:ext cx="10607040" cy="658368"/>
+          <a:ext cx="10607040" cy="731520"/>
         </p:xfrm>
         <a:graphic>
           <a:graphicData uri="http://schemas.openxmlformats.org/drawingml/2006/table">
@@ -5035,12 +5035,12 @@
               </a:tblPr>
               <a:tblGrid>
                 <a:gridCol w="2103120"/>
-                <a:gridCol w="2103120"/>
-                <a:gridCol w="2103120"/>
-                <a:gridCol w="2194560"/>
-                <a:gridCol w="2103120"/>
+                <a:gridCol w="1737360"/>
+                <a:gridCol w="2834640"/>
+                <a:gridCol w="2011680"/>
+                <a:gridCol w="1920240"/>
               </a:tblGrid>
-              <a:tr h="329184">
+              <a:tr h="365760">
                 <a:tc>
                   <a:txBody>
                     <a:bodyPr/>
@@ -5052,7 +5052,7 @@
                         </a:spcAft>
                       </a:pPr>
                       <a:r>
-                        <a:rPr sz="1150"/>
+                        <a:rPr sz="1100"/>
                         <a:t>Roads modelled</a:t>
                       </a:r>
                     </a:p>
@@ -5070,7 +5070,7 @@
                         </a:spcAft>
                       </a:pPr>
                       <a:r>
-                        <a:rPr sz="1150"/>
+                        <a:rPr sz="1100"/>
                         <a:t>Length covered</a:t>
                       </a:r>
                     </a:p>
@@ -5088,8 +5088,8 @@
                         </a:spcAft>
                       </a:pPr>
                       <a:r>
-                        <a:rPr sz="1150"/>
-                        <a:t>Districts</a:t>
+                        <a:rPr sz="1100"/>
+                        <a:t>Model trained on</a:t>
                       </a:r>
                     </a:p>
                   </a:txBody>
@@ -5106,8 +5106,8 @@
                         </a:spcAft>
                       </a:pPr>
                       <a:r>
-                        <a:rPr sz="1150"/>
-                        <a:t>Weak points found</a:t>
+                        <a:rPr sz="1100"/>
+                        <a:t>Forecast accuracy</a:t>
                       </a:r>
                     </a:p>
                   </a:txBody>
@@ -5124,15 +5124,15 @@
                         </a:spcAft>
                       </a:pPr>
                       <a:r>
-                        <a:rPr sz="1150"/>
-                        <a:t>Apps built</a:t>
+                        <a:rPr sz="1100"/>
+                        <a:t>Built</a:t>
                       </a:r>
                     </a:p>
                   </a:txBody>
                   <a:tcPr marL="73152" marR="73152" marT="18288" marB="18288"/>
                 </a:tc>
               </a:tr>
-              <a:tr h="329184">
+              <a:tr h="365760">
                 <a:tc>
                   <a:txBody>
                     <a:bodyPr/>
@@ -5144,8 +5144,8 @@
                         </a:spcAft>
                       </a:pPr>
                       <a:r>
-                        <a:rPr sz="1150"/>
-                        <a:t>42 sections</a:t>
+                        <a:rPr sz="1100"/>
+                        <a:t>42 sections, 82 districts</a:t>
                       </a:r>
                     </a:p>
                   </a:txBody>
@@ -5162,7 +5162,7 @@
                         </a:spcAft>
                       </a:pPr>
                       <a:r>
-                        <a:rPr sz="1150"/>
+                        <a:rPr sz="1100"/>
                         <a:t>3,567 km</a:t>
                       </a:r>
                     </a:p>
@@ -5180,8 +5180,8 @@
                         </a:spcAft>
                       </a:pPr>
                       <a:r>
-                        <a:rPr sz="1150"/>
-                        <a:t>82</a:t>
+                        <a:rPr sz="1100"/>
+                        <a:t>1,09,116 road-days of real weather</a:t>
                       </a:r>
                     </a:p>
                   </a:txBody>
@@ -5198,8 +5198,8 @@
                         </a:spcAft>
                       </a:pPr>
                       <a:r>
-                        <a:rPr sz="1150"/>
-                        <a:t>12</a:t>
+                        <a:rPr sz="1100"/>
+                        <a:t>0.88 (1.0 is perfect)</a:t>
                       </a:r>
                     </a:p>
                   </a:txBody>
@@ -5216,7 +5216,7 @@
                         </a:spcAft>
                       </a:pPr>
                       <a:r>
-                        <a:rPr sz="1150"/>
+                        <a:rPr sz="1100"/>
                         <a:t>4 apps and 1 dashboard</a:t>
                       </a:r>
                     </a:p>
@@ -5236,7 +5236,7 @@
         </p:nvSpPr>
         <p:spPr>
           <a:xfrm>
-            <a:off x="822960" y="2395728"/>
+            <a:off x="822960" y="2468880"/>
             <a:ext cx="5120640" cy="274320"/>
           </a:xfrm>
           <a:prstGeom prst="rect">
@@ -5270,7 +5270,7 @@
         </p:nvSpPr>
         <p:spPr>
           <a:xfrm>
-            <a:off x="822960" y="2724912"/>
+            <a:off x="822960" y="2798064"/>
             <a:ext cx="5120640" cy="2103120"/>
           </a:xfrm>
           <a:prstGeom prst="rect">
@@ -5291,7 +5291,7 @@
             </a:pPr>
             <a:r>
               <a:rPr sz="1100" b="0"/>
-              <a:t>The risk model marked the Dimapur to Kohima road as high risk after 161 mm of real rainfall. That road is Manipur's main supply line.</a:t>
+              <a:t>The forecast model was trained on two years of real recorded weather and tested only on later dates it had never seen. When it says 30%, the event happens about 30% of the time.</a:t>
             </a:r>
           </a:p>
           <a:p>
@@ -5302,7 +5302,7 @@
             </a:pPr>
             <a:r>
               <a:rPr sz="1100" b="0"/>
-              <a:t>As vehicle speeds dropped in a test, the road moved from open to slow to restricted to blocked, on its own.</a:t>
+              <a:t>As vehicle speeds dropped, one road moved from open to slow to blocked on its own, with no person involved, and the district alert followed.</a:t>
             </a:r>
           </a:p>
           <a:p>
@@ -5337,7 +5337,7 @@
         </p:nvSpPr>
         <p:spPr>
           <a:xfrm>
-            <a:off x="6309360" y="2395728"/>
+            <a:off x="6309360" y="2468880"/>
             <a:ext cx="5120640" cy="274320"/>
           </a:xfrm>
           <a:prstGeom prst="rect">
@@ -5371,7 +5371,7 @@
         </p:nvSpPr>
         <p:spPr>
           <a:xfrm>
-            <a:off x="6309360" y="2724912"/>
+            <a:off x="6309360" y="2798064"/>
             <a:ext cx="5120640" cy="2103120"/>
           </a:xfrm>
           <a:prstGeom prst="rect">

--- a/SIH2026_Sukobin.pptx
+++ b/SIH2026_Sukobin.pptx
@@ -6174,8 +6174,8 @@
         </p:nvSpPr>
         <p:spPr>
           <a:xfrm>
-            <a:off x="411480" y="1188720"/>
-            <a:ext cx="6446520" cy="219456"/>
+            <a:off x="411480" y="1143000"/>
+            <a:ext cx="6400800" cy="237744"/>
           </a:xfrm>
           <a:prstGeom prst="rect">
             <a:avLst/>
@@ -6202,25 +6202,69 @@
             <a:r>
               <a:rPr sz="1000" b="1" i="0">
                 <a:solidFill>
-                  <a:srgbClr val="1F497D"/>
-                </a:solidFill>
-                <a:latin typeface="Arial"/>
-              </a:rPr>
-              <a:t>THE GAP</a:t>
-            </a:r>
-          </a:p>
-        </p:txBody>
-      </p:sp>
-      <p:sp>
-        <p:nvSpPr>
-          <p:cNvPr id="15363" name="TextBox 15362"/>
+                  <a:srgbClr val="0070C0"/>
+                </a:solidFill>
+                <a:latin typeface="Arial"/>
+              </a:rPr>
+              <a:t>DETAILED EXPLANATION OF THE PROPOSED SOLUTION</a:t>
+            </a:r>
+          </a:p>
+        </p:txBody>
+      </p:sp>
+      <p:sp>
+        <p:nvSpPr>
+          <p:cNvPr id="15363" name="Rectangle 15362"/>
+          <p:cNvSpPr/>
+          <p:nvPr/>
+        </p:nvSpPr>
+        <p:spPr>
+          <a:xfrm>
+            <a:off x="411480" y="1330452"/>
+            <a:ext cx="6400800" cy="12801"/>
+          </a:xfrm>
+          <a:prstGeom prst="rect">
+            <a:avLst/>
+          </a:prstGeom>
+          <a:solidFill>
+            <a:srgbClr val="C9D6E4"/>
+          </a:solidFill>
+          <a:ln>
+            <a:noFill/>
+          </a:ln>
+          <a:effectLst/>
+        </p:spPr>
+        <p:style>
+          <a:lnRef idx="1">
+            <a:schemeClr val="accent1"/>
+          </a:lnRef>
+          <a:fillRef idx="3">
+            <a:schemeClr val="accent1"/>
+          </a:fillRef>
+          <a:effectRef idx="2">
+            <a:schemeClr val="accent1"/>
+          </a:effectRef>
+          <a:fontRef idx="minor">
+            <a:schemeClr val="lt1"/>
+          </a:fontRef>
+        </p:style>
+        <p:txBody>
+          <a:bodyPr rtlCol="0" anchor="ctr"/>
+          <a:lstStyle/>
+          <a:p>
+            <a:pPr algn="ctr"/>
+          </a:p>
+        </p:txBody>
+      </p:sp>
+      <p:sp>
+        <p:nvSpPr>
+          <p:cNvPr id="15364" name="TextBox 15363"/>
           <p:cNvSpPr txBox="1"/>
           <p:nvPr/>
         </p:nvSpPr>
         <p:spPr>
           <a:xfrm>
-            <a:off x="411480" y="1463040"/>
-            <a:ext cx="6446520" cy="566928"/>
+            <a:off x="411480" y="1435608"/>
+            <a:ext cx="6400800" cy="1325880"/>
           </a:xfrm>
           <a:prstGeom prst="rect">
             <a:avLst/>
@@ -6245,27 +6289,67 @@
               </a:spcAft>
             </a:pPr>
             <a:r>
-              <a:rPr sz="1300" b="0" i="0">
+              <a:rPr sz="1200" b="1">
+                <a:solidFill>
+                  <a:srgbClr val="1F497D"/>
+                </a:solidFill>
+                <a:latin typeface="Arial"/>
+              </a:rPr>
+              <a:t>Nobody drives for us. </a:t>
+            </a:r>
+            <a:r>
+              <a:rPr sz="1200" b="0">
                 <a:solidFill>
                   <a:srgbClr val="262B33"/>
                 </a:solidFill>
                 <a:latin typeface="Arial"/>
               </a:rPr>
-              <a:t>The NER has no road-condition sensor network. A district usually learns a road is shut when a truck is already stuck on it, and instrumenting 3,500 km of hill highway is not affordable.</a:t>
-            </a:r>
-          </a:p>
-        </p:txBody>
-      </p:sp>
-      <p:sp>
-        <p:nvSpPr>
-          <p:cNvPr id="15364" name="TextBox 15363"/>
+              <a:t>Anyone already travelling A to B enters their vehicle and route, and is offered only the parcels whose pickup and drop lie along that road, up to what the vehicle holds. No fleet, no contract, no empty return leg.</a:t>
+            </a:r>
+          </a:p>
+          <a:p>
+            <a:pPr algn="l">
+              <a:lnSpc>
+                <a:spcPct val="102000"/>
+              </a:lnSpc>
+              <a:spcBef>
+                <a:spcPts val="900"/>
+              </a:spcBef>
+              <a:spcAft>
+                <a:spcPts val="0"/>
+              </a:spcAft>
+            </a:pPr>
+            <a:r>
+              <a:rPr sz="1200" b="1">
+                <a:solidFill>
+                  <a:srgbClr val="1F497D"/>
+                </a:solidFill>
+                <a:latin typeface="Arial"/>
+              </a:rPr>
+              <a:t>Those carriers stream GPS while they drive. </a:t>
+            </a:r>
+            <a:r>
+              <a:rPr sz="1200" b="0">
+                <a:solidFill>
+                  <a:srgbClr val="262B33"/>
+                </a:solidFill>
+                <a:latin typeface="Arial"/>
+              </a:rPr>
+              <a:t>The rolling median of their speed against each road's baseline is a live accessibility reading, and the weather model turns that into a 72-hour closure forecast.</a:t>
+            </a:r>
+          </a:p>
+        </p:txBody>
+      </p:sp>
+      <p:sp>
+        <p:nvSpPr>
+          <p:cNvPr id="15365" name="TextBox 15364"/>
           <p:cNvSpPr txBox="1"/>
           <p:nvPr/>
         </p:nvSpPr>
         <p:spPr>
           <a:xfrm>
-            <a:off x="411480" y="2139696"/>
-            <a:ext cx="6446520" cy="219456"/>
+            <a:off x="411480" y="2807208"/>
+            <a:ext cx="6400800" cy="237744"/>
           </a:xfrm>
           <a:prstGeom prst="rect">
             <a:avLst/>
@@ -6292,223 +6376,69 @@
             <a:r>
               <a:rPr sz="1000" b="1" i="0">
                 <a:solidFill>
-                  <a:srgbClr val="1F497D"/>
-                </a:solidFill>
-                <a:latin typeface="Arial"/>
-              </a:rPr>
-              <a:t>THE IDEA</a:t>
-            </a:r>
-          </a:p>
-        </p:txBody>
-      </p:sp>
-      <p:sp>
-        <p:nvSpPr>
-          <p:cNvPr id="15365" name="TextBox 15364"/>
-          <p:cNvSpPr txBox="1"/>
+                  <a:srgbClr val="0070C0"/>
+                </a:solidFill>
+                <a:latin typeface="Arial"/>
+              </a:rPr>
+              <a:t>INNOVATION AND UNIQUENESS OF THE SOLUTION</a:t>
+            </a:r>
+          </a:p>
+        </p:txBody>
+      </p:sp>
+      <p:sp>
+        <p:nvSpPr>
+          <p:cNvPr id="15366" name="Rectangle 15365"/>
+          <p:cNvSpPr/>
           <p:nvPr/>
         </p:nvSpPr>
         <p:spPr>
           <a:xfrm>
-            <a:off x="411480" y="2414015"/>
-            <a:ext cx="6446520" cy="841248"/>
+            <a:off x="411480" y="2994660"/>
+            <a:ext cx="6400800" cy="12801"/>
           </a:xfrm>
           <a:prstGeom prst="rect">
             <a:avLst/>
           </a:prstGeom>
-          <a:noFill/>
-        </p:spPr>
-        <p:txBody>
-          <a:bodyPr wrap="square" lIns="0" rIns="0" tIns="0" bIns="0">
-            <a:spAutoFit/>
-          </a:bodyPr>
+          <a:solidFill>
+            <a:srgbClr val="C9D6E4"/>
+          </a:solidFill>
+          <a:ln>
+            <a:noFill/>
+          </a:ln>
+          <a:effectLst/>
+        </p:spPr>
+        <p:style>
+          <a:lnRef idx="1">
+            <a:schemeClr val="accent1"/>
+          </a:lnRef>
+          <a:fillRef idx="3">
+            <a:schemeClr val="accent1"/>
+          </a:fillRef>
+          <a:effectRef idx="2">
+            <a:schemeClr val="accent1"/>
+          </a:effectRef>
+          <a:fontRef idx="minor">
+            <a:schemeClr val="lt1"/>
+          </a:fontRef>
+        </p:style>
+        <p:txBody>
+          <a:bodyPr rtlCol="0" anchor="ctr"/>
           <a:lstStyle/>
           <a:p>
-            <a:pPr algn="l">
-              <a:lnSpc>
-                <a:spcPct val="102000"/>
-              </a:lnSpc>
-              <a:spcBef>
-                <a:spcPts val="0"/>
-              </a:spcBef>
-              <a:spcAft>
-                <a:spcPts val="0"/>
-              </a:spcAft>
-            </a:pPr>
-            <a:r>
-              <a:rPr sz="1300" b="1">
-                <a:solidFill>
-                  <a:srgbClr val="1F497D"/>
-                </a:solidFill>
-                <a:latin typeface="Arial"/>
-              </a:rPr>
-              <a:t>Nobody drives for us. </a:t>
-            </a:r>
-            <a:r>
-              <a:rPr sz="1300" b="0">
-                <a:solidFill>
-                  <a:srgbClr val="262B33"/>
-                </a:solidFill>
-                <a:latin typeface="Arial"/>
-              </a:rPr>
-              <a:t>Anyone already travelling A to B enters their vehicle and route, and sees only the parcels whose pickup and drop lie along that road, up to what the vehicle holds.</a:t>
-            </a:r>
-          </a:p>
-        </p:txBody>
-      </p:sp>
-      <p:sp>
-        <p:nvSpPr>
-          <p:cNvPr id="15366" name="TextBox 15365"/>
-          <p:cNvSpPr txBox="1"/>
-          <p:nvPr/>
-        </p:nvSpPr>
-        <p:spPr>
-          <a:xfrm>
-            <a:off x="411480" y="3328415"/>
-            <a:ext cx="6446520" cy="219456"/>
-          </a:xfrm>
-          <a:prstGeom prst="rect">
-            <a:avLst/>
-          </a:prstGeom>
-          <a:noFill/>
-        </p:spPr>
-        <p:txBody>
-          <a:bodyPr wrap="square" lIns="0" rIns="0" tIns="0" bIns="0">
-            <a:spAutoFit/>
-          </a:bodyPr>
-          <a:lstStyle/>
-          <a:p>
-            <a:pPr algn="l">
-              <a:lnSpc>
-                <a:spcPct val="100000"/>
-              </a:lnSpc>
-              <a:spcBef>
-                <a:spcPts val="0"/>
-              </a:spcBef>
-              <a:spcAft>
-                <a:spcPts val="0"/>
-              </a:spcAft>
-            </a:pPr>
-            <a:r>
-              <a:rPr sz="1000" b="1" i="0">
-                <a:solidFill>
-                  <a:srgbClr val="1F497D"/>
-                </a:solidFill>
-                <a:latin typeface="Arial"/>
-              </a:rPr>
-              <a:t>THE TURN THAT MAKES IT INTELLIGENCE</a:t>
-            </a:r>
-          </a:p>
-        </p:txBody>
-      </p:sp>
-      <p:sp>
-        <p:nvSpPr>
-          <p:cNvPr id="15367" name="TextBox 15366"/>
-          <p:cNvSpPr txBox="1"/>
-          <p:nvPr/>
-        </p:nvSpPr>
-        <p:spPr>
-          <a:xfrm>
-            <a:off x="411480" y="3602735"/>
-            <a:ext cx="6446520" cy="841248"/>
-          </a:xfrm>
-          <a:prstGeom prst="rect">
-            <a:avLst/>
-          </a:prstGeom>
-          <a:noFill/>
-        </p:spPr>
-        <p:txBody>
-          <a:bodyPr wrap="square" lIns="0" rIns="0" tIns="0" bIns="0">
-            <a:spAutoFit/>
-          </a:bodyPr>
-          <a:lstStyle/>
-          <a:p>
-            <a:pPr algn="l">
-              <a:lnSpc>
-                <a:spcPct val="102000"/>
-              </a:lnSpc>
-              <a:spcBef>
-                <a:spcPts val="0"/>
-              </a:spcBef>
-              <a:spcAft>
-                <a:spcPts val="0"/>
-              </a:spcAft>
-            </a:pPr>
-            <a:r>
-              <a:rPr sz="1300" b="1">
-                <a:solidFill>
-                  <a:srgbClr val="1F497D"/>
-                </a:solidFill>
-                <a:latin typeface="Arial"/>
-              </a:rPr>
-              <a:t>Those carriers stream GPS while they drive. </a:t>
-            </a:r>
-            <a:r>
-              <a:rPr sz="1300" b="0">
-                <a:solidFill>
-                  <a:srgbClr val="262B33"/>
-                </a:solidFill>
-                <a:latin typeface="Arial"/>
-              </a:rPr>
-              <a:t>The rolling median of their speed against each road's baseline is a live accessibility reading. One stream, two products: the goods move, and the road gets measured.</a:t>
-            </a:r>
-          </a:p>
-        </p:txBody>
-      </p:sp>
-      <p:sp>
-        <p:nvSpPr>
-          <p:cNvPr id="15368" name="TextBox 15367"/>
-          <p:cNvSpPr txBox="1"/>
-          <p:nvPr/>
-        </p:nvSpPr>
-        <p:spPr>
-          <a:xfrm>
-            <a:off x="411480" y="4535423"/>
-            <a:ext cx="6446520" cy="219456"/>
-          </a:xfrm>
-          <a:prstGeom prst="rect">
-            <a:avLst/>
-          </a:prstGeom>
-          <a:noFill/>
-        </p:spPr>
-        <p:txBody>
-          <a:bodyPr wrap="square" lIns="0" rIns="0" tIns="0" bIns="0">
-            <a:spAutoFit/>
-          </a:bodyPr>
-          <a:lstStyle/>
-          <a:p>
-            <a:pPr algn="l">
-              <a:lnSpc>
-                <a:spcPct val="100000"/>
-              </a:lnSpc>
-              <a:spcBef>
-                <a:spcPts val="0"/>
-              </a:spcBef>
-              <a:spcAft>
-                <a:spcPts val="0"/>
-              </a:spcAft>
-            </a:pPr>
-            <a:r>
-              <a:rPr sz="1000" b="1" i="0">
-                <a:solidFill>
-                  <a:srgbClr val="1F497D"/>
-                </a:solidFill>
-                <a:latin typeface="Arial"/>
-              </a:rPr>
-              <a:t>WHY THIS IS DIFFERENT</a:t>
-            </a:r>
-          </a:p>
-        </p:txBody>
-      </p:sp>
-      <p:sp>
-        <p:nvSpPr>
-          <p:cNvPr id="15369" name="Rounded Rectangle 15368"/>
+            <a:pPr algn="ctr"/>
+          </a:p>
+        </p:txBody>
+      </p:sp>
+      <p:sp>
+        <p:nvSpPr>
+          <p:cNvPr id="15367" name="Rounded Rectangle 15366"/>
           <p:cNvSpPr/>
           <p:nvPr/>
         </p:nvSpPr>
         <p:spPr>
           <a:xfrm>
-            <a:off x="411480" y="4809743"/>
-            <a:ext cx="6446520" cy="1170432"/>
+            <a:off x="411480" y="3099816"/>
+            <a:ext cx="6400800" cy="1188720"/>
           </a:xfrm>
           <a:prstGeom prst="roundRect">
             <a:avLst>
@@ -6540,123 +6470,7 @@
           </a:fontRef>
         </p:style>
         <p:txBody>
-          <a:bodyPr rtlCol="0" anchor="t" wrap="square" lIns="118872" rIns="118872" tIns="64008" bIns="64008"/>
-          <a:lstStyle/>
-          <a:p>
-            <a:pPr algn="l">
-              <a:lnSpc>
-                <a:spcPct val="98000"/>
-              </a:lnSpc>
-              <a:spcBef>
-                <a:spcPts val="0"/>
-              </a:spcBef>
-              <a:spcAft>
-                <a:spcPts val="0"/>
-              </a:spcAft>
-            </a:pPr>
-            <a:r>
-              <a:rPr sz="1250" b="1">
-                <a:solidFill>
-                  <a:srgbClr val="1F497D"/>
-                </a:solidFill>
-                <a:latin typeface="Arial"/>
-              </a:rPr>
-              <a:t>•  Coverage without hardware — </a:t>
-            </a:r>
-            <a:r>
-              <a:rPr sz="1250" b="0">
-                <a:solidFill>
-                  <a:srgbClr val="262B33"/>
-                </a:solidFill>
-                <a:latin typeface="Arial"/>
-              </a:rPr>
-              <a:t>no roadside sensors, no dedicated fleet.</a:t>
-            </a:r>
-          </a:p>
-          <a:p>
-            <a:pPr algn="l">
-              <a:lnSpc>
-                <a:spcPct val="98000"/>
-              </a:lnSpc>
-              <a:spcBef>
-                <a:spcPts val="600"/>
-              </a:spcBef>
-              <a:spcAft>
-                <a:spcPts val="0"/>
-              </a:spcAft>
-            </a:pPr>
-            <a:r>
-              <a:rPr sz="1250" b="1">
-                <a:solidFill>
-                  <a:srgbClr val="1F497D"/>
-                </a:solidFill>
-                <a:latin typeface="Arial"/>
-              </a:rPr>
-              <a:t>•  Cost per reading falls to zero — </a:t>
-            </a:r>
-            <a:r>
-              <a:rPr sz="1250" b="0">
-                <a:solidFill>
-                  <a:srgbClr val="262B33"/>
-                </a:solidFill>
-                <a:latin typeface="Arial"/>
-              </a:rPr>
-              <a:t>the driver was making the trip anyway.</a:t>
-            </a:r>
-          </a:p>
-          <a:p>
-            <a:pPr algn="l">
-              <a:lnSpc>
-                <a:spcPct val="98000"/>
-              </a:lnSpc>
-              <a:spcBef>
-                <a:spcPts val="600"/>
-              </a:spcBef>
-              <a:spcAft>
-                <a:spcPts val="0"/>
-              </a:spcAft>
-            </a:pPr>
-            <a:r>
-              <a:rPr sz="1250" b="1">
-                <a:solidFill>
-                  <a:srgbClr val="1F497D"/>
-                </a:solidFill>
-                <a:latin typeface="Arial"/>
-              </a:rPr>
-              <a:t>•  It improves as it is used — </a:t>
-            </a:r>
-            <a:r>
-              <a:rPr sz="1250" b="0">
-                <a:solidFill>
-                  <a:srgbClr val="262B33"/>
-                </a:solidFill>
-                <a:latin typeface="Arial"/>
-              </a:rPr>
-              <a:t>more carriers means denser sensing.</a:t>
-            </a:r>
-          </a:p>
-        </p:txBody>
-      </p:sp>
-      <p:sp>
-        <p:nvSpPr>
-          <p:cNvPr id="15370" name="TextBox 15369"/>
-          <p:cNvSpPr txBox="1"/>
-          <p:nvPr/>
-        </p:nvSpPr>
-        <p:spPr>
-          <a:xfrm>
-            <a:off x="7178040" y="1188720"/>
-            <a:ext cx="4599432" cy="219456"/>
-          </a:xfrm>
-          <a:prstGeom prst="rect">
-            <a:avLst/>
-          </a:prstGeom>
-          <a:noFill/>
-        </p:spPr>
-        <p:txBody>
-          <a:bodyPr wrap="square" lIns="0" rIns="0" tIns="0" bIns="0">
-            <a:spAutoFit/>
-          </a:bodyPr>
+          <a:bodyPr rtlCol="0" anchor="t" wrap="square" lIns="109728" rIns="109728" tIns="54864" bIns="54864"/>
           <a:lstStyle/>
           <a:p>
             <a:pPr algn="l">
@@ -6671,27 +6485,143 @@
               </a:spcAft>
             </a:pPr>
             <a:r>
-              <a:rPr sz="1000" b="1" i="0">
+              <a:rPr sz="1100" b="1">
                 <a:solidFill>
                   <a:srgbClr val="1F497D"/>
                 </a:solidFill>
                 <a:latin typeface="Arial"/>
               </a:rPr>
-              <a:t>HOW ONE TRIP BECOMES BOTH</a:t>
-            </a:r>
-          </a:p>
-        </p:txBody>
-      </p:sp>
-      <p:sp>
-        <p:nvSpPr>
-          <p:cNvPr id="15371" name="Rounded Rectangle 15370"/>
+              <a:t>•  The carrier network IS the sensor network — </a:t>
+            </a:r>
+            <a:r>
+              <a:rPr sz="1100" b="0">
+                <a:solidFill>
+                  <a:srgbClr val="262B33"/>
+                </a:solidFill>
+                <a:latin typeface="Arial"/>
+              </a:rPr>
+              <a:t>one GPS stream both delivers goods and measures the road.</a:t>
+            </a:r>
+          </a:p>
+          <a:p>
+            <a:pPr algn="l">
+              <a:lnSpc>
+                <a:spcPct val="100000"/>
+              </a:lnSpc>
+              <a:spcBef>
+                <a:spcPts val="800"/>
+              </a:spcBef>
+              <a:spcAft>
+                <a:spcPts val="0"/>
+              </a:spcAft>
+            </a:pPr>
+            <a:r>
+              <a:rPr sz="1100" b="1">
+                <a:solidFill>
+                  <a:srgbClr val="1F497D"/>
+                </a:solidFill>
+                <a:latin typeface="Arial"/>
+              </a:rPr>
+              <a:t>•  Coverage without hardware — </a:t>
+            </a:r>
+            <a:r>
+              <a:rPr sz="1100" b="0">
+                <a:solidFill>
+                  <a:srgbClr val="262B33"/>
+                </a:solidFill>
+                <a:latin typeface="Arial"/>
+              </a:rPr>
+              <a:t>no roadside sensors, no dedicated fleet, nothing to power or maintain.</a:t>
+            </a:r>
+          </a:p>
+          <a:p>
+            <a:pPr algn="l">
+              <a:lnSpc>
+                <a:spcPct val="100000"/>
+              </a:lnSpc>
+              <a:spcBef>
+                <a:spcPts val="800"/>
+              </a:spcBef>
+              <a:spcAft>
+                <a:spcPts val="0"/>
+              </a:spcAft>
+            </a:pPr>
+            <a:r>
+              <a:rPr sz="1100" b="1">
+                <a:solidFill>
+                  <a:srgbClr val="1F497D"/>
+                </a:solidFill>
+                <a:latin typeface="Arial"/>
+              </a:rPr>
+              <a:t>•  It improves as it is used — </a:t>
+            </a:r>
+            <a:r>
+              <a:rPr sz="1100" b="0">
+                <a:solidFill>
+                  <a:srgbClr val="262B33"/>
+                </a:solidFill>
+                <a:latin typeface="Arial"/>
+              </a:rPr>
+              <a:t>every new carrier adds sensing density at zero marginal cost.</a:t>
+            </a:r>
+          </a:p>
+        </p:txBody>
+      </p:sp>
+      <p:sp>
+        <p:nvSpPr>
+          <p:cNvPr id="15368" name="TextBox 15367"/>
+          <p:cNvSpPr txBox="1"/>
+          <p:nvPr/>
+        </p:nvSpPr>
+        <p:spPr>
+          <a:xfrm>
+            <a:off x="7086600" y="1197864"/>
+            <a:ext cx="4690872" cy="219456"/>
+          </a:xfrm>
+          <a:prstGeom prst="rect">
+            <a:avLst/>
+          </a:prstGeom>
+          <a:noFill/>
+        </p:spPr>
+        <p:txBody>
+          <a:bodyPr wrap="square" lIns="0" rIns="0" tIns="0" bIns="0">
+            <a:spAutoFit/>
+          </a:bodyPr>
+          <a:lstStyle/>
+          <a:p>
+            <a:pPr algn="l">
+              <a:lnSpc>
+                <a:spcPct val="100000"/>
+              </a:lnSpc>
+              <a:spcBef>
+                <a:spcPts val="0"/>
+              </a:spcBef>
+              <a:spcAft>
+                <a:spcPts val="0"/>
+              </a:spcAft>
+            </a:pPr>
+            <a:r>
+              <a:rPr sz="900" b="1" i="0">
+                <a:solidFill>
+                  <a:srgbClr val="1F497D"/>
+                </a:solidFill>
+                <a:latin typeface="Arial"/>
+              </a:rPr>
+              <a:t>ONE TRIP, TWO PRODUCTS</a:t>
+            </a:r>
+          </a:p>
+        </p:txBody>
+      </p:sp>
+      <p:sp>
+        <p:nvSpPr>
+          <p:cNvPr id="15369" name="Rounded Rectangle 15368"/>
           <p:cNvSpPr/>
           <p:nvPr/>
         </p:nvSpPr>
         <p:spPr>
           <a:xfrm>
-            <a:off x="7178040" y="1463040"/>
-            <a:ext cx="4599432" cy="548640"/>
+            <a:off x="7086600" y="1435608"/>
+            <a:ext cx="4690872" cy="457200"/>
           </a:xfrm>
           <a:prstGeom prst="roundRect">
             <a:avLst>
@@ -6723,7 +6653,7 @@
           </a:fontRef>
         </p:style>
         <p:txBody>
-          <a:bodyPr rtlCol="0" anchor="ctr" wrap="square" lIns="118872" rIns="118872" tIns="64008" bIns="64008"/>
+          <a:bodyPr rtlCol="0" anchor="ctr" wrap="square" lIns="109728" rIns="109728" tIns="54864" bIns="54864"/>
           <a:lstStyle/>
           <a:p>
             <a:pPr algn="ctr">
@@ -6738,7 +6668,7 @@
               </a:spcAft>
             </a:pPr>
             <a:r>
-              <a:rPr sz="1150" b="1" i="0">
+              <a:rPr sz="1100" b="1" i="0">
                 <a:solidFill>
                   <a:srgbClr val="1F497D"/>
                 </a:solidFill>
@@ -6751,14 +6681,14 @@
       </p:sp>
       <p:sp>
         <p:nvSpPr>
-          <p:cNvPr id="15372" name="Down Arrow 15371"/>
+          <p:cNvPr id="15370" name="Down Arrow 15369"/>
           <p:cNvSpPr/>
           <p:nvPr/>
         </p:nvSpPr>
         <p:spPr>
           <a:xfrm>
-            <a:off x="9427464" y="2039112"/>
-            <a:ext cx="100584" cy="160020"/>
+            <a:off x="9381744" y="1911096"/>
+            <a:ext cx="100584" cy="109728"/>
           </a:xfrm>
           <a:prstGeom prst="downArrow">
             <a:avLst/>
@@ -6795,14 +6725,14 @@
       </p:sp>
       <p:sp>
         <p:nvSpPr>
-          <p:cNvPr id="15373" name="Rounded Rectangle 15372"/>
+          <p:cNvPr id="15371" name="Rounded Rectangle 15370"/>
           <p:cNvSpPr/>
           <p:nvPr/>
         </p:nvSpPr>
         <p:spPr>
           <a:xfrm>
-            <a:off x="7178040" y="2226564"/>
-            <a:ext cx="4599432" cy="548640"/>
+            <a:off x="7086600" y="2039112"/>
+            <a:ext cx="4690872" cy="457200"/>
           </a:xfrm>
           <a:prstGeom prst="roundRect">
             <a:avLst>
@@ -6834,7 +6764,7 @@
           </a:fontRef>
         </p:style>
         <p:txBody>
-          <a:bodyPr rtlCol="0" anchor="ctr" wrap="square" lIns="118872" rIns="118872" tIns="64008" bIns="64008"/>
+          <a:bodyPr rtlCol="0" anchor="ctr" wrap="square" lIns="109728" rIns="109728" tIns="54864" bIns="54864"/>
           <a:lstStyle/>
           <a:p>
             <a:pPr algn="ctr">
@@ -6849,27 +6779,27 @@
               </a:spcAft>
             </a:pPr>
             <a:r>
-              <a:rPr sz="1150" b="0" i="0">
+              <a:rPr sz="1100" b="0" i="0">
                 <a:solidFill>
                   <a:srgbClr val="262B33"/>
                 </a:solidFill>
                 <a:latin typeface="Arial"/>
               </a:rPr>
-              <a:t>Sees only parcels lying on that road</a:t>
-            </a:r>
-          </a:p>
-        </p:txBody>
-      </p:sp>
-      <p:sp>
-        <p:nvSpPr>
-          <p:cNvPr id="15374" name="Down Arrow 15373"/>
+              <a:t>Offered only parcels on that road</a:t>
+            </a:r>
+          </a:p>
+        </p:txBody>
+      </p:sp>
+      <p:sp>
+        <p:nvSpPr>
+          <p:cNvPr id="15372" name="Down Arrow 15371"/>
           <p:cNvSpPr/>
           <p:nvPr/>
         </p:nvSpPr>
         <p:spPr>
           <a:xfrm>
-            <a:off x="9427464" y="2802636"/>
-            <a:ext cx="100584" cy="160020"/>
+            <a:off x="9381744" y="2514600"/>
+            <a:ext cx="100584" cy="109728"/>
           </a:xfrm>
           <a:prstGeom prst="downArrow">
             <a:avLst/>
@@ -6906,14 +6836,14 @@
       </p:sp>
       <p:sp>
         <p:nvSpPr>
-          <p:cNvPr id="15375" name="Rounded Rectangle 15374"/>
+          <p:cNvPr id="15373" name="Rounded Rectangle 15372"/>
           <p:cNvSpPr/>
           <p:nvPr/>
         </p:nvSpPr>
         <p:spPr>
           <a:xfrm>
-            <a:off x="7178040" y="2990088"/>
-            <a:ext cx="4599432" cy="548640"/>
+            <a:off x="7086600" y="2642616"/>
+            <a:ext cx="4690872" cy="457200"/>
           </a:xfrm>
           <a:prstGeom prst="roundRect">
             <a:avLst>
@@ -6945,7 +6875,7 @@
           </a:fontRef>
         </p:style>
         <p:txBody>
-          <a:bodyPr rtlCol="0" anchor="ctr" wrap="square" lIns="118872" rIns="118872" tIns="64008" bIns="64008"/>
+          <a:bodyPr rtlCol="0" anchor="ctr" wrap="square" lIns="109728" rIns="109728" tIns="54864" bIns="54864"/>
           <a:lstStyle/>
           <a:p>
             <a:pPr algn="ctr">
@@ -6960,27 +6890,27 @@
               </a:spcAft>
             </a:pPr>
             <a:r>
-              <a:rPr sz="1150" b="0" i="0">
+              <a:rPr sz="1100" b="0" i="0">
                 <a:solidFill>
                   <a:srgbClr val="262B33"/>
                 </a:solidFill>
                 <a:latin typeface="Arial"/>
               </a:rPr>
-              <a:t>Drives — phone streams GPS every 20 s</a:t>
-            </a:r>
-          </a:p>
-        </p:txBody>
-      </p:sp>
-      <p:sp>
-        <p:nvSpPr>
-          <p:cNvPr id="15376" name="Down Arrow 15375"/>
+              <a:t>Drives — GPS every 20 s / 40 m</a:t>
+            </a:r>
+          </a:p>
+        </p:txBody>
+      </p:sp>
+      <p:sp>
+        <p:nvSpPr>
+          <p:cNvPr id="15374" name="Down Arrow 15373"/>
           <p:cNvSpPr/>
           <p:nvPr/>
         </p:nvSpPr>
         <p:spPr>
           <a:xfrm>
-            <a:off x="9427464" y="3566160"/>
-            <a:ext cx="100584" cy="160020"/>
+            <a:off x="9381744" y="3118104"/>
+            <a:ext cx="100584" cy="109728"/>
           </a:xfrm>
           <a:prstGeom prst="downArrow">
             <a:avLst/>
@@ -7017,14 +6947,14 @@
       </p:sp>
       <p:sp>
         <p:nvSpPr>
-          <p:cNvPr id="15377" name="Rounded Rectangle 15376"/>
+          <p:cNvPr id="15375" name="Rounded Rectangle 15374"/>
           <p:cNvSpPr/>
           <p:nvPr/>
         </p:nvSpPr>
         <p:spPr>
           <a:xfrm>
-            <a:off x="7178040" y="3753612"/>
-            <a:ext cx="4599432" cy="548640"/>
+            <a:off x="7086600" y="3246120"/>
+            <a:ext cx="4690872" cy="457200"/>
           </a:xfrm>
           <a:prstGeom prst="roundRect">
             <a:avLst>
@@ -7056,7 +6986,7 @@
           </a:fontRef>
         </p:style>
         <p:txBody>
-          <a:bodyPr rtlCol="0" anchor="ctr" wrap="square" lIns="118872" rIns="118872" tIns="64008" bIns="64008"/>
+          <a:bodyPr rtlCol="0" anchor="ctr" wrap="square" lIns="109728" rIns="109728" tIns="54864" bIns="54864"/>
           <a:lstStyle/>
           <a:p>
             <a:pPr algn="ctr">
@@ -7071,27 +7001,27 @@
               </a:spcAft>
             </a:pPr>
             <a:r>
-              <a:rPr sz="1150" b="1" i="0">
+              <a:rPr sz="1100" b="1" i="0">
                 <a:solidFill>
                   <a:srgbClr val="1F497D"/>
                 </a:solidFill>
                 <a:latin typeface="Arial"/>
               </a:rPr>
-              <a:t>Median speed vs baseline → road status</a:t>
-            </a:r>
-          </a:p>
-        </p:txBody>
-      </p:sp>
-      <p:sp>
-        <p:nvSpPr>
-          <p:cNvPr id="15378" name="Down Arrow 15377"/>
+              <a:t>Median speed vs baseline → status</a:t>
+            </a:r>
+          </a:p>
+        </p:txBody>
+      </p:sp>
+      <p:sp>
+        <p:nvSpPr>
+          <p:cNvPr id="15376" name="Down Arrow 15375"/>
           <p:cNvSpPr/>
           <p:nvPr/>
         </p:nvSpPr>
         <p:spPr>
           <a:xfrm>
-            <a:off x="9427464" y="4329684"/>
-            <a:ext cx="100584" cy="160020"/>
+            <a:off x="9381744" y="3721608"/>
+            <a:ext cx="100584" cy="109728"/>
           </a:xfrm>
           <a:prstGeom prst="downArrow">
             <a:avLst/>
@@ -7128,14 +7058,14 @@
       </p:sp>
       <p:sp>
         <p:nvSpPr>
-          <p:cNvPr id="15379" name="Rounded Rectangle 15378"/>
+          <p:cNvPr id="15377" name="Rounded Rectangle 15376"/>
           <p:cNvSpPr/>
           <p:nvPr/>
         </p:nvSpPr>
         <p:spPr>
           <a:xfrm>
-            <a:off x="7178040" y="4517136"/>
-            <a:ext cx="4599432" cy="548640"/>
+            <a:off x="7086600" y="3849624"/>
+            <a:ext cx="4690872" cy="457200"/>
           </a:xfrm>
           <a:prstGeom prst="roundRect">
             <a:avLst>
@@ -7167,7 +7097,7 @@
           </a:fontRef>
         </p:style>
         <p:txBody>
-          <a:bodyPr rtlCol="0" anchor="ctr" wrap="square" lIns="118872" rIns="118872" tIns="64008" bIns="64008"/>
+          <a:bodyPr rtlCol="0" anchor="ctr" wrap="square" lIns="109728" rIns="109728" tIns="54864" bIns="54864"/>
           <a:lstStyle/>
           <a:p>
             <a:pPr algn="ctr">
@@ -7182,27 +7112,27 @@
               </a:spcAft>
             </a:pPr>
             <a:r>
-              <a:rPr sz="1150" b="0" i="0">
+              <a:rPr sz="1100" b="0" i="0">
                 <a:solidFill>
                   <a:srgbClr val="262B33"/>
                 </a:solidFill>
                 <a:latin typeface="Arial"/>
               </a:rPr>
-              <a:t>Officers · forecasts · alerts · re-routes</a:t>
-            </a:r>
-          </a:p>
-        </p:txBody>
-      </p:sp>
-      <p:sp>
-        <p:nvSpPr>
-          <p:cNvPr id="15380" name="TextBox 15379"/>
+              <a:t>Alerts · forecast · re-route · dashboard</a:t>
+            </a:r>
+          </a:p>
+        </p:txBody>
+      </p:sp>
+      <p:sp>
+        <p:nvSpPr>
+          <p:cNvPr id="15378" name="TextBox 15377"/>
           <p:cNvSpPr txBox="1"/>
           <p:nvPr/>
         </p:nvSpPr>
         <p:spPr>
           <a:xfrm>
-            <a:off x="7178040" y="5157216"/>
-            <a:ext cx="4599432" cy="777240"/>
+            <a:off x="411480" y="4398264"/>
+            <a:ext cx="11365992" cy="237744"/>
           </a:xfrm>
           <a:prstGeom prst="rect">
             <a:avLst/>
@@ -7215,9 +7145,9 @@
           </a:bodyPr>
           <a:lstStyle/>
           <a:p>
-            <a:pPr algn="ctr">
+            <a:pPr algn="l">
               <a:lnSpc>
-                <a:spcPct val="105000"/>
+                <a:spcPct val="100000"/>
               </a:lnSpc>
               <a:spcBef>
                 <a:spcPts val="0"/>
@@ -7227,13 +7157,841 @@
               </a:spcAft>
             </a:pPr>
             <a:r>
-              <a:rPr sz="1200" b="1" i="0">
+              <a:rPr sz="1000" b="1" i="0">
                 <a:solidFill>
                   <a:srgbClr val="0070C0"/>
                 </a:solidFill>
                 <a:latin typeface="Arial"/>
               </a:rPr>
-              <a:t>The carrier network and the sensor network are the same network. That is the whole idea.</a:t>
+              <a:t>HOW IT ADDRESSES THE PROBLEM — EVERY CLAUSE OF THE PROBLEM STATEMENT</a:t>
+            </a:r>
+          </a:p>
+        </p:txBody>
+      </p:sp>
+      <p:sp>
+        <p:nvSpPr>
+          <p:cNvPr id="15379" name="Rectangle 15378"/>
+          <p:cNvSpPr/>
+          <p:nvPr/>
+        </p:nvSpPr>
+        <p:spPr>
+          <a:xfrm>
+            <a:off x="411480" y="4585716"/>
+            <a:ext cx="11365992" cy="12801"/>
+          </a:xfrm>
+          <a:prstGeom prst="rect">
+            <a:avLst/>
+          </a:prstGeom>
+          <a:solidFill>
+            <a:srgbClr val="C9D6E4"/>
+          </a:solidFill>
+          <a:ln>
+            <a:noFill/>
+          </a:ln>
+          <a:effectLst/>
+        </p:spPr>
+        <p:style>
+          <a:lnRef idx="1">
+            <a:schemeClr val="accent1"/>
+          </a:lnRef>
+          <a:fillRef idx="3">
+            <a:schemeClr val="accent1"/>
+          </a:fillRef>
+          <a:effectRef idx="2">
+            <a:schemeClr val="accent1"/>
+          </a:effectRef>
+          <a:fontRef idx="minor">
+            <a:schemeClr val="lt1"/>
+          </a:fontRef>
+        </p:style>
+        <p:txBody>
+          <a:bodyPr rtlCol="0" anchor="ctr"/>
+          <a:lstStyle/>
+          <a:p>
+            <a:pPr algn="ctr"/>
+          </a:p>
+        </p:txBody>
+      </p:sp>
+      <p:sp>
+        <p:nvSpPr>
+          <p:cNvPr id="15380" name="Rounded Rectangle 15379"/>
+          <p:cNvSpPr/>
+          <p:nvPr/>
+        </p:nvSpPr>
+        <p:spPr>
+          <a:xfrm>
+            <a:off x="411480" y="4690872"/>
+            <a:ext cx="2759202" cy="548640"/>
+          </a:xfrm>
+          <a:prstGeom prst="roundRect">
+            <a:avLst>
+              <a:gd name="adj" fmla="val 8000"/>
+            </a:avLst>
+          </a:prstGeom>
+          <a:solidFill>
+            <a:srgbClr val="F2F5F9"/>
+          </a:solidFill>
+          <a:ln w="9525">
+            <a:solidFill>
+              <a:srgbClr val="C9D6E4"/>
+            </a:solidFill>
+          </a:ln>
+          <a:effectLst/>
+        </p:spPr>
+        <p:style>
+          <a:lnRef idx="1">
+            <a:schemeClr val="accent1"/>
+          </a:lnRef>
+          <a:fillRef idx="3">
+            <a:schemeClr val="accent1"/>
+          </a:fillRef>
+          <a:effectRef idx="2">
+            <a:schemeClr val="accent1"/>
+          </a:effectRef>
+          <a:fontRef idx="minor">
+            <a:schemeClr val="lt1"/>
+          </a:fontRef>
+        </p:style>
+        <p:txBody>
+          <a:bodyPr rtlCol="0" anchor="t" wrap="square" lIns="109728" rIns="109728" tIns="54864" bIns="54864"/>
+          <a:lstStyle/>
+          <a:p>
+            <a:pPr algn="l">
+              <a:lnSpc>
+                <a:spcPct val="95000"/>
+              </a:lnSpc>
+              <a:spcBef>
+                <a:spcPts val="0"/>
+              </a:spcBef>
+              <a:spcAft>
+                <a:spcPts val="0"/>
+              </a:spcAft>
+            </a:pPr>
+            <a:r>
+              <a:rPr sz="1050" b="1">
+                <a:solidFill>
+                  <a:srgbClr val="0070C0"/>
+                </a:solidFill>
+                <a:latin typeface="Arial"/>
+              </a:rPr>
+              <a:t>(a)  </a:t>
+            </a:r>
+            <a:r>
+              <a:rPr sz="1050" b="1">
+                <a:solidFill>
+                  <a:srgbClr val="1F497D"/>
+                </a:solidFill>
+                <a:latin typeface="Arial"/>
+              </a:rPr>
+              <a:t>Real-time accessibility</a:t>
+            </a:r>
+          </a:p>
+          <a:p>
+            <a:pPr algn="l">
+              <a:lnSpc>
+                <a:spcPct val="95000"/>
+              </a:lnSpc>
+              <a:spcBef>
+                <a:spcPts val="200"/>
+              </a:spcBef>
+              <a:spcAft>
+                <a:spcPts val="0"/>
+              </a:spcAft>
+            </a:pPr>
+            <a:r>
+              <a:rPr sz="900" b="0" i="0">
+                <a:solidFill>
+                  <a:srgbClr val="5A636E"/>
+                </a:solidFill>
+                <a:latin typeface="Arial"/>
+              </a:rPr>
+              <a:t>42 stretches, 3,567 km, live from driver GPS</a:t>
+            </a:r>
+          </a:p>
+        </p:txBody>
+      </p:sp>
+      <p:sp>
+        <p:nvSpPr>
+          <p:cNvPr id="15381" name="Rounded Rectangle 15380"/>
+          <p:cNvSpPr/>
+          <p:nvPr/>
+        </p:nvSpPr>
+        <p:spPr>
+          <a:xfrm>
+            <a:off x="3280410" y="4690872"/>
+            <a:ext cx="2759202" cy="548640"/>
+          </a:xfrm>
+          <a:prstGeom prst="roundRect">
+            <a:avLst>
+              <a:gd name="adj" fmla="val 8000"/>
+            </a:avLst>
+          </a:prstGeom>
+          <a:solidFill>
+            <a:srgbClr val="F2F5F9"/>
+          </a:solidFill>
+          <a:ln w="9525">
+            <a:solidFill>
+              <a:srgbClr val="C9D6E4"/>
+            </a:solidFill>
+          </a:ln>
+          <a:effectLst/>
+        </p:spPr>
+        <p:style>
+          <a:lnRef idx="1">
+            <a:schemeClr val="accent1"/>
+          </a:lnRef>
+          <a:fillRef idx="3">
+            <a:schemeClr val="accent1"/>
+          </a:fillRef>
+          <a:effectRef idx="2">
+            <a:schemeClr val="accent1"/>
+          </a:effectRef>
+          <a:fontRef idx="minor">
+            <a:schemeClr val="lt1"/>
+          </a:fontRef>
+        </p:style>
+        <p:txBody>
+          <a:bodyPr rtlCol="0" anchor="t" wrap="square" lIns="109728" rIns="109728" tIns="54864" bIns="54864"/>
+          <a:lstStyle/>
+          <a:p>
+            <a:pPr algn="l">
+              <a:lnSpc>
+                <a:spcPct val="95000"/>
+              </a:lnSpc>
+              <a:spcBef>
+                <a:spcPts val="0"/>
+              </a:spcBef>
+              <a:spcAft>
+                <a:spcPts val="0"/>
+              </a:spcAft>
+            </a:pPr>
+            <a:r>
+              <a:rPr sz="1050" b="1">
+                <a:solidFill>
+                  <a:srgbClr val="0070C0"/>
+                </a:solidFill>
+                <a:latin typeface="Arial"/>
+              </a:rPr>
+              <a:t>(b)  </a:t>
+            </a:r>
+            <a:r>
+              <a:rPr sz="1050" b="1">
+                <a:solidFill>
+                  <a:srgbClr val="1F497D"/>
+                </a:solidFill>
+                <a:latin typeface="Arial"/>
+              </a:rPr>
+              <a:t>Disruption prediction</a:t>
+            </a:r>
+          </a:p>
+          <a:p>
+            <a:pPr algn="l">
+              <a:lnSpc>
+                <a:spcPct val="95000"/>
+              </a:lnSpc>
+              <a:spcBef>
+                <a:spcPts val="200"/>
+              </a:spcBef>
+              <a:spcAft>
+                <a:spcPts val="0"/>
+              </a:spcAft>
+            </a:pPr>
+            <a:r>
+              <a:rPr sz="900" b="0" i="0">
+                <a:solidFill>
+                  <a:srgbClr val="5A636E"/>
+                </a:solidFill>
+                <a:latin typeface="Arial"/>
+              </a:rPr>
+              <a:t>24 / 48 / 72 h closure risk on every road</a:t>
+            </a:r>
+          </a:p>
+        </p:txBody>
+      </p:sp>
+      <p:sp>
+        <p:nvSpPr>
+          <p:cNvPr id="15382" name="Rounded Rectangle 15381"/>
+          <p:cNvSpPr/>
+          <p:nvPr/>
+        </p:nvSpPr>
+        <p:spPr>
+          <a:xfrm>
+            <a:off x="6149340" y="4690872"/>
+            <a:ext cx="2759202" cy="548640"/>
+          </a:xfrm>
+          <a:prstGeom prst="roundRect">
+            <a:avLst>
+              <a:gd name="adj" fmla="val 8000"/>
+            </a:avLst>
+          </a:prstGeom>
+          <a:solidFill>
+            <a:srgbClr val="F2F5F9"/>
+          </a:solidFill>
+          <a:ln w="9525">
+            <a:solidFill>
+              <a:srgbClr val="C9D6E4"/>
+            </a:solidFill>
+          </a:ln>
+          <a:effectLst/>
+        </p:spPr>
+        <p:style>
+          <a:lnRef idx="1">
+            <a:schemeClr val="accent1"/>
+          </a:lnRef>
+          <a:fillRef idx="3">
+            <a:schemeClr val="accent1"/>
+          </a:fillRef>
+          <a:effectRef idx="2">
+            <a:schemeClr val="accent1"/>
+          </a:effectRef>
+          <a:fontRef idx="minor">
+            <a:schemeClr val="lt1"/>
+          </a:fontRef>
+        </p:style>
+        <p:txBody>
+          <a:bodyPr rtlCol="0" anchor="t" wrap="square" lIns="109728" rIns="109728" tIns="54864" bIns="54864"/>
+          <a:lstStyle/>
+          <a:p>
+            <a:pPr algn="l">
+              <a:lnSpc>
+                <a:spcPct val="95000"/>
+              </a:lnSpc>
+              <a:spcBef>
+                <a:spcPts val="0"/>
+              </a:spcBef>
+              <a:spcAft>
+                <a:spcPts val="0"/>
+              </a:spcAft>
+            </a:pPr>
+            <a:r>
+              <a:rPr sz="1050" b="1">
+                <a:solidFill>
+                  <a:srgbClr val="0070C0"/>
+                </a:solidFill>
+                <a:latin typeface="Arial"/>
+              </a:rPr>
+              <a:t>(c)  </a:t>
+            </a:r>
+            <a:r>
+              <a:rPr sz="1050" b="1">
+                <a:solidFill>
+                  <a:srgbClr val="1F497D"/>
+                </a:solidFill>
+                <a:latin typeface="Arial"/>
+              </a:rPr>
+              <a:t>Alternate routes + delay</a:t>
+            </a:r>
+          </a:p>
+          <a:p>
+            <a:pPr algn="l">
+              <a:lnSpc>
+                <a:spcPct val="95000"/>
+              </a:lnSpc>
+              <a:spcBef>
+                <a:spcPts val="200"/>
+              </a:spcBef>
+              <a:spcAft>
+                <a:spcPts val="0"/>
+              </a:spcAft>
+            </a:pPr>
+            <a:r>
+              <a:rPr sz="900" b="0" i="0">
+                <a:solidFill>
+                  <a:srgbClr val="5A636E"/>
+                </a:solidFill>
+                <a:latin typeface="Arial"/>
+              </a:rPr>
+              <a:t>3 alternatives scored, condition-adjusted ETA</a:t>
+            </a:r>
+          </a:p>
+        </p:txBody>
+      </p:sp>
+      <p:sp>
+        <p:nvSpPr>
+          <p:cNvPr id="15383" name="Rounded Rectangle 15382"/>
+          <p:cNvSpPr/>
+          <p:nvPr/>
+        </p:nvSpPr>
+        <p:spPr>
+          <a:xfrm>
+            <a:off x="9018270" y="4690872"/>
+            <a:ext cx="2759202" cy="548640"/>
+          </a:xfrm>
+          <a:prstGeom prst="roundRect">
+            <a:avLst>
+              <a:gd name="adj" fmla="val 8000"/>
+            </a:avLst>
+          </a:prstGeom>
+          <a:solidFill>
+            <a:srgbClr val="F2F5F9"/>
+          </a:solidFill>
+          <a:ln w="9525">
+            <a:solidFill>
+              <a:srgbClr val="C9D6E4"/>
+            </a:solidFill>
+          </a:ln>
+          <a:effectLst/>
+        </p:spPr>
+        <p:style>
+          <a:lnRef idx="1">
+            <a:schemeClr val="accent1"/>
+          </a:lnRef>
+          <a:fillRef idx="3">
+            <a:schemeClr val="accent1"/>
+          </a:fillRef>
+          <a:effectRef idx="2">
+            <a:schemeClr val="accent1"/>
+          </a:effectRef>
+          <a:fontRef idx="minor">
+            <a:schemeClr val="lt1"/>
+          </a:fontRef>
+        </p:style>
+        <p:txBody>
+          <a:bodyPr rtlCol="0" anchor="t" wrap="square" lIns="109728" rIns="109728" tIns="54864" bIns="54864"/>
+          <a:lstStyle/>
+          <a:p>
+            <a:pPr algn="l">
+              <a:lnSpc>
+                <a:spcPct val="95000"/>
+              </a:lnSpc>
+              <a:spcBef>
+                <a:spcPts val="0"/>
+              </a:spcBef>
+              <a:spcAft>
+                <a:spcPts val="0"/>
+              </a:spcAft>
+            </a:pPr>
+            <a:r>
+              <a:rPr sz="1050" b="1">
+                <a:solidFill>
+                  <a:srgbClr val="0070C0"/>
+                </a:solidFill>
+                <a:latin typeface="Arial"/>
+              </a:rPr>
+              <a:t>(d)  </a:t>
+            </a:r>
+            <a:r>
+              <a:rPr sz="1050" b="1">
+                <a:solidFill>
+                  <a:srgbClr val="1F497D"/>
+                </a:solidFill>
+                <a:latin typeface="Arial"/>
+              </a:rPr>
+              <a:t>GPS tracking of essentials</a:t>
+            </a:r>
+          </a:p>
+          <a:p>
+            <a:pPr algn="l">
+              <a:lnSpc>
+                <a:spcPct val="95000"/>
+              </a:lnSpc>
+              <a:spcBef>
+                <a:spcPts val="200"/>
+              </a:spcBef>
+              <a:spcAft>
+                <a:spcPts val="0"/>
+              </a:spcAft>
+            </a:pPr>
+            <a:r>
+              <a:rPr sz="900" b="0" i="0">
+                <a:solidFill>
+                  <a:srgbClr val="5A636E"/>
+                </a:solidFill>
+                <a:latin typeface="Arial"/>
+              </a:rPr>
+              <a:t>20 s pings, essential commodities flagged</a:t>
+            </a:r>
+          </a:p>
+        </p:txBody>
+      </p:sp>
+      <p:sp>
+        <p:nvSpPr>
+          <p:cNvPr id="15384" name="Rounded Rectangle 15383"/>
+          <p:cNvSpPr/>
+          <p:nvPr/>
+        </p:nvSpPr>
+        <p:spPr>
+          <a:xfrm>
+            <a:off x="411480" y="5321808"/>
+            <a:ext cx="2759202" cy="548640"/>
+          </a:xfrm>
+          <a:prstGeom prst="roundRect">
+            <a:avLst>
+              <a:gd name="adj" fmla="val 8000"/>
+            </a:avLst>
+          </a:prstGeom>
+          <a:solidFill>
+            <a:srgbClr val="F2F5F9"/>
+          </a:solidFill>
+          <a:ln w="9525">
+            <a:solidFill>
+              <a:srgbClr val="C9D6E4"/>
+            </a:solidFill>
+          </a:ln>
+          <a:effectLst/>
+        </p:spPr>
+        <p:style>
+          <a:lnRef idx="1">
+            <a:schemeClr val="accent1"/>
+          </a:lnRef>
+          <a:fillRef idx="3">
+            <a:schemeClr val="accent1"/>
+          </a:fillRef>
+          <a:effectRef idx="2">
+            <a:schemeClr val="accent1"/>
+          </a:effectRef>
+          <a:fontRef idx="minor">
+            <a:schemeClr val="lt1"/>
+          </a:fontRef>
+        </p:style>
+        <p:txBody>
+          <a:bodyPr rtlCol="0" anchor="t" wrap="square" lIns="109728" rIns="109728" tIns="54864" bIns="54864"/>
+          <a:lstStyle/>
+          <a:p>
+            <a:pPr algn="l">
+              <a:lnSpc>
+                <a:spcPct val="95000"/>
+              </a:lnSpc>
+              <a:spcBef>
+                <a:spcPts val="0"/>
+              </a:spcBef>
+              <a:spcAft>
+                <a:spcPts val="0"/>
+              </a:spcAft>
+            </a:pPr>
+            <a:r>
+              <a:rPr sz="1050" b="1">
+                <a:solidFill>
+                  <a:srgbClr val="0070C0"/>
+                </a:solidFill>
+                <a:latin typeface="Arial"/>
+              </a:rPr>
+              <a:t>(e)  </a:t>
+            </a:r>
+            <a:r>
+              <a:rPr sz="1050" b="1">
+                <a:solidFill>
+                  <a:srgbClr val="1F497D"/>
+                </a:solidFill>
+                <a:latin typeface="Arial"/>
+              </a:rPr>
+              <a:t>Automated alerts</a:t>
+            </a:r>
+          </a:p>
+          <a:p>
+            <a:pPr algn="l">
+              <a:lnSpc>
+                <a:spcPct val="95000"/>
+              </a:lnSpc>
+              <a:spcBef>
+                <a:spcPts val="200"/>
+              </a:spcBef>
+              <a:spcAft>
+                <a:spcPts val="0"/>
+              </a:spcAft>
+            </a:pPr>
+            <a:r>
+              <a:rPr sz="900" b="0" i="0">
+                <a:solidFill>
+                  <a:srgbClr val="5A636E"/>
+                </a:solidFill>
+                <a:latin typeface="Arial"/>
+              </a:rPr>
+              <a:t>blocked road, cut-off region, high-risk corridor</a:t>
+            </a:r>
+          </a:p>
+        </p:txBody>
+      </p:sp>
+      <p:sp>
+        <p:nvSpPr>
+          <p:cNvPr id="15385" name="Rounded Rectangle 15384"/>
+          <p:cNvSpPr/>
+          <p:nvPr/>
+        </p:nvSpPr>
+        <p:spPr>
+          <a:xfrm>
+            <a:off x="3280410" y="5321808"/>
+            <a:ext cx="2759202" cy="548640"/>
+          </a:xfrm>
+          <a:prstGeom prst="roundRect">
+            <a:avLst>
+              <a:gd name="adj" fmla="val 8000"/>
+            </a:avLst>
+          </a:prstGeom>
+          <a:solidFill>
+            <a:srgbClr val="F2F5F9"/>
+          </a:solidFill>
+          <a:ln w="9525">
+            <a:solidFill>
+              <a:srgbClr val="C9D6E4"/>
+            </a:solidFill>
+          </a:ln>
+          <a:effectLst/>
+        </p:spPr>
+        <p:style>
+          <a:lnRef idx="1">
+            <a:schemeClr val="accent1"/>
+          </a:lnRef>
+          <a:fillRef idx="3">
+            <a:schemeClr val="accent1"/>
+          </a:fillRef>
+          <a:effectRef idx="2">
+            <a:schemeClr val="accent1"/>
+          </a:effectRef>
+          <a:fontRef idx="minor">
+            <a:schemeClr val="lt1"/>
+          </a:fontRef>
+        </p:style>
+        <p:txBody>
+          <a:bodyPr rtlCol="0" anchor="t" wrap="square" lIns="109728" rIns="109728" tIns="54864" bIns="54864"/>
+          <a:lstStyle/>
+          <a:p>
+            <a:pPr algn="l">
+              <a:lnSpc>
+                <a:spcPct val="95000"/>
+              </a:lnSpc>
+              <a:spcBef>
+                <a:spcPts val="0"/>
+              </a:spcBef>
+              <a:spcAft>
+                <a:spcPts val="0"/>
+              </a:spcAft>
+            </a:pPr>
+            <a:r>
+              <a:rPr sz="1050" b="1">
+                <a:solidFill>
+                  <a:srgbClr val="0070C0"/>
+                </a:solidFill>
+                <a:latin typeface="Arial"/>
+              </a:rPr>
+              <a:t>(f)  </a:t>
+            </a:r>
+            <a:r>
+              <a:rPr sz="1050" b="1">
+                <a:solidFill>
+                  <a:srgbClr val="1F497D"/>
+                </a:solidFill>
+                <a:latin typeface="Arial"/>
+              </a:rPr>
+              <a:t>Field reporting</a:t>
+            </a:r>
+          </a:p>
+          <a:p>
+            <a:pPr algn="l">
+              <a:lnSpc>
+                <a:spcPct val="95000"/>
+              </a:lnSpc>
+              <a:spcBef>
+                <a:spcPts val="200"/>
+              </a:spcBef>
+              <a:spcAft>
+                <a:spcPts val="0"/>
+              </a:spcAft>
+            </a:pPr>
+            <a:r>
+              <a:rPr sz="900" b="0" i="0">
+                <a:solidFill>
+                  <a:srgbClr val="5A636E"/>
+                </a:solidFill>
+                <a:latin typeface="Arial"/>
+              </a:rPr>
+              <a:t>photo + GPS + voice, queued when offline</a:t>
+            </a:r>
+          </a:p>
+        </p:txBody>
+      </p:sp>
+      <p:sp>
+        <p:nvSpPr>
+          <p:cNvPr id="15386" name="Rounded Rectangle 15385"/>
+          <p:cNvSpPr/>
+          <p:nvPr/>
+        </p:nvSpPr>
+        <p:spPr>
+          <a:xfrm>
+            <a:off x="6149340" y="5321808"/>
+            <a:ext cx="2759202" cy="548640"/>
+          </a:xfrm>
+          <a:prstGeom prst="roundRect">
+            <a:avLst>
+              <a:gd name="adj" fmla="val 8000"/>
+            </a:avLst>
+          </a:prstGeom>
+          <a:solidFill>
+            <a:srgbClr val="F2F5F9"/>
+          </a:solidFill>
+          <a:ln w="9525">
+            <a:solidFill>
+              <a:srgbClr val="C9D6E4"/>
+            </a:solidFill>
+          </a:ln>
+          <a:effectLst/>
+        </p:spPr>
+        <p:style>
+          <a:lnRef idx="1">
+            <a:schemeClr val="accent1"/>
+          </a:lnRef>
+          <a:fillRef idx="3">
+            <a:schemeClr val="accent1"/>
+          </a:fillRef>
+          <a:effectRef idx="2">
+            <a:schemeClr val="accent1"/>
+          </a:effectRef>
+          <a:fontRef idx="minor">
+            <a:schemeClr val="lt1"/>
+          </a:fontRef>
+        </p:style>
+        <p:txBody>
+          <a:bodyPr rtlCol="0" anchor="t" wrap="square" lIns="109728" rIns="109728" tIns="54864" bIns="54864"/>
+          <a:lstStyle/>
+          <a:p>
+            <a:pPr algn="l">
+              <a:lnSpc>
+                <a:spcPct val="95000"/>
+              </a:lnSpc>
+              <a:spcBef>
+                <a:spcPts val="0"/>
+              </a:spcBef>
+              <a:spcAft>
+                <a:spcPts val="0"/>
+              </a:spcAft>
+            </a:pPr>
+            <a:r>
+              <a:rPr sz="1050" b="1">
+                <a:solidFill>
+                  <a:srgbClr val="0070C0"/>
+                </a:solidFill>
+                <a:latin typeface="Arial"/>
+              </a:rPr>
+              <a:t>(g)  </a:t>
+            </a:r>
+            <a:r>
+              <a:rPr sz="1050" b="1">
+                <a:solidFill>
+                  <a:srgbClr val="1F497D"/>
+                </a:solidFill>
+                <a:latin typeface="Arial"/>
+              </a:rPr>
+              <a:t>Central dashboard</a:t>
+            </a:r>
+          </a:p>
+          <a:p>
+            <a:pPr algn="l">
+              <a:lnSpc>
+                <a:spcPct val="95000"/>
+              </a:lnSpc>
+              <a:spcBef>
+                <a:spcPts val="200"/>
+              </a:spcBef>
+              <a:spcAft>
+                <a:spcPts val="0"/>
+              </a:spcAft>
+            </a:pPr>
+            <a:r>
+              <a:rPr sz="900" b="0" i="0">
+                <a:solidFill>
+                  <a:srgbClr val="5A636E"/>
+                </a:solidFill>
+                <a:latin typeface="Arial"/>
+              </a:rPr>
+              <a:t>district status, bottlenecks, emergency routes</a:t>
+            </a:r>
+          </a:p>
+        </p:txBody>
+      </p:sp>
+      <p:sp>
+        <p:nvSpPr>
+          <p:cNvPr id="15387" name="Rounded Rectangle 15386"/>
+          <p:cNvSpPr/>
+          <p:nvPr/>
+        </p:nvSpPr>
+        <p:spPr>
+          <a:xfrm>
+            <a:off x="9018270" y="5321808"/>
+            <a:ext cx="2759202" cy="548640"/>
+          </a:xfrm>
+          <a:prstGeom prst="roundRect">
+            <a:avLst>
+              <a:gd name="adj" fmla="val 8000"/>
+            </a:avLst>
+          </a:prstGeom>
+          <a:solidFill>
+            <a:srgbClr val="F2F5F9"/>
+          </a:solidFill>
+          <a:ln w="9525">
+            <a:solidFill>
+              <a:srgbClr val="C9D6E4"/>
+            </a:solidFill>
+          </a:ln>
+          <a:effectLst/>
+        </p:spPr>
+        <p:style>
+          <a:lnRef idx="1">
+            <a:schemeClr val="accent1"/>
+          </a:lnRef>
+          <a:fillRef idx="3">
+            <a:schemeClr val="accent1"/>
+          </a:fillRef>
+          <a:effectRef idx="2">
+            <a:schemeClr val="accent1"/>
+          </a:effectRef>
+          <a:fontRef idx="minor">
+            <a:schemeClr val="lt1"/>
+          </a:fontRef>
+        </p:style>
+        <p:txBody>
+          <a:bodyPr rtlCol="0" anchor="t" wrap="square" lIns="109728" rIns="109728" tIns="54864" bIns="54864"/>
+          <a:lstStyle/>
+          <a:p>
+            <a:pPr algn="l">
+              <a:lnSpc>
+                <a:spcPct val="95000"/>
+              </a:lnSpc>
+              <a:spcBef>
+                <a:spcPts val="0"/>
+              </a:spcBef>
+              <a:spcAft>
+                <a:spcPts val="0"/>
+              </a:spcAft>
+            </a:pPr>
+            <a:r>
+              <a:rPr sz="1050" b="1">
+                <a:solidFill>
+                  <a:srgbClr val="0070C0"/>
+                </a:solidFill>
+                <a:latin typeface="Arial"/>
+              </a:rPr>
+              <a:t>(h)  </a:t>
+            </a:r>
+            <a:r>
+              <a:rPr sz="1050" b="1">
+                <a:solidFill>
+                  <a:srgbClr val="1F497D"/>
+                </a:solidFill>
+                <a:latin typeface="Arial"/>
+              </a:rPr>
+              <a:t>Multilingual + offline</a:t>
+            </a:r>
+          </a:p>
+          <a:p>
+            <a:pPr algn="l">
+              <a:lnSpc>
+                <a:spcPct val="95000"/>
+              </a:lnSpc>
+              <a:spcBef>
+                <a:spcPts val="200"/>
+              </a:spcBef>
+              <a:spcAft>
+                <a:spcPts val="0"/>
+              </a:spcAft>
+            </a:pPr>
+            <a:r>
+              <a:rPr sz="900" b="0" i="0">
+                <a:solidFill>
+                  <a:srgbClr val="5A636E"/>
+                </a:solidFill>
+                <a:latin typeface="Arial"/>
+              </a:rPr>
+              <a:t>10 languages, sync when the signal returns</a:t>
             </a:r>
           </a:p>
         </p:txBody>
@@ -7525,7 +8283,7 @@
         <p:spPr>
           <a:xfrm>
             <a:off x="411480" y="1143000"/>
-            <a:ext cx="3639312" cy="219456"/>
+            <a:ext cx="11365992" cy="237744"/>
           </a:xfrm>
           <a:prstGeom prst="rect">
             <a:avLst/>
@@ -7552,25 +8310,114 @@
             <a:r>
               <a:rPr sz="1000" b="1" i="0">
                 <a:solidFill>
-                  <a:srgbClr val="1F497D"/>
-                </a:solidFill>
-                <a:latin typeface="Arial"/>
-              </a:rPr>
-              <a:t>BUILT WITH</a:t>
-            </a:r>
-          </a:p>
-        </p:txBody>
-      </p:sp>
-      <p:sp>
-        <p:nvSpPr>
-          <p:cNvPr id="17411" name="Rounded Rectangle 17410"/>
+                  <a:srgbClr val="0070C0"/>
+                </a:solidFill>
+                <a:latin typeface="Arial"/>
+              </a:rPr>
+              <a:t>TECHNOLOGIES TO BE USED (PROGRAMMING LANGUAGES, FRAMEWORKS, HARDWARE)</a:t>
+            </a:r>
+          </a:p>
+        </p:txBody>
+      </p:sp>
+      <p:sp>
+        <p:nvSpPr>
+          <p:cNvPr id="17411" name="Rectangle 17410"/>
           <p:cNvSpPr/>
           <p:nvPr/>
         </p:nvSpPr>
         <p:spPr>
           <a:xfrm>
-            <a:off x="411480" y="1417320"/>
-            <a:ext cx="3639312" cy="2103120"/>
+            <a:off x="411480" y="1330452"/>
+            <a:ext cx="11365992" cy="12801"/>
+          </a:xfrm>
+          <a:prstGeom prst="rect">
+            <a:avLst/>
+          </a:prstGeom>
+          <a:solidFill>
+            <a:srgbClr val="C9D6E4"/>
+          </a:solidFill>
+          <a:ln>
+            <a:noFill/>
+          </a:ln>
+          <a:effectLst/>
+        </p:spPr>
+        <p:style>
+          <a:lnRef idx="1">
+            <a:schemeClr val="accent1"/>
+          </a:lnRef>
+          <a:fillRef idx="3">
+            <a:schemeClr val="accent1"/>
+          </a:fillRef>
+          <a:effectRef idx="2">
+            <a:schemeClr val="accent1"/>
+          </a:effectRef>
+          <a:fontRef idx="minor">
+            <a:schemeClr val="lt1"/>
+          </a:fontRef>
+        </p:style>
+        <p:txBody>
+          <a:bodyPr rtlCol="0" anchor="ctr"/>
+          <a:lstStyle/>
+          <a:p>
+            <a:pPr algn="ctr"/>
+          </a:p>
+        </p:txBody>
+      </p:sp>
+      <p:sp>
+        <p:nvSpPr>
+          <p:cNvPr id="17412" name="TextBox 17411"/>
+          <p:cNvSpPr txBox="1"/>
+          <p:nvPr/>
+        </p:nvSpPr>
+        <p:spPr>
+          <a:xfrm>
+            <a:off x="411480" y="1435608"/>
+            <a:ext cx="3654552" cy="219456"/>
+          </a:xfrm>
+          <a:prstGeom prst="rect">
+            <a:avLst/>
+          </a:prstGeom>
+          <a:noFill/>
+        </p:spPr>
+        <p:txBody>
+          <a:bodyPr wrap="square" lIns="0" rIns="0" tIns="0" bIns="0">
+            <a:spAutoFit/>
+          </a:bodyPr>
+          <a:lstStyle/>
+          <a:p>
+            <a:pPr algn="l">
+              <a:lnSpc>
+                <a:spcPct val="100000"/>
+              </a:lnSpc>
+              <a:spcBef>
+                <a:spcPts val="0"/>
+              </a:spcBef>
+              <a:spcAft>
+                <a:spcPts val="0"/>
+              </a:spcAft>
+            </a:pPr>
+            <a:r>
+              <a:rPr sz="900" b="1" i="0">
+                <a:solidFill>
+                  <a:srgbClr val="1F497D"/>
+                </a:solidFill>
+                <a:latin typeface="Arial"/>
+              </a:rPr>
+              <a:t>SOFTWARE STACK</a:t>
+            </a:r>
+          </a:p>
+        </p:txBody>
+      </p:sp>
+      <p:sp>
+        <p:nvSpPr>
+          <p:cNvPr id="17413" name="Rounded Rectangle 17412"/>
+          <p:cNvSpPr/>
+          <p:nvPr/>
+        </p:nvSpPr>
+        <p:spPr>
+          <a:xfrm>
+            <a:off x="411480" y="1673352"/>
+            <a:ext cx="3654552" cy="1975104"/>
           </a:xfrm>
           <a:prstGeom prst="roundRect">
             <a:avLst>
@@ -7602,7 +8449,7 @@
           </a:fontRef>
         </p:style>
         <p:txBody>
-          <a:bodyPr rtlCol="0" anchor="t" wrap="square" lIns="118872" rIns="118872" tIns="64008" bIns="64008"/>
+          <a:bodyPr rtlCol="0" anchor="t" wrap="square" lIns="109728" rIns="109728" tIns="54864" bIns="54864"/>
           <a:lstStyle/>
           <a:p>
             <a:pPr algn="l">
@@ -7617,7 +8464,7 @@
               </a:spcAft>
             </a:pPr>
             <a:r>
-              <a:rPr sz="1150" b="1">
+              <a:rPr sz="1050" b="1">
                 <a:solidFill>
                   <a:srgbClr val="1F497D"/>
                 </a:solidFill>
@@ -7626,13 +8473,13 @@
               <a:t>Backend  </a:t>
             </a:r>
             <a:r>
-              <a:rPr sz="1150" b="0">
+              <a:rPr sz="1050" b="0">
                 <a:solidFill>
                   <a:srgbClr val="262B33"/>
                 </a:solidFill>
                 <a:latin typeface="Arial"/>
               </a:rPr>
-              <a:t>Node.js · Express 5 · MongoDB with 2dsphere · JWT</a:t>
+              <a:t>Node.js · Express 5 · MongoDB with 2dsphere indexes · JWT</a:t>
             </a:r>
           </a:p>
           <a:p>
@@ -7641,14 +8488,14 @@
                 <a:spcPct val="100000"/>
               </a:lnSpc>
               <a:spcBef>
-                <a:spcPts val="1000"/>
+                <a:spcPts val="900"/>
               </a:spcBef>
               <a:spcAft>
                 <a:spcPts val="0"/>
               </a:spcAft>
             </a:pPr>
             <a:r>
-              <a:rPr sz="1150" b="1">
+              <a:rPr sz="1050" b="1">
                 <a:solidFill>
                   <a:srgbClr val="1F497D"/>
                 </a:solidFill>
@@ -7657,13 +8504,13 @@
               <a:t>Web  </a:t>
             </a:r>
             <a:r>
-              <a:rPr sz="1150" b="0">
+              <a:rPr sz="1050" b="0">
                 <a:solidFill>
                   <a:srgbClr val="262B33"/>
                 </a:solidFill>
                 <a:latin typeface="Arial"/>
               </a:rPr>
-              <a:t>React · Vite · MapLibre GL</a:t>
+              <a:t>React · Vite · MapLibre GL for the GIS dashboard</a:t>
             </a:r>
           </a:p>
           <a:p>
@@ -7672,14 +8519,14 @@
                 <a:spcPct val="100000"/>
               </a:lnSpc>
               <a:spcBef>
-                <a:spcPts val="1000"/>
+                <a:spcPts val="900"/>
               </a:spcBef>
               <a:spcAft>
                 <a:spcPts val="0"/>
               </a:spcAft>
             </a:pPr>
             <a:r>
-              <a:rPr sz="1150" b="1">
+              <a:rPr sz="1050" b="1">
                 <a:solidFill>
                   <a:srgbClr val="1F497D"/>
                 </a:solidFill>
@@ -7688,13 +8535,13 @@
               <a:t>Mobile  </a:t>
             </a:r>
             <a:r>
-              <a:rPr sz="1150" b="0">
+              <a:rPr sz="1050" b="0">
                 <a:solidFill>
                   <a:srgbClr val="262B33"/>
                 </a:solidFill>
                 <a:latin typeface="Arial"/>
               </a:rPr>
-              <a:t>Kotlin + XML — four apps: customer, merchant, driver, officer</a:t>
+              <a:t>Kotlin + XML — four Android apps: customer, merchant, driver, officer</a:t>
             </a:r>
           </a:p>
           <a:p>
@@ -7703,14 +8550,14 @@
                 <a:spcPct val="100000"/>
               </a:lnSpc>
               <a:spcBef>
-                <a:spcPts val="1000"/>
+                <a:spcPts val="900"/>
               </a:spcBef>
               <a:spcAft>
                 <a:spcPts val="0"/>
               </a:spcAft>
             </a:pPr>
             <a:r>
-              <a:rPr sz="1150" b="1">
+              <a:rPr sz="1050" b="1">
                 <a:solidFill>
                   <a:srgbClr val="1F497D"/>
                 </a:solidFill>
@@ -7719,27 +8566,27 @@
               <a:t>Cloud  </a:t>
             </a:r>
             <a:r>
-              <a:rPr sz="1150" b="0">
+              <a:rPr sz="1050" b="0">
                 <a:solidFill>
                   <a:srgbClr val="262B33"/>
                 </a:solidFill>
                 <a:latin typeface="Arial"/>
               </a:rPr>
-              <a:t>Render · MongoDB Atlas · Cloudinary · FCM push</a:t>
-            </a:r>
-          </a:p>
-        </p:txBody>
-      </p:sp>
-      <p:sp>
-        <p:nvSpPr>
-          <p:cNvPr id="17412" name="TextBox 17411"/>
+              <a:t>Render · MongoDB Atlas · Cloudinary · Firebase push</a:t>
+            </a:r>
+          </a:p>
+        </p:txBody>
+      </p:sp>
+      <p:sp>
+        <p:nvSpPr>
+          <p:cNvPr id="17414" name="TextBox 17413"/>
           <p:cNvSpPr txBox="1"/>
           <p:nvPr/>
         </p:nvSpPr>
         <p:spPr>
           <a:xfrm>
-            <a:off x="4270248" y="1143000"/>
-            <a:ext cx="3639312" cy="219456"/>
+            <a:off x="4267200" y="1435608"/>
+            <a:ext cx="3654552" cy="219456"/>
           </a:xfrm>
           <a:prstGeom prst="rect">
             <a:avLst/>
@@ -7764,27 +8611,27 @@
               </a:spcAft>
             </a:pPr>
             <a:r>
-              <a:rPr sz="1000" b="1" i="0">
+              <a:rPr sz="900" b="1" i="0">
                 <a:solidFill>
                   <a:srgbClr val="1F497D"/>
                 </a:solidFill>
                 <a:latin typeface="Arial"/>
               </a:rPr>
-              <a:t>THE MODEL</a:t>
-            </a:r>
-          </a:p>
-        </p:txBody>
-      </p:sp>
-      <p:sp>
-        <p:nvSpPr>
-          <p:cNvPr id="17413" name="Rounded Rectangle 17412"/>
+              <a:t>AI / ML</a:t>
+            </a:r>
+          </a:p>
+        </p:txBody>
+      </p:sp>
+      <p:sp>
+        <p:nvSpPr>
+          <p:cNvPr id="17415" name="Rounded Rectangle 17414"/>
           <p:cNvSpPr/>
           <p:nvPr/>
         </p:nvSpPr>
         <p:spPr>
           <a:xfrm>
-            <a:off x="4270248" y="1417320"/>
-            <a:ext cx="3639312" cy="2103120"/>
+            <a:off x="4267200" y="1673352"/>
+            <a:ext cx="3654552" cy="1975104"/>
           </a:xfrm>
           <a:prstGeom prst="roundRect">
             <a:avLst>
@@ -7816,7 +8663,7 @@
           </a:fontRef>
         </p:style>
         <p:txBody>
-          <a:bodyPr rtlCol="0" anchor="t" wrap="square" lIns="118872" rIns="118872" tIns="64008" bIns="64008"/>
+          <a:bodyPr rtlCol="0" anchor="t" wrap="square" lIns="109728" rIns="109728" tIns="54864" bIns="54864"/>
           <a:lstStyle/>
           <a:p>
             <a:pPr algn="l">
@@ -7831,16 +8678,16 @@
               </a:spcAft>
             </a:pPr>
             <a:r>
-              <a:rPr sz="1150" b="1">
+              <a:rPr sz="1050" b="1">
                 <a:solidFill>
                   <a:srgbClr val="1F497D"/>
                 </a:solidFill>
                 <a:latin typeface="Arial"/>
               </a:rPr>
-              <a:t>Type  </a:t>
-            </a:r>
-            <a:r>
-              <a:rPr sz="1150" b="0">
+              <a:t>Model  </a:t>
+            </a:r>
+            <a:r>
+              <a:rPr sz="1050" b="0">
                 <a:solidFill>
                   <a:srgbClr val="262B33"/>
                 </a:solidFill>
@@ -7855,14 +8702,14 @@
                 <a:spcPct val="100000"/>
               </a:lnSpc>
               <a:spcBef>
-                <a:spcPts val="1000"/>
+                <a:spcPts val="900"/>
               </a:spcBef>
               <a:spcAft>
                 <a:spcPts val="0"/>
               </a:spcAft>
             </a:pPr>
             <a:r>
-              <a:rPr sz="1150" b="1">
+              <a:rPr sz="1050" b="1">
                 <a:solidFill>
                   <a:srgbClr val="1F497D"/>
                 </a:solidFill>
@@ -7871,7 +8718,7 @@
               <a:t>Features  </a:t>
             </a:r>
             <a:r>
-              <a:rPr sz="1150" b="0">
+              <a:rPr sz="1050" b="0">
                 <a:solidFill>
                   <a:srgbClr val="262B33"/>
                 </a:solidFill>
@@ -7886,14 +8733,14 @@
                 <a:spcPct val="100000"/>
               </a:lnSpc>
               <a:spcBef>
-                <a:spcPts val="1000"/>
+                <a:spcPts val="900"/>
               </a:spcBef>
               <a:spcAft>
                 <a:spcPts val="0"/>
               </a:spcAft>
             </a:pPr>
             <a:r>
-              <a:rPr sz="1150" b="1">
+              <a:rPr sz="1050" b="1">
                 <a:solidFill>
                   <a:srgbClr val="1F497D"/>
                 </a:solidFill>
@@ -7902,13 +8749,13 @@
               <a:t>Trained on  </a:t>
             </a:r>
             <a:r>
-              <a:rPr sz="1150" b="0">
+              <a:rPr sz="1050" b="0">
                 <a:solidFill>
                   <a:srgbClr val="262B33"/>
                 </a:solidFill>
                 <a:latin typeface="Arial"/>
               </a:rPr>
-              <a:t>109,116 road-days of observed weather, 42 stretches x 877 days</a:t>
+              <a:t>109,116 road-days of observed weather · 42 stretches x 877 days</a:t>
             </a:r>
           </a:p>
           <a:p>
@@ -7917,14 +8764,14 @@
                 <a:spcPct val="100000"/>
               </a:lnSpc>
               <a:spcBef>
-                <a:spcPts val="1000"/>
+                <a:spcPts val="900"/>
               </a:spcBef>
               <a:spcAft>
                 <a:spcPts val="0"/>
               </a:spcAft>
             </a:pPr>
             <a:r>
-              <a:rPr sz="1150" b="1">
+              <a:rPr sz="1050" b="1">
                 <a:solidFill>
                   <a:srgbClr val="1F497D"/>
                 </a:solidFill>
@@ -7933,7 +8780,7 @@
               <a:t>Scored  </a:t>
             </a:r>
             <a:r>
-              <a:rPr sz="1150" b="0">
+              <a:rPr sz="1050" b="0">
                 <a:solidFill>
                   <a:srgbClr val="262B33"/>
                 </a:solidFill>
@@ -7946,14 +8793,14 @@
       </p:sp>
       <p:sp>
         <p:nvSpPr>
-          <p:cNvPr id="17414" name="TextBox 17413"/>
+          <p:cNvPr id="17416" name="TextBox 17415"/>
           <p:cNvSpPr txBox="1"/>
           <p:nvPr/>
         </p:nvSpPr>
         <p:spPr>
           <a:xfrm>
-            <a:off x="8129015" y="1143000"/>
-            <a:ext cx="3639312" cy="219456"/>
+            <a:off x="8122920" y="1435608"/>
+            <a:ext cx="3654552" cy="219456"/>
           </a:xfrm>
           <a:prstGeom prst="rect">
             <a:avLst/>
@@ -7978,27 +8825,27 @@
               </a:spcAft>
             </a:pPr>
             <a:r>
-              <a:rPr sz="1000" b="1" i="0">
+              <a:rPr sz="900" b="1" i="0">
                 <a:solidFill>
                   <a:srgbClr val="1F497D"/>
                 </a:solidFill>
                 <a:latin typeface="Arial"/>
               </a:rPr>
-              <a:t>REAL DATA, NOT MOCK</a:t>
-            </a:r>
-          </a:p>
-        </p:txBody>
-      </p:sp>
-      <p:sp>
-        <p:nvSpPr>
-          <p:cNvPr id="17415" name="Rounded Rectangle 17414"/>
+              <a:t>HARDWARE AND EXTERNAL DATA</a:t>
+            </a:r>
+          </a:p>
+        </p:txBody>
+      </p:sp>
+      <p:sp>
+        <p:nvSpPr>
+          <p:cNvPr id="17417" name="Rounded Rectangle 17416"/>
           <p:cNvSpPr/>
           <p:nvPr/>
         </p:nvSpPr>
         <p:spPr>
           <a:xfrm>
-            <a:off x="8129015" y="1417320"/>
-            <a:ext cx="3639312" cy="2103120"/>
+            <a:off x="8122920" y="1673352"/>
+            <a:ext cx="3654552" cy="1975104"/>
           </a:xfrm>
           <a:prstGeom prst="roundRect">
             <a:avLst>
@@ -8030,7 +8877,7 @@
           </a:fontRef>
         </p:style>
         <p:txBody>
-          <a:bodyPr rtlCol="0" anchor="t" wrap="square" lIns="118872" rIns="118872" tIns="64008" bIns="64008"/>
+          <a:bodyPr rtlCol="0" anchor="t" wrap="square" lIns="109728" rIns="109728" tIns="54864" bIns="54864"/>
           <a:lstStyle/>
           <a:p>
             <a:pPr algn="l">
@@ -8045,22 +8892,22 @@
               </a:spcAft>
             </a:pPr>
             <a:r>
-              <a:rPr sz="1150" b="1">
+              <a:rPr sz="1050" b="1">
                 <a:solidFill>
                   <a:srgbClr val="1F497D"/>
                 </a:solidFill>
                 <a:latin typeface="Arial"/>
               </a:rPr>
-              <a:t>Weather  </a:t>
-            </a:r>
-            <a:r>
-              <a:rPr sz="1150" b="0">
+              <a:t>Hardware  </a:t>
+            </a:r>
+            <a:r>
+              <a:rPr sz="1050" b="0">
                 <a:solidFill>
                   <a:srgbClr val="262B33"/>
                 </a:solidFill>
                 <a:latin typeface="Arial"/>
               </a:rPr>
-              <a:t>Open-Meteo archive + forecast, hourly</a:t>
+              <a:t>None to deploy — the driver's own phone is the sensor</a:t>
             </a:r>
           </a:p>
           <a:p>
@@ -8069,29 +8916,29 @@
                 <a:spcPct val="100000"/>
               </a:lnSpc>
               <a:spcBef>
-                <a:spcPts val="1000"/>
+                <a:spcPts val="900"/>
               </a:spcBef>
               <a:spcAft>
                 <a:spcPts val="0"/>
               </a:spcAft>
             </a:pPr>
             <a:r>
-              <a:rPr sz="1150" b="1">
+              <a:rPr sz="1050" b="1">
                 <a:solidFill>
                   <a:srgbClr val="1F497D"/>
                 </a:solidFill>
                 <a:latin typeface="Arial"/>
               </a:rPr>
-              <a:t>Roads  </a:t>
-            </a:r>
-            <a:r>
-              <a:rPr sz="1150" b="0">
+              <a:t>Weather  </a:t>
+            </a:r>
+            <a:r>
+              <a:rPr sz="1050" b="0">
                 <a:solidFill>
                   <a:srgbClr val="262B33"/>
                 </a:solidFill>
                 <a:latin typeface="Arial"/>
               </a:rPr>
-              <a:t>OSRM geometry — 42 stretches / 3,567 km</a:t>
+              <a:t>Open-Meteo archive + forecast, hourly</a:t>
             </a:r>
           </a:p>
           <a:p>
@@ -8100,29 +8947,29 @@
                 <a:spcPct val="100000"/>
               </a:lnSpc>
               <a:spcBef>
-                <a:spcPts val="1000"/>
+                <a:spcPts val="900"/>
               </a:spcBef>
               <a:spcAft>
                 <a:spcPts val="0"/>
               </a:spcAft>
             </a:pPr>
             <a:r>
-              <a:rPr sz="1150" b="1">
+              <a:rPr sz="1050" b="1">
                 <a:solidFill>
                   <a:srgbClr val="1F497D"/>
                 </a:solidFill>
                 <a:latin typeface="Arial"/>
               </a:rPr>
-              <a:t>Vehicles  </a:t>
-            </a:r>
-            <a:r>
-              <a:rPr sz="1150" b="0">
+              <a:t>Roads  </a:t>
+            </a:r>
+            <a:r>
+              <a:rPr sz="1050" b="0">
                 <a:solidFill>
                   <a:srgbClr val="262B33"/>
                 </a:solidFill>
                 <a:latin typeface="Arial"/>
               </a:rPr>
-              <a:t>VAHAN registration lookup</a:t>
+              <a:t>OSRM geometry and route alternates</a:t>
             </a:r>
           </a:p>
           <a:p>
@@ -8131,43 +8978,43 @@
                 <a:spcPct val="100000"/>
               </a:lnSpc>
               <a:spcBef>
-                <a:spcPts val="1000"/>
+                <a:spcPts val="900"/>
               </a:spcBef>
               <a:spcAft>
                 <a:spcPts val="0"/>
               </a:spcAft>
             </a:pPr>
             <a:r>
-              <a:rPr sz="1150" b="1">
+              <a:rPr sz="1050" b="1">
                 <a:solidFill>
                   <a:srgbClr val="1F497D"/>
                 </a:solidFill>
                 <a:latin typeface="Arial"/>
               </a:rPr>
-              <a:t>Field  </a:t>
-            </a:r>
-            <a:r>
-              <a:rPr sz="1150" b="0">
+              <a:t>Transport DB  </a:t>
+            </a:r>
+            <a:r>
+              <a:rPr sz="1050" b="0">
                 <a:solidFill>
                   <a:srgbClr val="262B33"/>
                 </a:solidFill>
                 <a:latin typeface="Arial"/>
               </a:rPr>
-              <a:t>Photos, GPS and voice from officers and drivers</a:t>
-            </a:r>
-          </a:p>
-        </p:txBody>
-      </p:sp>
-      <p:sp>
-        <p:nvSpPr>
-          <p:cNvPr id="17416" name="TextBox 17415"/>
+              <a:t>VAHAN registration lookup at driver sign-up</a:t>
+            </a:r>
+          </a:p>
+        </p:txBody>
+      </p:sp>
+      <p:sp>
+        <p:nvSpPr>
+          <p:cNvPr id="17418" name="TextBox 17417"/>
           <p:cNvSpPr txBox="1"/>
           <p:nvPr/>
         </p:nvSpPr>
         <p:spPr>
           <a:xfrm>
-            <a:off x="411480" y="3721608"/>
-            <a:ext cx="11338560" cy="219456"/>
+            <a:off x="411480" y="3794760"/>
+            <a:ext cx="11365992" cy="237744"/>
           </a:xfrm>
           <a:prstGeom prst="rect">
             <a:avLst/>
@@ -8194,25 +9041,69 @@
             <a:r>
               <a:rPr sz="1000" b="1" i="0">
                 <a:solidFill>
-                  <a:srgbClr val="1F497D"/>
-                </a:solidFill>
-                <a:latin typeface="Arial"/>
-              </a:rPr>
-              <a:t>FROM ONE GPS PING TO A ROAD STATUS, AN ALERT AND A ROUTE</a:t>
-            </a:r>
-          </a:p>
-        </p:txBody>
-      </p:sp>
-      <p:sp>
-        <p:nvSpPr>
-          <p:cNvPr id="17417" name="Rounded Rectangle 17416"/>
+                  <a:srgbClr val="0070C0"/>
+                </a:solidFill>
+                <a:latin typeface="Arial"/>
+              </a:rPr>
+              <a:t>METHODOLOGY AND PROCESS FOR IMPLEMENTATION</a:t>
+            </a:r>
+          </a:p>
+        </p:txBody>
+      </p:sp>
+      <p:sp>
+        <p:nvSpPr>
+          <p:cNvPr id="17419" name="Rectangle 17418"/>
           <p:cNvSpPr/>
           <p:nvPr/>
         </p:nvSpPr>
         <p:spPr>
           <a:xfrm>
-            <a:off x="411480" y="4032504"/>
-            <a:ext cx="1665732" cy="749808"/>
+            <a:off x="411480" y="3982212"/>
+            <a:ext cx="11365992" cy="12801"/>
+          </a:xfrm>
+          <a:prstGeom prst="rect">
+            <a:avLst/>
+          </a:prstGeom>
+          <a:solidFill>
+            <a:srgbClr val="C9D6E4"/>
+          </a:solidFill>
+          <a:ln>
+            <a:noFill/>
+          </a:ln>
+          <a:effectLst/>
+        </p:spPr>
+        <p:style>
+          <a:lnRef idx="1">
+            <a:schemeClr val="accent1"/>
+          </a:lnRef>
+          <a:fillRef idx="3">
+            <a:schemeClr val="accent1"/>
+          </a:fillRef>
+          <a:effectRef idx="2">
+            <a:schemeClr val="accent1"/>
+          </a:effectRef>
+          <a:fontRef idx="minor">
+            <a:schemeClr val="lt1"/>
+          </a:fontRef>
+        </p:style>
+        <p:txBody>
+          <a:bodyPr rtlCol="0" anchor="ctr"/>
+          <a:lstStyle/>
+          <a:p>
+            <a:pPr algn="ctr"/>
+          </a:p>
+        </p:txBody>
+      </p:sp>
+      <p:sp>
+        <p:nvSpPr>
+          <p:cNvPr id="17420" name="Rounded Rectangle 17419"/>
+          <p:cNvSpPr/>
+          <p:nvPr/>
+        </p:nvSpPr>
+        <p:spPr>
+          <a:xfrm>
+            <a:off x="411480" y="4087368"/>
+            <a:ext cx="1680972" cy="676656"/>
           </a:xfrm>
           <a:prstGeom prst="roundRect">
             <a:avLst>
@@ -8244,7 +9135,7 @@
           </a:fontRef>
         </p:style>
         <p:txBody>
-          <a:bodyPr rtlCol="0" anchor="ctr" wrap="square" lIns="118872" rIns="118872" tIns="64008" bIns="64008"/>
+          <a:bodyPr rtlCol="0" anchor="ctr" wrap="square" lIns="109728" rIns="109728" tIns="54864" bIns="54864"/>
           <a:lstStyle/>
           <a:p>
             <a:pPr algn="ctr">
@@ -8281,7 +9172,7 @@
               </a:spcAft>
             </a:pPr>
             <a:r>
-              <a:rPr sz="950" b="0" i="0">
+              <a:rPr sz="900" b="0" i="0">
                 <a:solidFill>
                   <a:srgbClr val="5A636E"/>
                 </a:solidFill>
@@ -8294,14 +9185,14 @@
       </p:sp>
       <p:sp>
         <p:nvSpPr>
-          <p:cNvPr id="17418" name="Right Arrow 17417"/>
+          <p:cNvPr id="17421" name="Right Arrow 17420"/>
           <p:cNvSpPr/>
           <p:nvPr/>
         </p:nvSpPr>
         <p:spPr>
           <a:xfrm>
-            <a:off x="2127504" y="4357116"/>
-            <a:ext cx="173736" cy="100584"/>
+            <a:off x="2138172" y="4379976"/>
+            <a:ext cx="164592" cy="91440"/>
           </a:xfrm>
           <a:prstGeom prst="rightArrow">
             <a:avLst/>
@@ -8338,14 +9229,14 @@
       </p:sp>
       <p:sp>
         <p:nvSpPr>
-          <p:cNvPr id="17419" name="Rounded Rectangle 17418"/>
+          <p:cNvPr id="17422" name="Rounded Rectangle 17421"/>
           <p:cNvSpPr/>
           <p:nvPr/>
         </p:nvSpPr>
         <p:spPr>
           <a:xfrm>
-            <a:off x="2351532" y="4032504"/>
-            <a:ext cx="1665732" cy="749808"/>
+            <a:off x="2348484" y="4087368"/>
+            <a:ext cx="1680972" cy="676656"/>
           </a:xfrm>
           <a:prstGeom prst="roundRect">
             <a:avLst>
@@ -8377,7 +9268,7 @@
           </a:fontRef>
         </p:style>
         <p:txBody>
-          <a:bodyPr rtlCol="0" anchor="ctr" wrap="square" lIns="118872" rIns="118872" tIns="64008" bIns="64008"/>
+          <a:bodyPr rtlCol="0" anchor="ctr" wrap="square" lIns="109728" rIns="109728" tIns="54864" bIns="54864"/>
           <a:lstStyle/>
           <a:p>
             <a:pPr algn="ctr">
@@ -8414,7 +9305,7 @@
               </a:spcAft>
             </a:pPr>
             <a:r>
-              <a:rPr sz="950" b="0" i="0">
+              <a:rPr sz="900" b="0" i="0">
                 <a:solidFill>
                   <a:srgbClr val="5A636E"/>
                 </a:solidFill>
@@ -8427,14 +9318,14 @@
       </p:sp>
       <p:sp>
         <p:nvSpPr>
-          <p:cNvPr id="17420" name="Right Arrow 17419"/>
+          <p:cNvPr id="17423" name="Right Arrow 17422"/>
           <p:cNvSpPr/>
           <p:nvPr/>
         </p:nvSpPr>
         <p:spPr>
           <a:xfrm>
-            <a:off x="4067556" y="4357116"/>
-            <a:ext cx="173736" cy="100584"/>
+            <a:off x="4075176" y="4379976"/>
+            <a:ext cx="164592" cy="91440"/>
           </a:xfrm>
           <a:prstGeom prst="rightArrow">
             <a:avLst/>
@@ -8471,14 +9362,14 @@
       </p:sp>
       <p:sp>
         <p:nvSpPr>
-          <p:cNvPr id="17421" name="Rounded Rectangle 17420"/>
+          <p:cNvPr id="17424" name="Rounded Rectangle 17423"/>
           <p:cNvSpPr/>
           <p:nvPr/>
         </p:nvSpPr>
         <p:spPr>
           <a:xfrm>
-            <a:off x="4291584" y="4032504"/>
-            <a:ext cx="1665732" cy="749808"/>
+            <a:off x="4285488" y="4087368"/>
+            <a:ext cx="1680972" cy="676656"/>
           </a:xfrm>
           <a:prstGeom prst="roundRect">
             <a:avLst>
@@ -8510,7 +9401,7 @@
           </a:fontRef>
         </p:style>
         <p:txBody>
-          <a:bodyPr rtlCol="0" anchor="ctr" wrap="square" lIns="118872" rIns="118872" tIns="64008" bIns="64008"/>
+          <a:bodyPr rtlCol="0" anchor="ctr" wrap="square" lIns="109728" rIns="109728" tIns="54864" bIns="54864"/>
           <a:lstStyle/>
           <a:p>
             <a:pPr algn="ctr">
@@ -8547,7 +9438,7 @@
               </a:spcAft>
             </a:pPr>
             <a:r>
-              <a:rPr sz="950" b="0" i="0">
+              <a:rPr sz="900" b="0" i="0">
                 <a:solidFill>
                   <a:srgbClr val="5A636E"/>
                 </a:solidFill>
@@ -8560,14 +9451,14 @@
       </p:sp>
       <p:sp>
         <p:nvSpPr>
-          <p:cNvPr id="17422" name="Right Arrow 17421"/>
+          <p:cNvPr id="17425" name="Right Arrow 17424"/>
           <p:cNvSpPr/>
           <p:nvPr/>
         </p:nvSpPr>
         <p:spPr>
           <a:xfrm>
-            <a:off x="6007607" y="4357116"/>
-            <a:ext cx="173736" cy="100584"/>
+            <a:off x="6012180" y="4379976"/>
+            <a:ext cx="164592" cy="91440"/>
           </a:xfrm>
           <a:prstGeom prst="rightArrow">
             <a:avLst/>
@@ -8604,14 +9495,14 @@
       </p:sp>
       <p:sp>
         <p:nvSpPr>
-          <p:cNvPr id="17423" name="Rounded Rectangle 17422"/>
+          <p:cNvPr id="17426" name="Rounded Rectangle 17425"/>
           <p:cNvSpPr/>
           <p:nvPr/>
         </p:nvSpPr>
         <p:spPr>
           <a:xfrm>
-            <a:off x="6231636" y="4032504"/>
-            <a:ext cx="1665732" cy="749808"/>
+            <a:off x="6222492" y="4087368"/>
+            <a:ext cx="1680972" cy="676656"/>
           </a:xfrm>
           <a:prstGeom prst="roundRect">
             <a:avLst>
@@ -8643,7 +9534,7 @@
           </a:fontRef>
         </p:style>
         <p:txBody>
-          <a:bodyPr rtlCol="0" anchor="ctr" wrap="square" lIns="118872" rIns="118872" tIns="64008" bIns="64008"/>
+          <a:bodyPr rtlCol="0" anchor="ctr" wrap="square" lIns="109728" rIns="109728" tIns="54864" bIns="54864"/>
           <a:lstStyle/>
           <a:p>
             <a:pPr algn="ctr">
@@ -8664,7 +9555,7 @@
                 </a:solidFill>
                 <a:latin typeface="Arial"/>
               </a:rPr>
-              <a:t>Status</a:t>
+              <a:t>Road status</a:t>
             </a:r>
           </a:p>
           <a:p>
@@ -8680,7 +9571,7 @@
               </a:spcAft>
             </a:pPr>
             <a:r>
-              <a:rPr sz="950" b="0" i="0">
+              <a:rPr sz="900" b="0" i="0">
                 <a:solidFill>
                   <a:srgbClr val="5A636E"/>
                 </a:solidFill>
@@ -8693,14 +9584,14 @@
       </p:sp>
       <p:sp>
         <p:nvSpPr>
-          <p:cNvPr id="17424" name="Right Arrow 17423"/>
+          <p:cNvPr id="17427" name="Right Arrow 17426"/>
           <p:cNvSpPr/>
           <p:nvPr/>
         </p:nvSpPr>
         <p:spPr>
           <a:xfrm>
-            <a:off x="7947660" y="4357116"/>
-            <a:ext cx="173736" cy="100584"/>
+            <a:off x="7949184" y="4379976"/>
+            <a:ext cx="164592" cy="91440"/>
           </a:xfrm>
           <a:prstGeom prst="rightArrow">
             <a:avLst/>
@@ -8737,14 +9628,14 @@
       </p:sp>
       <p:sp>
         <p:nvSpPr>
-          <p:cNvPr id="17425" name="Rounded Rectangle 17424"/>
+          <p:cNvPr id="17428" name="Rounded Rectangle 17427"/>
           <p:cNvSpPr/>
           <p:nvPr/>
         </p:nvSpPr>
         <p:spPr>
           <a:xfrm>
-            <a:off x="8171687" y="4032504"/>
-            <a:ext cx="1665732" cy="749808"/>
+            <a:off x="8159496" y="4087368"/>
+            <a:ext cx="1680972" cy="676656"/>
           </a:xfrm>
           <a:prstGeom prst="roundRect">
             <a:avLst>
@@ -8776,7 +9667,7 @@
           </a:fontRef>
         </p:style>
         <p:txBody>
-          <a:bodyPr rtlCol="0" anchor="ctr" wrap="square" lIns="118872" rIns="118872" tIns="64008" bIns="64008"/>
+          <a:bodyPr rtlCol="0" anchor="ctr" wrap="square" lIns="109728" rIns="109728" tIns="54864" bIns="54864"/>
           <a:lstStyle/>
           <a:p>
             <a:pPr algn="ctr">
@@ -8813,7 +9704,7 @@
               </a:spcAft>
             </a:pPr>
             <a:r>
-              <a:rPr sz="950" b="0" i="0">
+              <a:rPr sz="900" b="0" i="0">
                 <a:solidFill>
                   <a:srgbClr val="5A636E"/>
                 </a:solidFill>
@@ -8826,14 +9717,14 @@
       </p:sp>
       <p:sp>
         <p:nvSpPr>
-          <p:cNvPr id="17426" name="Right Arrow 17425"/>
+          <p:cNvPr id="17429" name="Right Arrow 17428"/>
           <p:cNvSpPr/>
           <p:nvPr/>
         </p:nvSpPr>
         <p:spPr>
           <a:xfrm>
-            <a:off x="9887712" y="4357116"/>
-            <a:ext cx="173736" cy="100584"/>
+            <a:off x="9886188" y="4379976"/>
+            <a:ext cx="164592" cy="91440"/>
           </a:xfrm>
           <a:prstGeom prst="rightArrow">
             <a:avLst/>
@@ -8870,14 +9761,14 @@
       </p:sp>
       <p:sp>
         <p:nvSpPr>
-          <p:cNvPr id="17427" name="Rounded Rectangle 17426"/>
+          <p:cNvPr id="17430" name="Rounded Rectangle 17429"/>
           <p:cNvSpPr/>
           <p:nvPr/>
         </p:nvSpPr>
         <p:spPr>
           <a:xfrm>
-            <a:off x="10111739" y="4032504"/>
-            <a:ext cx="1665732" cy="749808"/>
+            <a:off x="10096500" y="4087368"/>
+            <a:ext cx="1680972" cy="676656"/>
           </a:xfrm>
           <a:prstGeom prst="roundRect">
             <a:avLst>
@@ -8909,7 +9800,7 @@
           </a:fontRef>
         </p:style>
         <p:txBody>
-          <a:bodyPr rtlCol="0" anchor="ctr" wrap="square" lIns="118872" rIns="118872" tIns="64008" bIns="64008"/>
+          <a:bodyPr rtlCol="0" anchor="ctr" wrap="square" lIns="109728" rIns="109728" tIns="54864" bIns="54864"/>
           <a:lstStyle/>
           <a:p>
             <a:pPr algn="ctr">
@@ -8946,7 +9837,7 @@
               </a:spcAft>
             </a:pPr>
             <a:r>
-              <a:rPr sz="950" b="0" i="0">
+              <a:rPr sz="900" b="0" i="0">
                 <a:solidFill>
                   <a:srgbClr val="5A636E"/>
                 </a:solidFill>
@@ -8959,29 +9850,51 @@
       </p:sp>
       <p:sp>
         <p:nvSpPr>
-          <p:cNvPr id="17428" name="TextBox 17427"/>
-          <p:cNvSpPr txBox="1"/>
+          <p:cNvPr id="17431" name="Rounded Rectangle 17430"/>
+          <p:cNvSpPr/>
           <p:nvPr/>
         </p:nvSpPr>
         <p:spPr>
           <a:xfrm>
-            <a:off x="411480" y="4928616"/>
-            <a:ext cx="11365992" cy="365760"/>
-          </a:xfrm>
-          <a:prstGeom prst="rect">
-            <a:avLst/>
+            <a:off x="411480" y="4965192"/>
+            <a:ext cx="11365992" cy="786384"/>
+          </a:xfrm>
+          <a:prstGeom prst="roundRect">
+            <a:avLst>
+              <a:gd name="adj" fmla="val 8000"/>
+            </a:avLst>
           </a:prstGeom>
-          <a:noFill/>
-        </p:spPr>
-        <p:txBody>
-          <a:bodyPr wrap="square" lIns="0" rIns="0" tIns="0" bIns="0">
-            <a:spAutoFit/>
-          </a:bodyPr>
+          <a:solidFill>
+            <a:srgbClr val="FFFFFF"/>
+          </a:solidFill>
+          <a:ln w="15875">
+            <a:solidFill>
+              <a:srgbClr val="4F81BD"/>
+            </a:solidFill>
+          </a:ln>
+          <a:effectLst/>
+        </p:spPr>
+        <p:style>
+          <a:lnRef idx="1">
+            <a:schemeClr val="accent1"/>
+          </a:lnRef>
+          <a:fillRef idx="3">
+            <a:schemeClr val="accent1"/>
+          </a:fillRef>
+          <a:effectRef idx="2">
+            <a:schemeClr val="accent1"/>
+          </a:effectRef>
+          <a:fontRef idx="minor">
+            <a:schemeClr val="lt1"/>
+          </a:fontRef>
+        </p:style>
+        <p:txBody>
+          <a:bodyPr rtlCol="0" anchor="ctr" wrap="square" lIns="109728" rIns="109728" tIns="54864" bIns="54864"/>
           <a:lstStyle/>
           <a:p>
             <a:pPr algn="l">
               <a:lnSpc>
-                <a:spcPct val="100000"/>
+                <a:spcPct val="102000"/>
               </a:lnSpc>
               <a:spcBef>
                 <a:spcPts val="0"/>
@@ -8997,7 +9910,7 @@
                 </a:solidFill>
                 <a:latin typeface="Arial"/>
               </a:rPr>
-              <a:t>Trust rule — </a:t>
+              <a:t>Working prototype  </a:t>
             </a:r>
             <a:r>
               <a:rPr sz="1100" b="0">
@@ -9006,7 +9919,25 @@
                 </a:solidFill>
                 <a:latin typeface="Arial"/>
               </a:rPr>
-              <a:t>a reading needs at least 4 samples from at least 2 distinct vehicles, so one parked driver can never close a highway. A driver's hazard report is capped at RESTRICTED until an officer confirms it.</a:t>
+              <a:t>— four Android apps, the control dashboard and the backend are built and running against live data.  </a:t>
+            </a:r>
+            <a:r>
+              <a:rPr sz="1100" b="1">
+                <a:solidFill>
+                  <a:srgbClr val="1F497D"/>
+                </a:solidFill>
+                <a:latin typeface="Arial"/>
+              </a:rPr>
+              <a:t>Trust rule:  </a:t>
+            </a:r>
+            <a:r>
+              <a:rPr sz="1100" b="0">
+                <a:solidFill>
+                  <a:srgbClr val="262B33"/>
+                </a:solidFill>
+                <a:latin typeface="Arial"/>
+              </a:rPr>
+              <a:t>a status needs at least 4 samples from at least 2 distinct vehicles, and a driver's report is capped at RESTRICTED until an officer confirms it, so one parked vehicle can never close a highway.</a:t>
             </a:r>
           </a:p>
         </p:txBody>
@@ -9396,7 +10327,7 @@
         <p:spPr>
           <a:xfrm>
             <a:off x="411480" y="1143000"/>
-            <a:ext cx="4709160" cy="219456"/>
+            <a:ext cx="4343400" cy="237744"/>
           </a:xfrm>
           <a:prstGeom prst="rect">
             <a:avLst/>
@@ -9423,25 +10354,69 @@
             <a:r>
               <a:rPr sz="1000" b="1" i="0">
                 <a:solidFill>
-                  <a:srgbClr val="1F497D"/>
-                </a:solidFill>
-                <a:latin typeface="Arial"/>
-              </a:rPr>
-              <a:t>FEASIBLE BECAUSE IT IS ALREADY BUILT AND MEASURED</a:t>
-            </a:r>
-          </a:p>
-        </p:txBody>
-      </p:sp>
-      <p:sp>
-        <p:nvSpPr>
-          <p:cNvPr id="17411" name="Rounded Rectangle 17410"/>
+                  <a:srgbClr val="0070C0"/>
+                </a:solidFill>
+                <a:latin typeface="Arial"/>
+              </a:rPr>
+              <a:t>ANALYSIS OF THE FEASIBILITY OF THE IDEA</a:t>
+            </a:r>
+          </a:p>
+        </p:txBody>
+      </p:sp>
+      <p:sp>
+        <p:nvSpPr>
+          <p:cNvPr id="17411" name="Rectangle 17410"/>
           <p:cNvSpPr/>
           <p:nvPr/>
         </p:nvSpPr>
         <p:spPr>
           <a:xfrm>
-            <a:off x="411480" y="1417320"/>
-            <a:ext cx="4709160" cy="2697480"/>
+            <a:off x="411480" y="1330452"/>
+            <a:ext cx="4343400" cy="12801"/>
+          </a:xfrm>
+          <a:prstGeom prst="rect">
+            <a:avLst/>
+          </a:prstGeom>
+          <a:solidFill>
+            <a:srgbClr val="C9D6E4"/>
+          </a:solidFill>
+          <a:ln>
+            <a:noFill/>
+          </a:ln>
+          <a:effectLst/>
+        </p:spPr>
+        <p:style>
+          <a:lnRef idx="1">
+            <a:schemeClr val="accent1"/>
+          </a:lnRef>
+          <a:fillRef idx="3">
+            <a:schemeClr val="accent1"/>
+          </a:fillRef>
+          <a:effectRef idx="2">
+            <a:schemeClr val="accent1"/>
+          </a:effectRef>
+          <a:fontRef idx="minor">
+            <a:schemeClr val="lt1"/>
+          </a:fontRef>
+        </p:style>
+        <p:txBody>
+          <a:bodyPr rtlCol="0" anchor="ctr"/>
+          <a:lstStyle/>
+          <a:p>
+            <a:pPr algn="ctr"/>
+          </a:p>
+        </p:txBody>
+      </p:sp>
+      <p:sp>
+        <p:nvSpPr>
+          <p:cNvPr id="17412" name="Rounded Rectangle 17411"/>
+          <p:cNvSpPr/>
+          <p:nvPr/>
+        </p:nvSpPr>
+        <p:spPr>
+          <a:xfrm>
+            <a:off x="411480" y="1435608"/>
+            <a:ext cx="4343400" cy="2468880"/>
           </a:xfrm>
           <a:prstGeom prst="roundRect">
             <a:avLst>
@@ -9473,7 +10448,7 @@
           </a:fontRef>
         </p:style>
         <p:txBody>
-          <a:bodyPr rtlCol="0" anchor="t" wrap="square" lIns="118872" rIns="118872" tIns="64008" bIns="64008"/>
+          <a:bodyPr rtlCol="0" anchor="t" wrap="square" lIns="109728" rIns="109728" tIns="54864" bIns="54864"/>
           <a:lstStyle/>
           <a:p>
             <a:pPr algn="l">
@@ -9488,7 +10463,7 @@
               </a:spcAft>
             </a:pPr>
             <a:r>
-              <a:rPr sz="1150" b="1">
+              <a:rPr sz="1100" b="1">
                 <a:solidFill>
                   <a:srgbClr val="0070C0"/>
                 </a:solidFill>
@@ -9497,236 +10472,13 @@
               <a:t>42 stretches · 3,567 km  </a:t>
             </a:r>
             <a:r>
-              <a:rPr sz="1150" b="0">
+              <a:rPr sz="1100" b="0">
                 <a:solidFill>
                   <a:srgbClr val="262B33"/>
                 </a:solidFill>
                 <a:latin typeface="Arial"/>
               </a:rPr>
-              <a:t>real OSRM geometry across 12 corridors, 82 districts, 8 states</a:t>
-            </a:r>
-          </a:p>
-          <a:p>
-            <a:pPr algn="l">
-              <a:lnSpc>
-                <a:spcPct val="100000"/>
-              </a:lnSpc>
-              <a:spcBef>
-                <a:spcPts val="1300"/>
-              </a:spcBef>
-              <a:spcAft>
-                <a:spcPts val="0"/>
-              </a:spcAft>
-            </a:pPr>
-            <a:r>
-              <a:rPr sz="1150" b="1">
-                <a:solidFill>
-                  <a:srgbClr val="0070C0"/>
-                </a:solidFill>
-                <a:latin typeface="Arial"/>
-              </a:rPr>
-              <a:t>4 Android apps + dashboard  </a:t>
-            </a:r>
-            <a:r>
-              <a:rPr sz="1150" b="0">
-                <a:solidFill>
-                  <a:srgbClr val="262B33"/>
-                </a:solidFill>
-                <a:latin typeface="Arial"/>
-              </a:rPr>
-              <a:t>customer, merchant, driver, officer, control room</a:t>
-            </a:r>
-          </a:p>
-          <a:p>
-            <a:pPr algn="l">
-              <a:lnSpc>
-                <a:spcPct val="100000"/>
-              </a:lnSpc>
-              <a:spcBef>
-                <a:spcPts val="1300"/>
-              </a:spcBef>
-              <a:spcAft>
-                <a:spcPts val="0"/>
-              </a:spcAft>
-            </a:pPr>
-            <a:r>
-              <a:rPr sz="1150" b="1">
-                <a:solidFill>
-                  <a:srgbClr val="0070C0"/>
-                </a:solidFill>
-                <a:latin typeface="Arial"/>
-              </a:rPr>
-              <a:t>195 / 195  </a:t>
-            </a:r>
-            <a:r>
-              <a:rPr sz="1150" b="0">
-                <a:solidFill>
-                  <a:srgbClr val="262B33"/>
-                </a:solidFill>
-                <a:latin typeface="Arial"/>
-              </a:rPr>
-              <a:t>backend tests passing across 10 suites</a:t>
-            </a:r>
-          </a:p>
-          <a:p>
-            <a:pPr algn="l">
-              <a:lnSpc>
-                <a:spcPct val="100000"/>
-              </a:lnSpc>
-              <a:spcBef>
-                <a:spcPts val="1300"/>
-              </a:spcBef>
-              <a:spcAft>
-                <a:spcPts val="0"/>
-              </a:spcAft>
-            </a:pPr>
-            <a:r>
-              <a:rPr sz="1150" b="1">
-                <a:solidFill>
-                  <a:srgbClr val="0070C0"/>
-                </a:solidFill>
-                <a:latin typeface="Arial"/>
-              </a:rPr>
-              <a:t>10 languages · 8,424 units  </a:t>
-            </a:r>
-            <a:r>
-              <a:rPr sz="1150" b="0">
-                <a:solidFill>
-                  <a:srgbClr val="262B33"/>
-                </a:solidFill>
-                <a:latin typeface="Arial"/>
-              </a:rPr>
-              <a:t>every screen, zero English fallbacks</a:t>
-            </a:r>
-          </a:p>
-          <a:p>
-            <a:pPr algn="l">
-              <a:lnSpc>
-                <a:spcPct val="100000"/>
-              </a:lnSpc>
-              <a:spcBef>
-                <a:spcPts val="1300"/>
-              </a:spcBef>
-              <a:spcAft>
-                <a:spcPts val="0"/>
-              </a:spcAft>
-            </a:pPr>
-            <a:r>
-              <a:rPr sz="1150" b="1">
-                <a:solidFill>
-                  <a:srgbClr val="0070C0"/>
-                </a:solidFill>
-                <a:latin typeface="Arial"/>
-              </a:rPr>
-              <a:t>100 % coverage  </a:t>
-            </a:r>
-            <a:r>
-              <a:rPr sz="1150" b="0">
-                <a:solidFill>
-                  <a:srgbClr val="262B33"/>
-                </a:solidFill>
-                <a:latin typeface="Arial"/>
-              </a:rPr>
-              <a:t>status known, live vehicle data and forecast on every road</a:t>
-            </a:r>
-          </a:p>
-        </p:txBody>
-      </p:sp>
-      <p:sp>
-        <p:nvSpPr>
-          <p:cNvPr id="17412" name="TextBox 17411"/>
-          <p:cNvSpPr txBox="1"/>
-          <p:nvPr/>
-        </p:nvSpPr>
-        <p:spPr>
-          <a:xfrm>
-            <a:off x="411480" y="4270248"/>
-            <a:ext cx="4709160" cy="219456"/>
-          </a:xfrm>
-          <a:prstGeom prst="rect">
-            <a:avLst/>
-          </a:prstGeom>
-          <a:noFill/>
-        </p:spPr>
-        <p:txBody>
-          <a:bodyPr wrap="square" lIns="0" rIns="0" tIns="0" bIns="0">
-            <a:spAutoFit/>
-          </a:bodyPr>
-          <a:lstStyle/>
-          <a:p>
-            <a:pPr algn="l">
-              <a:lnSpc>
-                <a:spcPct val="100000"/>
-              </a:lnSpc>
-              <a:spcBef>
-                <a:spcPts val="0"/>
-              </a:spcBef>
-              <a:spcAft>
-                <a:spcPts val="0"/>
-              </a:spcAft>
-            </a:pPr>
-            <a:r>
-              <a:rPr sz="1000" b="1" i="0">
-                <a:solidFill>
-                  <a:srgbClr val="1F497D"/>
-                </a:solidFill>
-                <a:latin typeface="Arial"/>
-              </a:rPr>
-              <a:t>SCALING COSTS ALMOST NOTHING</a:t>
-            </a:r>
-          </a:p>
-        </p:txBody>
-      </p:sp>
-      <p:sp>
-        <p:nvSpPr>
-          <p:cNvPr id="17413" name="TextBox 17412"/>
-          <p:cNvSpPr txBox="1"/>
-          <p:nvPr/>
-        </p:nvSpPr>
-        <p:spPr>
-          <a:xfrm>
-            <a:off x="411480" y="4544568"/>
-            <a:ext cx="4709160" cy="1188720"/>
-          </a:xfrm>
-          <a:prstGeom prst="rect">
-            <a:avLst/>
-          </a:prstGeom>
-          <a:noFill/>
-        </p:spPr>
-        <p:txBody>
-          <a:bodyPr wrap="square" lIns="0" rIns="0" tIns="0" bIns="0">
-            <a:spAutoFit/>
-          </a:bodyPr>
-          <a:lstStyle/>
-          <a:p>
-            <a:pPr algn="l">
-              <a:lnSpc>
-                <a:spcPct val="100000"/>
-              </a:lnSpc>
-              <a:spcBef>
-                <a:spcPts val="0"/>
-              </a:spcBef>
-              <a:spcAft>
-                <a:spcPts val="0"/>
-              </a:spcAft>
-            </a:pPr>
-            <a:r>
-              <a:rPr sz="1150" b="1">
-                <a:solidFill>
-                  <a:srgbClr val="4F81BD"/>
-                </a:solidFill>
-                <a:latin typeface="Arial"/>
-              </a:rPr>
-              <a:t>•  </a:t>
-            </a:r>
-            <a:r>
-              <a:rPr sz="1150" b="0">
-                <a:solidFill>
-                  <a:srgbClr val="262B33"/>
-                </a:solidFill>
-                <a:latin typeface="Arial"/>
-              </a:rPr>
-              <a:t>No hardware to install, maintain or power.</a:t>
+              <a:t>real OSRM geometry, 12 corridors, 82 districts, 8 states</a:t>
             </a:r>
           </a:p>
           <a:p>
@@ -9742,22 +10494,22 @@
               </a:spcAft>
             </a:pPr>
             <a:r>
-              <a:rPr sz="1150" b="1">
-                <a:solidFill>
-                  <a:srgbClr val="4F81BD"/>
-                </a:solidFill>
-                <a:latin typeface="Arial"/>
-              </a:rPr>
-              <a:t>•  </a:t>
-            </a:r>
-            <a:r>
-              <a:rPr sz="1150" b="0">
+              <a:rPr sz="1100" b="1">
+                <a:solidFill>
+                  <a:srgbClr val="0070C0"/>
+                </a:solidFill>
+                <a:latin typeface="Arial"/>
+              </a:rPr>
+              <a:t>4 Android apps + dashboard  </a:t>
+            </a:r>
+            <a:r>
+              <a:rPr sz="1100" b="0">
                 <a:solidFill>
                   <a:srgbClr val="262B33"/>
                 </a:solidFill>
                 <a:latin typeface="Arial"/>
               </a:rPr>
-              <a:t>A new district needs its road geometry seeded — hours, not procurement.</a:t>
+              <a:t>customer, merchant, driver, officer, control room</a:t>
             </a:r>
           </a:p>
           <a:p>
@@ -9773,81 +10525,468 @@
               </a:spcAft>
             </a:pPr>
             <a:r>
-              <a:rPr sz="1150" b="1">
-                <a:solidFill>
-                  <a:srgbClr val="4F81BD"/>
-                </a:solidFill>
-                <a:latin typeface="Arial"/>
-              </a:rPr>
-              <a:t>•  </a:t>
-            </a:r>
-            <a:r>
-              <a:rPr sz="1150" b="0">
+              <a:rPr sz="1100" b="1">
+                <a:solidFill>
+                  <a:srgbClr val="0070C0"/>
+                </a:solidFill>
+                <a:latin typeface="Arial"/>
+              </a:rPr>
+              <a:t>195 / 195  </a:t>
+            </a:r>
+            <a:r>
+              <a:rPr sz="1100" b="0">
                 <a:solidFill>
                   <a:srgbClr val="262B33"/>
                 </a:solidFill>
                 <a:latin typeface="Arial"/>
               </a:rPr>
-              <a:t>Sensing density rises with adoption, at no extra cost.</a:t>
-            </a:r>
-          </a:p>
-        </p:txBody>
-      </p:sp>
-      <p:sp>
-        <p:nvSpPr>
-          <p:cNvPr id="17414" name="TextBox 17413"/>
-          <p:cNvSpPr txBox="1"/>
-          <p:nvPr/>
-        </p:nvSpPr>
-        <p:spPr>
-          <a:xfrm>
-            <a:off x="5394960" y="1143000"/>
-            <a:ext cx="6382512" cy="219456"/>
-          </a:xfrm>
-          <a:prstGeom prst="rect">
-            <a:avLst/>
-          </a:prstGeom>
-          <a:noFill/>
-        </p:spPr>
-        <p:txBody>
-          <a:bodyPr wrap="square" lIns="0" rIns="0" tIns="0" bIns="0">
-            <a:spAutoFit/>
-          </a:bodyPr>
-          <a:lstStyle/>
+              <a:t>backend tests passing across 10 suites</a:t>
+            </a:r>
+          </a:p>
           <a:p>
             <a:pPr algn="l">
               <a:lnSpc>
                 <a:spcPct val="100000"/>
               </a:lnSpc>
               <a:spcBef>
-                <a:spcPts val="0"/>
+                <a:spcPts val="1100"/>
               </a:spcBef>
               <a:spcAft>
                 <a:spcPts val="0"/>
               </a:spcAft>
             </a:pPr>
             <a:r>
+              <a:rPr sz="1100" b="1">
+                <a:solidFill>
+                  <a:srgbClr val="0070C0"/>
+                </a:solidFill>
+                <a:latin typeface="Arial"/>
+              </a:rPr>
+              <a:t>10 languages · 8,424 units  </a:t>
+            </a:r>
+            <a:r>
+              <a:rPr sz="1100" b="0">
+                <a:solidFill>
+                  <a:srgbClr val="262B33"/>
+                </a:solidFill>
+                <a:latin typeface="Arial"/>
+              </a:rPr>
+              <a:t>every screen, zero English fallbacks</a:t>
+            </a:r>
+          </a:p>
+          <a:p>
+            <a:pPr algn="l">
+              <a:lnSpc>
+                <a:spcPct val="100000"/>
+              </a:lnSpc>
+              <a:spcBef>
+                <a:spcPts val="1100"/>
+              </a:spcBef>
+              <a:spcAft>
+                <a:spcPts val="0"/>
+              </a:spcAft>
+            </a:pPr>
+            <a:r>
+              <a:rPr sz="1100" b="1">
+                <a:solidFill>
+                  <a:srgbClr val="0070C0"/>
+                </a:solidFill>
+                <a:latin typeface="Arial"/>
+              </a:rPr>
+              <a:t>100 % coverage  </a:t>
+            </a:r>
+            <a:r>
+              <a:rPr sz="1100" b="0">
+                <a:solidFill>
+                  <a:srgbClr val="262B33"/>
+                </a:solidFill>
+                <a:latin typeface="Arial"/>
+              </a:rPr>
+              <a:t>status, live vehicle data and forecast on every road</a:t>
+            </a:r>
+          </a:p>
+        </p:txBody>
+      </p:sp>
+      <p:sp>
+        <p:nvSpPr>
+          <p:cNvPr id="17413" name="TextBox 17412"/>
+          <p:cNvSpPr txBox="1"/>
+          <p:nvPr/>
+        </p:nvSpPr>
+        <p:spPr>
+          <a:xfrm>
+            <a:off x="411480" y="4032504"/>
+            <a:ext cx="4343400" cy="219456"/>
+          </a:xfrm>
+          <a:prstGeom prst="rect">
+            <a:avLst/>
+          </a:prstGeom>
+          <a:noFill/>
+        </p:spPr>
+        <p:txBody>
+          <a:bodyPr wrap="square" lIns="0" rIns="0" tIns="0" bIns="0">
+            <a:spAutoFit/>
+          </a:bodyPr>
+          <a:lstStyle/>
+          <a:p>
+            <a:pPr algn="l">
+              <a:lnSpc>
+                <a:spcPct val="100000"/>
+              </a:lnSpc>
+              <a:spcBef>
+                <a:spcPts val="0"/>
+              </a:spcBef>
+              <a:spcAft>
+                <a:spcPts val="0"/>
+              </a:spcAft>
+            </a:pPr>
+            <a:r>
+              <a:rPr sz="900" b="1" i="0">
+                <a:solidFill>
+                  <a:srgbClr val="1F497D"/>
+                </a:solidFill>
+                <a:latin typeface="Arial"/>
+              </a:rPr>
+              <a:t>VIABLE BECAUSE SCALING COSTS ALMOST NOTHING</a:t>
+            </a:r>
+          </a:p>
+        </p:txBody>
+      </p:sp>
+      <p:sp>
+        <p:nvSpPr>
+          <p:cNvPr id="17414" name="TextBox 17413"/>
+          <p:cNvSpPr txBox="1"/>
+          <p:nvPr/>
+        </p:nvSpPr>
+        <p:spPr>
+          <a:xfrm>
+            <a:off x="411480" y="4270248"/>
+            <a:ext cx="4343400" cy="1463040"/>
+          </a:xfrm>
+          <a:prstGeom prst="rect">
+            <a:avLst/>
+          </a:prstGeom>
+          <a:noFill/>
+        </p:spPr>
+        <p:txBody>
+          <a:bodyPr wrap="square" lIns="0" rIns="0" tIns="0" bIns="0">
+            <a:spAutoFit/>
+          </a:bodyPr>
+          <a:lstStyle/>
+          <a:p>
+            <a:pPr algn="l">
+              <a:lnSpc>
+                <a:spcPct val="100000"/>
+              </a:lnSpc>
+              <a:spcBef>
+                <a:spcPts val="0"/>
+              </a:spcBef>
+              <a:spcAft>
+                <a:spcPts val="0"/>
+              </a:spcAft>
+            </a:pPr>
+            <a:r>
+              <a:rPr sz="1100" b="1">
+                <a:solidFill>
+                  <a:srgbClr val="4F81BD"/>
+                </a:solidFill>
+                <a:latin typeface="Arial"/>
+              </a:rPr>
+              <a:t>•  </a:t>
+            </a:r>
+            <a:r>
+              <a:rPr sz="1100" b="0">
+                <a:solidFill>
+                  <a:srgbClr val="262B33"/>
+                </a:solidFill>
+                <a:latin typeface="Arial"/>
+              </a:rPr>
+              <a:t>No hardware to buy, install, power or maintain.</a:t>
+            </a:r>
+          </a:p>
+          <a:p>
+            <a:pPr algn="l">
+              <a:lnSpc>
+                <a:spcPct val="100000"/>
+              </a:lnSpc>
+              <a:spcBef>
+                <a:spcPts val="900"/>
+              </a:spcBef>
+              <a:spcAft>
+                <a:spcPts val="0"/>
+              </a:spcAft>
+            </a:pPr>
+            <a:r>
+              <a:rPr sz="1100" b="1">
+                <a:solidFill>
+                  <a:srgbClr val="4F81BD"/>
+                </a:solidFill>
+                <a:latin typeface="Arial"/>
+              </a:rPr>
+              <a:t>•  </a:t>
+            </a:r>
+            <a:r>
+              <a:rPr sz="1100" b="0">
+                <a:solidFill>
+                  <a:srgbClr val="262B33"/>
+                </a:solidFill>
+                <a:latin typeface="Arial"/>
+              </a:rPr>
+              <a:t>A new district needs its road geometry seeded — hours, not procurement.</a:t>
+            </a:r>
+          </a:p>
+          <a:p>
+            <a:pPr algn="l">
+              <a:lnSpc>
+                <a:spcPct val="100000"/>
+              </a:lnSpc>
+              <a:spcBef>
+                <a:spcPts val="900"/>
+              </a:spcBef>
+              <a:spcAft>
+                <a:spcPts val="0"/>
+              </a:spcAft>
+            </a:pPr>
+            <a:r>
+              <a:rPr sz="1100" b="1">
+                <a:solidFill>
+                  <a:srgbClr val="4F81BD"/>
+                </a:solidFill>
+                <a:latin typeface="Arial"/>
+              </a:rPr>
+              <a:t>•  </a:t>
+            </a:r>
+            <a:r>
+              <a:rPr sz="1100" b="0">
+                <a:solidFill>
+                  <a:srgbClr val="262B33"/>
+                </a:solidFill>
+                <a:latin typeface="Arial"/>
+              </a:rPr>
+              <a:t>Sensing density rises with adoption, at no extra cost per reading.</a:t>
+            </a:r>
+          </a:p>
+          <a:p>
+            <a:pPr algn="l">
+              <a:lnSpc>
+                <a:spcPct val="100000"/>
+              </a:lnSpc>
+              <a:spcBef>
+                <a:spcPts val="900"/>
+              </a:spcBef>
+              <a:spcAft>
+                <a:spcPts val="0"/>
+              </a:spcAft>
+            </a:pPr>
+            <a:r>
+              <a:rPr sz="1100" b="1">
+                <a:solidFill>
+                  <a:srgbClr val="4F81BD"/>
+                </a:solidFill>
+                <a:latin typeface="Arial"/>
+              </a:rPr>
+              <a:t>•  </a:t>
+            </a:r>
+            <a:r>
+              <a:rPr sz="1100" b="0">
+                <a:solidFill>
+                  <a:srgbClr val="262B33"/>
+                </a:solidFill>
+                <a:latin typeface="Arial"/>
+              </a:rPr>
+              <a:t>Runs on managed cloud services already in use.</a:t>
+            </a:r>
+          </a:p>
+        </p:txBody>
+      </p:sp>
+      <p:sp>
+        <p:nvSpPr>
+          <p:cNvPr id="17415" name="TextBox 17414"/>
+          <p:cNvSpPr txBox="1"/>
+          <p:nvPr/>
+        </p:nvSpPr>
+        <p:spPr>
+          <a:xfrm>
+            <a:off x="5047488" y="1143000"/>
+            <a:ext cx="2487168" cy="237744"/>
+          </a:xfrm>
+          <a:prstGeom prst="rect">
+            <a:avLst/>
+          </a:prstGeom>
+          <a:noFill/>
+        </p:spPr>
+        <p:txBody>
+          <a:bodyPr wrap="square" lIns="0" rIns="0" tIns="0" bIns="0">
+            <a:spAutoFit/>
+          </a:bodyPr>
+          <a:lstStyle/>
+          <a:p>
+            <a:pPr algn="l">
+              <a:lnSpc>
+                <a:spcPct val="100000"/>
+              </a:lnSpc>
+              <a:spcBef>
+                <a:spcPts val="0"/>
+              </a:spcBef>
+              <a:spcAft>
+                <a:spcPts val="0"/>
+              </a:spcAft>
+            </a:pPr>
+            <a:r>
               <a:rPr sz="1000" b="1" i="0">
                 <a:solidFill>
-                  <a:srgbClr val="1F497D"/>
-                </a:solidFill>
-                <a:latin typeface="Arial"/>
-              </a:rPr>
-              <a:t>RISKS, AND WHAT ANSWERS EACH ONE</a:t>
-            </a:r>
-          </a:p>
-        </p:txBody>
-      </p:sp>
-      <p:sp>
-        <p:nvSpPr>
-          <p:cNvPr id="17415" name="Rounded Rectangle 17414"/>
+                  <a:srgbClr val="0070C0"/>
+                </a:solidFill>
+                <a:latin typeface="Arial"/>
+              </a:rPr>
+              <a:t>POTENTIAL CHALLENGES AND RISKS</a:t>
+            </a:r>
+          </a:p>
+        </p:txBody>
+      </p:sp>
+      <p:sp>
+        <p:nvSpPr>
+          <p:cNvPr id="17416" name="Rectangle 17415"/>
           <p:cNvSpPr/>
           <p:nvPr/>
         </p:nvSpPr>
         <p:spPr>
           <a:xfrm>
-            <a:off x="5394960" y="1435608"/>
-            <a:ext cx="6382512" cy="786384"/>
+            <a:off x="5047488" y="1330452"/>
+            <a:ext cx="2487168" cy="12801"/>
+          </a:xfrm>
+          <a:prstGeom prst="rect">
+            <a:avLst/>
+          </a:prstGeom>
+          <a:solidFill>
+            <a:srgbClr val="C9D6E4"/>
+          </a:solidFill>
+          <a:ln>
+            <a:noFill/>
+          </a:ln>
+          <a:effectLst/>
+        </p:spPr>
+        <p:style>
+          <a:lnRef idx="1">
+            <a:schemeClr val="accent1"/>
+          </a:lnRef>
+          <a:fillRef idx="3">
+            <a:schemeClr val="accent1"/>
+          </a:fillRef>
+          <a:effectRef idx="2">
+            <a:schemeClr val="accent1"/>
+          </a:effectRef>
+          <a:fontRef idx="minor">
+            <a:schemeClr val="lt1"/>
+          </a:fontRef>
+        </p:style>
+        <p:txBody>
+          <a:bodyPr rtlCol="0" anchor="ctr"/>
+          <a:lstStyle/>
+          <a:p>
+            <a:pPr algn="ctr"/>
+          </a:p>
+        </p:txBody>
+      </p:sp>
+      <p:sp>
+        <p:nvSpPr>
+          <p:cNvPr id="17417" name="TextBox 17416"/>
+          <p:cNvSpPr txBox="1"/>
+          <p:nvPr/>
+        </p:nvSpPr>
+        <p:spPr>
+          <a:xfrm>
+            <a:off x="7662672" y="1143000"/>
+            <a:ext cx="4114800" cy="237744"/>
+          </a:xfrm>
+          <a:prstGeom prst="rect">
+            <a:avLst/>
+          </a:prstGeom>
+          <a:noFill/>
+        </p:spPr>
+        <p:txBody>
+          <a:bodyPr wrap="square" lIns="0" rIns="0" tIns="0" bIns="0">
+            <a:spAutoFit/>
+          </a:bodyPr>
+          <a:lstStyle/>
+          <a:p>
+            <a:pPr algn="l">
+              <a:lnSpc>
+                <a:spcPct val="100000"/>
+              </a:lnSpc>
+              <a:spcBef>
+                <a:spcPts val="0"/>
+              </a:spcBef>
+              <a:spcAft>
+                <a:spcPts val="0"/>
+              </a:spcAft>
+            </a:pPr>
+            <a:r>
+              <a:rPr sz="1000" b="1" i="0">
+                <a:solidFill>
+                  <a:srgbClr val="0070C0"/>
+                </a:solidFill>
+                <a:latin typeface="Arial"/>
+              </a:rPr>
+              <a:t>STRATEGIES FOR OVERCOMING THESE CHALLENGES</a:t>
+            </a:r>
+          </a:p>
+        </p:txBody>
+      </p:sp>
+      <p:sp>
+        <p:nvSpPr>
+          <p:cNvPr id="17418" name="Rectangle 17417"/>
+          <p:cNvSpPr/>
+          <p:nvPr/>
+        </p:nvSpPr>
+        <p:spPr>
+          <a:xfrm>
+            <a:off x="7662672" y="1330452"/>
+            <a:ext cx="4114800" cy="12801"/>
+          </a:xfrm>
+          <a:prstGeom prst="rect">
+            <a:avLst/>
+          </a:prstGeom>
+          <a:solidFill>
+            <a:srgbClr val="C9D6E4"/>
+          </a:solidFill>
+          <a:ln>
+            <a:noFill/>
+          </a:ln>
+          <a:effectLst/>
+        </p:spPr>
+        <p:style>
+          <a:lnRef idx="1">
+            <a:schemeClr val="accent1"/>
+          </a:lnRef>
+          <a:fillRef idx="3">
+            <a:schemeClr val="accent1"/>
+          </a:fillRef>
+          <a:effectRef idx="2">
+            <a:schemeClr val="accent1"/>
+          </a:effectRef>
+          <a:fontRef idx="minor">
+            <a:schemeClr val="lt1"/>
+          </a:fontRef>
+        </p:style>
+        <p:txBody>
+          <a:bodyPr rtlCol="0" anchor="ctr"/>
+          <a:lstStyle/>
+          <a:p>
+            <a:pPr algn="ctr"/>
+          </a:p>
+        </p:txBody>
+      </p:sp>
+      <p:sp>
+        <p:nvSpPr>
+          <p:cNvPr id="17419" name="Rounded Rectangle 17418"/>
+          <p:cNvSpPr/>
+          <p:nvPr/>
+        </p:nvSpPr>
+        <p:spPr>
+          <a:xfrm>
+            <a:off x="5047488" y="1435608"/>
+            <a:ext cx="2487168" cy="786384"/>
           </a:xfrm>
           <a:prstGeom prst="roundRect">
             <a:avLst>
@@ -9879,12 +11018,12 @@
           </a:fontRef>
         </p:style>
         <p:txBody>
-          <a:bodyPr rtlCol="0" anchor="t" wrap="square" lIns="118872" rIns="118872" tIns="64008" bIns="64008"/>
+          <a:bodyPr rtlCol="0" anchor="ctr" wrap="square" lIns="109728" rIns="109728" tIns="54864" bIns="54864"/>
           <a:lstStyle/>
           <a:p>
             <a:pPr algn="l">
               <a:lnSpc>
-                <a:spcPct val="95000"/>
+                <a:spcPct val="98000"/>
               </a:lnSpc>
               <a:spcBef>
                 <a:spcPts val="0"/>
@@ -9894,7 +11033,7 @@
               </a:spcAft>
             </a:pPr>
             <a:r>
-              <a:rPr sz="1100" b="1" i="0">
+              <a:rPr sz="1050" b="1" i="0">
                 <a:solidFill>
                   <a:srgbClr val="C25E1E"/>
                 </a:solidFill>
@@ -9903,13 +11042,58 @@
               <a:t>No public register of past road closures</a:t>
             </a:r>
           </a:p>
+        </p:txBody>
+      </p:sp>
+      <p:sp>
+        <p:nvSpPr>
+          <p:cNvPr id="17420" name="Rounded Rectangle 17419"/>
+          <p:cNvSpPr/>
+          <p:nvPr/>
+        </p:nvSpPr>
+        <p:spPr>
+          <a:xfrm>
+            <a:off x="7662672" y="1435608"/>
+            <a:ext cx="4114800" cy="786384"/>
+          </a:xfrm>
+          <a:prstGeom prst="roundRect">
+            <a:avLst>
+              <a:gd name="adj" fmla="val 8000"/>
+            </a:avLst>
+          </a:prstGeom>
+          <a:solidFill>
+            <a:srgbClr val="FFFFFF"/>
+          </a:solidFill>
+          <a:ln w="9525">
+            <a:solidFill>
+              <a:srgbClr val="C9D6E4"/>
+            </a:solidFill>
+          </a:ln>
+          <a:effectLst/>
+        </p:spPr>
+        <p:style>
+          <a:lnRef idx="1">
+            <a:schemeClr val="accent1"/>
+          </a:lnRef>
+          <a:fillRef idx="3">
+            <a:schemeClr val="accent1"/>
+          </a:fillRef>
+          <a:effectRef idx="2">
+            <a:schemeClr val="accent1"/>
+          </a:effectRef>
+          <a:fontRef idx="minor">
+            <a:schemeClr val="lt1"/>
+          </a:fontRef>
+        </p:style>
+        <p:txBody>
+          <a:bodyPr rtlCol="0" anchor="ctr" wrap="square" lIns="109728" rIns="109728" tIns="54864" bIns="54864"/>
+          <a:lstStyle/>
           <a:p>
             <a:pPr algn="l">
               <a:lnSpc>
-                <a:spcPct val="95000"/>
+                <a:spcPct val="100000"/>
               </a:lnSpc>
               <a:spcBef>
-                <a:spcPts val="200"/>
+                <a:spcPts val="0"/>
               </a:spcBef>
               <a:spcAft>
                 <a:spcPts val="0"/>
@@ -9922,21 +11106,65 @@
                 </a:solidFill>
                 <a:latin typeface="Arial"/>
               </a:rPr>
-              <a:t>Labels drawn from a rainfall-threshold hazard function; verified field reports override them. Stated openly on the dashboard.</a:t>
-            </a:r>
-          </a:p>
-        </p:txBody>
-      </p:sp>
-      <p:sp>
-        <p:nvSpPr>
-          <p:cNvPr id="17416" name="Rounded Rectangle 17415"/>
+              <a:t>Labels drawn from a rainfall-threshold hazard function; verified field reports override them, and the dashboard states this openly.</a:t>
+            </a:r>
+          </a:p>
+        </p:txBody>
+      </p:sp>
+      <p:sp>
+        <p:nvSpPr>
+          <p:cNvPr id="17421" name="Right Arrow 17420"/>
           <p:cNvSpPr/>
           <p:nvPr/>
         </p:nvSpPr>
         <p:spPr>
           <a:xfrm>
-            <a:off x="5394960" y="2322576"/>
-            <a:ext cx="6382512" cy="786384"/>
+            <a:off x="7557516" y="1787652"/>
+            <a:ext cx="82296" cy="82296"/>
+          </a:xfrm>
+          <a:prstGeom prst="rightArrow">
+            <a:avLst/>
+          </a:prstGeom>
+          <a:solidFill>
+            <a:srgbClr val="4F81BD"/>
+          </a:solidFill>
+          <a:ln>
+            <a:noFill/>
+          </a:ln>
+          <a:effectLst/>
+        </p:spPr>
+        <p:style>
+          <a:lnRef idx="1">
+            <a:schemeClr val="accent1"/>
+          </a:lnRef>
+          <a:fillRef idx="3">
+            <a:schemeClr val="accent1"/>
+          </a:fillRef>
+          <a:effectRef idx="2">
+            <a:schemeClr val="accent1"/>
+          </a:effectRef>
+          <a:fontRef idx="minor">
+            <a:schemeClr val="lt1"/>
+          </a:fontRef>
+        </p:style>
+        <p:txBody>
+          <a:bodyPr rtlCol="0" anchor="ctr"/>
+          <a:lstStyle/>
+          <a:p>
+            <a:pPr algn="ctr"/>
+          </a:p>
+        </p:txBody>
+      </p:sp>
+      <p:sp>
+        <p:nvSpPr>
+          <p:cNvPr id="17422" name="Rounded Rectangle 17421"/>
+          <p:cNvSpPr/>
+          <p:nvPr/>
+        </p:nvSpPr>
+        <p:spPr>
+          <a:xfrm>
+            <a:off x="5047488" y="2304288"/>
+            <a:ext cx="2487168" cy="786384"/>
           </a:xfrm>
           <a:prstGeom prst="roundRect">
             <a:avLst>
@@ -9968,12 +11196,12 @@
           </a:fontRef>
         </p:style>
         <p:txBody>
-          <a:bodyPr rtlCol="0" anchor="t" wrap="square" lIns="118872" rIns="118872" tIns="64008" bIns="64008"/>
+          <a:bodyPr rtlCol="0" anchor="ctr" wrap="square" lIns="109728" rIns="109728" tIns="54864" bIns="54864"/>
           <a:lstStyle/>
           <a:p>
             <a:pPr algn="l">
               <a:lnSpc>
-                <a:spcPct val="95000"/>
+                <a:spcPct val="98000"/>
               </a:lnSpc>
               <a:spcBef>
                 <a:spcPts val="0"/>
@@ -9983,7 +11211,7 @@
               </a:spcAft>
             </a:pPr>
             <a:r>
-              <a:rPr sz="1100" b="1" i="0">
+              <a:rPr sz="1050" b="1" i="0">
                 <a:solidFill>
                   <a:srgbClr val="C25E1E"/>
                 </a:solidFill>
@@ -9992,13 +11220,58 @@
               <a:t>One parked driver could read as a closure</a:t>
             </a:r>
           </a:p>
+        </p:txBody>
+      </p:sp>
+      <p:sp>
+        <p:nvSpPr>
+          <p:cNvPr id="17423" name="Rounded Rectangle 17422"/>
+          <p:cNvSpPr/>
+          <p:nvPr/>
+        </p:nvSpPr>
+        <p:spPr>
+          <a:xfrm>
+            <a:off x="7662672" y="2304288"/>
+            <a:ext cx="4114800" cy="786384"/>
+          </a:xfrm>
+          <a:prstGeom prst="roundRect">
+            <a:avLst>
+              <a:gd name="adj" fmla="val 8000"/>
+            </a:avLst>
+          </a:prstGeom>
+          <a:solidFill>
+            <a:srgbClr val="F2F5F9"/>
+          </a:solidFill>
+          <a:ln w="9525">
+            <a:solidFill>
+              <a:srgbClr val="C9D6E4"/>
+            </a:solidFill>
+          </a:ln>
+          <a:effectLst/>
+        </p:spPr>
+        <p:style>
+          <a:lnRef idx="1">
+            <a:schemeClr val="accent1"/>
+          </a:lnRef>
+          <a:fillRef idx="3">
+            <a:schemeClr val="accent1"/>
+          </a:fillRef>
+          <a:effectRef idx="2">
+            <a:schemeClr val="accent1"/>
+          </a:effectRef>
+          <a:fontRef idx="minor">
+            <a:schemeClr val="lt1"/>
+          </a:fontRef>
+        </p:style>
+        <p:txBody>
+          <a:bodyPr rtlCol="0" anchor="ctr" wrap="square" lIns="109728" rIns="109728" tIns="54864" bIns="54864"/>
+          <a:lstStyle/>
           <a:p>
             <a:pPr algn="l">
               <a:lnSpc>
-                <a:spcPct val="95000"/>
+                <a:spcPct val="100000"/>
               </a:lnSpc>
               <a:spcBef>
-                <a:spcPts val="200"/>
+                <a:spcPts val="0"/>
               </a:spcBef>
               <a:spcAft>
                 <a:spcPts val="0"/>
@@ -10011,21 +11284,65 @@
                 </a:solidFill>
                 <a:latin typeface="Arial"/>
               </a:rPr>
-              <a:t>A status needs ≥ 4 samples from ≥ 2 vehicles, else it is discarded.</a:t>
-            </a:r>
-          </a:p>
-        </p:txBody>
-      </p:sp>
-      <p:sp>
-        <p:nvSpPr>
-          <p:cNvPr id="17417" name="Rounded Rectangle 17416"/>
+              <a:t>A status needs ≥ 4 samples from ≥ 2 distinct vehicles, else the reading is discarded and the road keeps its previous status.</a:t>
+            </a:r>
+          </a:p>
+        </p:txBody>
+      </p:sp>
+      <p:sp>
+        <p:nvSpPr>
+          <p:cNvPr id="17424" name="Right Arrow 17423"/>
           <p:cNvSpPr/>
           <p:nvPr/>
         </p:nvSpPr>
         <p:spPr>
           <a:xfrm>
-            <a:off x="5394960" y="3209544"/>
-            <a:ext cx="6382512" cy="786384"/>
+            <a:off x="7557516" y="2656332"/>
+            <a:ext cx="82296" cy="82296"/>
+          </a:xfrm>
+          <a:prstGeom prst="rightArrow">
+            <a:avLst/>
+          </a:prstGeom>
+          <a:solidFill>
+            <a:srgbClr val="4F81BD"/>
+          </a:solidFill>
+          <a:ln>
+            <a:noFill/>
+          </a:ln>
+          <a:effectLst/>
+        </p:spPr>
+        <p:style>
+          <a:lnRef idx="1">
+            <a:schemeClr val="accent1"/>
+          </a:lnRef>
+          <a:fillRef idx="3">
+            <a:schemeClr val="accent1"/>
+          </a:fillRef>
+          <a:effectRef idx="2">
+            <a:schemeClr val="accent1"/>
+          </a:effectRef>
+          <a:fontRef idx="minor">
+            <a:schemeClr val="lt1"/>
+          </a:fontRef>
+        </p:style>
+        <p:txBody>
+          <a:bodyPr rtlCol="0" anchor="ctr"/>
+          <a:lstStyle/>
+          <a:p>
+            <a:pPr algn="ctr"/>
+          </a:p>
+        </p:txBody>
+      </p:sp>
+      <p:sp>
+        <p:nvSpPr>
+          <p:cNvPr id="17425" name="Rounded Rectangle 17424"/>
+          <p:cNvSpPr/>
+          <p:nvPr/>
+        </p:nvSpPr>
+        <p:spPr>
+          <a:xfrm>
+            <a:off x="5047488" y="3172968"/>
+            <a:ext cx="2487168" cy="786384"/>
           </a:xfrm>
           <a:prstGeom prst="roundRect">
             <a:avLst>
@@ -10057,12 +11374,12 @@
           </a:fontRef>
         </p:style>
         <p:txBody>
-          <a:bodyPr rtlCol="0" anchor="t" wrap="square" lIns="118872" rIns="118872" tIns="64008" bIns="64008"/>
+          <a:bodyPr rtlCol="0" anchor="ctr" wrap="square" lIns="109728" rIns="109728" tIns="54864" bIns="54864"/>
           <a:lstStyle/>
           <a:p>
             <a:pPr algn="l">
               <a:lnSpc>
-                <a:spcPct val="95000"/>
+                <a:spcPct val="98000"/>
               </a:lnSpc>
               <a:spcBef>
                 <a:spcPts val="0"/>
@@ -10072,7 +11389,7 @@
               </a:spcAft>
             </a:pPr>
             <a:r>
-              <a:rPr sz="1100" b="1" i="0">
+              <a:rPr sz="1050" b="1" i="0">
                 <a:solidFill>
                   <a:srgbClr val="C25E1E"/>
                 </a:solidFill>
@@ -10081,13 +11398,58 @@
               <a:t>Hill districts drop off the network</a:t>
             </a:r>
           </a:p>
+        </p:txBody>
+      </p:sp>
+      <p:sp>
+        <p:nvSpPr>
+          <p:cNvPr id="17426" name="Rounded Rectangle 17425"/>
+          <p:cNvSpPr/>
+          <p:nvPr/>
+        </p:nvSpPr>
+        <p:spPr>
+          <a:xfrm>
+            <a:off x="7662672" y="3172968"/>
+            <a:ext cx="4114800" cy="786384"/>
+          </a:xfrm>
+          <a:prstGeom prst="roundRect">
+            <a:avLst>
+              <a:gd name="adj" fmla="val 8000"/>
+            </a:avLst>
+          </a:prstGeom>
+          <a:solidFill>
+            <a:srgbClr val="FFFFFF"/>
+          </a:solidFill>
+          <a:ln w="9525">
+            <a:solidFill>
+              <a:srgbClr val="C9D6E4"/>
+            </a:solidFill>
+          </a:ln>
+          <a:effectLst/>
+        </p:spPr>
+        <p:style>
+          <a:lnRef idx="1">
+            <a:schemeClr val="accent1"/>
+          </a:lnRef>
+          <a:fillRef idx="3">
+            <a:schemeClr val="accent1"/>
+          </a:fillRef>
+          <a:effectRef idx="2">
+            <a:schemeClr val="accent1"/>
+          </a:effectRef>
+          <a:fontRef idx="minor">
+            <a:schemeClr val="lt1"/>
+          </a:fontRef>
+        </p:style>
+        <p:txBody>
+          <a:bodyPr rtlCol="0" anchor="ctr" wrap="square" lIns="109728" rIns="109728" tIns="54864" bIns="54864"/>
+          <a:lstStyle/>
           <a:p>
             <a:pPr algn="l">
               <a:lnSpc>
-                <a:spcPct val="95000"/>
+                <a:spcPct val="100000"/>
               </a:lnSpc>
               <a:spcBef>
-                <a:spcPts val="200"/>
+                <a:spcPts val="0"/>
               </a:spcBef>
               <a:spcAft>
                 <a:spcPts val="0"/>
@@ -10100,21 +11462,65 @@
                 </a:solidFill>
                 <a:latin typeface="Arial"/>
               </a:rPr>
-              <a:t>Reports queue on the phone with a client ID and sync later; duplicates are rejected, so nothing is filed twice.</a:t>
-            </a:r>
-          </a:p>
-        </p:txBody>
-      </p:sp>
-      <p:sp>
-        <p:nvSpPr>
-          <p:cNvPr id="17418" name="Rounded Rectangle 17417"/>
+              <a:t>Reports queue on the phone under a client ID and sync later; the server rejects duplicates, so nothing is filed twice.</a:t>
+            </a:r>
+          </a:p>
+        </p:txBody>
+      </p:sp>
+      <p:sp>
+        <p:nvSpPr>
+          <p:cNvPr id="17427" name="Right Arrow 17426"/>
           <p:cNvSpPr/>
           <p:nvPr/>
         </p:nvSpPr>
         <p:spPr>
           <a:xfrm>
-            <a:off x="5394960" y="4096511"/>
-            <a:ext cx="6382512" cy="786384"/>
+            <a:off x="7557516" y="3525012"/>
+            <a:ext cx="82296" cy="82296"/>
+          </a:xfrm>
+          <a:prstGeom prst="rightArrow">
+            <a:avLst/>
+          </a:prstGeom>
+          <a:solidFill>
+            <a:srgbClr val="4F81BD"/>
+          </a:solidFill>
+          <a:ln>
+            <a:noFill/>
+          </a:ln>
+          <a:effectLst/>
+        </p:spPr>
+        <p:style>
+          <a:lnRef idx="1">
+            <a:schemeClr val="accent1"/>
+          </a:lnRef>
+          <a:fillRef idx="3">
+            <a:schemeClr val="accent1"/>
+          </a:fillRef>
+          <a:effectRef idx="2">
+            <a:schemeClr val="accent1"/>
+          </a:effectRef>
+          <a:fontRef idx="minor">
+            <a:schemeClr val="lt1"/>
+          </a:fontRef>
+        </p:style>
+        <p:txBody>
+          <a:bodyPr rtlCol="0" anchor="ctr"/>
+          <a:lstStyle/>
+          <a:p>
+            <a:pPr algn="ctr"/>
+          </a:p>
+        </p:txBody>
+      </p:sp>
+      <p:sp>
+        <p:nvSpPr>
+          <p:cNvPr id="17428" name="Rounded Rectangle 17427"/>
+          <p:cNvSpPr/>
+          <p:nvPr/>
+        </p:nvSpPr>
+        <p:spPr>
+          <a:xfrm>
+            <a:off x="5047488" y="4041648"/>
+            <a:ext cx="2487168" cy="786384"/>
           </a:xfrm>
           <a:prstGeom prst="roundRect">
             <a:avLst>
@@ -10146,12 +11552,12 @@
           </a:fontRef>
         </p:style>
         <p:txBody>
-          <a:bodyPr rtlCol="0" anchor="t" wrap="square" lIns="118872" rIns="118872" tIns="64008" bIns="64008"/>
+          <a:bodyPr rtlCol="0" anchor="ctr" wrap="square" lIns="109728" rIns="109728" tIns="54864" bIns="54864"/>
           <a:lstStyle/>
           <a:p>
             <a:pPr algn="l">
               <a:lnSpc>
-                <a:spcPct val="95000"/>
+                <a:spcPct val="98000"/>
               </a:lnSpc>
               <a:spcBef>
                 <a:spcPts val="0"/>
@@ -10161,7 +11567,7 @@
               </a:spcAft>
             </a:pPr>
             <a:r>
-              <a:rPr sz="1100" b="1" i="0">
+              <a:rPr sz="1050" b="1" i="0">
                 <a:solidFill>
                   <a:srgbClr val="C25E1E"/>
                 </a:solidFill>
@@ -10170,13 +11576,58 @@
               <a:t>Officers and drivers do not share a language</a:t>
             </a:r>
           </a:p>
+        </p:txBody>
+      </p:sp>
+      <p:sp>
+        <p:nvSpPr>
+          <p:cNvPr id="17429" name="Rounded Rectangle 17428"/>
+          <p:cNvSpPr/>
+          <p:nvPr/>
+        </p:nvSpPr>
+        <p:spPr>
+          <a:xfrm>
+            <a:off x="7662672" y="4041648"/>
+            <a:ext cx="4114800" cy="786384"/>
+          </a:xfrm>
+          <a:prstGeom prst="roundRect">
+            <a:avLst>
+              <a:gd name="adj" fmla="val 8000"/>
+            </a:avLst>
+          </a:prstGeom>
+          <a:solidFill>
+            <a:srgbClr val="F2F5F9"/>
+          </a:solidFill>
+          <a:ln w="9525">
+            <a:solidFill>
+              <a:srgbClr val="C9D6E4"/>
+            </a:solidFill>
+          </a:ln>
+          <a:effectLst/>
+        </p:spPr>
+        <p:style>
+          <a:lnRef idx="1">
+            <a:schemeClr val="accent1"/>
+          </a:lnRef>
+          <a:fillRef idx="3">
+            <a:schemeClr val="accent1"/>
+          </a:fillRef>
+          <a:effectRef idx="2">
+            <a:schemeClr val="accent1"/>
+          </a:effectRef>
+          <a:fontRef idx="minor">
+            <a:schemeClr val="lt1"/>
+          </a:fontRef>
+        </p:style>
+        <p:txBody>
+          <a:bodyPr rtlCol="0" anchor="ctr" wrap="square" lIns="109728" rIns="109728" tIns="54864" bIns="54864"/>
+          <a:lstStyle/>
           <a:p>
             <a:pPr algn="l">
               <a:lnSpc>
-                <a:spcPct val="95000"/>
+                <a:spcPct val="100000"/>
               </a:lnSpc>
               <a:spcBef>
-                <a:spcPts val="200"/>
+                <a:spcPts val="0"/>
               </a:spcBef>
               <a:spcAft>
                 <a:spcPts val="0"/>
@@ -10189,21 +11640,65 @@
                 </a:solidFill>
                 <a:latin typeface="Arial"/>
               </a:rPr>
-              <a:t>Ten languages including Khasi, Mizo, Nagamese and Kokborok — spoken aloud as well as written.</a:t>
-            </a:r>
-          </a:p>
-        </p:txBody>
-      </p:sp>
-      <p:sp>
-        <p:nvSpPr>
-          <p:cNvPr id="17419" name="Rounded Rectangle 17418"/>
+              <a:t>Ten languages including Khasi, Mizo, Nagamese and Kokborok — spoken aloud as well as written, so literacy is not a barrier.</a:t>
+            </a:r>
+          </a:p>
+        </p:txBody>
+      </p:sp>
+      <p:sp>
+        <p:nvSpPr>
+          <p:cNvPr id="17430" name="Right Arrow 17429"/>
           <p:cNvSpPr/>
           <p:nvPr/>
         </p:nvSpPr>
         <p:spPr>
           <a:xfrm>
-            <a:off x="5394960" y="4983479"/>
-            <a:ext cx="6382512" cy="786384"/>
+            <a:off x="7557516" y="4393692"/>
+            <a:ext cx="82296" cy="82296"/>
+          </a:xfrm>
+          <a:prstGeom prst="rightArrow">
+            <a:avLst/>
+          </a:prstGeom>
+          <a:solidFill>
+            <a:srgbClr val="4F81BD"/>
+          </a:solidFill>
+          <a:ln>
+            <a:noFill/>
+          </a:ln>
+          <a:effectLst/>
+        </p:spPr>
+        <p:style>
+          <a:lnRef idx="1">
+            <a:schemeClr val="accent1"/>
+          </a:lnRef>
+          <a:fillRef idx="3">
+            <a:schemeClr val="accent1"/>
+          </a:fillRef>
+          <a:effectRef idx="2">
+            <a:schemeClr val="accent1"/>
+          </a:effectRef>
+          <a:fontRef idx="minor">
+            <a:schemeClr val="lt1"/>
+          </a:fontRef>
+        </p:style>
+        <p:txBody>
+          <a:bodyPr rtlCol="0" anchor="ctr"/>
+          <a:lstStyle/>
+          <a:p>
+            <a:pPr algn="ctr"/>
+          </a:p>
+        </p:txBody>
+      </p:sp>
+      <p:sp>
+        <p:nvSpPr>
+          <p:cNvPr id="17431" name="Rounded Rectangle 17430"/>
+          <p:cNvSpPr/>
+          <p:nvPr/>
+        </p:nvSpPr>
+        <p:spPr>
+          <a:xfrm>
+            <a:off x="5047488" y="4910328"/>
+            <a:ext cx="2487168" cy="786384"/>
           </a:xfrm>
           <a:prstGeom prst="roundRect">
             <a:avLst>
@@ -10235,12 +11730,12 @@
           </a:fontRef>
         </p:style>
         <p:txBody>
-          <a:bodyPr rtlCol="0" anchor="t" wrap="square" lIns="118872" rIns="118872" tIns="64008" bIns="64008"/>
+          <a:bodyPr rtlCol="0" anchor="ctr" wrap="square" lIns="109728" rIns="109728" tIns="54864" bIns="54864"/>
           <a:lstStyle/>
           <a:p>
             <a:pPr algn="l">
               <a:lnSpc>
-                <a:spcPct val="95000"/>
+                <a:spcPct val="98000"/>
               </a:lnSpc>
               <a:spcBef>
                 <a:spcPts val="0"/>
@@ -10250,7 +11745,7 @@
               </a:spcAft>
             </a:pPr>
             <a:r>
-              <a:rPr sz="1100" b="1" i="0">
+              <a:rPr sz="1050" b="1" i="0">
                 <a:solidFill>
                   <a:srgbClr val="C25E1E"/>
                 </a:solidFill>
@@ -10259,13 +11754,58 @@
               <a:t>A quiet road has no vehicles to sense it</a:t>
             </a:r>
           </a:p>
+        </p:txBody>
+      </p:sp>
+      <p:sp>
+        <p:nvSpPr>
+          <p:cNvPr id="17432" name="Rounded Rectangle 17431"/>
+          <p:cNvSpPr/>
+          <p:nvPr/>
+        </p:nvSpPr>
+        <p:spPr>
+          <a:xfrm>
+            <a:off x="7662672" y="4910328"/>
+            <a:ext cx="4114800" cy="786384"/>
+          </a:xfrm>
+          <a:prstGeom prst="roundRect">
+            <a:avLst>
+              <a:gd name="adj" fmla="val 8000"/>
+            </a:avLst>
+          </a:prstGeom>
+          <a:solidFill>
+            <a:srgbClr val="FFFFFF"/>
+          </a:solidFill>
+          <a:ln w="9525">
+            <a:solidFill>
+              <a:srgbClr val="C9D6E4"/>
+            </a:solidFill>
+          </a:ln>
+          <a:effectLst/>
+        </p:spPr>
+        <p:style>
+          <a:lnRef idx="1">
+            <a:schemeClr val="accent1"/>
+          </a:lnRef>
+          <a:fillRef idx="3">
+            <a:schemeClr val="accent1"/>
+          </a:fillRef>
+          <a:effectRef idx="2">
+            <a:schemeClr val="accent1"/>
+          </a:effectRef>
+          <a:fontRef idx="minor">
+            <a:schemeClr val="lt1"/>
+          </a:fontRef>
+        </p:style>
+        <p:txBody>
+          <a:bodyPr rtlCol="0" anchor="ctr" wrap="square" lIns="109728" rIns="109728" tIns="54864" bIns="54864"/>
+          <a:lstStyle/>
           <a:p>
             <a:pPr algn="l">
               <a:lnSpc>
-                <a:spcPct val="95000"/>
+                <a:spcPct val="100000"/>
               </a:lnSpc>
               <a:spcBef>
-                <a:spcPts val="200"/>
+                <a:spcPts val="0"/>
               </a:spcBef>
               <a:spcAft>
                 <a:spcPts val="0"/>
@@ -10278,8 +11818,52 @@
                 </a:solidFill>
                 <a:latin typeface="Arial"/>
               </a:rPr>
-              <a:t>The weather model forecasts every road regardless of traffic; the dashboard shows honestly what is sensed and what is not.</a:t>
-            </a:r>
+              <a:t>The weather model forecasts every road regardless of traffic, and the dashboard shows honestly what is sensed and what is not.</a:t>
+            </a:r>
+          </a:p>
+        </p:txBody>
+      </p:sp>
+      <p:sp>
+        <p:nvSpPr>
+          <p:cNvPr id="17433" name="Right Arrow 17432"/>
+          <p:cNvSpPr/>
+          <p:nvPr/>
+        </p:nvSpPr>
+        <p:spPr>
+          <a:xfrm>
+            <a:off x="7557516" y="5262372"/>
+            <a:ext cx="82296" cy="82296"/>
+          </a:xfrm>
+          <a:prstGeom prst="rightArrow">
+            <a:avLst/>
+          </a:prstGeom>
+          <a:solidFill>
+            <a:srgbClr val="4F81BD"/>
+          </a:solidFill>
+          <a:ln>
+            <a:noFill/>
+          </a:ln>
+          <a:effectLst/>
+        </p:spPr>
+        <p:style>
+          <a:lnRef idx="1">
+            <a:schemeClr val="accent1"/>
+          </a:lnRef>
+          <a:fillRef idx="3">
+            <a:schemeClr val="accent1"/>
+          </a:fillRef>
+          <a:effectRef idx="2">
+            <a:schemeClr val="accent1"/>
+          </a:effectRef>
+          <a:fontRef idx="minor">
+            <a:schemeClr val="lt1"/>
+          </a:fontRef>
+        </p:style>
+        <p:txBody>
+          <a:bodyPr rtlCol="0" anchor="ctr"/>
+          <a:lstStyle/>
+          <a:p>
+            <a:pPr algn="ctr"/>
           </a:p>
         </p:txBody>
       </p:sp>
@@ -10673,7 +12257,7 @@
         <p:spPr>
           <a:xfrm>
             <a:off x="411480" y="1143000"/>
-            <a:ext cx="11365992" cy="219456"/>
+            <a:ext cx="11365992" cy="237744"/>
           </a:xfrm>
           <a:prstGeom prst="rect">
             <a:avLst/>
@@ -10700,25 +12284,69 @@
             <a:r>
               <a:rPr sz="1000" b="1" i="0">
                 <a:solidFill>
-                  <a:srgbClr val="1F497D"/>
-                </a:solidFill>
-                <a:latin typeface="Arial"/>
-              </a:rPr>
-              <a:t>WHO IT REACHES</a:t>
-            </a:r>
-          </a:p>
-        </p:txBody>
-      </p:sp>
-      <p:sp>
-        <p:nvSpPr>
-          <p:cNvPr id="17411" name="Rounded Rectangle 17410"/>
+                  <a:srgbClr val="0070C0"/>
+                </a:solidFill>
+                <a:latin typeface="Arial"/>
+              </a:rPr>
+              <a:t>POTENTIAL IMPACT ON THE TARGET AUDIENCE</a:t>
+            </a:r>
+          </a:p>
+        </p:txBody>
+      </p:sp>
+      <p:sp>
+        <p:nvSpPr>
+          <p:cNvPr id="17411" name="Rectangle 17410"/>
           <p:cNvSpPr/>
           <p:nvPr/>
         </p:nvSpPr>
         <p:spPr>
           <a:xfrm>
-            <a:off x="411480" y="1417320"/>
-            <a:ext cx="2704338" cy="1298448"/>
+            <a:off x="411480" y="1330452"/>
+            <a:ext cx="11365992" cy="12801"/>
+          </a:xfrm>
+          <a:prstGeom prst="rect">
+            <a:avLst/>
+          </a:prstGeom>
+          <a:solidFill>
+            <a:srgbClr val="C9D6E4"/>
+          </a:solidFill>
+          <a:ln>
+            <a:noFill/>
+          </a:ln>
+          <a:effectLst/>
+        </p:spPr>
+        <p:style>
+          <a:lnRef idx="1">
+            <a:schemeClr val="accent1"/>
+          </a:lnRef>
+          <a:fillRef idx="3">
+            <a:schemeClr val="accent1"/>
+          </a:fillRef>
+          <a:effectRef idx="2">
+            <a:schemeClr val="accent1"/>
+          </a:effectRef>
+          <a:fontRef idx="minor">
+            <a:schemeClr val="lt1"/>
+          </a:fontRef>
+        </p:style>
+        <p:txBody>
+          <a:bodyPr rtlCol="0" anchor="ctr"/>
+          <a:lstStyle/>
+          <a:p>
+            <a:pPr algn="ctr"/>
+          </a:p>
+        </p:txBody>
+      </p:sp>
+      <p:sp>
+        <p:nvSpPr>
+          <p:cNvPr id="17412" name="Rounded Rectangle 17411"/>
+          <p:cNvSpPr/>
+          <p:nvPr/>
+        </p:nvSpPr>
+        <p:spPr>
+          <a:xfrm>
+            <a:off x="411480" y="1435608"/>
+            <a:ext cx="2718054" cy="1298448"/>
           </a:xfrm>
           <a:prstGeom prst="roundRect">
             <a:avLst>
@@ -10750,7 +12378,7 @@
           </a:fontRef>
         </p:style>
         <p:txBody>
-          <a:bodyPr rtlCol="0" anchor="t" wrap="square" lIns="118872" rIns="118872" tIns="64008" bIns="64008"/>
+          <a:bodyPr rtlCol="0" anchor="t" wrap="square" lIns="109728" rIns="109728" tIns="54864" bIns="54864"/>
           <a:lstStyle/>
           <a:p>
             <a:pPr algn="l">
@@ -10800,14 +12428,14 @@
       </p:sp>
       <p:sp>
         <p:nvSpPr>
-          <p:cNvPr id="17412" name="Rounded Rectangle 17411"/>
+          <p:cNvPr id="17413" name="Rounded Rectangle 17412"/>
           <p:cNvSpPr/>
           <p:nvPr/>
         </p:nvSpPr>
         <p:spPr>
           <a:xfrm>
-            <a:off x="3298698" y="1417320"/>
-            <a:ext cx="2704338" cy="1298448"/>
+            <a:off x="3294126" y="1435608"/>
+            <a:ext cx="2718054" cy="1298448"/>
           </a:xfrm>
           <a:prstGeom prst="roundRect">
             <a:avLst>
@@ -10839,7 +12467,7 @@
           </a:fontRef>
         </p:style>
         <p:txBody>
-          <a:bodyPr rtlCol="0" anchor="t" wrap="square" lIns="118872" rIns="118872" tIns="64008" bIns="64008"/>
+          <a:bodyPr rtlCol="0" anchor="t" wrap="square" lIns="109728" rIns="109728" tIns="54864" bIns="54864"/>
           <a:lstStyle/>
           <a:p>
             <a:pPr algn="l">
@@ -10882,21 +12510,21 @@
                 </a:solidFill>
                 <a:latin typeface="Arial"/>
               </a:rPr>
-              <a:t>One screen: weak points ranked with the reason each one scored, and a queue of reports to confirm.</a:t>
-            </a:r>
-          </a:p>
-        </p:txBody>
-      </p:sp>
-      <p:sp>
-        <p:nvSpPr>
-          <p:cNvPr id="17413" name="Rounded Rectangle 17412"/>
+              <a:t>One screen: weak points ranked with the reason each scored, and a queue of reports to confirm.</a:t>
+            </a:r>
+          </a:p>
+        </p:txBody>
+      </p:sp>
+      <p:sp>
+        <p:nvSpPr>
+          <p:cNvPr id="17414" name="Rounded Rectangle 17413"/>
           <p:cNvSpPr/>
           <p:nvPr/>
         </p:nvSpPr>
         <p:spPr>
           <a:xfrm>
-            <a:off x="6185916" y="1417320"/>
-            <a:ext cx="2704338" cy="1298448"/>
+            <a:off x="6176772" y="1435608"/>
+            <a:ext cx="2718054" cy="1298448"/>
           </a:xfrm>
           <a:prstGeom prst="roundRect">
             <a:avLst>
@@ -10928,7 +12556,7 @@
           </a:fontRef>
         </p:style>
         <p:txBody>
-          <a:bodyPr rtlCol="0" anchor="t" wrap="square" lIns="118872" rIns="118872" tIns="64008" bIns="64008"/>
+          <a:bodyPr rtlCol="0" anchor="t" wrap="square" lIns="109728" rIns="109728" tIns="54864" bIns="54864"/>
           <a:lstStyle/>
           <a:p>
             <a:pPr algn="l">
@@ -10978,14 +12606,14 @@
       </p:sp>
       <p:sp>
         <p:nvSpPr>
-          <p:cNvPr id="17414" name="Rounded Rectangle 17413"/>
+          <p:cNvPr id="17415" name="Rounded Rectangle 17414"/>
           <p:cNvSpPr/>
           <p:nvPr/>
         </p:nvSpPr>
         <p:spPr>
           <a:xfrm>
-            <a:off x="9073134" y="1417320"/>
-            <a:ext cx="2704338" cy="1298448"/>
+            <a:off x="9059418" y="1435608"/>
+            <a:ext cx="2718054" cy="1298448"/>
           </a:xfrm>
           <a:prstGeom prst="roundRect">
             <a:avLst>
@@ -11017,7 +12645,7 @@
           </a:fontRef>
         </p:style>
         <p:txBody>
-          <a:bodyPr rtlCol="0" anchor="t" wrap="square" lIns="118872" rIns="118872" tIns="64008" bIns="64008"/>
+          <a:bodyPr rtlCol="0" anchor="t" wrap="square" lIns="109728" rIns="109728" tIns="54864" bIns="54864"/>
           <a:lstStyle/>
           <a:p>
             <a:pPr algn="l">
@@ -11060,21 +12688,21 @@
                 </a:solidFill>
                 <a:latin typeface="Arial"/>
               </a:rPr>
-              <a:t>Medicines, rations and produce arrive, and an alert in the language spoken at home when they will not.</a:t>
-            </a:r>
-          </a:p>
-        </p:txBody>
-      </p:sp>
-      <p:sp>
-        <p:nvSpPr>
-          <p:cNvPr id="17415" name="TextBox 17414"/>
+              <a:t>Medicines, rations and produce arrive — and an alert in the language spoken at home when they will not.</a:t>
+            </a:r>
+          </a:p>
+        </p:txBody>
+      </p:sp>
+      <p:sp>
+        <p:nvSpPr>
+          <p:cNvPr id="17416" name="TextBox 17415"/>
           <p:cNvSpPr txBox="1"/>
           <p:nvPr/>
         </p:nvSpPr>
         <p:spPr>
           <a:xfrm>
-            <a:off x="411480" y="2916936"/>
-            <a:ext cx="11365992" cy="219456"/>
+            <a:off x="411480" y="2880360"/>
+            <a:ext cx="11365992" cy="237744"/>
           </a:xfrm>
           <a:prstGeom prst="rect">
             <a:avLst/>
@@ -11101,25 +12729,69 @@
             <a:r>
               <a:rPr sz="1000" b="1" i="0">
                 <a:solidFill>
-                  <a:srgbClr val="1F497D"/>
-                </a:solidFill>
-                <a:latin typeface="Arial"/>
-              </a:rPr>
-              <a:t>BENEFITS</a:t>
-            </a:r>
-          </a:p>
-        </p:txBody>
-      </p:sp>
-      <p:sp>
-        <p:nvSpPr>
-          <p:cNvPr id="17416" name="Rounded Rectangle 17415"/>
+                  <a:srgbClr val="0070C0"/>
+                </a:solidFill>
+                <a:latin typeface="Arial"/>
+              </a:rPr>
+              <a:t>BENEFITS OF THE SOLUTION (SOCIAL, ECONOMIC, ENVIRONMENTAL, ETC.)</a:t>
+            </a:r>
+          </a:p>
+        </p:txBody>
+      </p:sp>
+      <p:sp>
+        <p:nvSpPr>
+          <p:cNvPr id="17417" name="Rectangle 17416"/>
           <p:cNvSpPr/>
           <p:nvPr/>
         </p:nvSpPr>
         <p:spPr>
           <a:xfrm>
-            <a:off x="411480" y="3209544"/>
-            <a:ext cx="1481328" cy="640080"/>
+            <a:off x="411480" y="3067812"/>
+            <a:ext cx="11365992" cy="12801"/>
+          </a:xfrm>
+          <a:prstGeom prst="rect">
+            <a:avLst/>
+          </a:prstGeom>
+          <a:solidFill>
+            <a:srgbClr val="C9D6E4"/>
+          </a:solidFill>
+          <a:ln>
+            <a:noFill/>
+          </a:ln>
+          <a:effectLst/>
+        </p:spPr>
+        <p:style>
+          <a:lnRef idx="1">
+            <a:schemeClr val="accent1"/>
+          </a:lnRef>
+          <a:fillRef idx="3">
+            <a:schemeClr val="accent1"/>
+          </a:fillRef>
+          <a:effectRef idx="2">
+            <a:schemeClr val="accent1"/>
+          </a:effectRef>
+          <a:fontRef idx="minor">
+            <a:schemeClr val="lt1"/>
+          </a:fontRef>
+        </p:style>
+        <p:txBody>
+          <a:bodyPr rtlCol="0" anchor="ctr"/>
+          <a:lstStyle/>
+          <a:p>
+            <a:pPr algn="ctr"/>
+          </a:p>
+        </p:txBody>
+      </p:sp>
+      <p:sp>
+        <p:nvSpPr>
+          <p:cNvPr id="17418" name="Rounded Rectangle 17417"/>
+          <p:cNvSpPr/>
+          <p:nvPr/>
+        </p:nvSpPr>
+        <p:spPr>
+          <a:xfrm>
+            <a:off x="411480" y="3172968"/>
+            <a:ext cx="1444752" cy="640080"/>
           </a:xfrm>
           <a:prstGeom prst="roundRect">
             <a:avLst>
@@ -11149,7 +12821,7 @@
           </a:fontRef>
         </p:style>
         <p:txBody>
-          <a:bodyPr rtlCol="0" anchor="ctr" wrap="square" lIns="118872" rIns="118872" tIns="64008" bIns="64008"/>
+          <a:bodyPr rtlCol="0" anchor="ctr" wrap="square" lIns="109728" rIns="109728" tIns="54864" bIns="54864"/>
           <a:lstStyle/>
           <a:p>
             <a:pPr algn="ctr">
@@ -11164,7 +12836,7 @@
               </a:spcAft>
             </a:pPr>
             <a:r>
-              <a:rPr sz="1250" b="1" i="0">
+              <a:rPr sz="1200" b="1" i="0">
                 <a:solidFill>
                   <a:srgbClr val="FFFFFF"/>
                 </a:solidFill>
@@ -11177,14 +12849,14 @@
       </p:sp>
       <p:sp>
         <p:nvSpPr>
-          <p:cNvPr id="17417" name="Rounded Rectangle 17416"/>
+          <p:cNvPr id="17419" name="Rounded Rectangle 17418"/>
           <p:cNvSpPr/>
           <p:nvPr/>
         </p:nvSpPr>
         <p:spPr>
           <a:xfrm>
-            <a:off x="2002536" y="3209544"/>
-            <a:ext cx="9774936" cy="640080"/>
+            <a:off x="1965960" y="3172968"/>
+            <a:ext cx="9811512" cy="640080"/>
           </a:xfrm>
           <a:prstGeom prst="roundRect">
             <a:avLst>
@@ -11216,7 +12888,7 @@
           </a:fontRef>
         </p:style>
         <p:txBody>
-          <a:bodyPr rtlCol="0" anchor="ctr" wrap="square" lIns="118872" rIns="118872" tIns="64008" bIns="64008"/>
+          <a:bodyPr rtlCol="0" anchor="ctr" wrap="square" lIns="109728" rIns="109728" tIns="54864" bIns="54864"/>
           <a:lstStyle/>
           <a:p>
             <a:pPr algn="l">
@@ -11231,27 +12903,27 @@
               </a:spcAft>
             </a:pPr>
             <a:r>
-              <a:rPr sz="1150" b="0" i="0">
+              <a:rPr sz="1100" b="0" i="0">
                 <a:solidFill>
                   <a:srgbClr val="262B33"/>
                 </a:solidFill>
                 <a:latin typeface="Arial"/>
               </a:rPr>
-              <a:t>8 states · 82 districts. Alerts and voice reporting in 10 languages, including four with no other software support.</a:t>
-            </a:r>
-          </a:p>
-        </p:txBody>
-      </p:sp>
-      <p:sp>
-        <p:nvSpPr>
-          <p:cNvPr id="17418" name="Rounded Rectangle 17417"/>
+              <a:t>8 states · 82 districts. Alerts and voice reporting in 10 languages, four of which have almost no other software support.</a:t>
+            </a:r>
+          </a:p>
+        </p:txBody>
+      </p:sp>
+      <p:sp>
+        <p:nvSpPr>
+          <p:cNvPr id="17420" name="Rounded Rectangle 17419"/>
           <p:cNvSpPr/>
           <p:nvPr/>
         </p:nvSpPr>
         <p:spPr>
           <a:xfrm>
-            <a:off x="411480" y="3950207"/>
-            <a:ext cx="1481328" cy="640080"/>
+            <a:off x="411480" y="3895344"/>
+            <a:ext cx="1444752" cy="640080"/>
           </a:xfrm>
           <a:prstGeom prst="roundRect">
             <a:avLst>
@@ -11281,7 +12953,7 @@
           </a:fontRef>
         </p:style>
         <p:txBody>
-          <a:bodyPr rtlCol="0" anchor="ctr" wrap="square" lIns="118872" rIns="118872" tIns="64008" bIns="64008"/>
+          <a:bodyPr rtlCol="0" anchor="ctr" wrap="square" lIns="109728" rIns="109728" tIns="54864" bIns="54864"/>
           <a:lstStyle/>
           <a:p>
             <a:pPr algn="ctr">
@@ -11296,7 +12968,7 @@
               </a:spcAft>
             </a:pPr>
             <a:r>
-              <a:rPr sz="1250" b="1" i="0">
+              <a:rPr sz="1200" b="1" i="0">
                 <a:solidFill>
                   <a:srgbClr val="FFFFFF"/>
                 </a:solidFill>
@@ -11309,14 +12981,14 @@
       </p:sp>
       <p:sp>
         <p:nvSpPr>
-          <p:cNvPr id="17419" name="Rounded Rectangle 17418"/>
+          <p:cNvPr id="17421" name="Rounded Rectangle 17420"/>
           <p:cNvSpPr/>
           <p:nvPr/>
         </p:nvSpPr>
         <p:spPr>
           <a:xfrm>
-            <a:off x="2002536" y="3950207"/>
-            <a:ext cx="9774936" cy="640080"/>
+            <a:off x="1965960" y="3895344"/>
+            <a:ext cx="9811512" cy="640080"/>
           </a:xfrm>
           <a:prstGeom prst="roundRect">
             <a:avLst>
@@ -11348,7 +13020,7 @@
           </a:fontRef>
         </p:style>
         <p:txBody>
-          <a:bodyPr rtlCol="0" anchor="ctr" wrap="square" lIns="118872" rIns="118872" tIns="64008" bIns="64008"/>
+          <a:bodyPr rtlCol="0" anchor="ctr" wrap="square" lIns="109728" rIns="109728" tIns="54864" bIns="54864"/>
           <a:lstStyle/>
           <a:p>
             <a:pPr algn="l">
@@ -11363,27 +13035,27 @@
               </a:spcAft>
             </a:pPr>
             <a:r>
-              <a:rPr sz="1150" b="0" i="0">
+              <a:rPr sz="1100" b="0" i="0">
                 <a:solidFill>
                   <a:srgbClr val="262B33"/>
                 </a:solidFill>
                 <a:latin typeface="Arial"/>
               </a:rPr>
-              <a:t>No dedicated fleet, so the marginal cost of moving one more parcel is near zero. Spare capacity in vehicles already moving becomes income.</a:t>
-            </a:r>
-          </a:p>
-        </p:txBody>
-      </p:sp>
-      <p:sp>
-        <p:nvSpPr>
-          <p:cNvPr id="17420" name="Rounded Rectangle 17419"/>
+              <a:t>No dedicated fleet, so moving one more parcel costs close to nothing. Spare capacity in vehicles already on the road becomes income.</a:t>
+            </a:r>
+          </a:p>
+        </p:txBody>
+      </p:sp>
+      <p:sp>
+        <p:nvSpPr>
+          <p:cNvPr id="17422" name="Rounded Rectangle 17421"/>
           <p:cNvSpPr/>
           <p:nvPr/>
         </p:nvSpPr>
         <p:spPr>
           <a:xfrm>
-            <a:off x="411480" y="4690872"/>
-            <a:ext cx="1481328" cy="640080"/>
+            <a:off x="411480" y="4617720"/>
+            <a:ext cx="1444752" cy="640080"/>
           </a:xfrm>
           <a:prstGeom prst="roundRect">
             <a:avLst>
@@ -11413,7 +13085,7 @@
           </a:fontRef>
         </p:style>
         <p:txBody>
-          <a:bodyPr rtlCol="0" anchor="ctr" wrap="square" lIns="118872" rIns="118872" tIns="64008" bIns="64008"/>
+          <a:bodyPr rtlCol="0" anchor="ctr" wrap="square" lIns="109728" rIns="109728" tIns="54864" bIns="54864"/>
           <a:lstStyle/>
           <a:p>
             <a:pPr algn="ctr">
@@ -11428,7 +13100,7 @@
               </a:spcAft>
             </a:pPr>
             <a:r>
-              <a:rPr sz="1250" b="1" i="0">
+              <a:rPr sz="1200" b="1" i="0">
                 <a:solidFill>
                   <a:srgbClr val="FFFFFF"/>
                 </a:solidFill>
@@ -11441,14 +13113,14 @@
       </p:sp>
       <p:sp>
         <p:nvSpPr>
-          <p:cNvPr id="17421" name="Rounded Rectangle 17420"/>
+          <p:cNvPr id="17423" name="Rounded Rectangle 17422"/>
           <p:cNvSpPr/>
           <p:nvPr/>
         </p:nvSpPr>
         <p:spPr>
           <a:xfrm>
-            <a:off x="2002536" y="4690872"/>
-            <a:ext cx="9774936" cy="640080"/>
+            <a:off x="1965960" y="4617720"/>
+            <a:ext cx="9811512" cy="640080"/>
           </a:xfrm>
           <a:prstGeom prst="roundRect">
             <a:avLst>
@@ -11480,7 +13152,7 @@
           </a:fontRef>
         </p:style>
         <p:txBody>
-          <a:bodyPr rtlCol="0" anchor="ctr" wrap="square" lIns="118872" rIns="118872" tIns="64008" bIns="64008"/>
+          <a:bodyPr rtlCol="0" anchor="ctr" wrap="square" lIns="109728" rIns="109728" tIns="54864" bIns="54864"/>
           <a:lstStyle/>
           <a:p>
             <a:pPr algn="l">
@@ -11495,27 +13167,27 @@
               </a:spcAft>
             </a:pPr>
             <a:r>
-              <a:rPr sz="1150" b="0" i="0">
+              <a:rPr sz="1100" b="0" i="0">
                 <a:solidFill>
                   <a:srgbClr val="262B33"/>
                 </a:solidFill>
                 <a:latin typeface="Arial"/>
               </a:rPr>
-              <a:t>Fewer dedicated trips: a parcel rides in a vehicle that was making the journey regardless, instead of a second one setting out.</a:t>
-            </a:r>
-          </a:p>
-        </p:txBody>
-      </p:sp>
-      <p:sp>
-        <p:nvSpPr>
-          <p:cNvPr id="17422" name="Rounded Rectangle 17421"/>
+              <a:t>Fewer dedicated trips — a parcel rides in a vehicle that was making the journey anyway, instead of a second one setting out.</a:t>
+            </a:r>
+          </a:p>
+        </p:txBody>
+      </p:sp>
+      <p:sp>
+        <p:nvSpPr>
+          <p:cNvPr id="17424" name="Rounded Rectangle 17423"/>
           <p:cNvSpPr/>
           <p:nvPr/>
         </p:nvSpPr>
         <p:spPr>
           <a:xfrm>
-            <a:off x="411480" y="5431536"/>
-            <a:ext cx="1481328" cy="640080"/>
+            <a:off x="411480" y="5340096"/>
+            <a:ext cx="1444752" cy="640080"/>
           </a:xfrm>
           <a:prstGeom prst="roundRect">
             <a:avLst>
@@ -11545,7 +13217,7 @@
           </a:fontRef>
         </p:style>
         <p:txBody>
-          <a:bodyPr rtlCol="0" anchor="ctr" wrap="square" lIns="118872" rIns="118872" tIns="64008" bIns="64008"/>
+          <a:bodyPr rtlCol="0" anchor="ctr" wrap="square" lIns="109728" rIns="109728" tIns="54864" bIns="54864"/>
           <a:lstStyle/>
           <a:p>
             <a:pPr algn="ctr">
@@ -11560,7 +13232,7 @@
               </a:spcAft>
             </a:pPr>
             <a:r>
-              <a:rPr sz="1250" b="1" i="0">
+              <a:rPr sz="1200" b="1" i="0">
                 <a:solidFill>
                   <a:srgbClr val="FFFFFF"/>
                 </a:solidFill>
@@ -11573,14 +13245,14 @@
       </p:sp>
       <p:sp>
         <p:nvSpPr>
-          <p:cNvPr id="17423" name="Rounded Rectangle 17422"/>
+          <p:cNvPr id="17425" name="Rounded Rectangle 17424"/>
           <p:cNvSpPr/>
           <p:nvPr/>
         </p:nvSpPr>
         <p:spPr>
           <a:xfrm>
-            <a:off x="2002536" y="5431536"/>
-            <a:ext cx="9774936" cy="640080"/>
+            <a:off x="1965960" y="5340096"/>
+            <a:ext cx="9811512" cy="640080"/>
           </a:xfrm>
           <a:prstGeom prst="roundRect">
             <a:avLst>
@@ -11612,7 +13284,7 @@
           </a:fontRef>
         </p:style>
         <p:txBody>
-          <a:bodyPr rtlCol="0" anchor="ctr" wrap="square" lIns="118872" rIns="118872" tIns="64008" bIns="64008"/>
+          <a:bodyPr rtlCol="0" anchor="ctr" wrap="square" lIns="109728" rIns="109728" tIns="54864" bIns="54864"/>
           <a:lstStyle/>
           <a:p>
             <a:pPr algn="l">
@@ -11627,13 +13299,13 @@
               </a:spcAft>
             </a:pPr>
             <a:r>
-              <a:rPr sz="1150" b="0" i="0">
+              <a:rPr sz="1100" b="0" i="0">
                 <a:solidFill>
                   <a:srgbClr val="262B33"/>
                 </a:solidFill>
                 <a:latin typeface="Arial"/>
               </a:rPr>
-              <a:t>Every incident carries a photo, GPS fix, timestamp and the officer who confirmed it — an evidence trail, not a phone call.</a:t>
+              <a:t>Every incident carries a photo, a GPS fix, a timestamp and the officer who confirmed it — an evidence trail, not a phone call.</a:t>
             </a:r>
           </a:p>
         </p:txBody>
@@ -12028,7 +13700,7 @@
         <p:spPr>
           <a:xfrm>
             <a:off x="411480" y="1143000"/>
-            <a:ext cx="5577840" cy="219456"/>
+            <a:ext cx="11365992" cy="237744"/>
           </a:xfrm>
           <a:prstGeom prst="rect">
             <a:avLst/>
@@ -12055,25 +13727,114 @@
             <a:r>
               <a:rPr sz="1000" b="1" i="0">
                 <a:solidFill>
-                  <a:srgbClr val="1F497D"/>
-                </a:solidFill>
-                <a:latin typeface="Arial"/>
-              </a:rPr>
-              <a:t>DATA SOURCES THE PLATFORM RUNS ON</a:t>
-            </a:r>
-          </a:p>
-        </p:txBody>
-      </p:sp>
-      <p:sp>
-        <p:nvSpPr>
-          <p:cNvPr id="17411" name="Rounded Rectangle 17410"/>
+                  <a:srgbClr val="0070C0"/>
+                </a:solidFill>
+                <a:latin typeface="Arial"/>
+              </a:rPr>
+              <a:t>DETAILS / LINKS OF THE REFERENCE AND RESEARCH WORK</a:t>
+            </a:r>
+          </a:p>
+        </p:txBody>
+      </p:sp>
+      <p:sp>
+        <p:nvSpPr>
+          <p:cNvPr id="17411" name="Rectangle 17410"/>
           <p:cNvSpPr/>
           <p:nvPr/>
         </p:nvSpPr>
         <p:spPr>
           <a:xfrm>
-            <a:off x="411480" y="1417320"/>
-            <a:ext cx="5577840" cy="3291840"/>
+            <a:off x="411480" y="1330452"/>
+            <a:ext cx="11365992" cy="12801"/>
+          </a:xfrm>
+          <a:prstGeom prst="rect">
+            <a:avLst/>
+          </a:prstGeom>
+          <a:solidFill>
+            <a:srgbClr val="C9D6E4"/>
+          </a:solidFill>
+          <a:ln>
+            <a:noFill/>
+          </a:ln>
+          <a:effectLst/>
+        </p:spPr>
+        <p:style>
+          <a:lnRef idx="1">
+            <a:schemeClr val="accent1"/>
+          </a:lnRef>
+          <a:fillRef idx="3">
+            <a:schemeClr val="accent1"/>
+          </a:fillRef>
+          <a:effectRef idx="2">
+            <a:schemeClr val="accent1"/>
+          </a:effectRef>
+          <a:fontRef idx="minor">
+            <a:schemeClr val="lt1"/>
+          </a:fontRef>
+        </p:style>
+        <p:txBody>
+          <a:bodyPr rtlCol="0" anchor="ctr"/>
+          <a:lstStyle/>
+          <a:p>
+            <a:pPr algn="ctr"/>
+          </a:p>
+        </p:txBody>
+      </p:sp>
+      <p:sp>
+        <p:nvSpPr>
+          <p:cNvPr id="17412" name="TextBox 17411"/>
+          <p:cNvSpPr txBox="1"/>
+          <p:nvPr/>
+        </p:nvSpPr>
+        <p:spPr>
+          <a:xfrm>
+            <a:off x="411480" y="1435608"/>
+            <a:ext cx="5573268" cy="219456"/>
+          </a:xfrm>
+          <a:prstGeom prst="rect">
+            <a:avLst/>
+          </a:prstGeom>
+          <a:noFill/>
+        </p:spPr>
+        <p:txBody>
+          <a:bodyPr wrap="square" lIns="0" rIns="0" tIns="0" bIns="0">
+            <a:spAutoFit/>
+          </a:bodyPr>
+          <a:lstStyle/>
+          <a:p>
+            <a:pPr algn="l">
+              <a:lnSpc>
+                <a:spcPct val="100000"/>
+              </a:lnSpc>
+              <a:spcBef>
+                <a:spcPts val="0"/>
+              </a:spcBef>
+              <a:spcAft>
+                <a:spcPts val="0"/>
+              </a:spcAft>
+            </a:pPr>
+            <a:r>
+              <a:rPr sz="900" b="1" i="0">
+                <a:solidFill>
+                  <a:srgbClr val="1F497D"/>
+                </a:solidFill>
+                <a:latin typeface="Arial"/>
+              </a:rPr>
+              <a:t>DATA SOURCES THE PLATFORM RUNS ON</a:t>
+            </a:r>
+          </a:p>
+        </p:txBody>
+      </p:sp>
+      <p:sp>
+        <p:nvSpPr>
+          <p:cNvPr id="17413" name="Rounded Rectangle 17412"/>
+          <p:cNvSpPr/>
+          <p:nvPr/>
+        </p:nvSpPr>
+        <p:spPr>
+          <a:xfrm>
+            <a:off x="411480" y="1673352"/>
+            <a:ext cx="5573268" cy="3017520"/>
           </a:xfrm>
           <a:prstGeom prst="roundRect">
             <a:avLst>
@@ -12105,7 +13866,7 @@
           </a:fontRef>
         </p:style>
         <p:txBody>
-          <a:bodyPr rtlCol="0" anchor="t" wrap="square" lIns="118872" rIns="118872" tIns="64008" bIns="64008"/>
+          <a:bodyPr rtlCol="0" anchor="t" wrap="square" lIns="109728" rIns="109728" tIns="54864" bIns="54864"/>
           <a:lstStyle/>
           <a:p>
             <a:pPr algn="l">
@@ -12120,7 +13881,7 @@
               </a:spcAft>
             </a:pPr>
             <a:r>
-              <a:rPr sz="1150" b="1" i="0">
+              <a:rPr sz="1100" b="1" i="0">
                 <a:solidFill>
                   <a:srgbClr val="1F497D"/>
                 </a:solidFill>
@@ -12142,7 +13903,7 @@
               </a:spcAft>
             </a:pPr>
             <a:r>
-              <a:rPr sz="1000" b="0" i="0">
+              <a:rPr sz="950" b="0" i="0">
                 <a:solidFill>
                   <a:srgbClr val="5A636E"/>
                 </a:solidFill>
@@ -12157,14 +13918,14 @@
                 <a:spcPct val="95000"/>
               </a:lnSpc>
               <a:spcBef>
-                <a:spcPts val="2600"/>
+                <a:spcPts val="2200"/>
               </a:spcBef>
               <a:spcAft>
                 <a:spcPts val="0"/>
               </a:spcAft>
             </a:pPr>
             <a:r>
-              <a:rPr sz="1150" b="1" i="0">
+              <a:rPr sz="1100" b="1" i="0">
                 <a:solidFill>
                   <a:srgbClr val="1F497D"/>
                 </a:solidFill>
@@ -12186,13 +13947,13 @@
               </a:spcAft>
             </a:pPr>
             <a:r>
-              <a:rPr sz="1000" b="0" i="0">
+              <a:rPr sz="950" b="0" i="0">
                 <a:solidFill>
                   <a:srgbClr val="5A636E"/>
                 </a:solidFill>
                 <a:latin typeface="Arial"/>
               </a:rPr>
-              <a:t>project-osrm.org — road geometry and alternates for all 42 stretches</a:t>
+              <a:t>project-osrm.org — road geometry and route alternates, 42 stretches</a:t>
             </a:r>
           </a:p>
           <a:p>
@@ -12201,14 +13962,14 @@
                 <a:spcPct val="95000"/>
               </a:lnSpc>
               <a:spcBef>
-                <a:spcPts val="2600"/>
+                <a:spcPts val="2200"/>
               </a:spcBef>
               <a:spcAft>
                 <a:spcPts val="0"/>
               </a:spcAft>
             </a:pPr>
             <a:r>
-              <a:rPr sz="1150" b="1" i="0">
+              <a:rPr sz="1100" b="1" i="0">
                 <a:solidFill>
                   <a:srgbClr val="1F497D"/>
                 </a:solidFill>
@@ -12230,7 +13991,7 @@
               </a:spcAft>
             </a:pPr>
             <a:r>
-              <a:rPr sz="1000" b="0" i="0">
+              <a:rPr sz="950" b="0" i="0">
                 <a:solidFill>
                   <a:srgbClr val="5A636E"/>
                 </a:solidFill>
@@ -12245,14 +14006,14 @@
                 <a:spcPct val="95000"/>
               </a:lnSpc>
               <a:spcBef>
-                <a:spcPts val="2600"/>
+                <a:spcPts val="2200"/>
               </a:spcBef>
               <a:spcAft>
                 <a:spcPts val="0"/>
               </a:spcAft>
             </a:pPr>
             <a:r>
-              <a:rPr sz="1150" b="1" i="0">
+              <a:rPr sz="1100" b="1" i="0">
                 <a:solidFill>
                   <a:srgbClr val="1F497D"/>
                 </a:solidFill>
@@ -12274,7 +14035,7 @@
               </a:spcAft>
             </a:pPr>
             <a:r>
-              <a:rPr sz="1000" b="0" i="0">
+              <a:rPr sz="950" b="0" i="0">
                 <a:solidFill>
                   <a:srgbClr val="5A636E"/>
                 </a:solidFill>
@@ -12287,14 +14048,14 @@
       </p:sp>
       <p:sp>
         <p:nvSpPr>
-          <p:cNvPr id="17412" name="TextBox 17411"/>
+          <p:cNvPr id="17414" name="TextBox 17413"/>
           <p:cNvSpPr txBox="1"/>
           <p:nvPr/>
         </p:nvSpPr>
         <p:spPr>
           <a:xfrm>
-            <a:off x="6199632" y="1143000"/>
-            <a:ext cx="5577840" cy="219456"/>
+            <a:off x="6204204" y="1435608"/>
+            <a:ext cx="5573268" cy="219456"/>
           </a:xfrm>
           <a:prstGeom prst="rect">
             <a:avLst/>
@@ -12319,7 +14080,7 @@
               </a:spcAft>
             </a:pPr>
             <a:r>
-              <a:rPr sz="1000" b="1" i="0">
+              <a:rPr sz="900" b="1" i="0">
                 <a:solidFill>
                   <a:srgbClr val="1F497D"/>
                 </a:solidFill>
@@ -12332,14 +14093,14 @@
       </p:sp>
       <p:sp>
         <p:nvSpPr>
-          <p:cNvPr id="17413" name="Rounded Rectangle 17412"/>
+          <p:cNvPr id="17415" name="Rounded Rectangle 17414"/>
           <p:cNvSpPr/>
           <p:nvPr/>
         </p:nvSpPr>
         <p:spPr>
           <a:xfrm>
-            <a:off x="6199632" y="1417320"/>
-            <a:ext cx="5577840" cy="3291840"/>
+            <a:off x="6204204" y="1673352"/>
+            <a:ext cx="5573268" cy="3017520"/>
           </a:xfrm>
           <a:prstGeom prst="roundRect">
             <a:avLst>
@@ -12371,7 +14132,7 @@
           </a:fontRef>
         </p:style>
         <p:txBody>
-          <a:bodyPr rtlCol="0" anchor="t" wrap="square" lIns="118872" rIns="118872" tIns="64008" bIns="64008"/>
+          <a:bodyPr rtlCol="0" anchor="t" wrap="square" lIns="109728" rIns="109728" tIns="54864" bIns="54864"/>
           <a:lstStyle/>
           <a:p>
             <a:pPr algn="l">
@@ -12386,7 +14147,7 @@
               </a:spcAft>
             </a:pPr>
             <a:r>
-              <a:rPr sz="1150" b="1" i="0">
+              <a:rPr sz="1100" b="1" i="0">
                 <a:solidFill>
                   <a:srgbClr val="1F497D"/>
                 </a:solidFill>
@@ -12408,7 +14169,7 @@
               </a:spcAft>
             </a:pPr>
             <a:r>
-              <a:rPr sz="1000" b="0" i="0">
+              <a:rPr sz="950" b="0" i="0">
                 <a:solidFill>
                   <a:srgbClr val="5A636E"/>
                 </a:solidFill>
@@ -12423,14 +14184,14 @@
                 <a:spcPct val="95000"/>
               </a:lnSpc>
               <a:spcBef>
-                <a:spcPts val="2600"/>
+                <a:spcPts val="2200"/>
               </a:spcBef>
               <a:spcAft>
                 <a:spcPts val="0"/>
               </a:spcAft>
             </a:pPr>
             <a:r>
-              <a:rPr sz="1150" b="1" i="0">
+              <a:rPr sz="1100" b="1" i="0">
                 <a:solidFill>
                   <a:srgbClr val="1F497D"/>
                 </a:solidFill>
@@ -12452,13 +14213,13 @@
               </a:spcAft>
             </a:pPr>
             <a:r>
-              <a:rPr sz="1000" b="0" i="0">
+              <a:rPr sz="950" b="0" i="0">
                 <a:solidFill>
                   <a:srgbClr val="5A636E"/>
                 </a:solidFill>
                 <a:latin typeface="Arial"/>
               </a:rPr>
-              <a:t>nhidcl.com · morth.nic.in — corridor alignments and NH numbering used to seed the network</a:t>
+              <a:t>nhidcl.com · morth.nic.in — corridor alignments and NH numbering used to seed the road network</a:t>
             </a:r>
           </a:p>
           <a:p>
@@ -12467,14 +14228,14 @@
                 <a:spcPct val="95000"/>
               </a:lnSpc>
               <a:spcBef>
-                <a:spcPts val="2600"/>
+                <a:spcPts val="2200"/>
               </a:spcBef>
               <a:spcAft>
                 <a:spcPts val="0"/>
               </a:spcAft>
             </a:pPr>
             <a:r>
-              <a:rPr sz="1150" b="1" i="0">
+              <a:rPr sz="1100" b="1" i="0">
                 <a:solidFill>
                   <a:srgbClr val="1F497D"/>
                 </a:solidFill>
@@ -12496,7 +14257,7 @@
               </a:spcAft>
             </a:pPr>
             <a:r>
-              <a:rPr sz="1000" b="0" i="0">
+              <a:rPr sz="950" b="0" i="0">
                 <a:solidFill>
                   <a:srgbClr val="5A636E"/>
                 </a:solidFill>
@@ -12511,14 +14272,14 @@
                 <a:spcPct val="95000"/>
               </a:lnSpc>
               <a:spcBef>
-                <a:spcPts val="2600"/>
+                <a:spcPts val="2200"/>
               </a:spcBef>
               <a:spcAft>
                 <a:spcPts val="0"/>
               </a:spcAft>
             </a:pPr>
             <a:r>
-              <a:rPr sz="1150" b="1" i="0">
+              <a:rPr sz="1100" b="1" i="0">
                 <a:solidFill>
                   <a:srgbClr val="1F497D"/>
                 </a:solidFill>
@@ -12540,7 +14301,7 @@
               </a:spcAft>
             </a:pPr>
             <a:r>
-              <a:rPr sz="1000" b="0" i="0">
+              <a:rPr sz="950" b="0" i="0">
                 <a:solidFill>
                   <a:srgbClr val="5A636E"/>
                 </a:solidFill>
@@ -12553,14 +14314,14 @@
       </p:sp>
       <p:sp>
         <p:nvSpPr>
-          <p:cNvPr id="17414" name="Rounded Rectangle 17413"/>
+          <p:cNvPr id="17416" name="Rounded Rectangle 17415"/>
           <p:cNvSpPr/>
           <p:nvPr/>
         </p:nvSpPr>
         <p:spPr>
           <a:xfrm>
-            <a:off x="411480" y="4855464"/>
-            <a:ext cx="11365992" cy="960120"/>
+            <a:off x="411480" y="4818888"/>
+            <a:ext cx="11365992" cy="841248"/>
           </a:xfrm>
           <a:prstGeom prst="roundRect">
             <a:avLst>
@@ -12592,12 +14353,12 @@
           </a:fontRef>
         </p:style>
         <p:txBody>
-          <a:bodyPr rtlCol="0" anchor="ctr" wrap="square" lIns="118872" rIns="118872" tIns="64008" bIns="64008"/>
+          <a:bodyPr rtlCol="0" anchor="ctr" wrap="square" lIns="109728" rIns="109728" tIns="54864" bIns="54864"/>
           <a:lstStyle/>
           <a:p>
             <a:pPr algn="l">
               <a:lnSpc>
-                <a:spcPct val="100000"/>
+                <a:spcPct val="102000"/>
               </a:lnSpc>
               <a:spcBef>
                 <a:spcPts val="0"/>
@@ -12607,22 +14368,22 @@
               </a:spcAft>
             </a:pPr>
             <a:r>
-              <a:rPr sz="1150" b="1">
+              <a:rPr sz="1050" b="1">
                 <a:solidFill>
                   <a:srgbClr val="1F497D"/>
                 </a:solidFill>
                 <a:latin typeface="Arial"/>
               </a:rPr>
-              <a:t>Working prototype  </a:t>
-            </a:r>
-            <a:r>
-              <a:rPr sz="1150" b="0">
+              <a:t>Honest note on the model  </a:t>
+            </a:r>
+            <a:r>
+              <a:rPr sz="1050" b="0">
                 <a:solidFill>
                   <a:srgbClr val="262B33"/>
                 </a:solidFill>
                 <a:latin typeface="Arial"/>
               </a:rPr>
-              <a:t>— four Android apps, a control dashboard and the backend are built and running. The forecast model, the probe-sensing engine and the corridor matcher are covered by 195 automated tests.</a:t>
+              <a:t>— no public register of past NER road closures exists, so historical labels are drawn from a rainfall-threshold hazard function calibrated on IMD and GSI data. Verified field reports override every drawn label, and the dashboard says so on screen.</a:t>
             </a:r>
           </a:p>
         </p:txBody>

--- a/SIH2026_Sukobin.pptx
+++ b/SIH2026_Sukobin.pptx
@@ -6264,7 +6264,7 @@
         <p:spPr>
           <a:xfrm>
             <a:off x="411480" y="1435608"/>
-            <a:ext cx="6400800" cy="1325880"/>
+            <a:ext cx="6400800" cy="1691640"/>
           </a:xfrm>
           <a:prstGeom prst="rect">
             <a:avLst/>
@@ -6279,7 +6279,7 @@
           <a:p>
             <a:pPr algn="l">
               <a:lnSpc>
-                <a:spcPct val="102000"/>
+                <a:spcPct val="100000"/>
               </a:lnSpc>
               <a:spcBef>
                 <a:spcPts val="0"/>
@@ -6289,53 +6289,84 @@
               </a:spcAft>
             </a:pPr>
             <a:r>
-              <a:rPr sz="1200" b="1">
-                <a:solidFill>
-                  <a:srgbClr val="1F497D"/>
-                </a:solidFill>
-                <a:latin typeface="Arial"/>
-              </a:rPr>
-              <a:t>Nobody drives for us. </a:t>
-            </a:r>
-            <a:r>
-              <a:rPr sz="1200" b="0">
+              <a:rPr sz="1100" b="1">
+                <a:solidFill>
+                  <a:srgbClr val="C25E1E"/>
+                </a:solidFill>
+                <a:latin typeface="Arial"/>
+              </a:rPr>
+              <a:t>The problem. </a:t>
+            </a:r>
+            <a:r>
+              <a:rPr sz="1100" b="0">
                 <a:solidFill>
                   <a:srgbClr val="262B33"/>
                 </a:solidFill>
                 <a:latin typeface="Arial"/>
               </a:rPr>
-              <a:t>Anyone already travelling A to B enters their vehicle and route, and is offered only the parcels whose pickup and drop lie along that road, up to what the vehicle holds. No fleet, no contract, no empty return leg.</a:t>
+              <a:t>Landslides, floods and infrastructure gaps cut the NER's roads without warning. Medicines, food, produce and construction material arrive late or not at all, and no integrated platform exists to see it happening.</a:t>
             </a:r>
           </a:p>
           <a:p>
             <a:pPr algn="l">
               <a:lnSpc>
-                <a:spcPct val="102000"/>
+                <a:spcPct val="100000"/>
               </a:lnSpc>
               <a:spcBef>
-                <a:spcPts val="900"/>
-              </a:spcBef>
-              <a:spcAft>
-                <a:spcPts val="0"/>
-              </a:spcAft>
-            </a:pPr>
-            <a:r>
-              <a:rPr sz="1200" b="1">
+                <a:spcPts val="700"/>
+              </a:spcBef>
+              <a:spcAft>
+                <a:spcPts val="0"/>
+              </a:spcAft>
+            </a:pPr>
+            <a:r>
+              <a:rPr sz="1100" b="1">
                 <a:solidFill>
                   <a:srgbClr val="1F497D"/>
                 </a:solidFill>
                 <a:latin typeface="Arial"/>
               </a:rPr>
+              <a:t>Nobody drives for us. </a:t>
+            </a:r>
+            <a:r>
+              <a:rPr sz="1100" b="0">
+                <a:solidFill>
+                  <a:srgbClr val="262B33"/>
+                </a:solidFill>
+                <a:latin typeface="Arial"/>
+              </a:rPr>
+              <a:t>Anyone already travelling A to B enters their vehicle and route, and is offered only the consignments lying along that road, up to what the vehicle holds. No fleet, no empty return leg.</a:t>
+            </a:r>
+          </a:p>
+          <a:p>
+            <a:pPr algn="l">
+              <a:lnSpc>
+                <a:spcPct val="100000"/>
+              </a:lnSpc>
+              <a:spcBef>
+                <a:spcPts val="700"/>
+              </a:spcBef>
+              <a:spcAft>
+                <a:spcPts val="0"/>
+              </a:spcAft>
+            </a:pPr>
+            <a:r>
+              <a:rPr sz="1100" b="1">
+                <a:solidFill>
+                  <a:srgbClr val="1F497D"/>
+                </a:solidFill>
+                <a:latin typeface="Arial"/>
+              </a:rPr>
               <a:t>Those carriers stream GPS while they drive. </a:t>
             </a:r>
             <a:r>
-              <a:rPr sz="1200" b="0">
+              <a:rPr sz="1100" b="0">
                 <a:solidFill>
                   <a:srgbClr val="262B33"/>
                 </a:solidFill>
                 <a:latin typeface="Arial"/>
               </a:rPr>
-              <a:t>The rolling median of their speed against each road's baseline is a live accessibility reading, and the weather model turns that into a 72-hour closure forecast.</a:t>
+              <a:t>Median speed against each road's baseline is a live accessibility reading; the weather model turns it into a 72-hour closure forecast.</a:t>
             </a:r>
           </a:p>
         </p:txBody>
@@ -6348,7 +6379,7 @@
         </p:nvSpPr>
         <p:spPr>
           <a:xfrm>
-            <a:off x="411480" y="2807208"/>
+            <a:off x="411480" y="3191256"/>
             <a:ext cx="6400800" cy="237744"/>
           </a:xfrm>
           <a:prstGeom prst="rect">
@@ -6393,7 +6424,7 @@
         </p:nvSpPr>
         <p:spPr>
           <a:xfrm>
-            <a:off x="411480" y="2994660"/>
+            <a:off x="411480" y="3378708"/>
             <a:ext cx="6400800" cy="12801"/>
           </a:xfrm>
           <a:prstGeom prst="rect">
@@ -6437,8 +6468,8 @@
         </p:nvSpPr>
         <p:spPr>
           <a:xfrm>
-            <a:off x="411480" y="3099816"/>
-            <a:ext cx="6400800" cy="1188720"/>
+            <a:off x="411480" y="3483864"/>
+            <a:ext cx="6400800" cy="1060704"/>
           </a:xfrm>
           <a:prstGeom prst="roundRect">
             <a:avLst>
@@ -6485,7 +6516,7 @@
               </a:spcAft>
             </a:pPr>
             <a:r>
-              <a:rPr sz="1100" b="1">
+              <a:rPr sz="1050" b="1">
                 <a:solidFill>
                   <a:srgbClr val="1F497D"/>
                 </a:solidFill>
@@ -6494,7 +6525,7 @@
               <a:t>•  The carrier network IS the sensor network — </a:t>
             </a:r>
             <a:r>
-              <a:rPr sz="1100" b="0">
+              <a:rPr sz="1050" b="0">
                 <a:solidFill>
                   <a:srgbClr val="262B33"/>
                 </a:solidFill>
@@ -6509,14 +6540,14 @@
                 <a:spcPct val="100000"/>
               </a:lnSpc>
               <a:spcBef>
-                <a:spcPts val="800"/>
-              </a:spcBef>
-              <a:spcAft>
-                <a:spcPts val="0"/>
-              </a:spcAft>
-            </a:pPr>
-            <a:r>
-              <a:rPr sz="1100" b="1">
+                <a:spcPts val="700"/>
+              </a:spcBef>
+              <a:spcAft>
+                <a:spcPts val="0"/>
+              </a:spcAft>
+            </a:pPr>
+            <a:r>
+              <a:rPr sz="1050" b="1">
                 <a:solidFill>
                   <a:srgbClr val="1F497D"/>
                 </a:solidFill>
@@ -6525,7 +6556,7 @@
               <a:t>•  Coverage without hardware — </a:t>
             </a:r>
             <a:r>
-              <a:rPr sz="1100" b="0">
+              <a:rPr sz="1050" b="0">
                 <a:solidFill>
                   <a:srgbClr val="262B33"/>
                 </a:solidFill>
@@ -6540,14 +6571,14 @@
                 <a:spcPct val="100000"/>
               </a:lnSpc>
               <a:spcBef>
-                <a:spcPts val="800"/>
-              </a:spcBef>
-              <a:spcAft>
-                <a:spcPts val="0"/>
-              </a:spcAft>
-            </a:pPr>
-            <a:r>
-              <a:rPr sz="1100" b="1">
+                <a:spcPts val="700"/>
+              </a:spcBef>
+              <a:spcAft>
+                <a:spcPts val="0"/>
+              </a:spcAft>
+            </a:pPr>
+            <a:r>
+              <a:rPr sz="1050" b="1">
                 <a:solidFill>
                   <a:srgbClr val="1F497D"/>
                 </a:solidFill>
@@ -6556,7 +6587,7 @@
               <a:t>•  It improves as it is used — </a:t>
             </a:r>
             <a:r>
-              <a:rPr sz="1100" b="0">
+              <a:rPr sz="1050" b="0">
                 <a:solidFill>
                   <a:srgbClr val="262B33"/>
                 </a:solidFill>
@@ -6575,7 +6606,7 @@
         </p:nvSpPr>
         <p:spPr>
           <a:xfrm>
-            <a:off x="7086600" y="1197864"/>
+            <a:off x="7086600" y="1435608"/>
             <a:ext cx="4690872" cy="219456"/>
           </a:xfrm>
           <a:prstGeom prst="rect">
@@ -6620,7 +6651,7 @@
         </p:nvSpPr>
         <p:spPr>
           <a:xfrm>
-            <a:off x="7086600" y="1435608"/>
+            <a:off x="7086600" y="1673352"/>
             <a:ext cx="4690872" cy="457200"/>
           </a:xfrm>
           <a:prstGeom prst="roundRect">
@@ -6687,7 +6718,7 @@
         </p:nvSpPr>
         <p:spPr>
           <a:xfrm>
-            <a:off x="9381744" y="1911096"/>
+            <a:off x="9381744" y="2148840"/>
             <a:ext cx="100584" cy="109728"/>
           </a:xfrm>
           <a:prstGeom prst="downArrow">
@@ -6731,7 +6762,7 @@
         </p:nvSpPr>
         <p:spPr>
           <a:xfrm>
-            <a:off x="7086600" y="2039112"/>
+            <a:off x="7086600" y="2276856"/>
             <a:ext cx="4690872" cy="457200"/>
           </a:xfrm>
           <a:prstGeom prst="roundRect">
@@ -6798,7 +6829,7 @@
         </p:nvSpPr>
         <p:spPr>
           <a:xfrm>
-            <a:off x="9381744" y="2514600"/>
+            <a:off x="9381744" y="2752344"/>
             <a:ext cx="100584" cy="109728"/>
           </a:xfrm>
           <a:prstGeom prst="downArrow">
@@ -6842,7 +6873,7 @@
         </p:nvSpPr>
         <p:spPr>
           <a:xfrm>
-            <a:off x="7086600" y="2642616"/>
+            <a:off x="7086600" y="2880360"/>
             <a:ext cx="4690872" cy="457200"/>
           </a:xfrm>
           <a:prstGeom prst="roundRect">
@@ -6909,7 +6940,7 @@
         </p:nvSpPr>
         <p:spPr>
           <a:xfrm>
-            <a:off x="9381744" y="3118104"/>
+            <a:off x="9381744" y="3355848"/>
             <a:ext cx="100584" cy="109728"/>
           </a:xfrm>
           <a:prstGeom prst="downArrow">
@@ -6953,7 +6984,7 @@
         </p:nvSpPr>
         <p:spPr>
           <a:xfrm>
-            <a:off x="7086600" y="3246120"/>
+            <a:off x="7086600" y="3483864"/>
             <a:ext cx="4690872" cy="457200"/>
           </a:xfrm>
           <a:prstGeom prst="roundRect">
@@ -7020,7 +7051,7 @@
         </p:nvSpPr>
         <p:spPr>
           <a:xfrm>
-            <a:off x="9381744" y="3721608"/>
+            <a:off x="9381744" y="3959352"/>
             <a:ext cx="100584" cy="109728"/>
           </a:xfrm>
           <a:prstGeom prst="downArrow">
@@ -7064,7 +7095,7 @@
         </p:nvSpPr>
         <p:spPr>
           <a:xfrm>
-            <a:off x="7086600" y="3849624"/>
+            <a:off x="7086600" y="4087368"/>
             <a:ext cx="4690872" cy="457200"/>
           </a:xfrm>
           <a:prstGeom prst="roundRect">
@@ -7131,7 +7162,7 @@
         </p:nvSpPr>
         <p:spPr>
           <a:xfrm>
-            <a:off x="411480" y="4398264"/>
+            <a:off x="411480" y="4636008"/>
             <a:ext cx="11365992" cy="237744"/>
           </a:xfrm>
           <a:prstGeom prst="rect">
@@ -7176,7 +7207,7 @@
         </p:nvSpPr>
         <p:spPr>
           <a:xfrm>
-            <a:off x="411480" y="4585716"/>
+            <a:off x="411480" y="4823460"/>
             <a:ext cx="11365992" cy="12801"/>
           </a:xfrm>
           <a:prstGeom prst="rect">
@@ -7220,7 +7251,7 @@
         </p:nvSpPr>
         <p:spPr>
           <a:xfrm>
-            <a:off x="411480" y="4690872"/>
+            <a:off x="411480" y="4928616"/>
             <a:ext cx="2759202" cy="548640"/>
           </a:xfrm>
           <a:prstGeom prst="roundRect">
@@ -7283,7 +7314,7 @@
                 </a:solidFill>
                 <a:latin typeface="Arial"/>
               </a:rPr>
-              <a:t>Real-time accessibility</a:t>
+              <a:t>Road &amp; bridge accessibility</a:t>
             </a:r>
           </a:p>
           <a:p>
@@ -7305,7 +7336,7 @@
                 </a:solidFill>
                 <a:latin typeface="Arial"/>
               </a:rPr>
-              <a:t>42 stretches, 3,567 km, live from driver GPS</a:t>
+              <a:t>42 stretches, 3,567 km, 82 districts, live from GPS</a:t>
             </a:r>
           </a:p>
         </p:txBody>
@@ -7318,7 +7349,7 @@
         </p:nvSpPr>
         <p:spPr>
           <a:xfrm>
-            <a:off x="3280410" y="4690872"/>
+            <a:off x="3280410" y="4928616"/>
             <a:ext cx="2759202" cy="548640"/>
           </a:xfrm>
           <a:prstGeom prst="roundRect">
@@ -7416,7 +7447,7 @@
         </p:nvSpPr>
         <p:spPr>
           <a:xfrm>
-            <a:off x="6149340" y="4690872"/>
+            <a:off x="6149340" y="4928616"/>
             <a:ext cx="2759202" cy="548640"/>
           </a:xfrm>
           <a:prstGeom prst="roundRect">
@@ -7514,7 +7545,7 @@
         </p:nvSpPr>
         <p:spPr>
           <a:xfrm>
-            <a:off x="9018270" y="4690872"/>
+            <a:off x="9018270" y="4928616"/>
             <a:ext cx="2759202" cy="548640"/>
           </a:xfrm>
           <a:prstGeom prst="roundRect">
@@ -7599,7 +7630,7 @@
                 </a:solidFill>
                 <a:latin typeface="Arial"/>
               </a:rPr>
-              <a:t>20 s pings, essential commodities flagged</a:t>
+              <a:t>medicines, food, produce, construction material</a:t>
             </a:r>
           </a:p>
         </p:txBody>
@@ -7612,7 +7643,7 @@
         </p:nvSpPr>
         <p:spPr>
           <a:xfrm>
-            <a:off x="411480" y="5321808"/>
+            <a:off x="411480" y="5559552"/>
             <a:ext cx="2759202" cy="548640"/>
           </a:xfrm>
           <a:prstGeom prst="roundRect">
@@ -7710,7 +7741,7 @@
         </p:nvSpPr>
         <p:spPr>
           <a:xfrm>
-            <a:off x="3280410" y="5321808"/>
+            <a:off x="3280410" y="5559552"/>
             <a:ext cx="2759202" cy="548640"/>
           </a:xfrm>
           <a:prstGeom prst="roundRect">
@@ -7808,7 +7839,7 @@
         </p:nvSpPr>
         <p:spPr>
           <a:xfrm>
-            <a:off x="6149340" y="5321808"/>
+            <a:off x="6149340" y="5559552"/>
             <a:ext cx="2759202" cy="548640"/>
           </a:xfrm>
           <a:prstGeom prst="roundRect">
@@ -7906,7 +7937,7 @@
         </p:nvSpPr>
         <p:spPr>
           <a:xfrm>
-            <a:off x="9018270" y="5321808"/>
+            <a:off x="9018270" y="5559552"/>
             <a:ext cx="2759202" cy="548640"/>
           </a:xfrm>
           <a:prstGeom prst="roundRect">
@@ -8417,7 +8448,7 @@
         <p:spPr>
           <a:xfrm>
             <a:off x="411480" y="1673352"/>
-            <a:ext cx="3654552" cy="1975104"/>
+            <a:ext cx="3654552" cy="1847088"/>
           </a:xfrm>
           <a:prstGeom prst="roundRect">
             <a:avLst>
@@ -8464,7 +8495,7 @@
               </a:spcAft>
             </a:pPr>
             <a:r>
-              <a:rPr sz="1050" b="1">
+              <a:rPr sz="1000" b="1">
                 <a:solidFill>
                   <a:srgbClr val="1F497D"/>
                 </a:solidFill>
@@ -8473,7 +8504,7 @@
               <a:t>Backend  </a:t>
             </a:r>
             <a:r>
-              <a:rPr sz="1050" b="0">
+              <a:rPr sz="1000" b="0">
                 <a:solidFill>
                   <a:srgbClr val="262B33"/>
                 </a:solidFill>
@@ -8488,14 +8519,14 @@
                 <a:spcPct val="100000"/>
               </a:lnSpc>
               <a:spcBef>
-                <a:spcPts val="900"/>
-              </a:spcBef>
-              <a:spcAft>
-                <a:spcPts val="0"/>
-              </a:spcAft>
-            </a:pPr>
-            <a:r>
-              <a:rPr sz="1050" b="1">
+                <a:spcPts val="800"/>
+              </a:spcBef>
+              <a:spcAft>
+                <a:spcPts val="0"/>
+              </a:spcAft>
+            </a:pPr>
+            <a:r>
+              <a:rPr sz="1000" b="1">
                 <a:solidFill>
                   <a:srgbClr val="1F497D"/>
                 </a:solidFill>
@@ -8504,7 +8535,7 @@
               <a:t>Web  </a:t>
             </a:r>
             <a:r>
-              <a:rPr sz="1050" b="0">
+              <a:rPr sz="1000" b="0">
                 <a:solidFill>
                   <a:srgbClr val="262B33"/>
                 </a:solidFill>
@@ -8519,14 +8550,14 @@
                 <a:spcPct val="100000"/>
               </a:lnSpc>
               <a:spcBef>
-                <a:spcPts val="900"/>
-              </a:spcBef>
-              <a:spcAft>
-                <a:spcPts val="0"/>
-              </a:spcAft>
-            </a:pPr>
-            <a:r>
-              <a:rPr sz="1050" b="1">
+                <a:spcPts val="800"/>
+              </a:spcBef>
+              <a:spcAft>
+                <a:spcPts val="0"/>
+              </a:spcAft>
+            </a:pPr>
+            <a:r>
+              <a:rPr sz="1000" b="1">
                 <a:solidFill>
                   <a:srgbClr val="1F497D"/>
                 </a:solidFill>
@@ -8535,7 +8566,7 @@
               <a:t>Mobile  </a:t>
             </a:r>
             <a:r>
-              <a:rPr sz="1050" b="0">
+              <a:rPr sz="1000" b="0">
                 <a:solidFill>
                   <a:srgbClr val="262B33"/>
                 </a:solidFill>
@@ -8550,14 +8581,14 @@
                 <a:spcPct val="100000"/>
               </a:lnSpc>
               <a:spcBef>
-                <a:spcPts val="900"/>
-              </a:spcBef>
-              <a:spcAft>
-                <a:spcPts val="0"/>
-              </a:spcAft>
-            </a:pPr>
-            <a:r>
-              <a:rPr sz="1050" b="1">
+                <a:spcPts val="800"/>
+              </a:spcBef>
+              <a:spcAft>
+                <a:spcPts val="0"/>
+              </a:spcAft>
+            </a:pPr>
+            <a:r>
+              <a:rPr sz="1000" b="1">
                 <a:solidFill>
                   <a:srgbClr val="1F497D"/>
                 </a:solidFill>
@@ -8566,7 +8597,7 @@
               <a:t>Cloud  </a:t>
             </a:r>
             <a:r>
-              <a:rPr sz="1050" b="0">
+              <a:rPr sz="1000" b="0">
                 <a:solidFill>
                   <a:srgbClr val="262B33"/>
                 </a:solidFill>
@@ -8631,7 +8662,7 @@
         <p:spPr>
           <a:xfrm>
             <a:off x="4267200" y="1673352"/>
-            <a:ext cx="3654552" cy="1975104"/>
+            <a:ext cx="3654552" cy="1847088"/>
           </a:xfrm>
           <a:prstGeom prst="roundRect">
             <a:avLst>
@@ -8678,7 +8709,7 @@
               </a:spcAft>
             </a:pPr>
             <a:r>
-              <a:rPr sz="1050" b="1">
+              <a:rPr sz="1000" b="1">
                 <a:solidFill>
                   <a:srgbClr val="1F497D"/>
                 </a:solidFill>
@@ -8687,7 +8718,7 @@
               <a:t>Model  </a:t>
             </a:r>
             <a:r>
-              <a:rPr sz="1050" b="0">
+              <a:rPr sz="1000" b="0">
                 <a:solidFill>
                   <a:srgbClr val="262B33"/>
                 </a:solidFill>
@@ -8702,14 +8733,14 @@
                 <a:spcPct val="100000"/>
               </a:lnSpc>
               <a:spcBef>
-                <a:spcPts val="900"/>
-              </a:spcBef>
-              <a:spcAft>
-                <a:spcPts val="0"/>
-              </a:spcAft>
-            </a:pPr>
-            <a:r>
-              <a:rPr sz="1050" b="1">
+                <a:spcPts val="800"/>
+              </a:spcBef>
+              <a:spcAft>
+                <a:spcPts val="0"/>
+              </a:spcAft>
+            </a:pPr>
+            <a:r>
+              <a:rPr sz="1000" b="1">
                 <a:solidFill>
                   <a:srgbClr val="1F497D"/>
                 </a:solidFill>
@@ -8718,7 +8749,7 @@
               <a:t>Features  </a:t>
             </a:r>
             <a:r>
-              <a:rPr sz="1050" b="0">
+              <a:rPr sz="1000" b="0">
                 <a:solidFill>
                   <a:srgbClr val="262B33"/>
                 </a:solidFill>
@@ -8733,14 +8764,14 @@
                 <a:spcPct val="100000"/>
               </a:lnSpc>
               <a:spcBef>
-                <a:spcPts val="900"/>
-              </a:spcBef>
-              <a:spcAft>
-                <a:spcPts val="0"/>
-              </a:spcAft>
-            </a:pPr>
-            <a:r>
-              <a:rPr sz="1050" b="1">
+                <a:spcPts val="800"/>
+              </a:spcBef>
+              <a:spcAft>
+                <a:spcPts val="0"/>
+              </a:spcAft>
+            </a:pPr>
+            <a:r>
+              <a:rPr sz="1000" b="1">
                 <a:solidFill>
                   <a:srgbClr val="1F497D"/>
                 </a:solidFill>
@@ -8749,7 +8780,7 @@
               <a:t>Trained on  </a:t>
             </a:r>
             <a:r>
-              <a:rPr sz="1050" b="0">
+              <a:rPr sz="1000" b="0">
                 <a:solidFill>
                   <a:srgbClr val="262B33"/>
                 </a:solidFill>
@@ -8764,14 +8795,14 @@
                 <a:spcPct val="100000"/>
               </a:lnSpc>
               <a:spcBef>
-                <a:spcPts val="900"/>
-              </a:spcBef>
-              <a:spcAft>
-                <a:spcPts val="0"/>
-              </a:spcAft>
-            </a:pPr>
-            <a:r>
-              <a:rPr sz="1050" b="1">
+                <a:spcPts val="800"/>
+              </a:spcBef>
+              <a:spcAft>
+                <a:spcPts val="0"/>
+              </a:spcAft>
+            </a:pPr>
+            <a:r>
+              <a:rPr sz="1000" b="1">
                 <a:solidFill>
                   <a:srgbClr val="1F497D"/>
                 </a:solidFill>
@@ -8780,7 +8811,7 @@
               <a:t>Scored  </a:t>
             </a:r>
             <a:r>
-              <a:rPr sz="1050" b="0">
+              <a:rPr sz="1000" b="0">
                 <a:solidFill>
                   <a:srgbClr val="262B33"/>
                 </a:solidFill>
@@ -8845,7 +8876,7 @@
         <p:spPr>
           <a:xfrm>
             <a:off x="8122920" y="1673352"/>
-            <a:ext cx="3654552" cy="1975104"/>
+            <a:ext cx="3654552" cy="1847088"/>
           </a:xfrm>
           <a:prstGeom prst="roundRect">
             <a:avLst>
@@ -8892,7 +8923,7 @@
               </a:spcAft>
             </a:pPr>
             <a:r>
-              <a:rPr sz="1050" b="1">
+              <a:rPr sz="1000" b="1">
                 <a:solidFill>
                   <a:srgbClr val="1F497D"/>
                 </a:solidFill>
@@ -8901,7 +8932,7 @@
               <a:t>Hardware  </a:t>
             </a:r>
             <a:r>
-              <a:rPr sz="1050" b="0">
+              <a:rPr sz="1000" b="0">
                 <a:solidFill>
                   <a:srgbClr val="262B33"/>
                 </a:solidFill>
@@ -8916,14 +8947,14 @@
                 <a:spcPct val="100000"/>
               </a:lnSpc>
               <a:spcBef>
-                <a:spcPts val="900"/>
-              </a:spcBef>
-              <a:spcAft>
-                <a:spcPts val="0"/>
-              </a:spcAft>
-            </a:pPr>
-            <a:r>
-              <a:rPr sz="1050" b="1">
+                <a:spcPts val="800"/>
+              </a:spcBef>
+              <a:spcAft>
+                <a:spcPts val="0"/>
+              </a:spcAft>
+            </a:pPr>
+            <a:r>
+              <a:rPr sz="1000" b="1">
                 <a:solidFill>
                   <a:srgbClr val="1F497D"/>
                 </a:solidFill>
@@ -8932,7 +8963,7 @@
               <a:t>Weather  </a:t>
             </a:r>
             <a:r>
-              <a:rPr sz="1050" b="0">
+              <a:rPr sz="1000" b="0">
                 <a:solidFill>
                   <a:srgbClr val="262B33"/>
                 </a:solidFill>
@@ -8947,14 +8978,14 @@
                 <a:spcPct val="100000"/>
               </a:lnSpc>
               <a:spcBef>
-                <a:spcPts val="900"/>
-              </a:spcBef>
-              <a:spcAft>
-                <a:spcPts val="0"/>
-              </a:spcAft>
-            </a:pPr>
-            <a:r>
-              <a:rPr sz="1050" b="1">
+                <a:spcPts val="800"/>
+              </a:spcBef>
+              <a:spcAft>
+                <a:spcPts val="0"/>
+              </a:spcAft>
+            </a:pPr>
+            <a:r>
+              <a:rPr sz="1000" b="1">
                 <a:solidFill>
                   <a:srgbClr val="1F497D"/>
                 </a:solidFill>
@@ -8963,7 +8994,7 @@
               <a:t>Roads  </a:t>
             </a:r>
             <a:r>
-              <a:rPr sz="1050" b="0">
+              <a:rPr sz="1000" b="0">
                 <a:solidFill>
                   <a:srgbClr val="262B33"/>
                 </a:solidFill>
@@ -8978,14 +9009,14 @@
                 <a:spcPct val="100000"/>
               </a:lnSpc>
               <a:spcBef>
-                <a:spcPts val="900"/>
-              </a:spcBef>
-              <a:spcAft>
-                <a:spcPts val="0"/>
-              </a:spcAft>
-            </a:pPr>
-            <a:r>
-              <a:rPr sz="1050" b="1">
+                <a:spcPts val="800"/>
+              </a:spcBef>
+              <a:spcAft>
+                <a:spcPts val="0"/>
+              </a:spcAft>
+            </a:pPr>
+            <a:r>
+              <a:rPr sz="1000" b="1">
                 <a:solidFill>
                   <a:srgbClr val="1F497D"/>
                 </a:solidFill>
@@ -8994,7 +9025,7 @@
               <a:t>Transport DB  </a:t>
             </a:r>
             <a:r>
-              <a:rPr sz="1050" b="0">
+              <a:rPr sz="1000" b="0">
                 <a:solidFill>
                   <a:srgbClr val="262B33"/>
                 </a:solidFill>
@@ -9013,7 +9044,7 @@
         </p:nvSpPr>
         <p:spPr>
           <a:xfrm>
-            <a:off x="411480" y="3794760"/>
+            <a:off x="411480" y="3648456"/>
             <a:ext cx="11365992" cy="237744"/>
           </a:xfrm>
           <a:prstGeom prst="rect">
@@ -9058,7 +9089,7 @@
         </p:nvSpPr>
         <p:spPr>
           <a:xfrm>
-            <a:off x="411480" y="3982212"/>
+            <a:off x="411480" y="3835908"/>
             <a:ext cx="11365992" cy="12801"/>
           </a:xfrm>
           <a:prstGeom prst="rect">
@@ -9102,8 +9133,8 @@
         </p:nvSpPr>
         <p:spPr>
           <a:xfrm>
-            <a:off x="411480" y="4087368"/>
-            <a:ext cx="1680972" cy="676656"/>
+            <a:off x="411480" y="3941064"/>
+            <a:ext cx="1680972" cy="603504"/>
           </a:xfrm>
           <a:prstGeom prst="roundRect">
             <a:avLst>
@@ -9150,7 +9181,7 @@
               </a:spcAft>
             </a:pPr>
             <a:r>
-              <a:rPr sz="1050" b="1" i="0">
+              <a:rPr sz="1000" b="1" i="0">
                 <a:solidFill>
                   <a:srgbClr val="1F497D"/>
                 </a:solidFill>
@@ -9172,7 +9203,7 @@
               </a:spcAft>
             </a:pPr>
             <a:r>
-              <a:rPr sz="900" b="0" i="0">
+              <a:rPr sz="850" b="0" i="0">
                 <a:solidFill>
                   <a:srgbClr val="5A636E"/>
                 </a:solidFill>
@@ -9191,7 +9222,7 @@
         </p:nvSpPr>
         <p:spPr>
           <a:xfrm>
-            <a:off x="2138172" y="4379976"/>
+            <a:off x="2138172" y="4197096"/>
             <a:ext cx="164592" cy="91440"/>
           </a:xfrm>
           <a:prstGeom prst="rightArrow">
@@ -9235,8 +9266,8 @@
         </p:nvSpPr>
         <p:spPr>
           <a:xfrm>
-            <a:off x="2348484" y="4087368"/>
-            <a:ext cx="1680972" cy="676656"/>
+            <a:off x="2348484" y="3941064"/>
+            <a:ext cx="1680972" cy="603504"/>
           </a:xfrm>
           <a:prstGeom prst="roundRect">
             <a:avLst>
@@ -9283,7 +9314,7 @@
               </a:spcAft>
             </a:pPr>
             <a:r>
-              <a:rPr sz="1050" b="1" i="0">
+              <a:rPr sz="1000" b="1" i="0">
                 <a:solidFill>
                   <a:srgbClr val="1F497D"/>
                 </a:solidFill>
@@ -9305,7 +9336,7 @@
               </a:spcAft>
             </a:pPr>
             <a:r>
-              <a:rPr sz="900" b="0" i="0">
+              <a:rPr sz="850" b="0" i="0">
                 <a:solidFill>
                   <a:srgbClr val="5A636E"/>
                 </a:solidFill>
@@ -9324,7 +9355,7 @@
         </p:nvSpPr>
         <p:spPr>
           <a:xfrm>
-            <a:off x="4075176" y="4379976"/>
+            <a:off x="4075176" y="4197096"/>
             <a:ext cx="164592" cy="91440"/>
           </a:xfrm>
           <a:prstGeom prst="rightArrow">
@@ -9368,8 +9399,8 @@
         </p:nvSpPr>
         <p:spPr>
           <a:xfrm>
-            <a:off x="4285488" y="4087368"/>
-            <a:ext cx="1680972" cy="676656"/>
+            <a:off x="4285488" y="3941064"/>
+            <a:ext cx="1680972" cy="603504"/>
           </a:xfrm>
           <a:prstGeom prst="roundRect">
             <a:avLst>
@@ -9416,7 +9447,7 @@
               </a:spcAft>
             </a:pPr>
             <a:r>
-              <a:rPr sz="1050" b="1" i="0">
+              <a:rPr sz="1000" b="1" i="0">
                 <a:solidFill>
                   <a:srgbClr val="1F497D"/>
                 </a:solidFill>
@@ -9438,7 +9469,7 @@
               </a:spcAft>
             </a:pPr>
             <a:r>
-              <a:rPr sz="900" b="0" i="0">
+              <a:rPr sz="850" b="0" i="0">
                 <a:solidFill>
                   <a:srgbClr val="5A636E"/>
                 </a:solidFill>
@@ -9457,7 +9488,7 @@
         </p:nvSpPr>
         <p:spPr>
           <a:xfrm>
-            <a:off x="6012180" y="4379976"/>
+            <a:off x="6012180" y="4197096"/>
             <a:ext cx="164592" cy="91440"/>
           </a:xfrm>
           <a:prstGeom prst="rightArrow">
@@ -9501,8 +9532,8 @@
         </p:nvSpPr>
         <p:spPr>
           <a:xfrm>
-            <a:off x="6222492" y="4087368"/>
-            <a:ext cx="1680972" cy="676656"/>
+            <a:off x="6222492" y="3941064"/>
+            <a:ext cx="1680972" cy="603504"/>
           </a:xfrm>
           <a:prstGeom prst="roundRect">
             <a:avLst>
@@ -9549,7 +9580,7 @@
               </a:spcAft>
             </a:pPr>
             <a:r>
-              <a:rPr sz="1050" b="1" i="0">
+              <a:rPr sz="1000" b="1" i="0">
                 <a:solidFill>
                   <a:srgbClr val="1F497D"/>
                 </a:solidFill>
@@ -9571,7 +9602,7 @@
               </a:spcAft>
             </a:pPr>
             <a:r>
-              <a:rPr sz="900" b="0" i="0">
+              <a:rPr sz="850" b="0" i="0">
                 <a:solidFill>
                   <a:srgbClr val="5A636E"/>
                 </a:solidFill>
@@ -9590,7 +9621,7 @@
         </p:nvSpPr>
         <p:spPr>
           <a:xfrm>
-            <a:off x="7949184" y="4379976"/>
+            <a:off x="7949184" y="4197096"/>
             <a:ext cx="164592" cy="91440"/>
           </a:xfrm>
           <a:prstGeom prst="rightArrow">
@@ -9634,8 +9665,8 @@
         </p:nvSpPr>
         <p:spPr>
           <a:xfrm>
-            <a:off x="8159496" y="4087368"/>
-            <a:ext cx="1680972" cy="676656"/>
+            <a:off x="8159496" y="3941064"/>
+            <a:ext cx="1680972" cy="603504"/>
           </a:xfrm>
           <a:prstGeom prst="roundRect">
             <a:avLst>
@@ -9682,7 +9713,7 @@
               </a:spcAft>
             </a:pPr>
             <a:r>
-              <a:rPr sz="1050" b="1" i="0">
+              <a:rPr sz="1000" b="1" i="0">
                 <a:solidFill>
                   <a:srgbClr val="1F497D"/>
                 </a:solidFill>
@@ -9704,7 +9735,7 @@
               </a:spcAft>
             </a:pPr>
             <a:r>
-              <a:rPr sz="900" b="0" i="0">
+              <a:rPr sz="850" b="0" i="0">
                 <a:solidFill>
                   <a:srgbClr val="5A636E"/>
                 </a:solidFill>
@@ -9723,7 +9754,7 @@
         </p:nvSpPr>
         <p:spPr>
           <a:xfrm>
-            <a:off x="9886188" y="4379976"/>
+            <a:off x="9886188" y="4197096"/>
             <a:ext cx="164592" cy="91440"/>
           </a:xfrm>
           <a:prstGeom prst="rightArrow">
@@ -9767,8 +9798,8 @@
         </p:nvSpPr>
         <p:spPr>
           <a:xfrm>
-            <a:off x="10096500" y="4087368"/>
-            <a:ext cx="1680972" cy="676656"/>
+            <a:off x="10096500" y="3941064"/>
+            <a:ext cx="1680972" cy="603504"/>
           </a:xfrm>
           <a:prstGeom prst="roundRect">
             <a:avLst>
@@ -9815,7 +9846,7 @@
               </a:spcAft>
             </a:pPr>
             <a:r>
-              <a:rPr sz="1050" b="1" i="0">
+              <a:rPr sz="1000" b="1" i="0">
                 <a:solidFill>
                   <a:srgbClr val="1F497D"/>
                 </a:solidFill>
@@ -9837,7 +9868,7 @@
               </a:spcAft>
             </a:pPr>
             <a:r>
-              <a:rPr sz="900" b="0" i="0">
+              <a:rPr sz="850" b="0" i="0">
                 <a:solidFill>
                   <a:srgbClr val="5A636E"/>
                 </a:solidFill>
@@ -9850,14 +9881,682 @@
       </p:sp>
       <p:sp>
         <p:nvSpPr>
-          <p:cNvPr id="17431" name="Rounded Rectangle 17430"/>
+          <p:cNvPr id="17431" name="TextBox 17430"/>
+          <p:cNvSpPr txBox="1"/>
+          <p:nvPr/>
+        </p:nvSpPr>
+        <p:spPr>
+          <a:xfrm>
+            <a:off x="411480" y="4690872"/>
+            <a:ext cx="11365992" cy="219456"/>
+          </a:xfrm>
+          <a:prstGeom prst="rect">
+            <a:avLst/>
+          </a:prstGeom>
+          <a:noFill/>
+        </p:spPr>
+        <p:txBody>
+          <a:bodyPr wrap="square" lIns="0" rIns="0" tIns="0" bIns="0">
+            <a:spAutoFit/>
+          </a:bodyPr>
+          <a:lstStyle/>
+          <a:p>
+            <a:pPr algn="l">
+              <a:lnSpc>
+                <a:spcPct val="100000"/>
+              </a:lnSpc>
+              <a:spcBef>
+                <a:spcPts val="0"/>
+              </a:spcBef>
+              <a:spcAft>
+                <a:spcPts val="0"/>
+              </a:spcAft>
+            </a:pPr>
+            <a:r>
+              <a:rPr sz="900" b="1" i="0">
+                <a:solidFill>
+                  <a:srgbClr val="1F497D"/>
+                </a:solidFill>
+                <a:latin typeface="Arial"/>
+              </a:rPr>
+              <a:t>EXPECTED SOLUTION — EVERY COMPONENT, AND WHAT IMPLEMENTS IT</a:t>
+            </a:r>
+          </a:p>
+        </p:txBody>
+      </p:sp>
+      <p:sp>
+        <p:nvSpPr>
+          <p:cNvPr id="17432" name="Rounded Rectangle 17431"/>
           <p:cNvSpPr/>
           <p:nvPr/>
         </p:nvSpPr>
         <p:spPr>
           <a:xfrm>
-            <a:off x="411480" y="4965192"/>
-            <a:ext cx="11365992" cy="786384"/>
+            <a:off x="411480" y="4928616"/>
+            <a:ext cx="1545336" cy="603504"/>
+          </a:xfrm>
+          <a:prstGeom prst="roundRect">
+            <a:avLst>
+              <a:gd name="adj" fmla="val 8000"/>
+            </a:avLst>
+          </a:prstGeom>
+          <a:solidFill>
+            <a:srgbClr val="F2F5F9"/>
+          </a:solidFill>
+          <a:ln w="9525">
+            <a:solidFill>
+              <a:srgbClr val="C9D6E4"/>
+            </a:solidFill>
+          </a:ln>
+          <a:effectLst/>
+        </p:spPr>
+        <p:style>
+          <a:lnRef idx="1">
+            <a:schemeClr val="accent1"/>
+          </a:lnRef>
+          <a:fillRef idx="3">
+            <a:schemeClr val="accent1"/>
+          </a:fillRef>
+          <a:effectRef idx="2">
+            <a:schemeClr val="accent1"/>
+          </a:effectRef>
+          <a:fontRef idx="minor">
+            <a:schemeClr val="lt1"/>
+          </a:fontRef>
+        </p:style>
+        <p:txBody>
+          <a:bodyPr rtlCol="0" anchor="t" wrap="square" lIns="109728" rIns="109728" tIns="54864" bIns="54864"/>
+          <a:lstStyle/>
+          <a:p>
+            <a:pPr algn="ctr">
+              <a:lnSpc>
+                <a:spcPct val="95000"/>
+              </a:lnSpc>
+              <a:spcBef>
+                <a:spcPts val="0"/>
+              </a:spcBef>
+              <a:spcAft>
+                <a:spcPts val="0"/>
+              </a:spcAft>
+            </a:pPr>
+            <a:r>
+              <a:rPr sz="900" b="1" i="0">
+                <a:solidFill>
+                  <a:srgbClr val="1F497D"/>
+                </a:solidFill>
+                <a:latin typeface="Arial"/>
+              </a:rPr>
+              <a:t>AI route engine</a:t>
+            </a:r>
+          </a:p>
+          <a:p>
+            <a:pPr algn="ctr">
+              <a:lnSpc>
+                <a:spcPct val="95000"/>
+              </a:lnSpc>
+              <a:spcBef>
+                <a:spcPts val="200"/>
+              </a:spcBef>
+              <a:spcAft>
+                <a:spcPts val="0"/>
+              </a:spcAft>
+            </a:pPr>
+            <a:r>
+              <a:rPr sz="750" b="0" i="0">
+                <a:solidFill>
+                  <a:srgbClr val="5A636E"/>
+                </a:solidFill>
+                <a:latin typeface="Arial"/>
+              </a:rPr>
+              <a:t>3 OSRM alternates scored, condition-adjusted ETA</a:t>
+            </a:r>
+          </a:p>
+        </p:txBody>
+      </p:sp>
+      <p:sp>
+        <p:nvSpPr>
+          <p:cNvPr id="17433" name="Rounded Rectangle 17432"/>
+          <p:cNvSpPr/>
+          <p:nvPr/>
+        </p:nvSpPr>
+        <p:spPr>
+          <a:xfrm>
+            <a:off x="2048256" y="4928616"/>
+            <a:ext cx="1545336" cy="603504"/>
+          </a:xfrm>
+          <a:prstGeom prst="roundRect">
+            <a:avLst>
+              <a:gd name="adj" fmla="val 8000"/>
+            </a:avLst>
+          </a:prstGeom>
+          <a:solidFill>
+            <a:srgbClr val="F2F5F9"/>
+          </a:solidFill>
+          <a:ln w="9525">
+            <a:solidFill>
+              <a:srgbClr val="C9D6E4"/>
+            </a:solidFill>
+          </a:ln>
+          <a:effectLst/>
+        </p:spPr>
+        <p:style>
+          <a:lnRef idx="1">
+            <a:schemeClr val="accent1"/>
+          </a:lnRef>
+          <a:fillRef idx="3">
+            <a:schemeClr val="accent1"/>
+          </a:fillRef>
+          <a:effectRef idx="2">
+            <a:schemeClr val="accent1"/>
+          </a:effectRef>
+          <a:fontRef idx="minor">
+            <a:schemeClr val="lt1"/>
+          </a:fontRef>
+        </p:style>
+        <p:txBody>
+          <a:bodyPr rtlCol="0" anchor="t" wrap="square" lIns="109728" rIns="109728" tIns="54864" bIns="54864"/>
+          <a:lstStyle/>
+          <a:p>
+            <a:pPr algn="ctr">
+              <a:lnSpc>
+                <a:spcPct val="95000"/>
+              </a:lnSpc>
+              <a:spcBef>
+                <a:spcPts val="0"/>
+              </a:spcBef>
+              <a:spcAft>
+                <a:spcPts val="0"/>
+              </a:spcAft>
+            </a:pPr>
+            <a:r>
+              <a:rPr sz="900" b="1" i="0">
+                <a:solidFill>
+                  <a:srgbClr val="1F497D"/>
+                </a:solidFill>
+                <a:latin typeface="Arial"/>
+              </a:rPr>
+              <a:t>GIS dashboard</a:t>
+            </a:r>
+          </a:p>
+          <a:p>
+            <a:pPr algn="ctr">
+              <a:lnSpc>
+                <a:spcPct val="95000"/>
+              </a:lnSpc>
+              <a:spcBef>
+                <a:spcPts val="200"/>
+              </a:spcBef>
+              <a:spcAft>
+                <a:spcPts val="0"/>
+              </a:spcAft>
+            </a:pPr>
+            <a:r>
+              <a:rPr sz="750" b="0" i="0">
+                <a:solidFill>
+                  <a:srgbClr val="5A636E"/>
+                </a:solidFill>
+                <a:latin typeface="Arial"/>
+              </a:rPr>
+              <a:t>MapLibre, 42 stretches, status / risk / forecast</a:t>
+            </a:r>
+          </a:p>
+        </p:txBody>
+      </p:sp>
+      <p:sp>
+        <p:nvSpPr>
+          <p:cNvPr id="17434" name="Rounded Rectangle 17433"/>
+          <p:cNvSpPr/>
+          <p:nvPr/>
+        </p:nvSpPr>
+        <p:spPr>
+          <a:xfrm>
+            <a:off x="3685032" y="4928616"/>
+            <a:ext cx="1545336" cy="603504"/>
+          </a:xfrm>
+          <a:prstGeom prst="roundRect">
+            <a:avLst>
+              <a:gd name="adj" fmla="val 8000"/>
+            </a:avLst>
+          </a:prstGeom>
+          <a:solidFill>
+            <a:srgbClr val="F2F5F9"/>
+          </a:solidFill>
+          <a:ln w="9525">
+            <a:solidFill>
+              <a:srgbClr val="C9D6E4"/>
+            </a:solidFill>
+          </a:ln>
+          <a:effectLst/>
+        </p:spPr>
+        <p:style>
+          <a:lnRef idx="1">
+            <a:schemeClr val="accent1"/>
+          </a:lnRef>
+          <a:fillRef idx="3">
+            <a:schemeClr val="accent1"/>
+          </a:fillRef>
+          <a:effectRef idx="2">
+            <a:schemeClr val="accent1"/>
+          </a:effectRef>
+          <a:fontRef idx="minor">
+            <a:schemeClr val="lt1"/>
+          </a:fontRef>
+        </p:style>
+        <p:txBody>
+          <a:bodyPr rtlCol="0" anchor="t" wrap="square" lIns="109728" rIns="109728" tIns="54864" bIns="54864"/>
+          <a:lstStyle/>
+          <a:p>
+            <a:pPr algn="ctr">
+              <a:lnSpc>
+                <a:spcPct val="95000"/>
+              </a:lnSpc>
+              <a:spcBef>
+                <a:spcPts val="0"/>
+              </a:spcBef>
+              <a:spcAft>
+                <a:spcPts val="0"/>
+              </a:spcAft>
+            </a:pPr>
+            <a:r>
+              <a:rPr sz="900" b="1" i="0">
+                <a:solidFill>
+                  <a:srgbClr val="1F497D"/>
+                </a:solidFill>
+                <a:latin typeface="Arial"/>
+              </a:rPr>
+              <a:t>GPS tracking</a:t>
+            </a:r>
+          </a:p>
+          <a:p>
+            <a:pPr algn="ctr">
+              <a:lnSpc>
+                <a:spcPct val="95000"/>
+              </a:lnSpc>
+              <a:spcBef>
+                <a:spcPts val="200"/>
+              </a:spcBef>
+              <a:spcAft>
+                <a:spcPts val="0"/>
+              </a:spcAft>
+            </a:pPr>
+            <a:r>
+              <a:rPr sz="750" b="0" i="0">
+                <a:solidFill>
+                  <a:srgbClr val="5A636E"/>
+                </a:solidFill>
+                <a:latin typeface="Arial"/>
+              </a:rPr>
+              <a:t>20 s pings, map-matched, essentials flagged</a:t>
+            </a:r>
+          </a:p>
+        </p:txBody>
+      </p:sp>
+      <p:sp>
+        <p:nvSpPr>
+          <p:cNvPr id="17435" name="Rounded Rectangle 17434"/>
+          <p:cNvSpPr/>
+          <p:nvPr/>
+        </p:nvSpPr>
+        <p:spPr>
+          <a:xfrm>
+            <a:off x="5321808" y="4928616"/>
+            <a:ext cx="1545336" cy="603504"/>
+          </a:xfrm>
+          <a:prstGeom prst="roundRect">
+            <a:avLst>
+              <a:gd name="adj" fmla="val 8000"/>
+            </a:avLst>
+          </a:prstGeom>
+          <a:solidFill>
+            <a:srgbClr val="F2F5F9"/>
+          </a:solidFill>
+          <a:ln w="9525">
+            <a:solidFill>
+              <a:srgbClr val="C9D6E4"/>
+            </a:solidFill>
+          </a:ln>
+          <a:effectLst/>
+        </p:spPr>
+        <p:style>
+          <a:lnRef idx="1">
+            <a:schemeClr val="accent1"/>
+          </a:lnRef>
+          <a:fillRef idx="3">
+            <a:schemeClr val="accent1"/>
+          </a:fillRef>
+          <a:effectRef idx="2">
+            <a:schemeClr val="accent1"/>
+          </a:effectRef>
+          <a:fontRef idx="minor">
+            <a:schemeClr val="lt1"/>
+          </a:fontRef>
+        </p:style>
+        <p:txBody>
+          <a:bodyPr rtlCol="0" anchor="t" wrap="square" lIns="109728" rIns="109728" tIns="54864" bIns="54864"/>
+          <a:lstStyle/>
+          <a:p>
+            <a:pPr algn="ctr">
+              <a:lnSpc>
+                <a:spcPct val="95000"/>
+              </a:lnSpc>
+              <a:spcBef>
+                <a:spcPts val="0"/>
+              </a:spcBef>
+              <a:spcAft>
+                <a:spcPts val="0"/>
+              </a:spcAft>
+            </a:pPr>
+            <a:r>
+              <a:rPr sz="900" b="1" i="0">
+                <a:solidFill>
+                  <a:srgbClr val="1F497D"/>
+                </a:solidFill>
+                <a:latin typeface="Arial"/>
+              </a:rPr>
+              <a:t>Real-time alerts</a:t>
+            </a:r>
+          </a:p>
+          <a:p>
+            <a:pPr algn="ctr">
+              <a:lnSpc>
+                <a:spcPct val="95000"/>
+              </a:lnSpc>
+              <a:spcBef>
+                <a:spcPts val="200"/>
+              </a:spcBef>
+              <a:spcAft>
+                <a:spcPts val="0"/>
+              </a:spcAft>
+            </a:pPr>
+            <a:r>
+              <a:rPr sz="750" b="0" i="0">
+                <a:solidFill>
+                  <a:srgbClr val="5A636E"/>
+                </a:solidFill>
+                <a:latin typeface="Arial"/>
+              </a:rPr>
+              <a:t>7 alert kinds, push + in-app, 10 languages</a:t>
+            </a:r>
+          </a:p>
+        </p:txBody>
+      </p:sp>
+      <p:sp>
+        <p:nvSpPr>
+          <p:cNvPr id="17436" name="Rounded Rectangle 17435"/>
+          <p:cNvSpPr/>
+          <p:nvPr/>
+        </p:nvSpPr>
+        <p:spPr>
+          <a:xfrm>
+            <a:off x="6958584" y="4928616"/>
+            <a:ext cx="1545336" cy="603504"/>
+          </a:xfrm>
+          <a:prstGeom prst="roundRect">
+            <a:avLst>
+              <a:gd name="adj" fmla="val 8000"/>
+            </a:avLst>
+          </a:prstGeom>
+          <a:solidFill>
+            <a:srgbClr val="F2F5F9"/>
+          </a:solidFill>
+          <a:ln w="9525">
+            <a:solidFill>
+              <a:srgbClr val="C9D6E4"/>
+            </a:solidFill>
+          </a:ln>
+          <a:effectLst/>
+        </p:spPr>
+        <p:style>
+          <a:lnRef idx="1">
+            <a:schemeClr val="accent1"/>
+          </a:lnRef>
+          <a:fillRef idx="3">
+            <a:schemeClr val="accent1"/>
+          </a:fillRef>
+          <a:effectRef idx="2">
+            <a:schemeClr val="accent1"/>
+          </a:effectRef>
+          <a:fontRef idx="minor">
+            <a:schemeClr val="lt1"/>
+          </a:fontRef>
+        </p:style>
+        <p:txBody>
+          <a:bodyPr rtlCol="0" anchor="t" wrap="square" lIns="109728" rIns="109728" tIns="54864" bIns="54864"/>
+          <a:lstStyle/>
+          <a:p>
+            <a:pPr algn="ctr">
+              <a:lnSpc>
+                <a:spcPct val="95000"/>
+              </a:lnSpc>
+              <a:spcBef>
+                <a:spcPts val="0"/>
+              </a:spcBef>
+              <a:spcAft>
+                <a:spcPts val="0"/>
+              </a:spcAft>
+            </a:pPr>
+            <a:r>
+              <a:rPr sz="900" b="1" i="0">
+                <a:solidFill>
+                  <a:srgbClr val="1F497D"/>
+                </a:solidFill>
+                <a:latin typeface="Arial"/>
+              </a:rPr>
+              <a:t>Mobile + web apps</a:t>
+            </a:r>
+          </a:p>
+          <a:p>
+            <a:pPr algn="ctr">
+              <a:lnSpc>
+                <a:spcPct val="95000"/>
+              </a:lnSpc>
+              <a:spcBef>
+                <a:spcPts val="200"/>
+              </a:spcBef>
+              <a:spcAft>
+                <a:spcPts val="0"/>
+              </a:spcAft>
+            </a:pPr>
+            <a:r>
+              <a:rPr sz="750" b="0" i="0">
+                <a:solidFill>
+                  <a:srgbClr val="5A636E"/>
+                </a:solidFill>
+                <a:latin typeface="Arial"/>
+              </a:rPr>
+              <a:t>4 Android apps and a control dashboard</a:t>
+            </a:r>
+          </a:p>
+        </p:txBody>
+      </p:sp>
+      <p:sp>
+        <p:nvSpPr>
+          <p:cNvPr id="17437" name="Rounded Rectangle 17436"/>
+          <p:cNvSpPr/>
+          <p:nvPr/>
+        </p:nvSpPr>
+        <p:spPr>
+          <a:xfrm>
+            <a:off x="8595360" y="4928616"/>
+            <a:ext cx="1545336" cy="603504"/>
+          </a:xfrm>
+          <a:prstGeom prst="roundRect">
+            <a:avLst>
+              <a:gd name="adj" fmla="val 8000"/>
+            </a:avLst>
+          </a:prstGeom>
+          <a:solidFill>
+            <a:srgbClr val="F2F5F9"/>
+          </a:solidFill>
+          <a:ln w="9525">
+            <a:solidFill>
+              <a:srgbClr val="C9D6E4"/>
+            </a:solidFill>
+          </a:ln>
+          <a:effectLst/>
+        </p:spPr>
+        <p:style>
+          <a:lnRef idx="1">
+            <a:schemeClr val="accent1"/>
+          </a:lnRef>
+          <a:fillRef idx="3">
+            <a:schemeClr val="accent1"/>
+          </a:fillRef>
+          <a:effectRef idx="2">
+            <a:schemeClr val="accent1"/>
+          </a:effectRef>
+          <a:fontRef idx="minor">
+            <a:schemeClr val="lt1"/>
+          </a:fontRef>
+        </p:style>
+        <p:txBody>
+          <a:bodyPr rtlCol="0" anchor="t" wrap="square" lIns="109728" rIns="109728" tIns="54864" bIns="54864"/>
+          <a:lstStyle/>
+          <a:p>
+            <a:pPr algn="ctr">
+              <a:lnSpc>
+                <a:spcPct val="95000"/>
+              </a:lnSpc>
+              <a:spcBef>
+                <a:spcPts val="0"/>
+              </a:spcBef>
+              <a:spcAft>
+                <a:spcPts val="0"/>
+              </a:spcAft>
+            </a:pPr>
+            <a:r>
+              <a:rPr sz="900" b="1" i="0">
+                <a:solidFill>
+                  <a:srgbClr val="1F497D"/>
+                </a:solidFill>
+                <a:latin typeface="Arial"/>
+              </a:rPr>
+              <a:t>External integration</a:t>
+            </a:r>
+          </a:p>
+          <a:p>
+            <a:pPr algn="ctr">
+              <a:lnSpc>
+                <a:spcPct val="95000"/>
+              </a:lnSpc>
+              <a:spcBef>
+                <a:spcPts val="200"/>
+              </a:spcBef>
+              <a:spcAft>
+                <a:spcPts val="0"/>
+              </a:spcAft>
+            </a:pPr>
+            <a:r>
+              <a:rPr sz="750" b="0" i="0">
+                <a:solidFill>
+                  <a:srgbClr val="5A636E"/>
+                </a:solidFill>
+                <a:latin typeface="Arial"/>
+              </a:rPr>
+              <a:t>Open-Meteo · OSRM · VAHAN</a:t>
+            </a:r>
+          </a:p>
+        </p:txBody>
+      </p:sp>
+      <p:sp>
+        <p:nvSpPr>
+          <p:cNvPr id="17438" name="Rounded Rectangle 17437"/>
+          <p:cNvSpPr/>
+          <p:nvPr/>
+        </p:nvSpPr>
+        <p:spPr>
+          <a:xfrm>
+            <a:off x="10232136" y="4928616"/>
+            <a:ext cx="1545336" cy="603504"/>
+          </a:xfrm>
+          <a:prstGeom prst="roundRect">
+            <a:avLst>
+              <a:gd name="adj" fmla="val 8000"/>
+            </a:avLst>
+          </a:prstGeom>
+          <a:solidFill>
+            <a:srgbClr val="F2F5F9"/>
+          </a:solidFill>
+          <a:ln w="9525">
+            <a:solidFill>
+              <a:srgbClr val="C9D6E4"/>
+            </a:solidFill>
+          </a:ln>
+          <a:effectLst/>
+        </p:spPr>
+        <p:style>
+          <a:lnRef idx="1">
+            <a:schemeClr val="accent1"/>
+          </a:lnRef>
+          <a:fillRef idx="3">
+            <a:schemeClr val="accent1"/>
+          </a:fillRef>
+          <a:effectRef idx="2">
+            <a:schemeClr val="accent1"/>
+          </a:effectRef>
+          <a:fontRef idx="minor">
+            <a:schemeClr val="lt1"/>
+          </a:fontRef>
+        </p:style>
+        <p:txBody>
+          <a:bodyPr rtlCol="0" anchor="t" wrap="square" lIns="109728" rIns="109728" tIns="54864" bIns="54864"/>
+          <a:lstStyle/>
+          <a:p>
+            <a:pPr algn="ctr">
+              <a:lnSpc>
+                <a:spcPct val="95000"/>
+              </a:lnSpc>
+              <a:spcBef>
+                <a:spcPts val="0"/>
+              </a:spcBef>
+              <a:spcAft>
+                <a:spcPts val="0"/>
+              </a:spcAft>
+            </a:pPr>
+            <a:r>
+              <a:rPr sz="900" b="1" i="0">
+                <a:solidFill>
+                  <a:srgbClr val="1F497D"/>
+                </a:solidFill>
+                <a:latin typeface="Arial"/>
+              </a:rPr>
+              <a:t>Cloud + offline</a:t>
+            </a:r>
+          </a:p>
+          <a:p>
+            <a:pPr algn="ctr">
+              <a:lnSpc>
+                <a:spcPct val="95000"/>
+              </a:lnSpc>
+              <a:spcBef>
+                <a:spcPts val="200"/>
+              </a:spcBef>
+              <a:spcAft>
+                <a:spcPts val="0"/>
+              </a:spcAft>
+            </a:pPr>
+            <a:r>
+              <a:rPr sz="750" b="0" i="0">
+                <a:solidFill>
+                  <a:srgbClr val="5A636E"/>
+                </a:solidFill>
+                <a:latin typeface="Arial"/>
+              </a:rPr>
+              <a:t>Atlas · JWT · queue-and-sync on the phone</a:t>
+            </a:r>
+          </a:p>
+        </p:txBody>
+      </p:sp>
+      <p:sp>
+        <p:nvSpPr>
+          <p:cNvPr id="17439" name="Rounded Rectangle 17438"/>
+          <p:cNvSpPr/>
+          <p:nvPr/>
+        </p:nvSpPr>
+        <p:spPr>
+          <a:xfrm>
+            <a:off x="411480" y="5660136"/>
+            <a:ext cx="11365992" cy="475488"/>
           </a:xfrm>
           <a:prstGeom prst="roundRect">
             <a:avLst>
@@ -9894,7 +10593,7 @@
           <a:p>
             <a:pPr algn="l">
               <a:lnSpc>
-                <a:spcPct val="102000"/>
+                <a:spcPct val="100000"/>
               </a:lnSpc>
               <a:spcBef>
                 <a:spcPts val="0"/>
@@ -9904,40 +10603,22 @@
               </a:spcAft>
             </a:pPr>
             <a:r>
-              <a:rPr sz="1100" b="1">
+              <a:rPr sz="1050" b="1">
                 <a:solidFill>
                   <a:srgbClr val="1F497D"/>
                 </a:solidFill>
                 <a:latin typeface="Arial"/>
               </a:rPr>
-              <a:t>Working prototype  </a:t>
-            </a:r>
-            <a:r>
-              <a:rPr sz="1100" b="0">
+              <a:t>Trust rule  </a:t>
+            </a:r>
+            <a:r>
+              <a:rPr sz="1050" b="0">
                 <a:solidFill>
                   <a:srgbClr val="262B33"/>
                 </a:solidFill>
                 <a:latin typeface="Arial"/>
               </a:rPr>
-              <a:t>— four Android apps, the control dashboard and the backend are built and running against live data.  </a:t>
-            </a:r>
-            <a:r>
-              <a:rPr sz="1100" b="1">
-                <a:solidFill>
-                  <a:srgbClr val="1F497D"/>
-                </a:solidFill>
-                <a:latin typeface="Arial"/>
-              </a:rPr>
-              <a:t>Trust rule:  </a:t>
-            </a:r>
-            <a:r>
-              <a:rPr sz="1100" b="0">
-                <a:solidFill>
-                  <a:srgbClr val="262B33"/>
-                </a:solidFill>
-                <a:latin typeface="Arial"/>
-              </a:rPr>
-              <a:t>a status needs at least 4 samples from at least 2 distinct vehicles, and a driver's report is capped at RESTRICTED until an officer confirms it, so one parked vehicle can never close a highway.</a:t>
+              <a:t>— a status needs at least 4 samples from at least 2 distinct vehicles, and a driver's report is capped at RESTRICTED until an officer confirms it, so one parked vehicle can never close a highway.</a:t>
             </a:r>
           </a:p>
         </p:txBody>
@@ -12688,7 +13369,7 @@
                 </a:solidFill>
                 <a:latin typeface="Arial"/>
               </a:rPr>
-              <a:t>Medicines, rations and produce arrive — and an alert in the language spoken at home when they will not.</a:t>
+              <a:t>Medicines, food, produce and construction material arrive — and an alert in the language spoken at home when they will not.</a:t>
             </a:r>
           </a:p>
         </p:txBody>
@@ -12791,7 +13472,7 @@
         <p:spPr>
           <a:xfrm>
             <a:off x="411480" y="3172968"/>
-            <a:ext cx="1444752" cy="640080"/>
+            <a:ext cx="1444752" cy="585216"/>
           </a:xfrm>
           <a:prstGeom prst="roundRect">
             <a:avLst>
@@ -12856,7 +13537,7 @@
         <p:spPr>
           <a:xfrm>
             <a:off x="1965960" y="3172968"/>
-            <a:ext cx="9811512" cy="640080"/>
+            <a:ext cx="9811512" cy="585216"/>
           </a:xfrm>
           <a:prstGeom prst="roundRect">
             <a:avLst>
@@ -12922,8 +13603,8 @@
         </p:nvSpPr>
         <p:spPr>
           <a:xfrm>
-            <a:off x="411480" y="3895344"/>
-            <a:ext cx="1444752" cy="640080"/>
+            <a:off x="411480" y="3840480"/>
+            <a:ext cx="1444752" cy="585216"/>
           </a:xfrm>
           <a:prstGeom prst="roundRect">
             <a:avLst>
@@ -12987,8 +13668,8 @@
         </p:nvSpPr>
         <p:spPr>
           <a:xfrm>
-            <a:off x="1965960" y="3895344"/>
-            <a:ext cx="9811512" cy="640080"/>
+            <a:off x="1965960" y="3840480"/>
+            <a:ext cx="9811512" cy="585216"/>
           </a:xfrm>
           <a:prstGeom prst="roundRect">
             <a:avLst>
@@ -13054,8 +13735,8 @@
         </p:nvSpPr>
         <p:spPr>
           <a:xfrm>
-            <a:off x="411480" y="4617720"/>
-            <a:ext cx="1444752" cy="640080"/>
+            <a:off x="411480" y="4507992"/>
+            <a:ext cx="1444752" cy="585216"/>
           </a:xfrm>
           <a:prstGeom prst="roundRect">
             <a:avLst>
@@ -13119,8 +13800,8 @@
         </p:nvSpPr>
         <p:spPr>
           <a:xfrm>
-            <a:off x="1965960" y="4617720"/>
-            <a:ext cx="9811512" cy="640080"/>
+            <a:off x="1965960" y="4507992"/>
+            <a:ext cx="9811512" cy="585216"/>
           </a:xfrm>
           <a:prstGeom prst="roundRect">
             <a:avLst>
@@ -13186,8 +13867,8 @@
         </p:nvSpPr>
         <p:spPr>
           <a:xfrm>
-            <a:off x="411480" y="5340096"/>
-            <a:ext cx="1444752" cy="640080"/>
+            <a:off x="411480" y="5175504"/>
+            <a:ext cx="1444752" cy="585216"/>
           </a:xfrm>
           <a:prstGeom prst="roundRect">
             <a:avLst>
@@ -13251,8 +13932,8 @@
         </p:nvSpPr>
         <p:spPr>
           <a:xfrm>
-            <a:off x="1965960" y="5340096"/>
-            <a:ext cx="9811512" cy="640080"/>
+            <a:off x="1965960" y="5175504"/>
+            <a:ext cx="9811512" cy="585216"/>
           </a:xfrm>
           <a:prstGeom prst="roundRect">
             <a:avLst>
@@ -13306,6 +13987,73 @@
                 <a:latin typeface="Arial"/>
               </a:rPr>
               <a:t>Every incident carries a photo, a GPS fix, a timestamp and the officer who confirmed it — an evidence trail, not a phone call.</a:t>
+            </a:r>
+          </a:p>
+        </p:txBody>
+      </p:sp>
+      <p:sp>
+        <p:nvSpPr>
+          <p:cNvPr id="17426" name="Rounded Rectangle 17425"/>
+          <p:cNvSpPr/>
+          <p:nvPr/>
+        </p:nvSpPr>
+        <p:spPr>
+          <a:xfrm>
+            <a:off x="411480" y="5879592"/>
+            <a:ext cx="11365992" cy="402336"/>
+          </a:xfrm>
+          <a:prstGeom prst="roundRect">
+            <a:avLst>
+              <a:gd name="adj" fmla="val 8000"/>
+            </a:avLst>
+          </a:prstGeom>
+          <a:solidFill>
+            <a:srgbClr val="FFFFFF"/>
+          </a:solidFill>
+          <a:ln w="15875">
+            <a:solidFill>
+              <a:srgbClr val="4F81BD"/>
+            </a:solidFill>
+          </a:ln>
+          <a:effectLst/>
+        </p:spPr>
+        <p:style>
+          <a:lnRef idx="1">
+            <a:schemeClr val="accent1"/>
+          </a:lnRef>
+          <a:fillRef idx="3">
+            <a:schemeClr val="accent1"/>
+          </a:fillRef>
+          <a:effectRef idx="2">
+            <a:schemeClr val="accent1"/>
+          </a:effectRef>
+          <a:fontRef idx="minor">
+            <a:schemeClr val="lt1"/>
+          </a:fontRef>
+        </p:style>
+        <p:txBody>
+          <a:bodyPr rtlCol="0" anchor="ctr" wrap="square" lIns="109728" rIns="109728" tIns="54864" bIns="54864"/>
+          <a:lstStyle/>
+          <a:p>
+            <a:pPr algn="ctr">
+              <a:lnSpc>
+                <a:spcPct val="100000"/>
+              </a:lnSpc>
+              <a:spcBef>
+                <a:spcPts val="0"/>
+              </a:spcBef>
+              <a:spcAft>
+                <a:spcPts val="0"/>
+              </a:spcAft>
+            </a:pPr>
+            <a:r>
+              <a:rPr sz="1050" b="1" i="0">
+                <a:solidFill>
+                  <a:srgbClr val="1F497D"/>
+                </a:solidFill>
+                <a:latin typeface="Arial"/>
+              </a:rPr>
+              <a:t>Improved regional connectivity  ·  stronger emergency response  ·  fewer supply-chain disruptions  ·  planning and monitoring on evidence</a:t>
             </a:r>
           </a:p>
         </p:txBody>

--- a/SIH2026_Sukobin.pptx
+++ b/SIH2026_Sukobin.pptx
@@ -5540,8 +5540,8 @@
         </p:nvSpPr>
         <p:spPr>
           <a:xfrm>
-            <a:off x="1245686" y="1024128"/>
-            <a:ext cx="8534400" cy="1143000"/>
+            <a:off x="1245686" y="1005840"/>
+            <a:ext cx="8534400" cy="1188720"/>
           </a:xfrm>
         </p:spPr>
         <p:txBody>
@@ -5681,7 +5681,7 @@
               </a:spcAft>
             </a:pPr>
             <a:r>
-              <a:rPr sz="1350" b="1">
+              <a:rPr sz="1250" b="1">
                 <a:solidFill>
                   <a:srgbClr val="1F497D"/>
                 </a:solidFill>
@@ -5690,13 +5690,13 @@
               <a:t>Problem Statement ID – </a:t>
             </a:r>
             <a:r>
-              <a:rPr sz="1350" b="0">
+              <a:rPr sz="1250" b="0">
                 <a:solidFill>
                   <a:srgbClr val="262B33"/>
                 </a:solidFill>
                 <a:latin typeface="Arial"/>
               </a:rPr>
-              <a:t>SIH26-MDoNER-01</a:t>
+              <a:t>26002</a:t>
             </a:r>
             <a:endParaRPr lang="en-US" dirty="0"/>
           </a:p>
@@ -5706,7 +5706,38 @@
                 <a:spcPct val="95000"/>
               </a:lnSpc>
               <a:spcBef>
-                <a:spcPts val="900"/>
+                <a:spcPts val="800"/>
+              </a:spcBef>
+              <a:spcAft>
+                <a:spcPts val="0"/>
+              </a:spcAft>
+            </a:pPr>
+            <a:r>
+              <a:rPr sz="1150" b="1">
+                <a:solidFill>
+                  <a:srgbClr val="1F497D"/>
+                </a:solidFill>
+                <a:latin typeface="Arial"/>
+              </a:rPr>
+              <a:t>Problem Statement Title – </a:t>
+            </a:r>
+            <a:r>
+              <a:rPr sz="1150" b="0">
+                <a:solidFill>
+                  <a:srgbClr val="262B33"/>
+                </a:solidFill>
+                <a:latin typeface="Arial"/>
+              </a:rPr>
+              <a:t>AI-Enabled Logistics Accessibility Intelligence Platform for the North Eastern Region</a:t>
+            </a:r>
+          </a:p>
+          <a:p>
+            <a:pPr algn="l">
+              <a:lnSpc>
+                <a:spcPct val="95000"/>
+              </a:lnSpc>
+              <a:spcBef>
+                <a:spcPts val="800"/>
               </a:spcBef>
               <a:spcAft>
                 <a:spcPts val="0"/>
@@ -5719,7 +5750,7 @@
                 </a:solidFill>
                 <a:latin typeface="Arial"/>
               </a:rPr>
-              <a:t>Problem Statement Title – </a:t>
+              <a:t>Organization – </a:t>
             </a:r>
             <a:r>
               <a:rPr sz="1250" b="0">
@@ -5728,7 +5759,7 @@
                 </a:solidFill>
                 <a:latin typeface="Arial"/>
               </a:rPr>
-              <a:t>AI-Enabled Logistics Accessibility Intelligence Platform for the North Eastern Region</a:t>
+              <a:t>Ministry of Development of North Eastern Region (MDoNER)</a:t>
             </a:r>
           </a:p>
           <a:p>
@@ -5737,14 +5768,14 @@
                 <a:spcPct val="95000"/>
               </a:lnSpc>
               <a:spcBef>
-                <a:spcPts val="900"/>
-              </a:spcBef>
-              <a:spcAft>
-                <a:spcPts val="0"/>
-              </a:spcAft>
-            </a:pPr>
-            <a:r>
-              <a:rPr sz="1350" b="1">
+                <a:spcPts val="800"/>
+              </a:spcBef>
+              <a:spcAft>
+                <a:spcPts val="0"/>
+              </a:spcAft>
+            </a:pPr>
+            <a:r>
+              <a:rPr sz="1250" b="1">
                 <a:solidFill>
                   <a:srgbClr val="1F497D"/>
                 </a:solidFill>
@@ -5753,7 +5784,7 @@
               <a:t>Theme – </a:t>
             </a:r>
             <a:r>
-              <a:rPr sz="1350" b="0">
+              <a:rPr sz="1250" b="0">
                 <a:solidFill>
                   <a:srgbClr val="262B33"/>
                 </a:solidFill>
@@ -5768,14 +5799,14 @@
                 <a:spcPct val="95000"/>
               </a:lnSpc>
               <a:spcBef>
-                <a:spcPts val="900"/>
-              </a:spcBef>
-              <a:spcAft>
-                <a:spcPts val="0"/>
-              </a:spcAft>
-            </a:pPr>
-            <a:r>
-              <a:rPr sz="1350" b="1">
+                <a:spcPts val="800"/>
+              </a:spcBef>
+              <a:spcAft>
+                <a:spcPts val="0"/>
+              </a:spcAft>
+            </a:pPr>
+            <a:r>
+              <a:rPr sz="1250" b="1">
                 <a:solidFill>
                   <a:srgbClr val="1F497D"/>
                 </a:solidFill>
@@ -5784,7 +5815,7 @@
               <a:t>PS Category – </a:t>
             </a:r>
             <a:r>
-              <a:rPr sz="1350" b="0">
+              <a:rPr sz="1250" b="0">
                 <a:solidFill>
                   <a:srgbClr val="262B33"/>
                 </a:solidFill>
@@ -5799,14 +5830,14 @@
                 <a:spcPct val="95000"/>
               </a:lnSpc>
               <a:spcBef>
-                <a:spcPts val="900"/>
-              </a:spcBef>
-              <a:spcAft>
-                <a:spcPts val="0"/>
-              </a:spcAft>
-            </a:pPr>
-            <a:r>
-              <a:rPr sz="1350" b="1">
+                <a:spcPts val="800"/>
+              </a:spcBef>
+              <a:spcAft>
+                <a:spcPts val="0"/>
+              </a:spcAft>
+            </a:pPr>
+            <a:r>
+              <a:rPr sz="1250" b="1">
                 <a:solidFill>
                   <a:srgbClr val="1F497D"/>
                 </a:solidFill>
@@ -5815,7 +5846,7 @@
               <a:t>Team ID – </a:t>
             </a:r>
             <a:r>
-              <a:rPr sz="1350" b="0">
+              <a:rPr sz="1250" b="0">
                 <a:solidFill>
                   <a:srgbClr val="262B33"/>
                 </a:solidFill>
@@ -5830,14 +5861,14 @@
                 <a:spcPct val="95000"/>
               </a:lnSpc>
               <a:spcBef>
-                <a:spcPts val="900"/>
-              </a:spcBef>
-              <a:spcAft>
-                <a:spcPts val="0"/>
-              </a:spcAft>
-            </a:pPr>
-            <a:r>
-              <a:rPr sz="1350" b="1">
+                <a:spcPts val="800"/>
+              </a:spcBef>
+              <a:spcAft>
+                <a:spcPts val="0"/>
+              </a:spcAft>
+            </a:pPr>
+            <a:r>
+              <a:rPr sz="1250" b="1">
                 <a:solidFill>
                   <a:srgbClr val="1F497D"/>
                 </a:solidFill>
@@ -5846,7 +5877,7 @@
               <a:t>Team Name – </a:t>
             </a:r>
             <a:r>
-              <a:rPr sz="1350" b="0">
+              <a:rPr sz="1250" b="0">
                 <a:solidFill>
                   <a:srgbClr val="262B33"/>
                 </a:solidFill>
@@ -6264,7 +6295,7 @@
         <p:spPr>
           <a:xfrm>
             <a:off x="411480" y="1435608"/>
-            <a:ext cx="6400800" cy="1691640"/>
+            <a:ext cx="6400800" cy="1572768"/>
           </a:xfrm>
           <a:prstGeom prst="rect">
             <a:avLst/>
@@ -6291,11 +6322,11 @@
             <a:r>
               <a:rPr sz="1100" b="1">
                 <a:solidFill>
-                  <a:srgbClr val="C25E1E"/>
-                </a:solidFill>
-                <a:latin typeface="Arial"/>
-              </a:rPr>
-              <a:t>The problem. </a:t>
+                  <a:srgbClr val="1F497D"/>
+                </a:solidFill>
+                <a:latin typeface="Arial"/>
+              </a:rPr>
+              <a:t>Sukobin </a:t>
             </a:r>
             <a:r>
               <a:rPr sz="1100" b="0">
@@ -6304,7 +6335,7 @@
                 </a:solidFill>
                 <a:latin typeface="Arial"/>
               </a:rPr>
-              <a:t>Landslides, floods and infrastructure gaps cut the NER's roads without warning. Medicines, food, produce and construction material arrive late or not at all, and no integrated platform exists to see it happening.</a:t>
+              <a:t>combines GPS from registered transporters, field reports, weather and road-network data to understand how accessible a route is. Instead of costly roadside sensors, it turns vehicles already travelling the region into mobile road probes.</a:t>
             </a:r>
           </a:p>
           <a:p>
@@ -6335,7 +6366,7 @@
                 </a:solidFill>
                 <a:latin typeface="Arial"/>
               </a:rPr>
-              <a:t>Anyone already travelling A to B enters their vehicle and route, and is offered only the consignments lying along that road, up to what the vehicle holds. No fleet, no empty return leg.</a:t>
+              <a:t>A driver declares a journey they were making anyway and is offered only the consignments lying along that road, within capacity.</a:t>
             </a:r>
           </a:p>
           <a:p>
@@ -6357,7 +6388,7 @@
                 </a:solidFill>
                 <a:latin typeface="Arial"/>
               </a:rPr>
-              <a:t>Those carriers stream GPS while they drive. </a:t>
+              <a:t>Their movement is the measurement. </a:t>
             </a:r>
             <a:r>
               <a:rPr sz="1100" b="0">
@@ -6366,7 +6397,7 @@
                 </a:solidFill>
                 <a:latin typeface="Arial"/>
               </a:rPr>
-              <a:t>Median speed against each road's baseline is a live accessibility reading; the weather model turns it into a 72-hour closure forecast.</a:t>
+              <a:t>Median speed against each road's baseline gives live accessibility; AI turns it into risk, forecasts and alternate routes.</a:t>
             </a:r>
           </a:p>
         </p:txBody>
@@ -6379,7 +6410,7 @@
         </p:nvSpPr>
         <p:spPr>
           <a:xfrm>
-            <a:off x="411480" y="3191256"/>
+            <a:off x="411480" y="3081528"/>
             <a:ext cx="6400800" cy="237744"/>
           </a:xfrm>
           <a:prstGeom prst="rect">
@@ -6424,7 +6455,7 @@
         </p:nvSpPr>
         <p:spPr>
           <a:xfrm>
-            <a:off x="411480" y="3378708"/>
+            <a:off x="411480" y="3268980"/>
             <a:ext cx="6400800" cy="12801"/>
           </a:xfrm>
           <a:prstGeom prst="rect">
@@ -6468,8 +6499,8 @@
         </p:nvSpPr>
         <p:spPr>
           <a:xfrm>
-            <a:off x="411480" y="3483864"/>
-            <a:ext cx="6400800" cy="1060704"/>
+            <a:off x="411480" y="3374136"/>
+            <a:ext cx="6400800" cy="1078992"/>
           </a:xfrm>
           <a:prstGeom prst="roundRect">
             <a:avLst>
@@ -6522,7 +6553,7 @@
                 </a:solidFill>
                 <a:latin typeface="Arial"/>
               </a:rPr>
-              <a:t>•  The carrier network IS the sensor network — </a:t>
+              <a:t>•  The carrier network IS the sensing network — </a:t>
             </a:r>
             <a:r>
               <a:rPr sz="1050" b="0">
@@ -6531,7 +6562,7 @@
                 </a:solidFill>
                 <a:latin typeface="Arial"/>
               </a:rPr>
-              <a:t>one GPS stream both delivers goods and measures the road.</a:t>
+              <a:t>one journey delivers goods and reads the road.</a:t>
             </a:r>
           </a:p>
           <a:p>
@@ -6553,7 +6584,7 @@
                 </a:solidFill>
                 <a:latin typeface="Arial"/>
               </a:rPr>
-              <a:t>•  Coverage without hardware — </a:t>
+              <a:t>•  No hardware, no dedicated fleet — </a:t>
             </a:r>
             <a:r>
               <a:rPr sz="1050" b="0">
@@ -6562,7 +6593,7 @@
                 </a:solidFill>
                 <a:latin typeface="Arial"/>
               </a:rPr>
-              <a:t>no roadside sensors, no dedicated fleet, nothing to power or maintain.</a:t>
+              <a:t>nothing to install, power or maintain anywhere.</a:t>
             </a:r>
           </a:p>
           <a:p>
@@ -6584,7 +6615,7 @@
                 </a:solidFill>
                 <a:latin typeface="Arial"/>
               </a:rPr>
-              <a:t>•  It improves as it is used — </a:t>
+              <a:t>•  Self-improving — </a:t>
             </a:r>
             <a:r>
               <a:rPr sz="1050" b="0">
@@ -6606,7 +6637,7 @@
         </p:nvSpPr>
         <p:spPr>
           <a:xfrm>
-            <a:off x="7086600" y="1435608"/>
+            <a:off x="7086600" y="1417320"/>
             <a:ext cx="4690872" cy="219456"/>
           </a:xfrm>
           <a:prstGeom prst="rect">
@@ -6651,8 +6682,8 @@
         </p:nvSpPr>
         <p:spPr>
           <a:xfrm>
-            <a:off x="7086600" y="1673352"/>
-            <a:ext cx="4690872" cy="457200"/>
+            <a:off x="7086600" y="1655064"/>
+            <a:ext cx="4690872" cy="438912"/>
           </a:xfrm>
           <a:prstGeom prst="roundRect">
             <a:avLst>
@@ -6699,7 +6730,7 @@
               </a:spcAft>
             </a:pPr>
             <a:r>
-              <a:rPr sz="1100" b="1" i="0">
+              <a:rPr sz="1050" b="1" i="0">
                 <a:solidFill>
                   <a:srgbClr val="1F497D"/>
                 </a:solidFill>
@@ -6718,8 +6749,8 @@
         </p:nvSpPr>
         <p:spPr>
           <a:xfrm>
-            <a:off x="9381744" y="2148840"/>
-            <a:ext cx="100584" cy="109728"/>
+            <a:off x="9381744" y="2112264"/>
+            <a:ext cx="100584" cy="100583"/>
           </a:xfrm>
           <a:prstGeom prst="downArrow">
             <a:avLst/>
@@ -6762,8 +6793,8 @@
         </p:nvSpPr>
         <p:spPr>
           <a:xfrm>
-            <a:off x="7086600" y="2276856"/>
-            <a:ext cx="4690872" cy="457200"/>
+            <a:off x="7086600" y="2231136"/>
+            <a:ext cx="4690872" cy="438912"/>
           </a:xfrm>
           <a:prstGeom prst="roundRect">
             <a:avLst>
@@ -6810,13 +6841,13 @@
               </a:spcAft>
             </a:pPr>
             <a:r>
-              <a:rPr sz="1100" b="0" i="0">
+              <a:rPr sz="1050" b="0" i="0">
                 <a:solidFill>
                   <a:srgbClr val="262B33"/>
                 </a:solidFill>
                 <a:latin typeface="Arial"/>
               </a:rPr>
-              <a:t>Offered only parcels on that road</a:t>
+              <a:t>Offered only consignments on that road</a:t>
             </a:r>
           </a:p>
         </p:txBody>
@@ -6829,8 +6860,8 @@
         </p:nvSpPr>
         <p:spPr>
           <a:xfrm>
-            <a:off x="9381744" y="2752344"/>
-            <a:ext cx="100584" cy="109728"/>
+            <a:off x="9381744" y="2688336"/>
+            <a:ext cx="100584" cy="100583"/>
           </a:xfrm>
           <a:prstGeom prst="downArrow">
             <a:avLst/>
@@ -6873,8 +6904,8 @@
         </p:nvSpPr>
         <p:spPr>
           <a:xfrm>
-            <a:off x="7086600" y="2880360"/>
-            <a:ext cx="4690872" cy="457200"/>
+            <a:off x="7086600" y="2807208"/>
+            <a:ext cx="4690872" cy="438912"/>
           </a:xfrm>
           <a:prstGeom prst="roundRect">
             <a:avLst>
@@ -6921,7 +6952,7 @@
               </a:spcAft>
             </a:pPr>
             <a:r>
-              <a:rPr sz="1100" b="0" i="0">
+              <a:rPr sz="1050" b="0" i="0">
                 <a:solidFill>
                   <a:srgbClr val="262B33"/>
                 </a:solidFill>
@@ -6940,8 +6971,8 @@
         </p:nvSpPr>
         <p:spPr>
           <a:xfrm>
-            <a:off x="9381744" y="3355848"/>
-            <a:ext cx="100584" cy="109728"/>
+            <a:off x="9381744" y="3264408"/>
+            <a:ext cx="100584" cy="100583"/>
           </a:xfrm>
           <a:prstGeom prst="downArrow">
             <a:avLst/>
@@ -6984,8 +7015,8 @@
         </p:nvSpPr>
         <p:spPr>
           <a:xfrm>
-            <a:off x="7086600" y="3483864"/>
-            <a:ext cx="4690872" cy="457200"/>
+            <a:off x="7086600" y="3383279"/>
+            <a:ext cx="4690872" cy="438912"/>
           </a:xfrm>
           <a:prstGeom prst="roundRect">
             <a:avLst>
@@ -7032,13 +7063,13 @@
               </a:spcAft>
             </a:pPr>
             <a:r>
-              <a:rPr sz="1100" b="1" i="0">
+              <a:rPr sz="1050" b="1" i="0">
                 <a:solidFill>
                   <a:srgbClr val="1F497D"/>
                 </a:solidFill>
                 <a:latin typeface="Arial"/>
               </a:rPr>
-              <a:t>Median speed vs baseline → status</a:t>
+              <a:t>Median speed vs baseline → road status</a:t>
             </a:r>
           </a:p>
         </p:txBody>
@@ -7051,8 +7082,8 @@
         </p:nvSpPr>
         <p:spPr>
           <a:xfrm>
-            <a:off x="9381744" y="3959352"/>
-            <a:ext cx="100584" cy="109728"/>
+            <a:off x="9381744" y="3840479"/>
+            <a:ext cx="100584" cy="100583"/>
           </a:xfrm>
           <a:prstGeom prst="downArrow">
             <a:avLst/>
@@ -7095,8 +7126,8 @@
         </p:nvSpPr>
         <p:spPr>
           <a:xfrm>
-            <a:off x="7086600" y="4087368"/>
-            <a:ext cx="4690872" cy="457200"/>
+            <a:off x="7086600" y="3959352"/>
+            <a:ext cx="4690872" cy="438912"/>
           </a:xfrm>
           <a:prstGeom prst="roundRect">
             <a:avLst>
@@ -7143,7 +7174,7 @@
               </a:spcAft>
             </a:pPr>
             <a:r>
-              <a:rPr sz="1100" b="0" i="0">
+              <a:rPr sz="1050" b="0" i="0">
                 <a:solidFill>
                   <a:srgbClr val="262B33"/>
                 </a:solidFill>
@@ -7162,7 +7193,7 @@
         </p:nvSpPr>
         <p:spPr>
           <a:xfrm>
-            <a:off x="411480" y="4636008"/>
+            <a:off x="411480" y="4562856"/>
             <a:ext cx="11365992" cy="237744"/>
           </a:xfrm>
           <a:prstGeom prst="rect">
@@ -7207,7 +7238,7 @@
         </p:nvSpPr>
         <p:spPr>
           <a:xfrm>
-            <a:off x="411480" y="4823460"/>
+            <a:off x="411480" y="4750308"/>
             <a:ext cx="11365992" cy="12801"/>
           </a:xfrm>
           <a:prstGeom prst="rect">
@@ -7251,8 +7282,8 @@
         </p:nvSpPr>
         <p:spPr>
           <a:xfrm>
-            <a:off x="411480" y="4928616"/>
-            <a:ext cx="2759202" cy="548640"/>
+            <a:off x="411480" y="4855464"/>
+            <a:ext cx="2759202" cy="530352"/>
           </a:xfrm>
           <a:prstGeom prst="roundRect">
             <a:avLst>
@@ -7299,7 +7330,7 @@
               </a:spcAft>
             </a:pPr>
             <a:r>
-              <a:rPr sz="1050" b="1">
+              <a:rPr sz="1000" b="1">
                 <a:solidFill>
                   <a:srgbClr val="0070C0"/>
                 </a:solidFill>
@@ -7308,7 +7339,7 @@
               <a:t>(a)  </a:t>
             </a:r>
             <a:r>
-              <a:rPr sz="1050" b="1">
+              <a:rPr sz="1000" b="1">
                 <a:solidFill>
                   <a:srgbClr val="1F497D"/>
                 </a:solidFill>
@@ -7330,7 +7361,7 @@
               </a:spcAft>
             </a:pPr>
             <a:r>
-              <a:rPr sz="900" b="0" i="0">
+              <a:rPr sz="850" b="0" i="0">
                 <a:solidFill>
                   <a:srgbClr val="5A636E"/>
                 </a:solidFill>
@@ -7349,8 +7380,8 @@
         </p:nvSpPr>
         <p:spPr>
           <a:xfrm>
-            <a:off x="3280410" y="4928616"/>
-            <a:ext cx="2759202" cy="548640"/>
+            <a:off x="3280410" y="4855464"/>
+            <a:ext cx="2759202" cy="530352"/>
           </a:xfrm>
           <a:prstGeom prst="roundRect">
             <a:avLst>
@@ -7397,7 +7428,7 @@
               </a:spcAft>
             </a:pPr>
             <a:r>
-              <a:rPr sz="1050" b="1">
+              <a:rPr sz="1000" b="1">
                 <a:solidFill>
                   <a:srgbClr val="0070C0"/>
                 </a:solidFill>
@@ -7406,7 +7437,7 @@
               <a:t>(b)  </a:t>
             </a:r>
             <a:r>
-              <a:rPr sz="1050" b="1">
+              <a:rPr sz="1000" b="1">
                 <a:solidFill>
                   <a:srgbClr val="1F497D"/>
                 </a:solidFill>
@@ -7428,7 +7459,7 @@
               </a:spcAft>
             </a:pPr>
             <a:r>
-              <a:rPr sz="900" b="0" i="0">
+              <a:rPr sz="850" b="0" i="0">
                 <a:solidFill>
                   <a:srgbClr val="5A636E"/>
                 </a:solidFill>
@@ -7447,8 +7478,8 @@
         </p:nvSpPr>
         <p:spPr>
           <a:xfrm>
-            <a:off x="6149340" y="4928616"/>
-            <a:ext cx="2759202" cy="548640"/>
+            <a:off x="6149340" y="4855464"/>
+            <a:ext cx="2759202" cy="530352"/>
           </a:xfrm>
           <a:prstGeom prst="roundRect">
             <a:avLst>
@@ -7495,7 +7526,7 @@
               </a:spcAft>
             </a:pPr>
             <a:r>
-              <a:rPr sz="1050" b="1">
+              <a:rPr sz="1000" b="1">
                 <a:solidFill>
                   <a:srgbClr val="0070C0"/>
                 </a:solidFill>
@@ -7504,7 +7535,7 @@
               <a:t>(c)  </a:t>
             </a:r>
             <a:r>
-              <a:rPr sz="1050" b="1">
+              <a:rPr sz="1000" b="1">
                 <a:solidFill>
                   <a:srgbClr val="1F497D"/>
                 </a:solidFill>
@@ -7526,7 +7557,7 @@
               </a:spcAft>
             </a:pPr>
             <a:r>
-              <a:rPr sz="900" b="0" i="0">
+              <a:rPr sz="850" b="0" i="0">
                 <a:solidFill>
                   <a:srgbClr val="5A636E"/>
                 </a:solidFill>
@@ -7545,8 +7576,8 @@
         </p:nvSpPr>
         <p:spPr>
           <a:xfrm>
-            <a:off x="9018270" y="4928616"/>
-            <a:ext cx="2759202" cy="548640"/>
+            <a:off x="9018270" y="4855464"/>
+            <a:ext cx="2759202" cy="530352"/>
           </a:xfrm>
           <a:prstGeom prst="roundRect">
             <a:avLst>
@@ -7593,7 +7624,7 @@
               </a:spcAft>
             </a:pPr>
             <a:r>
-              <a:rPr sz="1050" b="1">
+              <a:rPr sz="1000" b="1">
                 <a:solidFill>
                   <a:srgbClr val="0070C0"/>
                 </a:solidFill>
@@ -7602,7 +7633,7 @@
               <a:t>(d)  </a:t>
             </a:r>
             <a:r>
-              <a:rPr sz="1050" b="1">
+              <a:rPr sz="1000" b="1">
                 <a:solidFill>
                   <a:srgbClr val="1F497D"/>
                 </a:solidFill>
@@ -7624,7 +7655,7 @@
               </a:spcAft>
             </a:pPr>
             <a:r>
-              <a:rPr sz="900" b="0" i="0">
+              <a:rPr sz="850" b="0" i="0">
                 <a:solidFill>
                   <a:srgbClr val="5A636E"/>
                 </a:solidFill>
@@ -7643,8 +7674,8 @@
         </p:nvSpPr>
         <p:spPr>
           <a:xfrm>
-            <a:off x="411480" y="5559552"/>
-            <a:ext cx="2759202" cy="548640"/>
+            <a:off x="411480" y="5458968"/>
+            <a:ext cx="2759202" cy="530352"/>
           </a:xfrm>
           <a:prstGeom prst="roundRect">
             <a:avLst>
@@ -7691,7 +7722,7 @@
               </a:spcAft>
             </a:pPr>
             <a:r>
-              <a:rPr sz="1050" b="1">
+              <a:rPr sz="1000" b="1">
                 <a:solidFill>
                   <a:srgbClr val="0070C0"/>
                 </a:solidFill>
@@ -7700,7 +7731,7 @@
               <a:t>(e)  </a:t>
             </a:r>
             <a:r>
-              <a:rPr sz="1050" b="1">
+              <a:rPr sz="1000" b="1">
                 <a:solidFill>
                   <a:srgbClr val="1F497D"/>
                 </a:solidFill>
@@ -7722,7 +7753,7 @@
               </a:spcAft>
             </a:pPr>
             <a:r>
-              <a:rPr sz="900" b="0" i="0">
+              <a:rPr sz="850" b="0" i="0">
                 <a:solidFill>
                   <a:srgbClr val="5A636E"/>
                 </a:solidFill>
@@ -7741,8 +7772,8 @@
         </p:nvSpPr>
         <p:spPr>
           <a:xfrm>
-            <a:off x="3280410" y="5559552"/>
-            <a:ext cx="2759202" cy="548640"/>
+            <a:off x="3280410" y="5458968"/>
+            <a:ext cx="2759202" cy="530352"/>
           </a:xfrm>
           <a:prstGeom prst="roundRect">
             <a:avLst>
@@ -7789,7 +7820,7 @@
               </a:spcAft>
             </a:pPr>
             <a:r>
-              <a:rPr sz="1050" b="1">
+              <a:rPr sz="1000" b="1">
                 <a:solidFill>
                   <a:srgbClr val="0070C0"/>
                 </a:solidFill>
@@ -7798,7 +7829,7 @@
               <a:t>(f)  </a:t>
             </a:r>
             <a:r>
-              <a:rPr sz="1050" b="1">
+              <a:rPr sz="1000" b="1">
                 <a:solidFill>
                   <a:srgbClr val="1F497D"/>
                 </a:solidFill>
@@ -7820,7 +7851,7 @@
               </a:spcAft>
             </a:pPr>
             <a:r>
-              <a:rPr sz="900" b="0" i="0">
+              <a:rPr sz="850" b="0" i="0">
                 <a:solidFill>
                   <a:srgbClr val="5A636E"/>
                 </a:solidFill>
@@ -7839,8 +7870,8 @@
         </p:nvSpPr>
         <p:spPr>
           <a:xfrm>
-            <a:off x="6149340" y="5559552"/>
-            <a:ext cx="2759202" cy="548640"/>
+            <a:off x="6149340" y="5458968"/>
+            <a:ext cx="2759202" cy="530352"/>
           </a:xfrm>
           <a:prstGeom prst="roundRect">
             <a:avLst>
@@ -7887,7 +7918,7 @@
               </a:spcAft>
             </a:pPr>
             <a:r>
-              <a:rPr sz="1050" b="1">
+              <a:rPr sz="1000" b="1">
                 <a:solidFill>
                   <a:srgbClr val="0070C0"/>
                 </a:solidFill>
@@ -7896,7 +7927,7 @@
               <a:t>(g)  </a:t>
             </a:r>
             <a:r>
-              <a:rPr sz="1050" b="1">
+              <a:rPr sz="1000" b="1">
                 <a:solidFill>
                   <a:srgbClr val="1F497D"/>
                 </a:solidFill>
@@ -7918,7 +7949,7 @@
               </a:spcAft>
             </a:pPr>
             <a:r>
-              <a:rPr sz="900" b="0" i="0">
+              <a:rPr sz="850" b="0" i="0">
                 <a:solidFill>
                   <a:srgbClr val="5A636E"/>
                 </a:solidFill>
@@ -7937,8 +7968,8 @@
         </p:nvSpPr>
         <p:spPr>
           <a:xfrm>
-            <a:off x="9018270" y="5559552"/>
-            <a:ext cx="2759202" cy="548640"/>
+            <a:off x="9018270" y="5458968"/>
+            <a:ext cx="2759202" cy="530352"/>
           </a:xfrm>
           <a:prstGeom prst="roundRect">
             <a:avLst>
@@ -7985,7 +8016,7 @@
               </a:spcAft>
             </a:pPr>
             <a:r>
-              <a:rPr sz="1050" b="1">
+              <a:rPr sz="1000" b="1">
                 <a:solidFill>
                   <a:srgbClr val="0070C0"/>
                 </a:solidFill>
@@ -7994,7 +8025,7 @@
               <a:t>(h)  </a:t>
             </a:r>
             <a:r>
-              <a:rPr sz="1050" b="1">
+              <a:rPr sz="1000" b="1">
                 <a:solidFill>
                   <a:srgbClr val="1F497D"/>
                 </a:solidFill>
@@ -8016,7 +8047,7 @@
               </a:spcAft>
             </a:pPr>
             <a:r>
-              <a:rPr sz="900" b="0" i="0">
+              <a:rPr sz="850" b="0" i="0">
                 <a:solidFill>
                   <a:srgbClr val="5A636E"/>
                 </a:solidFill>
@@ -8403,7 +8434,7 @@
         <p:spPr>
           <a:xfrm>
             <a:off x="411480" y="1435608"/>
-            <a:ext cx="3654552" cy="219456"/>
+            <a:ext cx="3666744" cy="219456"/>
           </a:xfrm>
           <a:prstGeom prst="rect">
             <a:avLst/>
@@ -8448,7 +8479,7 @@
         <p:spPr>
           <a:xfrm>
             <a:off x="411480" y="1673352"/>
-            <a:ext cx="3654552" cy="1847088"/>
+            <a:ext cx="3666744" cy="1517904"/>
           </a:xfrm>
           <a:prstGeom prst="roundRect">
             <a:avLst>
@@ -8485,125 +8516,125 @@
           <a:p>
             <a:pPr algn="l">
               <a:lnSpc>
-                <a:spcPct val="100000"/>
-              </a:lnSpc>
-              <a:spcBef>
-                <a:spcPts val="0"/>
-              </a:spcBef>
-              <a:spcAft>
-                <a:spcPts val="0"/>
-              </a:spcAft>
-            </a:pPr>
-            <a:r>
-              <a:rPr sz="1000" b="1">
+                <a:spcPct val="98000"/>
+              </a:lnSpc>
+              <a:spcBef>
+                <a:spcPts val="0"/>
+              </a:spcBef>
+              <a:spcAft>
+                <a:spcPts val="0"/>
+              </a:spcAft>
+            </a:pPr>
+            <a:r>
+              <a:rPr sz="950" b="1">
                 <a:solidFill>
                   <a:srgbClr val="1F497D"/>
                 </a:solidFill>
                 <a:latin typeface="Arial"/>
               </a:rPr>
+              <a:t>Mobile  </a:t>
+            </a:r>
+            <a:r>
+              <a:rPr sz="950" b="0">
+                <a:solidFill>
+                  <a:srgbClr val="262B33"/>
+                </a:solidFill>
+                <a:latin typeface="Arial"/>
+              </a:rPr>
+              <a:t>Kotlin + XML — 4 Android apps: customer, merchant, partner, officer</a:t>
+            </a:r>
+          </a:p>
+          <a:p>
+            <a:pPr algn="l">
+              <a:lnSpc>
+                <a:spcPct val="98000"/>
+              </a:lnSpc>
+              <a:spcBef>
+                <a:spcPts val="700"/>
+              </a:spcBef>
+              <a:spcAft>
+                <a:spcPts val="0"/>
+              </a:spcAft>
+            </a:pPr>
+            <a:r>
+              <a:rPr sz="950" b="1">
+                <a:solidFill>
+                  <a:srgbClr val="1F497D"/>
+                </a:solidFill>
+                <a:latin typeface="Arial"/>
+              </a:rPr>
+              <a:t>Web  </a:t>
+            </a:r>
+            <a:r>
+              <a:rPr sz="950" b="0">
+                <a:solidFill>
+                  <a:srgbClr val="262B33"/>
+                </a:solidFill>
+                <a:latin typeface="Arial"/>
+              </a:rPr>
+              <a:t>React · Vite · MapLibre GL dashboard</a:t>
+            </a:r>
+          </a:p>
+          <a:p>
+            <a:pPr algn="l">
+              <a:lnSpc>
+                <a:spcPct val="98000"/>
+              </a:lnSpc>
+              <a:spcBef>
+                <a:spcPts val="700"/>
+              </a:spcBef>
+              <a:spcAft>
+                <a:spcPts val="0"/>
+              </a:spcAft>
+            </a:pPr>
+            <a:r>
+              <a:rPr sz="950" b="1">
+                <a:solidFill>
+                  <a:srgbClr val="1F497D"/>
+                </a:solidFill>
+                <a:latin typeface="Arial"/>
+              </a:rPr>
               <a:t>Backend  </a:t>
             </a:r>
             <a:r>
-              <a:rPr sz="1000" b="0">
+              <a:rPr sz="950" b="0">
                 <a:solidFill>
                   <a:srgbClr val="262B33"/>
                 </a:solidFill>
                 <a:latin typeface="Arial"/>
               </a:rPr>
-              <a:t>Node.js · Express 5 · MongoDB with 2dsphere indexes · JWT</a:t>
+              <a:t>Node.js · Express 5 · MongoDB 2dsphere · JWT</a:t>
             </a:r>
           </a:p>
           <a:p>
             <a:pPr algn="l">
               <a:lnSpc>
-                <a:spcPct val="100000"/>
-              </a:lnSpc>
-              <a:spcBef>
-                <a:spcPts val="800"/>
-              </a:spcBef>
-              <a:spcAft>
-                <a:spcPts val="0"/>
-              </a:spcAft>
-            </a:pPr>
-            <a:r>
-              <a:rPr sz="1000" b="1">
+                <a:spcPct val="98000"/>
+              </a:lnSpc>
+              <a:spcBef>
+                <a:spcPts val="700"/>
+              </a:spcBef>
+              <a:spcAft>
+                <a:spcPts val="0"/>
+              </a:spcAft>
+            </a:pPr>
+            <a:r>
+              <a:rPr sz="950" b="1">
                 <a:solidFill>
                   <a:srgbClr val="1F497D"/>
                 </a:solidFill>
                 <a:latin typeface="Arial"/>
               </a:rPr>
-              <a:t>Web  </a:t>
-            </a:r>
-            <a:r>
-              <a:rPr sz="1000" b="0">
+              <a:t>Cloud  </a:t>
+            </a:r>
+            <a:r>
+              <a:rPr sz="950" b="0">
                 <a:solidFill>
                   <a:srgbClr val="262B33"/>
                 </a:solidFill>
                 <a:latin typeface="Arial"/>
               </a:rPr>
-              <a:t>React · Vite · MapLibre GL for the GIS dashboard</a:t>
-            </a:r>
-          </a:p>
-          <a:p>
-            <a:pPr algn="l">
-              <a:lnSpc>
-                <a:spcPct val="100000"/>
-              </a:lnSpc>
-              <a:spcBef>
-                <a:spcPts val="800"/>
-              </a:spcBef>
-              <a:spcAft>
-                <a:spcPts val="0"/>
-              </a:spcAft>
-            </a:pPr>
-            <a:r>
-              <a:rPr sz="1000" b="1">
-                <a:solidFill>
-                  <a:srgbClr val="1F497D"/>
-                </a:solidFill>
-                <a:latin typeface="Arial"/>
-              </a:rPr>
-              <a:t>Mobile  </a:t>
-            </a:r>
-            <a:r>
-              <a:rPr sz="1000" b="0">
-                <a:solidFill>
-                  <a:srgbClr val="262B33"/>
-                </a:solidFill>
-                <a:latin typeface="Arial"/>
-              </a:rPr>
-              <a:t>Kotlin + XML — four Android apps: customer, merchant, driver, officer</a:t>
-            </a:r>
-          </a:p>
-          <a:p>
-            <a:pPr algn="l">
-              <a:lnSpc>
-                <a:spcPct val="100000"/>
-              </a:lnSpc>
-              <a:spcBef>
-                <a:spcPts val="800"/>
-              </a:spcBef>
-              <a:spcAft>
-                <a:spcPts val="0"/>
-              </a:spcAft>
-            </a:pPr>
-            <a:r>
-              <a:rPr sz="1000" b="1">
-                <a:solidFill>
-                  <a:srgbClr val="1F497D"/>
-                </a:solidFill>
-                <a:latin typeface="Arial"/>
-              </a:rPr>
-              <a:t>Cloud  </a:t>
-            </a:r>
-            <a:r>
-              <a:rPr sz="1000" b="0">
-                <a:solidFill>
-                  <a:srgbClr val="262B33"/>
-                </a:solidFill>
-                <a:latin typeface="Arial"/>
-              </a:rPr>
-              <a:t>Render · MongoDB Atlas · Cloudinary · Firebase push</a:t>
+              <a:t>Render · Atlas · Cloudinary · FCM</a:t>
             </a:r>
           </a:p>
         </p:txBody>
@@ -8616,8 +8647,8 @@
         </p:nvSpPr>
         <p:spPr>
           <a:xfrm>
-            <a:off x="4267200" y="1435608"/>
-            <a:ext cx="3654552" cy="219456"/>
+            <a:off x="4261104" y="1435608"/>
+            <a:ext cx="3666744" cy="219456"/>
           </a:xfrm>
           <a:prstGeom prst="rect">
             <a:avLst/>
@@ -8648,7 +8679,7 @@
                 </a:solidFill>
                 <a:latin typeface="Arial"/>
               </a:rPr>
-              <a:t>AI / ML</a:t>
+              <a:t>AI / ML AND DATA</a:t>
             </a:r>
           </a:p>
         </p:txBody>
@@ -8661,8 +8692,8 @@
         </p:nvSpPr>
         <p:spPr>
           <a:xfrm>
-            <a:off x="4267200" y="1673352"/>
-            <a:ext cx="3654552" cy="1847088"/>
+            <a:off x="4261104" y="1673352"/>
+            <a:ext cx="3666744" cy="1517904"/>
           </a:xfrm>
           <a:prstGeom prst="roundRect">
             <a:avLst>
@@ -8699,17 +8730,17 @@
           <a:p>
             <a:pPr algn="l">
               <a:lnSpc>
-                <a:spcPct val="100000"/>
-              </a:lnSpc>
-              <a:spcBef>
-                <a:spcPts val="0"/>
-              </a:spcBef>
-              <a:spcAft>
-                <a:spcPts val="0"/>
-              </a:spcAft>
-            </a:pPr>
-            <a:r>
-              <a:rPr sz="1000" b="1">
+                <a:spcPct val="98000"/>
+              </a:lnSpc>
+              <a:spcBef>
+                <a:spcPts val="0"/>
+              </a:spcBef>
+              <a:spcAft>
+                <a:spcPts val="0"/>
+              </a:spcAft>
+            </a:pPr>
+            <a:r>
+              <a:rPr sz="950" b="1">
                 <a:solidFill>
                   <a:srgbClr val="1F497D"/>
                 </a:solidFill>
@@ -8718,106 +8749,106 @@
               <a:t>Model  </a:t>
             </a:r>
             <a:r>
-              <a:rPr sz="1000" b="0">
+              <a:rPr sz="950" b="0">
                 <a:solidFill>
                   <a:srgbClr val="262B33"/>
                 </a:solidFill>
                 <a:latin typeface="Arial"/>
               </a:rPr>
-              <a:t>Logistic regression, benchmarked against gradient-boosted stumps</a:t>
+              <a:t>Logistic regression vs gradient-boosted stumps, 18 features</a:t>
             </a:r>
           </a:p>
           <a:p>
             <a:pPr algn="l">
               <a:lnSpc>
-                <a:spcPct val="100000"/>
-              </a:lnSpc>
-              <a:spcBef>
-                <a:spcPts val="800"/>
-              </a:spcBef>
-              <a:spcAft>
-                <a:spcPts val="0"/>
-              </a:spcAft>
-            </a:pPr>
-            <a:r>
-              <a:rPr sz="1000" b="1">
+                <a:spcPct val="98000"/>
+              </a:lnSpc>
+              <a:spcBef>
+                <a:spcPts val="700"/>
+              </a:spcBef>
+              <a:spcAft>
+                <a:spcPts val="0"/>
+              </a:spcAft>
+            </a:pPr>
+            <a:r>
+              <a:rPr sz="950" b="1">
                 <a:solidFill>
                   <a:srgbClr val="1F497D"/>
                 </a:solidFill>
                 <a:latin typeface="Arial"/>
               </a:rPr>
-              <a:t>Features  </a:t>
-            </a:r>
-            <a:r>
-              <a:rPr sz="1000" b="0">
+              <a:t>Trained on  </a:t>
+            </a:r>
+            <a:r>
+              <a:rPr sz="950" b="0">
                 <a:solidFill>
                   <a:srgbClr val="262B33"/>
                 </a:solidFill>
                 <a:latin typeface="Arial"/>
               </a:rPr>
-              <a:t>18 — antecedent rain, burst intensity, slope, terrain, closure history</a:t>
+              <a:t>109,116 road-days · AUC 0.883 · Brier 0.092</a:t>
             </a:r>
           </a:p>
           <a:p>
             <a:pPr algn="l">
               <a:lnSpc>
-                <a:spcPct val="100000"/>
-              </a:lnSpc>
-              <a:spcBef>
-                <a:spcPts val="800"/>
-              </a:spcBef>
-              <a:spcAft>
-                <a:spcPts val="0"/>
-              </a:spcAft>
-            </a:pPr>
-            <a:r>
-              <a:rPr sz="1000" b="1">
+                <a:spcPct val="98000"/>
+              </a:lnSpc>
+              <a:spcBef>
+                <a:spcPts val="700"/>
+              </a:spcBef>
+              <a:spcAft>
+                <a:spcPts val="0"/>
+              </a:spcAft>
+            </a:pPr>
+            <a:r>
+              <a:rPr sz="950" b="1">
                 <a:solidFill>
                   <a:srgbClr val="1F497D"/>
                 </a:solidFill>
                 <a:latin typeface="Arial"/>
               </a:rPr>
-              <a:t>Trained on  </a:t>
-            </a:r>
-            <a:r>
-              <a:rPr sz="1000" b="0">
+              <a:t>Weather  </a:t>
+            </a:r>
+            <a:r>
+              <a:rPr sz="950" b="0">
                 <a:solidFill>
                   <a:srgbClr val="262B33"/>
                 </a:solidFill>
                 <a:latin typeface="Arial"/>
               </a:rPr>
-              <a:t>109,116 road-days of observed weather · 42 stretches x 877 days</a:t>
+              <a:t>Open-Meteo archive + forecast, hourly</a:t>
             </a:r>
           </a:p>
           <a:p>
             <a:pPr algn="l">
               <a:lnSpc>
-                <a:spcPct val="100000"/>
-              </a:lnSpc>
-              <a:spcBef>
-                <a:spcPts val="800"/>
-              </a:spcBef>
-              <a:spcAft>
-                <a:spcPts val="0"/>
-              </a:spcAft>
-            </a:pPr>
-            <a:r>
-              <a:rPr sz="1000" b="1">
+                <a:spcPct val="98000"/>
+              </a:lnSpc>
+              <a:spcBef>
+                <a:spcPts val="700"/>
+              </a:spcBef>
+              <a:spcAft>
+                <a:spcPts val="0"/>
+              </a:spcAft>
+            </a:pPr>
+            <a:r>
+              <a:rPr sz="950" b="1">
                 <a:solidFill>
                   <a:srgbClr val="1F497D"/>
                 </a:solidFill>
                 <a:latin typeface="Arial"/>
               </a:rPr>
-              <a:t>Scored  </a:t>
-            </a:r>
-            <a:r>
-              <a:rPr sz="1000" b="0">
+              <a:t>Roads  </a:t>
+            </a:r>
+            <a:r>
+              <a:rPr sz="950" b="0">
                 <a:solidFill>
                   <a:srgbClr val="262B33"/>
                 </a:solidFill>
                 <a:latin typeface="Arial"/>
               </a:rPr>
-              <a:t>AUC 0.883 · Brier 0.092 · held out after 2026-03-01</a:t>
+              <a:t>OSRM geometry and route alternates · VAHAN lookup</a:t>
             </a:r>
           </a:p>
         </p:txBody>
@@ -8830,8 +8861,8 @@
         </p:nvSpPr>
         <p:spPr>
           <a:xfrm>
-            <a:off x="8122920" y="1435608"/>
-            <a:ext cx="3654552" cy="219456"/>
+            <a:off x="8110728" y="1435608"/>
+            <a:ext cx="3666744" cy="219456"/>
           </a:xfrm>
           <a:prstGeom prst="rect">
             <a:avLst/>
@@ -8862,7 +8893,7 @@
                 </a:solidFill>
                 <a:latin typeface="Arial"/>
               </a:rPr>
-              <a:t>HARDWARE AND EXTERNAL DATA</a:t>
+              <a:t>PLATFORM COMPONENTS</a:t>
             </a:r>
           </a:p>
         </p:txBody>
@@ -8875,8 +8906,8 @@
         </p:nvSpPr>
         <p:spPr>
           <a:xfrm>
-            <a:off x="8122920" y="1673352"/>
-            <a:ext cx="3654552" cy="1847088"/>
+            <a:off x="8110728" y="1673352"/>
+            <a:ext cx="3666744" cy="1517904"/>
           </a:xfrm>
           <a:prstGeom prst="roundRect">
             <a:avLst>
@@ -8913,17 +8944,17 @@
           <a:p>
             <a:pPr algn="l">
               <a:lnSpc>
-                <a:spcPct val="100000"/>
-              </a:lnSpc>
-              <a:spcBef>
-                <a:spcPts val="0"/>
-              </a:spcBef>
-              <a:spcAft>
-                <a:spcPts val="0"/>
-              </a:spcAft>
-            </a:pPr>
-            <a:r>
-              <a:rPr sz="1000" b="1">
+                <a:spcPct val="98000"/>
+              </a:lnSpc>
+              <a:spcBef>
+                <a:spcPts val="0"/>
+              </a:spcBef>
+              <a:spcAft>
+                <a:spcPts val="0"/>
+              </a:spcAft>
+            </a:pPr>
+            <a:r>
+              <a:rPr sz="950" b="1">
                 <a:solidFill>
                   <a:srgbClr val="1F497D"/>
                 </a:solidFill>
@@ -8932,106 +8963,106 @@
               <a:t>Hardware  </a:t>
             </a:r>
             <a:r>
-              <a:rPr sz="1000" b="0">
+              <a:rPr sz="950" b="0">
                 <a:solidFill>
                   <a:srgbClr val="262B33"/>
                 </a:solidFill>
                 <a:latin typeface="Arial"/>
               </a:rPr>
-              <a:t>None to deploy — the driver's own phone is the sensor</a:t>
+              <a:t>None — the driver's own phone is the sensor</a:t>
             </a:r>
           </a:p>
           <a:p>
             <a:pPr algn="l">
               <a:lnSpc>
-                <a:spcPct val="100000"/>
-              </a:lnSpc>
-              <a:spcBef>
-                <a:spcPts val="800"/>
-              </a:spcBef>
-              <a:spcAft>
-                <a:spcPts val="0"/>
-              </a:spcAft>
-            </a:pPr>
-            <a:r>
-              <a:rPr sz="1000" b="1">
+                <a:spcPct val="98000"/>
+              </a:lnSpc>
+              <a:spcBef>
+                <a:spcPts val="700"/>
+              </a:spcBef>
+              <a:spcAft>
+                <a:spcPts val="0"/>
+              </a:spcAft>
+            </a:pPr>
+            <a:r>
+              <a:rPr sz="950" b="1">
                 <a:solidFill>
                   <a:srgbClr val="1F497D"/>
                 </a:solidFill>
                 <a:latin typeface="Arial"/>
               </a:rPr>
-              <a:t>Weather  </a:t>
-            </a:r>
-            <a:r>
-              <a:rPr sz="1000" b="0">
+              <a:t>Engines  </a:t>
+            </a:r>
+            <a:r>
+              <a:rPr sz="950" b="0">
                 <a:solidFill>
                   <a:srgbClr val="262B33"/>
                 </a:solidFill>
                 <a:latin typeface="Arial"/>
               </a:rPr>
-              <a:t>Open-Meteo archive + forecast, hourly</a:t>
+              <a:t>Route prediction · GIS monitoring · GPS tracking · alerts</a:t>
             </a:r>
           </a:p>
           <a:p>
             <a:pPr algn="l">
               <a:lnSpc>
-                <a:spcPct val="100000"/>
-              </a:lnSpc>
-              <a:spcBef>
-                <a:spcPts val="800"/>
-              </a:spcBef>
-              <a:spcAft>
-                <a:spcPts val="0"/>
-              </a:spcAft>
-            </a:pPr>
-            <a:r>
-              <a:rPr sz="1000" b="1">
+                <a:spcPct val="98000"/>
+              </a:lnSpc>
+              <a:spcBef>
+                <a:spcPts val="700"/>
+              </a:spcBef>
+              <a:spcAft>
+                <a:spcPts val="0"/>
+              </a:spcAft>
+            </a:pPr>
+            <a:r>
+              <a:rPr sz="950" b="1">
                 <a:solidFill>
                   <a:srgbClr val="1F497D"/>
                 </a:solidFill>
                 <a:latin typeface="Arial"/>
               </a:rPr>
-              <a:t>Roads  </a:t>
-            </a:r>
-            <a:r>
-              <a:rPr sz="1000" b="0">
+              <a:t>Field layer  </a:t>
+            </a:r>
+            <a:r>
+              <a:rPr sz="950" b="0">
                 <a:solidFill>
                   <a:srgbClr val="262B33"/>
                 </a:solidFill>
                 <a:latin typeface="Arial"/>
               </a:rPr>
-              <a:t>OSRM geometry and route alternates</a:t>
+              <a:t>Photo, GPS and voice reporting in 10 languages</a:t>
             </a:r>
           </a:p>
           <a:p>
             <a:pPr algn="l">
               <a:lnSpc>
-                <a:spcPct val="100000"/>
-              </a:lnSpc>
-              <a:spcBef>
-                <a:spcPts val="800"/>
-              </a:spcBef>
-              <a:spcAft>
-                <a:spcPts val="0"/>
-              </a:spcAft>
-            </a:pPr>
-            <a:r>
-              <a:rPr sz="1000" b="1">
+                <a:spcPct val="98000"/>
+              </a:lnSpc>
+              <a:spcBef>
+                <a:spcPts val="700"/>
+              </a:spcBef>
+              <a:spcAft>
+                <a:spcPts val="0"/>
+              </a:spcAft>
+            </a:pPr>
+            <a:r>
+              <a:rPr sz="950" b="1">
                 <a:solidFill>
                   <a:srgbClr val="1F497D"/>
                 </a:solidFill>
                 <a:latin typeface="Arial"/>
               </a:rPr>
-              <a:t>Transport DB  </a:t>
-            </a:r>
-            <a:r>
-              <a:rPr sz="1000" b="0">
+              <a:t>Resilience  </a:t>
+            </a:r>
+            <a:r>
+              <a:rPr sz="950" b="0">
                 <a:solidFill>
                   <a:srgbClr val="262B33"/>
                 </a:solidFill>
                 <a:latin typeface="Arial"/>
               </a:rPr>
-              <a:t>VAHAN registration lookup at driver sign-up</a:t>
+              <a:t>Offline queue, cloud storage, secure token auth</a:t>
             </a:r>
           </a:p>
         </p:txBody>
@@ -9044,7 +9075,7 @@
         </p:nvSpPr>
         <p:spPr>
           <a:xfrm>
-            <a:off x="411480" y="3648456"/>
+            <a:off x="411480" y="3264408"/>
             <a:ext cx="11365992" cy="237744"/>
           </a:xfrm>
           <a:prstGeom prst="rect">
@@ -9089,7 +9120,7 @@
         </p:nvSpPr>
         <p:spPr>
           <a:xfrm>
-            <a:off x="411480" y="3835908"/>
+            <a:off x="411480" y="3451860"/>
             <a:ext cx="11365992" cy="12801"/>
           </a:xfrm>
           <a:prstGeom prst="rect">
@@ -9133,8 +9164,8 @@
         </p:nvSpPr>
         <p:spPr>
           <a:xfrm>
-            <a:off x="411480" y="3941064"/>
-            <a:ext cx="1680972" cy="603504"/>
+            <a:off x="411480" y="3557016"/>
+            <a:ext cx="1696212" cy="566928"/>
           </a:xfrm>
           <a:prstGeom prst="roundRect">
             <a:avLst>
@@ -9181,13 +9212,13 @@
               </a:spcAft>
             </a:pPr>
             <a:r>
-              <a:rPr sz="1000" b="1" i="0">
+              <a:rPr sz="950" b="1" i="0">
                 <a:solidFill>
                   <a:srgbClr val="1F497D"/>
                 </a:solidFill>
                 <a:latin typeface="Arial"/>
               </a:rPr>
-              <a:t>GPS ping</a:t>
+              <a:t>Declare route</a:t>
             </a:r>
           </a:p>
           <a:p>
@@ -9203,13 +9234,13 @@
               </a:spcAft>
             </a:pPr>
             <a:r>
-              <a:rPr sz="850" b="0" i="0">
+              <a:rPr sz="800" b="0" i="0">
                 <a:solidFill>
                   <a:srgbClr val="5A636E"/>
                 </a:solidFill>
                 <a:latin typeface="Arial"/>
               </a:rPr>
-              <a:t>every 20 s / 40 m</a:t>
+              <a:t>driver states A → B</a:t>
             </a:r>
           </a:p>
         </p:txBody>
@@ -9222,8 +9253,8 @@
         </p:nvSpPr>
         <p:spPr>
           <a:xfrm>
-            <a:off x="2138172" y="4197096"/>
-            <a:ext cx="164592" cy="91440"/>
+            <a:off x="2148840" y="3799332"/>
+            <a:ext cx="155448" cy="82296"/>
           </a:xfrm>
           <a:prstGeom prst="rightArrow">
             <a:avLst/>
@@ -9266,8 +9297,8 @@
         </p:nvSpPr>
         <p:spPr>
           <a:xfrm>
-            <a:off x="2348484" y="3941064"/>
-            <a:ext cx="1680972" cy="603504"/>
+            <a:off x="2345436" y="3557016"/>
+            <a:ext cx="1696212" cy="566928"/>
           </a:xfrm>
           <a:prstGeom prst="roundRect">
             <a:avLst>
@@ -9314,13 +9345,13 @@
               </a:spcAft>
             </a:pPr>
             <a:r>
-              <a:rPr sz="1000" b="1" i="0">
+              <a:rPr sz="950" b="1" i="0">
                 <a:solidFill>
                   <a:srgbClr val="1F497D"/>
                 </a:solidFill>
                 <a:latin typeface="Arial"/>
               </a:rPr>
-              <a:t>Map-matched</a:t>
+              <a:t>Match corridor</a:t>
             </a:r>
           </a:p>
           <a:p>
@@ -9336,13 +9367,13 @@
               </a:spcAft>
             </a:pPr>
             <a:r>
-              <a:rPr sz="850" b="0" i="0">
+              <a:rPr sz="800" b="0" i="0">
                 <a:solidFill>
                   <a:srgbClr val="5A636E"/>
                 </a:solidFill>
                 <a:latin typeface="Arial"/>
               </a:rPr>
-              <a:t>to a road ≤ 600 m</a:t>
+              <a:t>consignments on that road</a:t>
             </a:r>
           </a:p>
         </p:txBody>
@@ -9355,8 +9386,8 @@
         </p:nvSpPr>
         <p:spPr>
           <a:xfrm>
-            <a:off x="4075176" y="4197096"/>
-            <a:ext cx="164592" cy="91440"/>
+            <a:off x="4082796" y="3799332"/>
+            <a:ext cx="155448" cy="82296"/>
           </a:xfrm>
           <a:prstGeom prst="rightArrow">
             <a:avLst/>
@@ -9399,8 +9430,8 @@
         </p:nvSpPr>
         <p:spPr>
           <a:xfrm>
-            <a:off x="4285488" y="3941064"/>
-            <a:ext cx="1680972" cy="603504"/>
+            <a:off x="4279392" y="3557016"/>
+            <a:ext cx="1696212" cy="566928"/>
           </a:xfrm>
           <a:prstGeom prst="roundRect">
             <a:avLst>
@@ -9447,13 +9478,13 @@
               </a:spcAft>
             </a:pPr>
             <a:r>
-              <a:rPr sz="1000" b="1" i="0">
+              <a:rPr sz="950" b="1" i="0">
                 <a:solidFill>
                   <a:srgbClr val="1F497D"/>
                 </a:solidFill>
                 <a:latin typeface="Arial"/>
               </a:rPr>
-              <a:t>45-min rolling</a:t>
+              <a:t>Stream GPS</a:t>
             </a:r>
           </a:p>
           <a:p>
@@ -9469,13 +9500,13 @@
               </a:spcAft>
             </a:pPr>
             <a:r>
-              <a:rPr sz="850" b="0" i="0">
+              <a:rPr sz="800" b="0" i="0">
                 <a:solidFill>
                   <a:srgbClr val="5A636E"/>
                 </a:solidFill>
                 <a:latin typeface="Arial"/>
               </a:rPr>
-              <a:t>median speed</a:t>
+              <a:t>every 20 s / 40 m</a:t>
             </a:r>
           </a:p>
         </p:txBody>
@@ -9488,8 +9519,8 @@
         </p:nvSpPr>
         <p:spPr>
           <a:xfrm>
-            <a:off x="6012180" y="4197096"/>
-            <a:ext cx="164592" cy="91440"/>
+            <a:off x="6016752" y="3799332"/>
+            <a:ext cx="155448" cy="82296"/>
           </a:xfrm>
           <a:prstGeom prst="rightArrow">
             <a:avLst/>
@@ -9532,8 +9563,141 @@
         </p:nvSpPr>
         <p:spPr>
           <a:xfrm>
-            <a:off x="6222492" y="3941064"/>
-            <a:ext cx="1680972" cy="603504"/>
+            <a:off x="6213348" y="3557016"/>
+            <a:ext cx="1696212" cy="566928"/>
+          </a:xfrm>
+          <a:prstGeom prst="roundRect">
+            <a:avLst>
+              <a:gd name="adj" fmla="val 8000"/>
+            </a:avLst>
+          </a:prstGeom>
+          <a:solidFill>
+            <a:srgbClr val="F2F5F9"/>
+          </a:solidFill>
+          <a:ln w="9525">
+            <a:solidFill>
+              <a:srgbClr val="C9D6E4"/>
+            </a:solidFill>
+          </a:ln>
+          <a:effectLst/>
+        </p:spPr>
+        <p:style>
+          <a:lnRef idx="1">
+            <a:schemeClr val="accent1"/>
+          </a:lnRef>
+          <a:fillRef idx="3">
+            <a:schemeClr val="accent1"/>
+          </a:fillRef>
+          <a:effectRef idx="2">
+            <a:schemeClr val="accent1"/>
+          </a:effectRef>
+          <a:fontRef idx="minor">
+            <a:schemeClr val="lt1"/>
+          </a:fontRef>
+        </p:style>
+        <p:txBody>
+          <a:bodyPr rtlCol="0" anchor="ctr" wrap="square" lIns="109728" rIns="109728" tIns="54864" bIns="54864"/>
+          <a:lstStyle/>
+          <a:p>
+            <a:pPr algn="ctr">
+              <a:lnSpc>
+                <a:spcPct val="95000"/>
+              </a:lnSpc>
+              <a:spcBef>
+                <a:spcPts val="0"/>
+              </a:spcBef>
+              <a:spcAft>
+                <a:spcPts val="0"/>
+              </a:spcAft>
+            </a:pPr>
+            <a:r>
+              <a:rPr sz="950" b="1" i="0">
+                <a:solidFill>
+                  <a:srgbClr val="1F497D"/>
+                </a:solidFill>
+                <a:latin typeface="Arial"/>
+              </a:rPr>
+              <a:t>Map-match</a:t>
+            </a:r>
+          </a:p>
+          <a:p>
+            <a:pPr algn="ctr">
+              <a:lnSpc>
+                <a:spcPct val="95000"/>
+              </a:lnSpc>
+              <a:spcBef>
+                <a:spcPts val="100"/>
+              </a:spcBef>
+              <a:spcAft>
+                <a:spcPts val="0"/>
+              </a:spcAft>
+            </a:pPr>
+            <a:r>
+              <a:rPr sz="800" b="0" i="0">
+                <a:solidFill>
+                  <a:srgbClr val="5A636E"/>
+                </a:solidFill>
+                <a:latin typeface="Arial"/>
+              </a:rPr>
+              <a:t>to a road ≤ 600 m</a:t>
+            </a:r>
+          </a:p>
+        </p:txBody>
+      </p:sp>
+      <p:sp>
+        <p:nvSpPr>
+          <p:cNvPr id="17427" name="Right Arrow 17426"/>
+          <p:cNvSpPr/>
+          <p:nvPr/>
+        </p:nvSpPr>
+        <p:spPr>
+          <a:xfrm>
+            <a:off x="7950708" y="3799332"/>
+            <a:ext cx="155448" cy="82296"/>
+          </a:xfrm>
+          <a:prstGeom prst="rightArrow">
+            <a:avLst/>
+          </a:prstGeom>
+          <a:solidFill>
+            <a:srgbClr val="4F81BD"/>
+          </a:solidFill>
+          <a:ln>
+            <a:noFill/>
+          </a:ln>
+          <a:effectLst/>
+        </p:spPr>
+        <p:style>
+          <a:lnRef idx="1">
+            <a:schemeClr val="accent1"/>
+          </a:lnRef>
+          <a:fillRef idx="3">
+            <a:schemeClr val="accent1"/>
+          </a:fillRef>
+          <a:effectRef idx="2">
+            <a:schemeClr val="accent1"/>
+          </a:effectRef>
+          <a:fontRef idx="minor">
+            <a:schemeClr val="lt1"/>
+          </a:fontRef>
+        </p:style>
+        <p:txBody>
+          <a:bodyPr rtlCol="0" anchor="ctr"/>
+          <a:lstStyle/>
+          <a:p>
+            <a:pPr algn="ctr"/>
+          </a:p>
+        </p:txBody>
+      </p:sp>
+      <p:sp>
+        <p:nvSpPr>
+          <p:cNvPr id="17428" name="Rounded Rectangle 17427"/>
+          <p:cNvSpPr/>
+          <p:nvPr/>
+        </p:nvSpPr>
+        <p:spPr>
+          <a:xfrm>
+            <a:off x="8147304" y="3557016"/>
+            <a:ext cx="1696212" cy="566928"/>
           </a:xfrm>
           <a:prstGeom prst="roundRect">
             <a:avLst>
@@ -9580,13 +9744,13 @@
               </a:spcAft>
             </a:pPr>
             <a:r>
-              <a:rPr sz="1000" b="1" i="0">
+              <a:rPr sz="950" b="1" i="0">
                 <a:solidFill>
                   <a:srgbClr val="1F497D"/>
                 </a:solidFill>
                 <a:latin typeface="Arial"/>
               </a:rPr>
-              <a:t>Road status</a:t>
+              <a:t>Resolve status</a:t>
             </a:r>
           </a:p>
           <a:p>
@@ -9602,27 +9766,27 @@
               </a:spcAft>
             </a:pPr>
             <a:r>
-              <a:rPr sz="850" b="0" i="0">
+              <a:rPr sz="800" b="0" i="0">
                 <a:solidFill>
                   <a:srgbClr val="5A636E"/>
                 </a:solidFill>
                 <a:latin typeface="Arial"/>
               </a:rPr>
-              <a:t>OPEN → BLOCKED</a:t>
-            </a:r>
-          </a:p>
-        </p:txBody>
-      </p:sp>
-      <p:sp>
-        <p:nvSpPr>
-          <p:cNvPr id="17427" name="Right Arrow 17426"/>
+              <a:t>median speed vs baseline</a:t>
+            </a:r>
+          </a:p>
+        </p:txBody>
+      </p:sp>
+      <p:sp>
+        <p:nvSpPr>
+          <p:cNvPr id="17429" name="Right Arrow 17428"/>
           <p:cNvSpPr/>
           <p:nvPr/>
         </p:nvSpPr>
         <p:spPr>
           <a:xfrm>
-            <a:off x="7949184" y="4197096"/>
-            <a:ext cx="164592" cy="91440"/>
+            <a:off x="9884664" y="3799332"/>
+            <a:ext cx="155448" cy="82296"/>
           </a:xfrm>
           <a:prstGeom prst="rightArrow">
             <a:avLst/>
@@ -9659,14 +9823,148 @@
       </p:sp>
       <p:sp>
         <p:nvSpPr>
-          <p:cNvPr id="17428" name="Rounded Rectangle 17427"/>
+          <p:cNvPr id="17430" name="Rounded Rectangle 17429"/>
           <p:cNvSpPr/>
           <p:nvPr/>
         </p:nvSpPr>
         <p:spPr>
           <a:xfrm>
-            <a:off x="8159496" y="3941064"/>
-            <a:ext cx="1680972" cy="603504"/>
+            <a:off x="10081260" y="3557016"/>
+            <a:ext cx="1696212" cy="566928"/>
+          </a:xfrm>
+          <a:prstGeom prst="roundRect">
+            <a:avLst>
+              <a:gd name="adj" fmla="val 8000"/>
+            </a:avLst>
+          </a:prstGeom>
+          <a:solidFill>
+            <a:srgbClr val="FFFFFF"/>
+          </a:solidFill>
+          <a:ln w="15875">
+            <a:solidFill>
+              <a:srgbClr val="4F81BD"/>
+            </a:solidFill>
+          </a:ln>
+          <a:effectLst/>
+        </p:spPr>
+        <p:style>
+          <a:lnRef idx="1">
+            <a:schemeClr val="accent1"/>
+          </a:lnRef>
+          <a:fillRef idx="3">
+            <a:schemeClr val="accent1"/>
+          </a:fillRef>
+          <a:effectRef idx="2">
+            <a:schemeClr val="accent1"/>
+          </a:effectRef>
+          <a:fontRef idx="minor">
+            <a:schemeClr val="lt1"/>
+          </a:fontRef>
+        </p:style>
+        <p:txBody>
+          <a:bodyPr rtlCol="0" anchor="ctr" wrap="square" lIns="109728" rIns="109728" tIns="54864" bIns="54864"/>
+          <a:lstStyle/>
+          <a:p>
+            <a:pPr algn="ctr">
+              <a:lnSpc>
+                <a:spcPct val="95000"/>
+              </a:lnSpc>
+              <a:spcBef>
+                <a:spcPts val="0"/>
+              </a:spcBef>
+              <a:spcAft>
+                <a:spcPts val="0"/>
+              </a:spcAft>
+            </a:pPr>
+            <a:r>
+              <a:rPr sz="950" b="1" i="0">
+                <a:solidFill>
+                  <a:srgbClr val="1F497D"/>
+                </a:solidFill>
+                <a:latin typeface="Arial"/>
+              </a:rPr>
+              <a:t>Alert + re-route</a:t>
+            </a:r>
+          </a:p>
+          <a:p>
+            <a:pPr algn="ctr">
+              <a:lnSpc>
+                <a:spcPct val="95000"/>
+              </a:lnSpc>
+              <a:spcBef>
+                <a:spcPts val="100"/>
+              </a:spcBef>
+              <a:spcAft>
+                <a:spcPts val="0"/>
+              </a:spcAft>
+            </a:pPr>
+            <a:r>
+              <a:rPr sz="800" b="0" i="0">
+                <a:solidFill>
+                  <a:srgbClr val="5A636E"/>
+                </a:solidFill>
+                <a:latin typeface="Arial"/>
+              </a:rPr>
+              <a:t>and forecast 72 h</a:t>
+            </a:r>
+          </a:p>
+        </p:txBody>
+      </p:sp>
+      <p:sp>
+        <p:nvSpPr>
+          <p:cNvPr id="17431" name="TextBox 17430"/>
+          <p:cNvSpPr txBox="1"/>
+          <p:nvPr/>
+        </p:nvSpPr>
+        <p:spPr>
+          <a:xfrm>
+            <a:off x="411480" y="4270248"/>
+            <a:ext cx="5573268" cy="219456"/>
+          </a:xfrm>
+          <a:prstGeom prst="rect">
+            <a:avLst/>
+          </a:prstGeom>
+          <a:noFill/>
+        </p:spPr>
+        <p:txBody>
+          <a:bodyPr wrap="square" lIns="0" rIns="0" tIns="0" bIns="0">
+            <a:spAutoFit/>
+          </a:bodyPr>
+          <a:lstStyle/>
+          <a:p>
+            <a:pPr algn="l">
+              <a:lnSpc>
+                <a:spcPct val="100000"/>
+              </a:lnSpc>
+              <a:spcBef>
+                <a:spcPts val="0"/>
+              </a:spcBef>
+              <a:spcAft>
+                <a:spcPts val="0"/>
+              </a:spcAft>
+            </a:pPr>
+            <a:r>
+              <a:rPr sz="900" b="1" i="0">
+                <a:solidFill>
+                  <a:srgbClr val="1F497D"/>
+                </a:solidFill>
+                <a:latin typeface="Arial"/>
+              </a:rPr>
+              <a:t>ALGORITHM 1 — CORRIDOR MATCHING</a:t>
+            </a:r>
+          </a:p>
+        </p:txBody>
+      </p:sp>
+      <p:sp>
+        <p:nvSpPr>
+          <p:cNvPr id="17432" name="Rounded Rectangle 17431"/>
+          <p:cNvSpPr/>
+          <p:nvPr/>
+        </p:nvSpPr>
+        <p:spPr>
+          <a:xfrm>
+            <a:off x="411480" y="4507992"/>
+            <a:ext cx="5573268" cy="1481328"/>
           </a:xfrm>
           <a:prstGeom prst="roundRect">
             <a:avLst>
@@ -9698,197 +9996,152 @@
           </a:fontRef>
         </p:style>
         <p:txBody>
-          <a:bodyPr rtlCol="0" anchor="ctr" wrap="square" lIns="109728" rIns="109728" tIns="54864" bIns="54864"/>
+          <a:bodyPr rtlCol="0" anchor="t" wrap="square" lIns="109728" rIns="109728" tIns="54864" bIns="54864"/>
           <a:lstStyle/>
           <a:p>
+            <a:pPr algn="l">
+              <a:lnSpc>
+                <a:spcPct val="95000"/>
+              </a:lnSpc>
+              <a:spcBef>
+                <a:spcPts val="0"/>
+              </a:spcBef>
+              <a:spcAft>
+                <a:spcPts val="0"/>
+              </a:spcAft>
+            </a:pPr>
+            <a:r>
+              <a:rPr sz="900" b="0" i="0">
+                <a:solidFill>
+                  <a:srgbClr val="262B33"/>
+                </a:solidFill>
+                <a:latin typeface="Arial"/>
+              </a:rPr>
+              <a:t>1  Coarse fetch — bounding box around the route polyline</a:t>
+            </a:r>
+          </a:p>
+          <a:p>
+            <a:pPr algn="l">
+              <a:lnSpc>
+                <a:spcPct val="95000"/>
+              </a:lnSpc>
+              <a:spcBef>
+                <a:spcPts val="500"/>
+              </a:spcBef>
+              <a:spcAft>
+                <a:spcPts val="0"/>
+              </a:spcAft>
+            </a:pPr>
+            <a:r>
+              <a:rPr sz="900" b="0" i="0">
+                <a:solidFill>
+                  <a:srgbClr val="262B33"/>
+                </a:solidFill>
+                <a:latin typeface="Arial"/>
+              </a:rPr>
+              <a:t>2  Corridor — pickup and drop ≤ 10 km off the line, or inside the endpoint city</a:t>
+            </a:r>
+          </a:p>
+          <a:p>
+            <a:pPr algn="l">
+              <a:lnSpc>
+                <a:spcPct val="95000"/>
+              </a:lnSpc>
+              <a:spcBef>
+                <a:spcPts val="500"/>
+              </a:spcBef>
+              <a:spcAft>
+                <a:spcPts val="0"/>
+              </a:spcAft>
+            </a:pPr>
+            <a:r>
+              <a:rPr sz="900" b="0" i="0">
+                <a:solidFill>
+                  <a:srgbClr val="262B33"/>
+                </a:solidFill>
+                <a:latin typeface="Arial"/>
+              </a:rPr>
+              <a:t>3  Detour cap — mid-route deviation ≤ 24 km, else rejected</a:t>
+            </a:r>
+          </a:p>
+          <a:p>
+            <a:pPr algn="l">
+              <a:lnSpc>
+                <a:spcPct val="95000"/>
+              </a:lnSpc>
+              <a:spcBef>
+                <a:spcPts val="500"/>
+              </a:spcBef>
+              <a:spcAft>
+                <a:spcPts val="0"/>
+              </a:spcAft>
+            </a:pPr>
+            <a:r>
+              <a:rPr sz="900" b="0" i="0">
+                <a:solidFill>
+                  <a:srgbClr val="262B33"/>
+                </a:solidFill>
+                <a:latin typeface="Arial"/>
+              </a:rPr>
+              <a:t>4  Direction — driver → pickup → drop, projected along the line</a:t>
+            </a:r>
+          </a:p>
+          <a:p>
+            <a:pPr algn="l">
+              <a:lnSpc>
+                <a:spcPct val="95000"/>
+              </a:lnSpc>
+              <a:spcBef>
+                <a:spcPts val="500"/>
+              </a:spcBef>
+              <a:spcAft>
+                <a:spcPts val="0"/>
+              </a:spcAft>
+            </a:pPr>
+            <a:r>
+              <a:rPr sz="900" b="0" i="0">
+                <a:solidFill>
+                  <a:srgbClr val="262B33"/>
+                </a:solidFill>
+                <a:latin typeface="Arial"/>
+              </a:rPr>
+              <a:t>5  Score, then sequence stops by position so the route never doubles back</a:t>
+            </a:r>
+          </a:p>
+          <a:p>
             <a:pPr algn="ctr">
               <a:lnSpc>
-                <a:spcPct val="95000"/>
-              </a:lnSpc>
-              <a:spcBef>
-                <a:spcPts val="0"/>
-              </a:spcBef>
-              <a:spcAft>
-                <a:spcPts val="0"/>
-              </a:spcAft>
-            </a:pPr>
-            <a:r>
-              <a:rPr sz="1000" b="1" i="0">
-                <a:solidFill>
-                  <a:srgbClr val="1F497D"/>
-                </a:solidFill>
-                <a:latin typeface="Arial"/>
-              </a:rPr>
-              <a:t>Alert engine</a:t>
-            </a:r>
-          </a:p>
-          <a:p>
-            <a:pPr algn="ctr">
-              <a:lnSpc>
-                <a:spcPct val="95000"/>
-              </a:lnSpc>
-              <a:spcBef>
-                <a:spcPts val="100"/>
-              </a:spcBef>
-              <a:spcAft>
-                <a:spcPts val="0"/>
-              </a:spcAft>
-            </a:pPr>
-            <a:r>
-              <a:rPr sz="850" b="0" i="0">
-                <a:solidFill>
-                  <a:srgbClr val="5A636E"/>
-                </a:solidFill>
-                <a:latin typeface="Arial"/>
-              </a:rPr>
-              <a:t>10 languages</a:t>
-            </a:r>
-          </a:p>
-        </p:txBody>
-      </p:sp>
-      <p:sp>
-        <p:nvSpPr>
-          <p:cNvPr id="17429" name="Right Arrow 17428"/>
-          <p:cNvSpPr/>
-          <p:nvPr/>
-        </p:nvSpPr>
-        <p:spPr>
-          <a:xfrm>
-            <a:off x="9886188" y="4197096"/>
-            <a:ext cx="164592" cy="91440"/>
-          </a:xfrm>
-          <a:prstGeom prst="rightArrow">
-            <a:avLst/>
-          </a:prstGeom>
-          <a:solidFill>
-            <a:srgbClr val="4F81BD"/>
-          </a:solidFill>
-          <a:ln>
-            <a:noFill/>
-          </a:ln>
-          <a:effectLst/>
-        </p:spPr>
-        <p:style>
-          <a:lnRef idx="1">
-            <a:schemeClr val="accent1"/>
-          </a:lnRef>
-          <a:fillRef idx="3">
-            <a:schemeClr val="accent1"/>
-          </a:fillRef>
-          <a:effectRef idx="2">
-            <a:schemeClr val="accent1"/>
-          </a:effectRef>
-          <a:fontRef idx="minor">
-            <a:schemeClr val="lt1"/>
-          </a:fontRef>
-        </p:style>
-        <p:txBody>
-          <a:bodyPr rtlCol="0" anchor="ctr"/>
-          <a:lstStyle/>
-          <a:p>
-            <a:pPr algn="ctr"/>
-          </a:p>
-        </p:txBody>
-      </p:sp>
-      <p:sp>
-        <p:nvSpPr>
-          <p:cNvPr id="17430" name="Rounded Rectangle 17429"/>
-          <p:cNvSpPr/>
-          <p:nvPr/>
-        </p:nvSpPr>
-        <p:spPr>
-          <a:xfrm>
-            <a:off x="10096500" y="3941064"/>
-            <a:ext cx="1680972" cy="603504"/>
-          </a:xfrm>
-          <a:prstGeom prst="roundRect">
-            <a:avLst>
-              <a:gd name="adj" fmla="val 8000"/>
-            </a:avLst>
-          </a:prstGeom>
-          <a:solidFill>
-            <a:srgbClr val="FFFFFF"/>
-          </a:solidFill>
-          <a:ln w="15875">
-            <a:solidFill>
-              <a:srgbClr val="4F81BD"/>
-            </a:solidFill>
-          </a:ln>
-          <a:effectLst/>
-        </p:spPr>
-        <p:style>
-          <a:lnRef idx="1">
-            <a:schemeClr val="accent1"/>
-          </a:lnRef>
-          <a:fillRef idx="3">
-            <a:schemeClr val="accent1"/>
-          </a:fillRef>
-          <a:effectRef idx="2">
-            <a:schemeClr val="accent1"/>
-          </a:effectRef>
-          <a:fontRef idx="minor">
-            <a:schemeClr val="lt1"/>
-          </a:fontRef>
-        </p:style>
-        <p:txBody>
-          <a:bodyPr rtlCol="0" anchor="ctr" wrap="square" lIns="109728" rIns="109728" tIns="54864" bIns="54864"/>
-          <a:lstStyle/>
-          <a:p>
-            <a:pPr algn="ctr">
-              <a:lnSpc>
-                <a:spcPct val="95000"/>
-              </a:lnSpc>
-              <a:spcBef>
-                <a:spcPts val="0"/>
-              </a:spcBef>
-              <a:spcAft>
-                <a:spcPts val="0"/>
-              </a:spcAft>
-            </a:pPr>
-            <a:r>
-              <a:rPr sz="1000" b="1" i="0">
-                <a:solidFill>
-                  <a:srgbClr val="1F497D"/>
-                </a:solidFill>
-                <a:latin typeface="Arial"/>
-              </a:rPr>
-              <a:t>Re-route + ETA</a:t>
-            </a:r>
-          </a:p>
-          <a:p>
-            <a:pPr algn="ctr">
-              <a:lnSpc>
-                <a:spcPct val="95000"/>
-              </a:lnSpc>
-              <a:spcBef>
-                <a:spcPts val="100"/>
-              </a:spcBef>
-              <a:spcAft>
-                <a:spcPts val="0"/>
-              </a:spcAft>
-            </a:pPr>
-            <a:r>
-              <a:rPr sz="850" b="0" i="0">
-                <a:solidFill>
-                  <a:srgbClr val="5A636E"/>
-                </a:solidFill>
-                <a:latin typeface="Arial"/>
-              </a:rPr>
-              <a:t>for the corridor</a:t>
-            </a:r>
-          </a:p>
-        </p:txBody>
-      </p:sp>
-      <p:sp>
-        <p:nvSpPr>
-          <p:cNvPr id="17431" name="TextBox 17430"/>
+                <a:spcPct val="100000"/>
+              </a:lnSpc>
+              <a:spcBef>
+                <a:spcPts val="700"/>
+              </a:spcBef>
+              <a:spcAft>
+                <a:spcPts val="0"/>
+              </a:spcAft>
+            </a:pPr>
+            <a:r>
+              <a:rPr sz="950" b="1">
+                <a:solidFill>
+                  <a:srgbClr val="0070C0"/>
+                </a:solidFill>
+                <a:latin typeface="Arial"/>
+              </a:rPr>
+              <a:t>score = 1.0 × fee  −  8.0 × offRouteKm  −  0.15 × ageMinutes</a:t>
+            </a:r>
+          </a:p>
+        </p:txBody>
+      </p:sp>
+      <p:sp>
+        <p:nvSpPr>
+          <p:cNvPr id="17433" name="TextBox 17432"/>
           <p:cNvSpPr txBox="1"/>
           <p:nvPr/>
         </p:nvSpPr>
         <p:spPr>
           <a:xfrm>
-            <a:off x="411480" y="4690872"/>
-            <a:ext cx="11365992" cy="219456"/>
+            <a:off x="6204204" y="4270248"/>
+            <a:ext cx="5573268" cy="219456"/>
           </a:xfrm>
           <a:prstGeom prst="rect">
             <a:avLst/>
@@ -9919,21 +10172,21 @@
                 </a:solidFill>
                 <a:latin typeface="Arial"/>
               </a:rPr>
-              <a:t>EXPECTED SOLUTION — EVERY COMPONENT, AND WHAT IMPLEMENTS IT</a:t>
-            </a:r>
-          </a:p>
-        </p:txBody>
-      </p:sp>
-      <p:sp>
-        <p:nvSpPr>
-          <p:cNvPr id="17432" name="Rounded Rectangle 17431"/>
+              <a:t>ALGORITHM 2 — PROBE SENSING</a:t>
+            </a:r>
+          </a:p>
+        </p:txBody>
+      </p:sp>
+      <p:sp>
+        <p:nvSpPr>
+          <p:cNvPr id="17434" name="Rounded Rectangle 17433"/>
           <p:cNvSpPr/>
           <p:nvPr/>
         </p:nvSpPr>
         <p:spPr>
           <a:xfrm>
-            <a:off x="411480" y="4928616"/>
-            <a:ext cx="1545336" cy="603504"/>
+            <a:off x="6204204" y="4507992"/>
+            <a:ext cx="5573268" cy="1481328"/>
           </a:xfrm>
           <a:prstGeom prst="roundRect">
             <a:avLst>
@@ -9968,7 +10221,7 @@
           <a:bodyPr rtlCol="0" anchor="t" wrap="square" lIns="109728" rIns="109728" tIns="54864" bIns="54864"/>
           <a:lstStyle/>
           <a:p>
-            <a:pPr algn="ctr">
+            <a:pPr algn="l">
               <a:lnSpc>
                 <a:spcPct val="95000"/>
               </a:lnSpc>
@@ -9980,645 +10233,204 @@
               </a:spcAft>
             </a:pPr>
             <a:r>
-              <a:rPr sz="900" b="1" i="0">
+              <a:rPr sz="900" b="0" i="0">
+                <a:solidFill>
+                  <a:srgbClr val="262B33"/>
+                </a:solidFill>
+                <a:latin typeface="Arial"/>
+              </a:rPr>
+              <a:t>45-minute rolling median of vehicle speed ÷ the road's own baseline:</a:t>
+            </a:r>
+          </a:p>
+          <a:p>
+            <a:pPr algn="l">
+              <a:lnSpc>
+                <a:spcPct val="95000"/>
+              </a:lnSpc>
+              <a:spcBef>
+                <a:spcPts val="400"/>
+              </a:spcBef>
+              <a:spcAft>
+                <a:spcPts val="0"/>
+              </a:spcAft>
+            </a:pPr>
+            <a:r>
+              <a:rPr sz="900" b="1">
                 <a:solidFill>
                   <a:srgbClr val="1F497D"/>
                 </a:solidFill>
                 <a:latin typeface="Arial"/>
               </a:rPr>
-              <a:t>AI route engine</a:t>
-            </a:r>
-          </a:p>
-          <a:p>
-            <a:pPr algn="ctr">
+              <a:t>≤ 0.15  </a:t>
+            </a:r>
+            <a:r>
+              <a:rPr sz="900" b="0">
+                <a:solidFill>
+                  <a:srgbClr val="5A636E"/>
+                </a:solidFill>
+                <a:latin typeface="Arial"/>
+              </a:rPr>
+              <a:t>  →  </a:t>
+            </a:r>
+            <a:r>
+              <a:rPr sz="900" b="1">
+                <a:solidFill>
+                  <a:srgbClr val="C25E1E"/>
+                </a:solidFill>
+                <a:latin typeface="Arial"/>
+              </a:rPr>
+              <a:t>BLOCKED</a:t>
+            </a:r>
+          </a:p>
+          <a:p>
+            <a:pPr algn="l">
               <a:lnSpc>
                 <a:spcPct val="95000"/>
               </a:lnSpc>
               <a:spcBef>
-                <a:spcPts val="200"/>
-              </a:spcBef>
-              <a:spcAft>
-                <a:spcPts val="0"/>
-              </a:spcAft>
-            </a:pPr>
-            <a:r>
-              <a:rPr sz="750" b="0" i="0">
+                <a:spcPts val="400"/>
+              </a:spcBef>
+              <a:spcAft>
+                <a:spcPts val="0"/>
+              </a:spcAft>
+            </a:pPr>
+            <a:r>
+              <a:rPr sz="900" b="1">
+                <a:solidFill>
+                  <a:srgbClr val="1F497D"/>
+                </a:solidFill>
+                <a:latin typeface="Arial"/>
+              </a:rPr>
+              <a:t>≤ 0.35  </a:t>
+            </a:r>
+            <a:r>
+              <a:rPr sz="900" b="0">
                 <a:solidFill>
                   <a:srgbClr val="5A636E"/>
                 </a:solidFill>
                 <a:latin typeface="Arial"/>
               </a:rPr>
-              <a:t>3 OSRM alternates scored, condition-adjusted ETA</a:t>
-            </a:r>
-          </a:p>
-        </p:txBody>
-      </p:sp>
-      <p:sp>
-        <p:nvSpPr>
-          <p:cNvPr id="17433" name="Rounded Rectangle 17432"/>
-          <p:cNvSpPr/>
-          <p:nvPr/>
-        </p:nvSpPr>
-        <p:spPr>
-          <a:xfrm>
-            <a:off x="2048256" y="4928616"/>
-            <a:ext cx="1545336" cy="603504"/>
-          </a:xfrm>
-          <a:prstGeom prst="roundRect">
-            <a:avLst>
-              <a:gd name="adj" fmla="val 8000"/>
-            </a:avLst>
-          </a:prstGeom>
-          <a:solidFill>
-            <a:srgbClr val="F2F5F9"/>
-          </a:solidFill>
-          <a:ln w="9525">
-            <a:solidFill>
-              <a:srgbClr val="C9D6E4"/>
-            </a:solidFill>
-          </a:ln>
-          <a:effectLst/>
-        </p:spPr>
-        <p:style>
-          <a:lnRef idx="1">
-            <a:schemeClr val="accent1"/>
-          </a:lnRef>
-          <a:fillRef idx="3">
-            <a:schemeClr val="accent1"/>
-          </a:fillRef>
-          <a:effectRef idx="2">
-            <a:schemeClr val="accent1"/>
-          </a:effectRef>
-          <a:fontRef idx="minor">
-            <a:schemeClr val="lt1"/>
-          </a:fontRef>
-        </p:style>
-        <p:txBody>
-          <a:bodyPr rtlCol="0" anchor="t" wrap="square" lIns="109728" rIns="109728" tIns="54864" bIns="54864"/>
-          <a:lstStyle/>
-          <a:p>
-            <a:pPr algn="ctr">
+              <a:t>  →  </a:t>
+            </a:r>
+            <a:r>
+              <a:rPr sz="900" b="1">
+                <a:solidFill>
+                  <a:srgbClr val="C25E1E"/>
+                </a:solidFill>
+                <a:latin typeface="Arial"/>
+              </a:rPr>
+              <a:t>RESTRICTED</a:t>
+            </a:r>
+          </a:p>
+          <a:p>
+            <a:pPr algn="l">
               <a:lnSpc>
                 <a:spcPct val="95000"/>
               </a:lnSpc>
               <a:spcBef>
-                <a:spcPts val="0"/>
-              </a:spcBef>
-              <a:spcAft>
-                <a:spcPts val="0"/>
-              </a:spcAft>
-            </a:pPr>
-            <a:r>
-              <a:rPr sz="900" b="1" i="0">
+                <a:spcPts val="400"/>
+              </a:spcBef>
+              <a:spcAft>
+                <a:spcPts val="0"/>
+              </a:spcAft>
+            </a:pPr>
+            <a:r>
+              <a:rPr sz="900" b="1">
                 <a:solidFill>
                   <a:srgbClr val="1F497D"/>
                 </a:solidFill>
                 <a:latin typeface="Arial"/>
               </a:rPr>
-              <a:t>GIS dashboard</a:t>
-            </a:r>
-          </a:p>
-          <a:p>
-            <a:pPr algn="ctr">
+              <a:t>≤ 0.60  </a:t>
+            </a:r>
+            <a:r>
+              <a:rPr sz="900" b="0">
+                <a:solidFill>
+                  <a:srgbClr val="5A636E"/>
+                </a:solidFill>
+                <a:latin typeface="Arial"/>
+              </a:rPr>
+              <a:t>  →  </a:t>
+            </a:r>
+            <a:r>
+              <a:rPr sz="900" b="1">
+                <a:solidFill>
+                  <a:srgbClr val="5A636E"/>
+                </a:solidFill>
+                <a:latin typeface="Arial"/>
+              </a:rPr>
+              <a:t>SLOW</a:t>
+            </a:r>
+          </a:p>
+          <a:p>
+            <a:pPr algn="l">
               <a:lnSpc>
                 <a:spcPct val="95000"/>
               </a:lnSpc>
               <a:spcBef>
-                <a:spcPts val="200"/>
-              </a:spcBef>
-              <a:spcAft>
-                <a:spcPts val="0"/>
-              </a:spcAft>
-            </a:pPr>
-            <a:r>
-              <a:rPr sz="750" b="0" i="0">
+                <a:spcPts val="400"/>
+              </a:spcBef>
+              <a:spcAft>
+                <a:spcPts val="0"/>
+              </a:spcAft>
+            </a:pPr>
+            <a:r>
+              <a:rPr sz="900" b="1">
+                <a:solidFill>
+                  <a:srgbClr val="1F497D"/>
+                </a:solidFill>
+                <a:latin typeface="Arial"/>
+              </a:rPr>
+              <a:t>&gt; 0.60  </a:t>
+            </a:r>
+            <a:r>
+              <a:rPr sz="900" b="0">
                 <a:solidFill>
                   <a:srgbClr val="5A636E"/>
                 </a:solidFill>
                 <a:latin typeface="Arial"/>
               </a:rPr>
-              <a:t>MapLibre, 42 stretches, status / risk / forecast</a:t>
-            </a:r>
-          </a:p>
-        </p:txBody>
-      </p:sp>
-      <p:sp>
-        <p:nvSpPr>
-          <p:cNvPr id="17434" name="Rounded Rectangle 17433"/>
-          <p:cNvSpPr/>
-          <p:nvPr/>
-        </p:nvSpPr>
-        <p:spPr>
-          <a:xfrm>
-            <a:off x="3685032" y="4928616"/>
-            <a:ext cx="1545336" cy="603504"/>
-          </a:xfrm>
-          <a:prstGeom prst="roundRect">
-            <a:avLst>
-              <a:gd name="adj" fmla="val 8000"/>
-            </a:avLst>
-          </a:prstGeom>
-          <a:solidFill>
-            <a:srgbClr val="F2F5F9"/>
-          </a:solidFill>
-          <a:ln w="9525">
-            <a:solidFill>
-              <a:srgbClr val="C9D6E4"/>
-            </a:solidFill>
-          </a:ln>
-          <a:effectLst/>
-        </p:spPr>
-        <p:style>
-          <a:lnRef idx="1">
-            <a:schemeClr val="accent1"/>
-          </a:lnRef>
-          <a:fillRef idx="3">
-            <a:schemeClr val="accent1"/>
-          </a:fillRef>
-          <a:effectRef idx="2">
-            <a:schemeClr val="accent1"/>
-          </a:effectRef>
-          <a:fontRef idx="minor">
-            <a:schemeClr val="lt1"/>
-          </a:fontRef>
-        </p:style>
-        <p:txBody>
-          <a:bodyPr rtlCol="0" anchor="t" wrap="square" lIns="109728" rIns="109728" tIns="54864" bIns="54864"/>
-          <a:lstStyle/>
-          <a:p>
-            <a:pPr algn="ctr">
+              <a:t>  →  </a:t>
+            </a:r>
+            <a:r>
+              <a:rPr sz="900" b="1">
+                <a:solidFill>
+                  <a:srgbClr val="2E7D4F"/>
+                </a:solidFill>
+                <a:latin typeface="Arial"/>
+              </a:rPr>
+              <a:t>OPEN</a:t>
+            </a:r>
+          </a:p>
+          <a:p>
+            <a:pPr algn="l">
               <a:lnSpc>
                 <a:spcPct val="95000"/>
               </a:lnSpc>
               <a:spcBef>
-                <a:spcPts val="0"/>
-              </a:spcBef>
-              <a:spcAft>
-                <a:spcPts val="0"/>
-              </a:spcAft>
-            </a:pPr>
-            <a:r>
-              <a:rPr sz="900" b="1" i="0">
+                <a:spcPts val="700"/>
+              </a:spcBef>
+              <a:spcAft>
+                <a:spcPts val="0"/>
+              </a:spcAft>
+            </a:pPr>
+            <a:r>
+              <a:rPr sz="900" b="1">
                 <a:solidFill>
                   <a:srgbClr val="1F497D"/>
                 </a:solidFill>
                 <a:latin typeface="Arial"/>
               </a:rPr>
-              <a:t>GPS tracking</a:t>
-            </a:r>
-          </a:p>
-          <a:p>
-            <a:pPr algn="ctr">
-              <a:lnSpc>
-                <a:spcPct val="95000"/>
-              </a:lnSpc>
-              <a:spcBef>
-                <a:spcPts val="200"/>
-              </a:spcBef>
-              <a:spcAft>
-                <a:spcPts val="0"/>
-              </a:spcAft>
-            </a:pPr>
-            <a:r>
-              <a:rPr sz="750" b="0" i="0">
-                <a:solidFill>
-                  <a:srgbClr val="5A636E"/>
-                </a:solidFill>
-                <a:latin typeface="Arial"/>
-              </a:rPr>
-              <a:t>20 s pings, map-matched, essentials flagged</a:t>
-            </a:r>
-          </a:p>
-        </p:txBody>
-      </p:sp>
-      <p:sp>
-        <p:nvSpPr>
-          <p:cNvPr id="17435" name="Rounded Rectangle 17434"/>
-          <p:cNvSpPr/>
-          <p:nvPr/>
-        </p:nvSpPr>
-        <p:spPr>
-          <a:xfrm>
-            <a:off x="5321808" y="4928616"/>
-            <a:ext cx="1545336" cy="603504"/>
-          </a:xfrm>
-          <a:prstGeom prst="roundRect">
-            <a:avLst>
-              <a:gd name="adj" fmla="val 8000"/>
-            </a:avLst>
-          </a:prstGeom>
-          <a:solidFill>
-            <a:srgbClr val="F2F5F9"/>
-          </a:solidFill>
-          <a:ln w="9525">
-            <a:solidFill>
-              <a:srgbClr val="C9D6E4"/>
-            </a:solidFill>
-          </a:ln>
-          <a:effectLst/>
-        </p:spPr>
-        <p:style>
-          <a:lnRef idx="1">
-            <a:schemeClr val="accent1"/>
-          </a:lnRef>
-          <a:fillRef idx="3">
-            <a:schemeClr val="accent1"/>
-          </a:fillRef>
-          <a:effectRef idx="2">
-            <a:schemeClr val="accent1"/>
-          </a:effectRef>
-          <a:fontRef idx="minor">
-            <a:schemeClr val="lt1"/>
-          </a:fontRef>
-        </p:style>
-        <p:txBody>
-          <a:bodyPr rtlCol="0" anchor="t" wrap="square" lIns="109728" rIns="109728" tIns="54864" bIns="54864"/>
-          <a:lstStyle/>
-          <a:p>
-            <a:pPr algn="ctr">
-              <a:lnSpc>
-                <a:spcPct val="95000"/>
-              </a:lnSpc>
-              <a:spcBef>
-                <a:spcPts val="0"/>
-              </a:spcBef>
-              <a:spcAft>
-                <a:spcPts val="0"/>
-              </a:spcAft>
-            </a:pPr>
-            <a:r>
-              <a:rPr sz="900" b="1" i="0">
-                <a:solidFill>
-                  <a:srgbClr val="1F497D"/>
-                </a:solidFill>
-                <a:latin typeface="Arial"/>
-              </a:rPr>
-              <a:t>Real-time alerts</a:t>
-            </a:r>
-          </a:p>
-          <a:p>
-            <a:pPr algn="ctr">
-              <a:lnSpc>
-                <a:spcPct val="95000"/>
-              </a:lnSpc>
-              <a:spcBef>
-                <a:spcPts val="200"/>
-              </a:spcBef>
-              <a:spcAft>
-                <a:spcPts val="0"/>
-              </a:spcAft>
-            </a:pPr>
-            <a:r>
-              <a:rPr sz="750" b="0" i="0">
-                <a:solidFill>
-                  <a:srgbClr val="5A636E"/>
-                </a:solidFill>
-                <a:latin typeface="Arial"/>
-              </a:rPr>
-              <a:t>7 alert kinds, push + in-app, 10 languages</a:t>
-            </a:r>
-          </a:p>
-        </p:txBody>
-      </p:sp>
-      <p:sp>
-        <p:nvSpPr>
-          <p:cNvPr id="17436" name="Rounded Rectangle 17435"/>
-          <p:cNvSpPr/>
-          <p:nvPr/>
-        </p:nvSpPr>
-        <p:spPr>
-          <a:xfrm>
-            <a:off x="6958584" y="4928616"/>
-            <a:ext cx="1545336" cy="603504"/>
-          </a:xfrm>
-          <a:prstGeom prst="roundRect">
-            <a:avLst>
-              <a:gd name="adj" fmla="val 8000"/>
-            </a:avLst>
-          </a:prstGeom>
-          <a:solidFill>
-            <a:srgbClr val="F2F5F9"/>
-          </a:solidFill>
-          <a:ln w="9525">
-            <a:solidFill>
-              <a:srgbClr val="C9D6E4"/>
-            </a:solidFill>
-          </a:ln>
-          <a:effectLst/>
-        </p:spPr>
-        <p:style>
-          <a:lnRef idx="1">
-            <a:schemeClr val="accent1"/>
-          </a:lnRef>
-          <a:fillRef idx="3">
-            <a:schemeClr val="accent1"/>
-          </a:fillRef>
-          <a:effectRef idx="2">
-            <a:schemeClr val="accent1"/>
-          </a:effectRef>
-          <a:fontRef idx="minor">
-            <a:schemeClr val="lt1"/>
-          </a:fontRef>
-        </p:style>
-        <p:txBody>
-          <a:bodyPr rtlCol="0" anchor="t" wrap="square" lIns="109728" rIns="109728" tIns="54864" bIns="54864"/>
-          <a:lstStyle/>
-          <a:p>
-            <a:pPr algn="ctr">
-              <a:lnSpc>
-                <a:spcPct val="95000"/>
-              </a:lnSpc>
-              <a:spcBef>
-                <a:spcPts val="0"/>
-              </a:spcBef>
-              <a:spcAft>
-                <a:spcPts val="0"/>
-              </a:spcAft>
-            </a:pPr>
-            <a:r>
-              <a:rPr sz="900" b="1" i="0">
-                <a:solidFill>
-                  <a:srgbClr val="1F497D"/>
-                </a:solidFill>
-                <a:latin typeface="Arial"/>
-              </a:rPr>
-              <a:t>Mobile + web apps</a:t>
-            </a:r>
-          </a:p>
-          <a:p>
-            <a:pPr algn="ctr">
-              <a:lnSpc>
-                <a:spcPct val="95000"/>
-              </a:lnSpc>
-              <a:spcBef>
-                <a:spcPts val="200"/>
-              </a:spcBef>
-              <a:spcAft>
-                <a:spcPts val="0"/>
-              </a:spcAft>
-            </a:pPr>
-            <a:r>
-              <a:rPr sz="750" b="0" i="0">
-                <a:solidFill>
-                  <a:srgbClr val="5A636E"/>
-                </a:solidFill>
-                <a:latin typeface="Arial"/>
-              </a:rPr>
-              <a:t>4 Android apps and a control dashboard</a:t>
-            </a:r>
-          </a:p>
-        </p:txBody>
-      </p:sp>
-      <p:sp>
-        <p:nvSpPr>
-          <p:cNvPr id="17437" name="Rounded Rectangle 17436"/>
-          <p:cNvSpPr/>
-          <p:nvPr/>
-        </p:nvSpPr>
-        <p:spPr>
-          <a:xfrm>
-            <a:off x="8595360" y="4928616"/>
-            <a:ext cx="1545336" cy="603504"/>
-          </a:xfrm>
-          <a:prstGeom prst="roundRect">
-            <a:avLst>
-              <a:gd name="adj" fmla="val 8000"/>
-            </a:avLst>
-          </a:prstGeom>
-          <a:solidFill>
-            <a:srgbClr val="F2F5F9"/>
-          </a:solidFill>
-          <a:ln w="9525">
-            <a:solidFill>
-              <a:srgbClr val="C9D6E4"/>
-            </a:solidFill>
-          </a:ln>
-          <a:effectLst/>
-        </p:spPr>
-        <p:style>
-          <a:lnRef idx="1">
-            <a:schemeClr val="accent1"/>
-          </a:lnRef>
-          <a:fillRef idx="3">
-            <a:schemeClr val="accent1"/>
-          </a:fillRef>
-          <a:effectRef idx="2">
-            <a:schemeClr val="accent1"/>
-          </a:effectRef>
-          <a:fontRef idx="minor">
-            <a:schemeClr val="lt1"/>
-          </a:fontRef>
-        </p:style>
-        <p:txBody>
-          <a:bodyPr rtlCol="0" anchor="t" wrap="square" lIns="109728" rIns="109728" tIns="54864" bIns="54864"/>
-          <a:lstStyle/>
-          <a:p>
-            <a:pPr algn="ctr">
-              <a:lnSpc>
-                <a:spcPct val="95000"/>
-              </a:lnSpc>
-              <a:spcBef>
-                <a:spcPts val="0"/>
-              </a:spcBef>
-              <a:spcAft>
-                <a:spcPts val="0"/>
-              </a:spcAft>
-            </a:pPr>
-            <a:r>
-              <a:rPr sz="900" b="1" i="0">
-                <a:solidFill>
-                  <a:srgbClr val="1F497D"/>
-                </a:solidFill>
-                <a:latin typeface="Arial"/>
-              </a:rPr>
-              <a:t>External integration</a:t>
-            </a:r>
-          </a:p>
-          <a:p>
-            <a:pPr algn="ctr">
-              <a:lnSpc>
-                <a:spcPct val="95000"/>
-              </a:lnSpc>
-              <a:spcBef>
-                <a:spcPts val="200"/>
-              </a:spcBef>
-              <a:spcAft>
-                <a:spcPts val="0"/>
-              </a:spcAft>
-            </a:pPr>
-            <a:r>
-              <a:rPr sz="750" b="0" i="0">
-                <a:solidFill>
-                  <a:srgbClr val="5A636E"/>
-                </a:solidFill>
-                <a:latin typeface="Arial"/>
-              </a:rPr>
-              <a:t>Open-Meteo · OSRM · VAHAN</a:t>
-            </a:r>
-          </a:p>
-        </p:txBody>
-      </p:sp>
-      <p:sp>
-        <p:nvSpPr>
-          <p:cNvPr id="17438" name="Rounded Rectangle 17437"/>
-          <p:cNvSpPr/>
-          <p:nvPr/>
-        </p:nvSpPr>
-        <p:spPr>
-          <a:xfrm>
-            <a:off x="10232136" y="4928616"/>
-            <a:ext cx="1545336" cy="603504"/>
-          </a:xfrm>
-          <a:prstGeom prst="roundRect">
-            <a:avLst>
-              <a:gd name="adj" fmla="val 8000"/>
-            </a:avLst>
-          </a:prstGeom>
-          <a:solidFill>
-            <a:srgbClr val="F2F5F9"/>
-          </a:solidFill>
-          <a:ln w="9525">
-            <a:solidFill>
-              <a:srgbClr val="C9D6E4"/>
-            </a:solidFill>
-          </a:ln>
-          <a:effectLst/>
-        </p:spPr>
-        <p:style>
-          <a:lnRef idx="1">
-            <a:schemeClr val="accent1"/>
-          </a:lnRef>
-          <a:fillRef idx="3">
-            <a:schemeClr val="accent1"/>
-          </a:fillRef>
-          <a:effectRef idx="2">
-            <a:schemeClr val="accent1"/>
-          </a:effectRef>
-          <a:fontRef idx="minor">
-            <a:schemeClr val="lt1"/>
-          </a:fontRef>
-        </p:style>
-        <p:txBody>
-          <a:bodyPr rtlCol="0" anchor="t" wrap="square" lIns="109728" rIns="109728" tIns="54864" bIns="54864"/>
-          <a:lstStyle/>
-          <a:p>
-            <a:pPr algn="ctr">
-              <a:lnSpc>
-                <a:spcPct val="95000"/>
-              </a:lnSpc>
-              <a:spcBef>
-                <a:spcPts val="0"/>
-              </a:spcBef>
-              <a:spcAft>
-                <a:spcPts val="0"/>
-              </a:spcAft>
-            </a:pPr>
-            <a:r>
-              <a:rPr sz="900" b="1" i="0">
-                <a:solidFill>
-                  <a:srgbClr val="1F497D"/>
-                </a:solidFill>
-                <a:latin typeface="Arial"/>
-              </a:rPr>
-              <a:t>Cloud + offline</a:t>
-            </a:r>
-          </a:p>
-          <a:p>
-            <a:pPr algn="ctr">
-              <a:lnSpc>
-                <a:spcPct val="95000"/>
-              </a:lnSpc>
-              <a:spcBef>
-                <a:spcPts val="200"/>
-              </a:spcBef>
-              <a:spcAft>
-                <a:spcPts val="0"/>
-              </a:spcAft>
-            </a:pPr>
-            <a:r>
-              <a:rPr sz="750" b="0" i="0">
-                <a:solidFill>
-                  <a:srgbClr val="5A636E"/>
-                </a:solidFill>
-                <a:latin typeface="Arial"/>
-              </a:rPr>
-              <a:t>Atlas · JWT · queue-and-sync on the phone</a:t>
-            </a:r>
-          </a:p>
-        </p:txBody>
-      </p:sp>
-      <p:sp>
-        <p:nvSpPr>
-          <p:cNvPr id="17439" name="Rounded Rectangle 17438"/>
-          <p:cNvSpPr/>
-          <p:nvPr/>
-        </p:nvSpPr>
-        <p:spPr>
-          <a:xfrm>
-            <a:off x="411480" y="5660136"/>
-            <a:ext cx="11365992" cy="475488"/>
-          </a:xfrm>
-          <a:prstGeom prst="roundRect">
-            <a:avLst>
-              <a:gd name="adj" fmla="val 8000"/>
-            </a:avLst>
-          </a:prstGeom>
-          <a:solidFill>
-            <a:srgbClr val="FFFFFF"/>
-          </a:solidFill>
-          <a:ln w="15875">
-            <a:solidFill>
-              <a:srgbClr val="4F81BD"/>
-            </a:solidFill>
-          </a:ln>
-          <a:effectLst/>
-        </p:spPr>
-        <p:style>
-          <a:lnRef idx="1">
-            <a:schemeClr val="accent1"/>
-          </a:lnRef>
-          <a:fillRef idx="3">
-            <a:schemeClr val="accent1"/>
-          </a:fillRef>
-          <a:effectRef idx="2">
-            <a:schemeClr val="accent1"/>
-          </a:effectRef>
-          <a:fontRef idx="minor">
-            <a:schemeClr val="lt1"/>
-          </a:fontRef>
-        </p:style>
-        <p:txBody>
-          <a:bodyPr rtlCol="0" anchor="ctr" wrap="square" lIns="109728" rIns="109728" tIns="54864" bIns="54864"/>
-          <a:lstStyle/>
-          <a:p>
-            <a:pPr algn="l">
-              <a:lnSpc>
-                <a:spcPct val="100000"/>
-              </a:lnSpc>
-              <a:spcBef>
-                <a:spcPts val="0"/>
-              </a:spcBef>
-              <a:spcAft>
-                <a:spcPts val="0"/>
-              </a:spcAft>
-            </a:pPr>
-            <a:r>
-              <a:rPr sz="1050" b="1">
-                <a:solidFill>
-                  <a:srgbClr val="1F497D"/>
-                </a:solidFill>
-                <a:latin typeface="Arial"/>
-              </a:rPr>
-              <a:t>Trust rule  </a:t>
-            </a:r>
-            <a:r>
-              <a:rPr sz="1050" b="0">
+              <a:t>Trust rule — </a:t>
+            </a:r>
+            <a:r>
+              <a:rPr sz="900" b="0">
                 <a:solidFill>
                   <a:srgbClr val="262B33"/>
                 </a:solidFill>
                 <a:latin typeface="Arial"/>
               </a:rPr>
-              <a:t>— a status needs at least 4 samples from at least 2 distinct vehicles, and a driver's report is capped at RESTRICTED until an officer confirms it, so one parked vehicle can never close a highway.</a:t>
+              <a:t>≥ 4 samples from ≥ 2 distinct vehicles, else discarded. An unverified driver report is capped at RESTRICTED.</a:t>
             </a:r>
           </a:p>
         </p:txBody>
@@ -11008,7 +10820,7 @@
         <p:spPr>
           <a:xfrm>
             <a:off x="411480" y="1143000"/>
-            <a:ext cx="4343400" cy="237744"/>
+            <a:ext cx="4224528" cy="237744"/>
           </a:xfrm>
           <a:prstGeom prst="rect">
             <a:avLst/>
@@ -11053,7 +10865,7 @@
         <p:spPr>
           <a:xfrm>
             <a:off x="411480" y="1330452"/>
-            <a:ext cx="4343400" cy="12801"/>
+            <a:ext cx="4224528" cy="12801"/>
           </a:xfrm>
           <a:prstGeom prst="rect">
             <a:avLst/>
@@ -11097,7 +10909,7 @@
         <p:spPr>
           <a:xfrm>
             <a:off x="411480" y="1435608"/>
-            <a:ext cx="4343400" cy="2468880"/>
+            <a:ext cx="4224528" cy="1572768"/>
           </a:xfrm>
           <a:prstGeom prst="roundRect">
             <a:avLst>
@@ -11134,17 +10946,39 @@
           <a:p>
             <a:pPr algn="l">
               <a:lnSpc>
-                <a:spcPct val="100000"/>
-              </a:lnSpc>
-              <a:spcBef>
-                <a:spcPts val="0"/>
-              </a:spcBef>
-              <a:spcAft>
-                <a:spcPts val="0"/>
-              </a:spcAft>
-            </a:pPr>
-            <a:r>
-              <a:rPr sz="1100" b="1">
+                <a:spcPct val="98000"/>
+              </a:lnSpc>
+              <a:spcBef>
+                <a:spcPts val="0"/>
+              </a:spcBef>
+              <a:spcAft>
+                <a:spcPts val="0"/>
+              </a:spcAft>
+            </a:pPr>
+            <a:r>
+              <a:rPr sz="950" b="0" i="0">
+                <a:solidFill>
+                  <a:srgbClr val="262B33"/>
+                </a:solidFill>
+                <a:latin typeface="Arial"/>
+              </a:rPr>
+              <a:t>Runs on smartphones, GPS, GIS and cloud services — no roadside hardware to procure, install or power. Modular, so weather, routing and government sources can be swapped per state.</a:t>
+            </a:r>
+          </a:p>
+          <a:p>
+            <a:pPr algn="l">
+              <a:lnSpc>
+                <a:spcPct val="98000"/>
+              </a:lnSpc>
+              <a:spcBef>
+                <a:spcPts val="600"/>
+              </a:spcBef>
+              <a:spcAft>
+                <a:spcPts val="0"/>
+              </a:spcAft>
+            </a:pPr>
+            <a:r>
+              <a:rPr sz="950" b="1">
                 <a:solidFill>
                   <a:srgbClr val="0070C0"/>
                 </a:solidFill>
@@ -11153,137 +10987,75 @@
               <a:t>42 stretches · 3,567 km  </a:t>
             </a:r>
             <a:r>
-              <a:rPr sz="1100" b="0">
+              <a:rPr sz="950" b="0">
                 <a:solidFill>
                   <a:srgbClr val="262B33"/>
                 </a:solidFill>
                 <a:latin typeface="Arial"/>
               </a:rPr>
-              <a:t>real OSRM geometry, 12 corridors, 82 districts, 8 states</a:t>
+              <a:t>real OSRM geometry, 12 corridors, 8 states</a:t>
             </a:r>
           </a:p>
           <a:p>
             <a:pPr algn="l">
               <a:lnSpc>
-                <a:spcPct val="100000"/>
-              </a:lnSpc>
-              <a:spcBef>
-                <a:spcPts val="1100"/>
-              </a:spcBef>
-              <a:spcAft>
-                <a:spcPts val="0"/>
-              </a:spcAft>
-            </a:pPr>
-            <a:r>
-              <a:rPr sz="1100" b="1">
+                <a:spcPct val="98000"/>
+              </a:lnSpc>
+              <a:spcBef>
+                <a:spcPts val="600"/>
+              </a:spcBef>
+              <a:spcAft>
+                <a:spcPts val="0"/>
+              </a:spcAft>
+            </a:pPr>
+            <a:r>
+              <a:rPr sz="950" b="1">
                 <a:solidFill>
                   <a:srgbClr val="0070C0"/>
                 </a:solidFill>
                 <a:latin typeface="Arial"/>
               </a:rPr>
-              <a:t>4 Android apps + dashboard  </a:t>
-            </a:r>
-            <a:r>
-              <a:rPr sz="1100" b="0">
+              <a:t>4 apps + dashboard  </a:t>
+            </a:r>
+            <a:r>
+              <a:rPr sz="950" b="0">
                 <a:solidFill>
                   <a:srgbClr val="262B33"/>
                 </a:solidFill>
                 <a:latin typeface="Arial"/>
               </a:rPr>
-              <a:t>customer, merchant, driver, officer, control room</a:t>
+              <a:t>built and running against live data</a:t>
             </a:r>
           </a:p>
           <a:p>
             <a:pPr algn="l">
               <a:lnSpc>
-                <a:spcPct val="100000"/>
-              </a:lnSpc>
-              <a:spcBef>
-                <a:spcPts val="1100"/>
-              </a:spcBef>
-              <a:spcAft>
-                <a:spcPts val="0"/>
-              </a:spcAft>
-            </a:pPr>
-            <a:r>
-              <a:rPr sz="1100" b="1">
+                <a:spcPct val="98000"/>
+              </a:lnSpc>
+              <a:spcBef>
+                <a:spcPts val="600"/>
+              </a:spcBef>
+              <a:spcAft>
+                <a:spcPts val="0"/>
+              </a:spcAft>
+            </a:pPr>
+            <a:r>
+              <a:rPr sz="950" b="1">
                 <a:solidFill>
                   <a:srgbClr val="0070C0"/>
                 </a:solidFill>
                 <a:latin typeface="Arial"/>
               </a:rPr>
-              <a:t>195 / 195  </a:t>
-            </a:r>
-            <a:r>
-              <a:rPr sz="1100" b="0">
+              <a:t>195 / 195 tests  </a:t>
+            </a:r>
+            <a:r>
+              <a:rPr sz="950" b="0">
                 <a:solidFill>
                   <a:srgbClr val="262B33"/>
                 </a:solidFill>
                 <a:latin typeface="Arial"/>
               </a:rPr>
-              <a:t>backend tests passing across 10 suites</a:t>
-            </a:r>
-          </a:p>
-          <a:p>
-            <a:pPr algn="l">
-              <a:lnSpc>
-                <a:spcPct val="100000"/>
-              </a:lnSpc>
-              <a:spcBef>
-                <a:spcPts val="1100"/>
-              </a:spcBef>
-              <a:spcAft>
-                <a:spcPts val="0"/>
-              </a:spcAft>
-            </a:pPr>
-            <a:r>
-              <a:rPr sz="1100" b="1">
-                <a:solidFill>
-                  <a:srgbClr val="0070C0"/>
-                </a:solidFill>
-                <a:latin typeface="Arial"/>
-              </a:rPr>
-              <a:t>10 languages · 8,424 units  </a:t>
-            </a:r>
-            <a:r>
-              <a:rPr sz="1100" b="0">
-                <a:solidFill>
-                  <a:srgbClr val="262B33"/>
-                </a:solidFill>
-                <a:latin typeface="Arial"/>
-              </a:rPr>
-              <a:t>every screen, zero English fallbacks</a:t>
-            </a:r>
-          </a:p>
-          <a:p>
-            <a:pPr algn="l">
-              <a:lnSpc>
-                <a:spcPct val="100000"/>
-              </a:lnSpc>
-              <a:spcBef>
-                <a:spcPts val="1100"/>
-              </a:spcBef>
-              <a:spcAft>
-                <a:spcPts val="0"/>
-              </a:spcAft>
-            </a:pPr>
-            <a:r>
-              <a:rPr sz="1100" b="1">
-                <a:solidFill>
-                  <a:srgbClr val="0070C0"/>
-                </a:solidFill>
-                <a:latin typeface="Arial"/>
-              </a:rPr>
-              <a:t>100 % coverage  </a:t>
-            </a:r>
-            <a:r>
-              <a:rPr sz="1100" b="0">
-                <a:solidFill>
-                  <a:srgbClr val="262B33"/>
-                </a:solidFill>
-                <a:latin typeface="Arial"/>
-              </a:rPr>
-              <a:t>status, live vehicle data and forecast on every road</a:t>
+              <a:t>10 suites · 10 languages · 0 English fallbacks</a:t>
             </a:r>
           </a:p>
         </p:txBody>
@@ -11296,8 +11068,8 @@
         </p:nvSpPr>
         <p:spPr>
           <a:xfrm>
-            <a:off x="411480" y="4032504"/>
-            <a:ext cx="4343400" cy="219456"/>
+            <a:off x="411480" y="3136392"/>
+            <a:ext cx="4224528" cy="219456"/>
           </a:xfrm>
           <a:prstGeom prst="rect">
             <a:avLst/>
@@ -11328,21 +11100,190 @@
                 </a:solidFill>
                 <a:latin typeface="Arial"/>
               </a:rPr>
-              <a:t>VIABLE BECAUSE SCALING COSTS ALMOST NOTHING</a:t>
-            </a:r>
-          </a:p>
-        </p:txBody>
-      </p:sp>
-      <p:sp>
-        <p:nvSpPr>
-          <p:cNvPr id="17414" name="TextBox 17413"/>
+              <a:t>BUSINESS MODEL — HOW IT SUSTAINS ITSELF</a:t>
+            </a:r>
+          </a:p>
+        </p:txBody>
+      </p:sp>
+      <p:sp>
+        <p:nvSpPr>
+          <p:cNvPr id="17414" name="Rounded Rectangle 17413"/>
+          <p:cNvSpPr/>
+          <p:nvPr/>
+        </p:nvSpPr>
+        <p:spPr>
+          <a:xfrm>
+            <a:off x="411480" y="3374136"/>
+            <a:ext cx="4224528" cy="2103120"/>
+          </a:xfrm>
+          <a:prstGeom prst="roundRect">
+            <a:avLst>
+              <a:gd name="adj" fmla="val 8000"/>
+            </a:avLst>
+          </a:prstGeom>
+          <a:solidFill>
+            <a:srgbClr val="FFFFFF"/>
+          </a:solidFill>
+          <a:ln w="15875">
+            <a:solidFill>
+              <a:srgbClr val="4F81BD"/>
+            </a:solidFill>
+          </a:ln>
+          <a:effectLst/>
+        </p:spPr>
+        <p:style>
+          <a:lnRef idx="1">
+            <a:schemeClr val="accent1"/>
+          </a:lnRef>
+          <a:fillRef idx="3">
+            <a:schemeClr val="accent1"/>
+          </a:fillRef>
+          <a:effectRef idx="2">
+            <a:schemeClr val="accent1"/>
+          </a:effectRef>
+          <a:fontRef idx="minor">
+            <a:schemeClr val="lt1"/>
+          </a:fontRef>
+        </p:style>
+        <p:txBody>
+          <a:bodyPr rtlCol="0" anchor="t" wrap="square" lIns="109728" rIns="109728" tIns="54864" bIns="54864"/>
+          <a:lstStyle/>
+          <a:p>
+            <a:pPr algn="l">
+              <a:lnSpc>
+                <a:spcPct val="98000"/>
+              </a:lnSpc>
+              <a:spcBef>
+                <a:spcPts val="0"/>
+              </a:spcBef>
+              <a:spcAft>
+                <a:spcPts val="0"/>
+              </a:spcAft>
+            </a:pPr>
+            <a:r>
+              <a:rPr sz="950" b="1">
+                <a:solidFill>
+                  <a:srgbClr val="1F497D"/>
+                </a:solidFill>
+                <a:latin typeface="Arial"/>
+              </a:rPr>
+              <a:t>Flat platform fee  </a:t>
+            </a:r>
+            <a:r>
+              <a:rPr sz="950" b="0">
+                <a:solidFill>
+                  <a:srgbClr val="262B33"/>
+                </a:solidFill>
+                <a:latin typeface="Arial"/>
+              </a:rPr>
+              <a:t>₹5 per parcel, ₹2 per shop order. The driver keeps the full delivery charge — that is what makes carrying worth it.</a:t>
+            </a:r>
+          </a:p>
+          <a:p>
+            <a:pPr algn="l">
+              <a:lnSpc>
+                <a:spcPct val="98000"/>
+              </a:lnSpc>
+              <a:spcBef>
+                <a:spcPts val="800"/>
+              </a:spcBef>
+              <a:spcAft>
+                <a:spcPts val="0"/>
+              </a:spcAft>
+            </a:pPr>
+            <a:r>
+              <a:rPr sz="950" b="1">
+                <a:solidFill>
+                  <a:srgbClr val="1F497D"/>
+                </a:solidFill>
+                <a:latin typeface="Arial"/>
+              </a:rPr>
+              <a:t>Government licence  </a:t>
+            </a:r>
+            <a:r>
+              <a:rPr sz="950" b="0">
+                <a:solidFill>
+                  <a:srgbClr val="262B33"/>
+                </a:solidFill>
+                <a:latin typeface="Arial"/>
+              </a:rPr>
+              <a:t>the accessibility dashboard sold per state or district to transport and disaster-management departments.</a:t>
+            </a:r>
+          </a:p>
+          <a:p>
+            <a:pPr algn="l">
+              <a:lnSpc>
+                <a:spcPct val="98000"/>
+              </a:lnSpc>
+              <a:spcBef>
+                <a:spcPts val="800"/>
+              </a:spcBef>
+              <a:spcAft>
+                <a:spcPts val="0"/>
+              </a:spcAft>
+            </a:pPr>
+            <a:r>
+              <a:rPr sz="950" b="1">
+                <a:solidFill>
+                  <a:srgbClr val="1F497D"/>
+                </a:solidFill>
+                <a:latin typeface="Arial"/>
+              </a:rPr>
+              <a:t>Merchant plans  </a:t>
+            </a:r>
+            <a:r>
+              <a:rPr sz="950" b="0">
+                <a:solidFill>
+                  <a:srgbClr val="262B33"/>
+                </a:solidFill>
+                <a:latin typeface="Arial"/>
+              </a:rPr>
+              <a:t>optional listing and analytics tiers for shops.</a:t>
+            </a:r>
+          </a:p>
+          <a:p>
+            <a:pPr algn="l">
+              <a:lnSpc>
+                <a:spcPct val="98000"/>
+              </a:lnSpc>
+              <a:spcBef>
+                <a:spcPts val="800"/>
+              </a:spcBef>
+              <a:spcAft>
+                <a:spcPts val="0"/>
+              </a:spcAft>
+            </a:pPr>
+            <a:r>
+              <a:rPr sz="950" b="1">
+                <a:solidFill>
+                  <a:srgbClr val="1F497D"/>
+                </a:solidFill>
+                <a:latin typeface="Arial"/>
+              </a:rPr>
+              <a:t>Cost side  </a:t>
+            </a:r>
+            <a:r>
+              <a:rPr sz="950" b="0">
+                <a:solidFill>
+                  <a:srgbClr val="262B33"/>
+                </a:solidFill>
+                <a:latin typeface="Arial"/>
+              </a:rPr>
+              <a:t>cloud only. No fleet, no vehicles, no hardware, so marginal cost per extra parcel is a payment-gateway fee.</a:t>
+            </a:r>
+          </a:p>
+        </p:txBody>
+      </p:sp>
+      <p:sp>
+        <p:nvSpPr>
+          <p:cNvPr id="17415" name="TextBox 17414"/>
           <p:cNvSpPr txBox="1"/>
           <p:nvPr/>
         </p:nvSpPr>
         <p:spPr>
           <a:xfrm>
-            <a:off x="411480" y="4270248"/>
-            <a:ext cx="4343400" cy="1463040"/>
+            <a:off x="4892040" y="1143000"/>
+            <a:ext cx="2331720" cy="237744"/>
           </a:xfrm>
           <a:prstGeom prst="rect">
             <a:avLst/>
@@ -11367,153 +11308,6 @@
               </a:spcAft>
             </a:pPr>
             <a:r>
-              <a:rPr sz="1100" b="1">
-                <a:solidFill>
-                  <a:srgbClr val="4F81BD"/>
-                </a:solidFill>
-                <a:latin typeface="Arial"/>
-              </a:rPr>
-              <a:t>•  </a:t>
-            </a:r>
-            <a:r>
-              <a:rPr sz="1100" b="0">
-                <a:solidFill>
-                  <a:srgbClr val="262B33"/>
-                </a:solidFill>
-                <a:latin typeface="Arial"/>
-              </a:rPr>
-              <a:t>No hardware to buy, install, power or maintain.</a:t>
-            </a:r>
-          </a:p>
-          <a:p>
-            <a:pPr algn="l">
-              <a:lnSpc>
-                <a:spcPct val="100000"/>
-              </a:lnSpc>
-              <a:spcBef>
-                <a:spcPts val="900"/>
-              </a:spcBef>
-              <a:spcAft>
-                <a:spcPts val="0"/>
-              </a:spcAft>
-            </a:pPr>
-            <a:r>
-              <a:rPr sz="1100" b="1">
-                <a:solidFill>
-                  <a:srgbClr val="4F81BD"/>
-                </a:solidFill>
-                <a:latin typeface="Arial"/>
-              </a:rPr>
-              <a:t>•  </a:t>
-            </a:r>
-            <a:r>
-              <a:rPr sz="1100" b="0">
-                <a:solidFill>
-                  <a:srgbClr val="262B33"/>
-                </a:solidFill>
-                <a:latin typeface="Arial"/>
-              </a:rPr>
-              <a:t>A new district needs its road geometry seeded — hours, not procurement.</a:t>
-            </a:r>
-          </a:p>
-          <a:p>
-            <a:pPr algn="l">
-              <a:lnSpc>
-                <a:spcPct val="100000"/>
-              </a:lnSpc>
-              <a:spcBef>
-                <a:spcPts val="900"/>
-              </a:spcBef>
-              <a:spcAft>
-                <a:spcPts val="0"/>
-              </a:spcAft>
-            </a:pPr>
-            <a:r>
-              <a:rPr sz="1100" b="1">
-                <a:solidFill>
-                  <a:srgbClr val="4F81BD"/>
-                </a:solidFill>
-                <a:latin typeface="Arial"/>
-              </a:rPr>
-              <a:t>•  </a:t>
-            </a:r>
-            <a:r>
-              <a:rPr sz="1100" b="0">
-                <a:solidFill>
-                  <a:srgbClr val="262B33"/>
-                </a:solidFill>
-                <a:latin typeface="Arial"/>
-              </a:rPr>
-              <a:t>Sensing density rises with adoption, at no extra cost per reading.</a:t>
-            </a:r>
-          </a:p>
-          <a:p>
-            <a:pPr algn="l">
-              <a:lnSpc>
-                <a:spcPct val="100000"/>
-              </a:lnSpc>
-              <a:spcBef>
-                <a:spcPts val="900"/>
-              </a:spcBef>
-              <a:spcAft>
-                <a:spcPts val="0"/>
-              </a:spcAft>
-            </a:pPr>
-            <a:r>
-              <a:rPr sz="1100" b="1">
-                <a:solidFill>
-                  <a:srgbClr val="4F81BD"/>
-                </a:solidFill>
-                <a:latin typeface="Arial"/>
-              </a:rPr>
-              <a:t>•  </a:t>
-            </a:r>
-            <a:r>
-              <a:rPr sz="1100" b="0">
-                <a:solidFill>
-                  <a:srgbClr val="262B33"/>
-                </a:solidFill>
-                <a:latin typeface="Arial"/>
-              </a:rPr>
-              <a:t>Runs on managed cloud services already in use.</a:t>
-            </a:r>
-          </a:p>
-        </p:txBody>
-      </p:sp>
-      <p:sp>
-        <p:nvSpPr>
-          <p:cNvPr id="17415" name="TextBox 17414"/>
-          <p:cNvSpPr txBox="1"/>
-          <p:nvPr/>
-        </p:nvSpPr>
-        <p:spPr>
-          <a:xfrm>
-            <a:off x="5047488" y="1143000"/>
-            <a:ext cx="2487168" cy="237744"/>
-          </a:xfrm>
-          <a:prstGeom prst="rect">
-            <a:avLst/>
-          </a:prstGeom>
-          <a:noFill/>
-        </p:spPr>
-        <p:txBody>
-          <a:bodyPr wrap="square" lIns="0" rIns="0" tIns="0" bIns="0">
-            <a:spAutoFit/>
-          </a:bodyPr>
-          <a:lstStyle/>
-          <a:p>
-            <a:pPr algn="l">
-              <a:lnSpc>
-                <a:spcPct val="100000"/>
-              </a:lnSpc>
-              <a:spcBef>
-                <a:spcPts val="0"/>
-              </a:spcBef>
-              <a:spcAft>
-                <a:spcPts val="0"/>
-              </a:spcAft>
-            </a:pPr>
-            <a:r>
               <a:rPr sz="1000" b="1" i="0">
                 <a:solidFill>
                   <a:srgbClr val="0070C0"/>
@@ -11533,8 +11327,8 @@
         </p:nvSpPr>
         <p:spPr>
           <a:xfrm>
-            <a:off x="5047488" y="1330452"/>
-            <a:ext cx="2487168" cy="12801"/>
+            <a:off x="4892040" y="1330452"/>
+            <a:ext cx="2331720" cy="12801"/>
           </a:xfrm>
           <a:prstGeom prst="rect">
             <a:avLst/>
@@ -11577,8 +11371,8 @@
         </p:nvSpPr>
         <p:spPr>
           <a:xfrm>
-            <a:off x="7662672" y="1143000"/>
-            <a:ext cx="4114800" cy="237744"/>
+            <a:off x="7333488" y="1143000"/>
+            <a:ext cx="4443984" cy="237744"/>
           </a:xfrm>
           <a:prstGeom prst="rect">
             <a:avLst/>
@@ -11622,8 +11416,8 @@
         </p:nvSpPr>
         <p:spPr>
           <a:xfrm>
-            <a:off x="7662672" y="1330452"/>
-            <a:ext cx="4114800" cy="12801"/>
+            <a:off x="7333488" y="1330452"/>
+            <a:ext cx="4443984" cy="12801"/>
           </a:xfrm>
           <a:prstGeom prst="rect">
             <a:avLst/>
@@ -11666,8 +11460,8 @@
         </p:nvSpPr>
         <p:spPr>
           <a:xfrm>
-            <a:off x="5047488" y="1435608"/>
-            <a:ext cx="2487168" cy="786384"/>
+            <a:off x="4892040" y="1435608"/>
+            <a:ext cx="2331720" cy="658368"/>
           </a:xfrm>
           <a:prstGeom prst="roundRect">
             <a:avLst>
@@ -11714,13 +11508,13 @@
               </a:spcAft>
             </a:pPr>
             <a:r>
-              <a:rPr sz="1050" b="1" i="0">
+              <a:rPr sz="950" b="1" i="0">
                 <a:solidFill>
                   <a:srgbClr val="C25E1E"/>
                 </a:solidFill>
                 <a:latin typeface="Arial"/>
               </a:rPr>
-              <a:t>No public register of past road closures</a:t>
+              <a:t>Remote areas lose network</a:t>
             </a:r>
           </a:p>
         </p:txBody>
@@ -11733,8 +11527,8 @@
         </p:nvSpPr>
         <p:spPr>
           <a:xfrm>
-            <a:off x="7662672" y="1435608"/>
-            <a:ext cx="4114800" cy="786384"/>
+            <a:off x="7333488" y="1435608"/>
+            <a:ext cx="4443984" cy="658368"/>
           </a:xfrm>
           <a:prstGeom prst="roundRect">
             <a:avLst>
@@ -11771,23 +11565,23 @@
           <a:p>
             <a:pPr algn="l">
               <a:lnSpc>
-                <a:spcPct val="100000"/>
-              </a:lnSpc>
-              <a:spcBef>
-                <a:spcPts val="0"/>
-              </a:spcBef>
-              <a:spcAft>
-                <a:spcPts val="0"/>
-              </a:spcAft>
-            </a:pPr>
-            <a:r>
-              <a:rPr sz="1000" b="0" i="0">
+                <a:spcPct val="98000"/>
+              </a:lnSpc>
+              <a:spcBef>
+                <a:spcPts val="0"/>
+              </a:spcBef>
+              <a:spcAft>
+                <a:spcPts val="0"/>
+              </a:spcAft>
+            </a:pPr>
+            <a:r>
+              <a:rPr sz="900" b="0" i="0">
                 <a:solidFill>
                   <a:srgbClr val="262B33"/>
                 </a:solidFill>
                 <a:latin typeface="Arial"/>
               </a:rPr>
-              <a:t>Labels drawn from a rainfall-threshold hazard function; verified field reports override them, and the dashboard states this openly.</a:t>
+              <a:t>Field reports queue on the phone under a client ID and sync later; the server rejects duplicates, so nothing is filed twice.</a:t>
             </a:r>
           </a:p>
         </p:txBody>
@@ -11800,8 +11594,8 @@
         </p:nvSpPr>
         <p:spPr>
           <a:xfrm>
-            <a:off x="7557516" y="1787652"/>
-            <a:ext cx="82296" cy="82296"/>
+            <a:off x="7237476" y="1728216"/>
+            <a:ext cx="73152" cy="73152"/>
           </a:xfrm>
           <a:prstGeom prst="rightArrow">
             <a:avLst/>
@@ -11844,8 +11638,8 @@
         </p:nvSpPr>
         <p:spPr>
           <a:xfrm>
-            <a:off x="5047488" y="2304288"/>
-            <a:ext cx="2487168" cy="786384"/>
+            <a:off x="4892040" y="2157984"/>
+            <a:ext cx="2331720" cy="658368"/>
           </a:xfrm>
           <a:prstGeom prst="roundRect">
             <a:avLst>
@@ -11892,13 +11686,13 @@
               </a:spcAft>
             </a:pPr>
             <a:r>
-              <a:rPr sz="1050" b="1" i="0">
+              <a:rPr sz="950" b="1" i="0">
                 <a:solidFill>
                   <a:srgbClr val="C25E1E"/>
                 </a:solidFill>
                 <a:latin typeface="Arial"/>
               </a:rPr>
-              <a:t>One parked driver could read as a closure</a:t>
+              <a:t>Noisy or inaccurate GPS</a:t>
             </a:r>
           </a:p>
         </p:txBody>
@@ -11911,8 +11705,8 @@
         </p:nvSpPr>
         <p:spPr>
           <a:xfrm>
-            <a:off x="7662672" y="2304288"/>
-            <a:ext cx="4114800" cy="786384"/>
+            <a:off x="7333488" y="2157984"/>
+            <a:ext cx="4443984" cy="658368"/>
           </a:xfrm>
           <a:prstGeom prst="roundRect">
             <a:avLst>
@@ -11949,23 +11743,23 @@
           <a:p>
             <a:pPr algn="l">
               <a:lnSpc>
-                <a:spcPct val="100000"/>
-              </a:lnSpc>
-              <a:spcBef>
-                <a:spcPts val="0"/>
-              </a:spcBef>
-              <a:spcAft>
-                <a:spcPts val="0"/>
-              </a:spcAft>
-            </a:pPr>
-            <a:r>
-              <a:rPr sz="1000" b="0" i="0">
+                <a:spcPct val="98000"/>
+              </a:lnSpc>
+              <a:spcBef>
+                <a:spcPts val="0"/>
+              </a:spcBef>
+              <a:spcAft>
+                <a:spcPts val="0"/>
+              </a:spcAft>
+            </a:pPr>
+            <a:r>
+              <a:rPr sz="900" b="0" i="0">
                 <a:solidFill>
                   <a:srgbClr val="262B33"/>
                 </a:solidFill>
                 <a:latin typeface="Arial"/>
               </a:rPr>
-              <a:t>A status needs ≥ 4 samples from ≥ 2 distinct vehicles, else the reading is discarded and the road keeps its previous status.</a:t>
+              <a:t>Fixes worse than 120 m are dropped on the device, and a road status needs ≥ 4 samples from ≥ 2 distinct vehicles before it changes.</a:t>
             </a:r>
           </a:p>
         </p:txBody>
@@ -11978,8 +11772,8 @@
         </p:nvSpPr>
         <p:spPr>
           <a:xfrm>
-            <a:off x="7557516" y="2656332"/>
-            <a:ext cx="82296" cy="82296"/>
+            <a:off x="7237476" y="2450592"/>
+            <a:ext cx="73152" cy="73152"/>
           </a:xfrm>
           <a:prstGeom prst="rightArrow">
             <a:avLst/>
@@ -12022,8 +11816,8 @@
         </p:nvSpPr>
         <p:spPr>
           <a:xfrm>
-            <a:off x="5047488" y="3172968"/>
-            <a:ext cx="2487168" cy="786384"/>
+            <a:off x="4892040" y="2880360"/>
+            <a:ext cx="2331720" cy="658368"/>
           </a:xfrm>
           <a:prstGeom prst="roundRect">
             <a:avLst>
@@ -12070,13 +11864,13 @@
               </a:spcAft>
             </a:pPr>
             <a:r>
-              <a:rPr sz="1050" b="1" i="0">
+              <a:rPr sz="950" b="1" i="0">
                 <a:solidFill>
                   <a:srgbClr val="C25E1E"/>
                 </a:solidFill>
                 <a:latin typeface="Arial"/>
               </a:rPr>
-              <a:t>Hill districts drop off the network</a:t>
+              <a:t>Incorrect user reports</a:t>
             </a:r>
           </a:p>
         </p:txBody>
@@ -12089,8 +11883,8 @@
         </p:nvSpPr>
         <p:spPr>
           <a:xfrm>
-            <a:off x="7662672" y="3172968"/>
-            <a:ext cx="4114800" cy="786384"/>
+            <a:off x="7333488" y="2880360"/>
+            <a:ext cx="4443984" cy="658368"/>
           </a:xfrm>
           <a:prstGeom prst="roundRect">
             <a:avLst>
@@ -12127,23 +11921,23 @@
           <a:p>
             <a:pPr algn="l">
               <a:lnSpc>
-                <a:spcPct val="100000"/>
-              </a:lnSpc>
-              <a:spcBef>
-                <a:spcPts val="0"/>
-              </a:spcBef>
-              <a:spcAft>
-                <a:spcPts val="0"/>
-              </a:spcAft>
-            </a:pPr>
-            <a:r>
-              <a:rPr sz="1000" b="0" i="0">
+                <a:spcPct val="98000"/>
+              </a:lnSpc>
+              <a:spcBef>
+                <a:spcPts val="0"/>
+              </a:spcBef>
+              <a:spcAft>
+                <a:spcPts val="0"/>
+              </a:spcAft>
+            </a:pPr>
+            <a:r>
+              <a:rPr sz="900" b="0" i="0">
                 <a:solidFill>
                   <a:srgbClr val="262B33"/>
                 </a:solidFill>
                 <a:latin typeface="Arial"/>
               </a:rPr>
-              <a:t>Reports queue on the phone under a client ID and sync later; the server rejects duplicates, so nothing is filed twice.</a:t>
+              <a:t>An unverified report is capped at RESTRICTED; only an officer's verification can close a road.</a:t>
             </a:r>
           </a:p>
         </p:txBody>
@@ -12156,8 +11950,8 @@
         </p:nvSpPr>
         <p:spPr>
           <a:xfrm>
-            <a:off x="7557516" y="3525012"/>
-            <a:ext cx="82296" cy="82296"/>
+            <a:off x="7237476" y="3172968"/>
+            <a:ext cx="73152" cy="73152"/>
           </a:xfrm>
           <a:prstGeom prst="rightArrow">
             <a:avLst/>
@@ -12200,8 +11994,8 @@
         </p:nvSpPr>
         <p:spPr>
           <a:xfrm>
-            <a:off x="5047488" y="4041648"/>
-            <a:ext cx="2487168" cy="786384"/>
+            <a:off x="4892040" y="3602736"/>
+            <a:ext cx="2331720" cy="658368"/>
           </a:xfrm>
           <a:prstGeom prst="roundRect">
             <a:avLst>
@@ -12248,13 +12042,13 @@
               </a:spcAft>
             </a:pPr>
             <a:r>
-              <a:rPr sz="1050" b="1" i="0">
+              <a:rPr sz="950" b="1" i="0">
                 <a:solidFill>
                   <a:srgbClr val="C25E1E"/>
                 </a:solidFill>
                 <a:latin typeface="Arial"/>
               </a:rPr>
-              <a:t>Officers and drivers do not share a language</a:t>
+              <a:t>Uncertainty in AI predictions</a:t>
             </a:r>
           </a:p>
         </p:txBody>
@@ -12267,8 +12061,8 @@
         </p:nvSpPr>
         <p:spPr>
           <a:xfrm>
-            <a:off x="7662672" y="4041648"/>
-            <a:ext cx="4114800" cy="786384"/>
+            <a:off x="7333488" y="3602736"/>
+            <a:ext cx="4443984" cy="658368"/>
           </a:xfrm>
           <a:prstGeom prst="roundRect">
             <a:avLst>
@@ -12305,23 +12099,23 @@
           <a:p>
             <a:pPr algn="l">
               <a:lnSpc>
-                <a:spcPct val="100000"/>
-              </a:lnSpc>
-              <a:spcBef>
-                <a:spcPts val="0"/>
-              </a:spcBef>
-              <a:spcAft>
-                <a:spcPts val="0"/>
-              </a:spcAft>
-            </a:pPr>
-            <a:r>
-              <a:rPr sz="1000" b="0" i="0">
+                <a:spcPct val="98000"/>
+              </a:lnSpc>
+              <a:spcBef>
+                <a:spcPts val="0"/>
+              </a:spcBef>
+              <a:spcAft>
+                <a:spcPts val="0"/>
+              </a:spcAft>
+            </a:pPr>
+            <a:r>
+              <a:rPr sz="900" b="0" i="0">
                 <a:solidFill>
                   <a:srgbClr val="262B33"/>
                 </a:solidFill>
                 <a:latin typeface="Arial"/>
               </a:rPr>
-              <a:t>Ten languages including Khasi, Mizo, Nagamese and Kokborok — spoken aloud as well as written, so literacy is not a barrier.</a:t>
+              <a:t>Every prediction is explainable by feature, calibration is published on screen, and current risk is kept separate from the forecast.</a:t>
             </a:r>
           </a:p>
         </p:txBody>
@@ -12334,8 +12128,8 @@
         </p:nvSpPr>
         <p:spPr>
           <a:xfrm>
-            <a:off x="7557516" y="4393692"/>
-            <a:ext cx="82296" cy="82296"/>
+            <a:off x="7237476" y="3895344"/>
+            <a:ext cx="73152" cy="73152"/>
           </a:xfrm>
           <a:prstGeom prst="rightArrow">
             <a:avLst/>
@@ -12378,8 +12172,8 @@
         </p:nvSpPr>
         <p:spPr>
           <a:xfrm>
-            <a:off x="5047488" y="4910328"/>
-            <a:ext cx="2487168" cy="786384"/>
+            <a:off x="4892040" y="4325112"/>
+            <a:ext cx="2331720" cy="658368"/>
           </a:xfrm>
           <a:prstGeom prst="roundRect">
             <a:avLst>
@@ -12426,13 +12220,13 @@
               </a:spcAft>
             </a:pPr>
             <a:r>
-              <a:rPr sz="1050" b="1" i="0">
+              <a:rPr sz="950" b="1" i="0">
                 <a:solidFill>
                   <a:srgbClr val="C25E1E"/>
                 </a:solidFill>
                 <a:latin typeface="Arial"/>
               </a:rPr>
-              <a:t>A quiet road has no vehicles to sense it</a:t>
+              <a:t>Roads close mid-journey</a:t>
             </a:r>
           </a:p>
         </p:txBody>
@@ -12445,8 +12239,8 @@
         </p:nvSpPr>
         <p:spPr>
           <a:xfrm>
-            <a:off x="7662672" y="4910328"/>
-            <a:ext cx="4114800" cy="786384"/>
+            <a:off x="7333488" y="4325112"/>
+            <a:ext cx="4443984" cy="658368"/>
           </a:xfrm>
           <a:prstGeom prst="roundRect">
             <a:avLst>
@@ -12483,23 +12277,23 @@
           <a:p>
             <a:pPr algn="l">
               <a:lnSpc>
-                <a:spcPct val="100000"/>
-              </a:lnSpc>
-              <a:spcBef>
-                <a:spcPts val="0"/>
-              </a:spcBef>
-              <a:spcAft>
-                <a:spcPts val="0"/>
-              </a:spcAft>
-            </a:pPr>
-            <a:r>
-              <a:rPr sz="1000" b="0" i="0">
+                <a:spcPct val="98000"/>
+              </a:lnSpc>
+              <a:spcBef>
+                <a:spcPts val="0"/>
+              </a:spcBef>
+              <a:spcAft>
+                <a:spcPts val="0"/>
+              </a:spcAft>
+            </a:pPr>
+            <a:r>
+              <a:rPr sz="900" b="0" i="0">
                 <a:solidFill>
                   <a:srgbClr val="262B33"/>
                 </a:solidFill>
                 <a:latin typeface="Arial"/>
               </a:rPr>
-              <a:t>The weather model forecasts every road regardless of traffic, and the dashboard shows honestly what is sensed and what is not.</a:t>
+              <a:t>The route planner scores three real alternatives and reports why each rejected one failed.</a:t>
             </a:r>
           </a:p>
         </p:txBody>
@@ -12512,8 +12306,186 @@
         </p:nvSpPr>
         <p:spPr>
           <a:xfrm>
-            <a:off x="7557516" y="5262372"/>
-            <a:ext cx="82296" cy="82296"/>
+            <a:off x="7237476" y="4617720"/>
+            <a:ext cx="73152" cy="73152"/>
+          </a:xfrm>
+          <a:prstGeom prst="rightArrow">
+            <a:avLst/>
+          </a:prstGeom>
+          <a:solidFill>
+            <a:srgbClr val="4F81BD"/>
+          </a:solidFill>
+          <a:ln>
+            <a:noFill/>
+          </a:ln>
+          <a:effectLst/>
+        </p:spPr>
+        <p:style>
+          <a:lnRef idx="1">
+            <a:schemeClr val="accent1"/>
+          </a:lnRef>
+          <a:fillRef idx="3">
+            <a:schemeClr val="accent1"/>
+          </a:fillRef>
+          <a:effectRef idx="2">
+            <a:schemeClr val="accent1"/>
+          </a:effectRef>
+          <a:fontRef idx="minor">
+            <a:schemeClr val="lt1"/>
+          </a:fontRef>
+        </p:style>
+        <p:txBody>
+          <a:bodyPr rtlCol="0" anchor="ctr"/>
+          <a:lstStyle/>
+          <a:p>
+            <a:pPr algn="ctr"/>
+          </a:p>
+        </p:txBody>
+      </p:sp>
+      <p:sp>
+        <p:nvSpPr>
+          <p:cNvPr id="17434" name="Rounded Rectangle 17433"/>
+          <p:cNvSpPr/>
+          <p:nvPr/>
+        </p:nvSpPr>
+        <p:spPr>
+          <a:xfrm>
+            <a:off x="4892040" y="5047488"/>
+            <a:ext cx="2331720" cy="658368"/>
+          </a:xfrm>
+          <a:prstGeom prst="roundRect">
+            <a:avLst>
+              <a:gd name="adj" fmla="val 8000"/>
+            </a:avLst>
+          </a:prstGeom>
+          <a:solidFill>
+            <a:srgbClr val="F2F5F9"/>
+          </a:solidFill>
+          <a:ln w="9525">
+            <a:solidFill>
+              <a:srgbClr val="C9D6E4"/>
+            </a:solidFill>
+          </a:ln>
+          <a:effectLst/>
+        </p:spPr>
+        <p:style>
+          <a:lnRef idx="1">
+            <a:schemeClr val="accent1"/>
+          </a:lnRef>
+          <a:fillRef idx="3">
+            <a:schemeClr val="accent1"/>
+          </a:fillRef>
+          <a:effectRef idx="2">
+            <a:schemeClr val="accent1"/>
+          </a:effectRef>
+          <a:fontRef idx="minor">
+            <a:schemeClr val="lt1"/>
+          </a:fontRef>
+        </p:style>
+        <p:txBody>
+          <a:bodyPr rtlCol="0" anchor="ctr" wrap="square" lIns="109728" rIns="109728" tIns="54864" bIns="54864"/>
+          <a:lstStyle/>
+          <a:p>
+            <a:pPr algn="l">
+              <a:lnSpc>
+                <a:spcPct val="98000"/>
+              </a:lnSpc>
+              <a:spcBef>
+                <a:spcPts val="0"/>
+              </a:spcBef>
+              <a:spcAft>
+                <a:spcPts val="0"/>
+              </a:spcAft>
+            </a:pPr>
+            <a:r>
+              <a:rPr sz="950" b="1" i="0">
+                <a:solidFill>
+                  <a:srgbClr val="C25E1E"/>
+                </a:solidFill>
+                <a:latin typeface="Arial"/>
+              </a:rPr>
+              <a:t>No historical closure dataset</a:t>
+            </a:r>
+          </a:p>
+        </p:txBody>
+      </p:sp>
+      <p:sp>
+        <p:nvSpPr>
+          <p:cNvPr id="17435" name="Rounded Rectangle 17434"/>
+          <p:cNvSpPr/>
+          <p:nvPr/>
+        </p:nvSpPr>
+        <p:spPr>
+          <a:xfrm>
+            <a:off x="7333488" y="5047488"/>
+            <a:ext cx="4443984" cy="658368"/>
+          </a:xfrm>
+          <a:prstGeom prst="roundRect">
+            <a:avLst>
+              <a:gd name="adj" fmla="val 8000"/>
+            </a:avLst>
+          </a:prstGeom>
+          <a:solidFill>
+            <a:srgbClr val="F2F5F9"/>
+          </a:solidFill>
+          <a:ln w="9525">
+            <a:solidFill>
+              <a:srgbClr val="C9D6E4"/>
+            </a:solidFill>
+          </a:ln>
+          <a:effectLst/>
+        </p:spPr>
+        <p:style>
+          <a:lnRef idx="1">
+            <a:schemeClr val="accent1"/>
+          </a:lnRef>
+          <a:fillRef idx="3">
+            <a:schemeClr val="accent1"/>
+          </a:fillRef>
+          <a:effectRef idx="2">
+            <a:schemeClr val="accent1"/>
+          </a:effectRef>
+          <a:fontRef idx="minor">
+            <a:schemeClr val="lt1"/>
+          </a:fontRef>
+        </p:style>
+        <p:txBody>
+          <a:bodyPr rtlCol="0" anchor="ctr" wrap="square" lIns="109728" rIns="109728" tIns="54864" bIns="54864"/>
+          <a:lstStyle/>
+          <a:p>
+            <a:pPr algn="l">
+              <a:lnSpc>
+                <a:spcPct val="98000"/>
+              </a:lnSpc>
+              <a:spcBef>
+                <a:spcPts val="0"/>
+              </a:spcBef>
+              <a:spcAft>
+                <a:spcPts val="0"/>
+              </a:spcAft>
+            </a:pPr>
+            <a:r>
+              <a:rPr sz="900" b="0" i="0">
+                <a:solidFill>
+                  <a:srgbClr val="262B33"/>
+                </a:solidFill>
+                <a:latin typeface="Arial"/>
+              </a:rPr>
+              <a:t>Labels come from a rainfall-threshold hazard function; verified field reports override them, and the platform says so openly.</a:t>
+            </a:r>
+          </a:p>
+        </p:txBody>
+      </p:sp>
+      <p:sp>
+        <p:nvSpPr>
+          <p:cNvPr id="17436" name="Right Arrow 17435"/>
+          <p:cNvSpPr/>
+          <p:nvPr/>
+        </p:nvSpPr>
+        <p:spPr>
+          <a:xfrm>
+            <a:off x="7237476" y="5340096"/>
+            <a:ext cx="73152" cy="73152"/>
           </a:xfrm>
           <a:prstGeom prst="rightArrow">
             <a:avLst/>
@@ -13027,7 +12999,7 @@
         <p:spPr>
           <a:xfrm>
             <a:off x="411480" y="1435608"/>
-            <a:ext cx="2718054" cy="1298448"/>
+            <a:ext cx="2731770" cy="1225296"/>
           </a:xfrm>
           <a:prstGeom prst="roundRect">
             <a:avLst>
@@ -13074,7 +13046,7 @@
               </a:spcAft>
             </a:pPr>
             <a:r>
-              <a:rPr sz="1150" b="1" i="0">
+              <a:rPr sz="1050" b="1" i="0">
                 <a:solidFill>
                   <a:srgbClr val="1F497D"/>
                 </a:solidFill>
@@ -13089,20 +13061,20 @@
                 <a:spcPct val="98000"/>
               </a:lnSpc>
               <a:spcBef>
-                <a:spcPts val="400"/>
-              </a:spcBef>
-              <a:spcAft>
-                <a:spcPts val="0"/>
-              </a:spcAft>
-            </a:pPr>
-            <a:r>
-              <a:rPr sz="1050" b="0" i="0">
+                <a:spcPts val="300"/>
+              </a:spcBef>
+              <a:spcAft>
+                <a:spcPts val="0"/>
+              </a:spcAft>
+            </a:pPr>
+            <a:r>
+              <a:rPr sz="900" b="0" i="0">
                 <a:solidFill>
                   <a:srgbClr val="262B33"/>
                 </a:solidFill>
                 <a:latin typeface="Arial"/>
               </a:rPr>
-              <a:t>A lifeline corridor's closure risk 72 hours out, ranked by how many people lose their only road.</a:t>
+              <a:t>Continuous visibility of accessibility, and a lifeline corridor's closure risk 72 hours out.</a:t>
             </a:r>
           </a:p>
         </p:txBody>
@@ -13115,8 +13087,8 @@
         </p:nvSpPr>
         <p:spPr>
           <a:xfrm>
-            <a:off x="3294126" y="1435608"/>
-            <a:ext cx="2718054" cy="1298448"/>
+            <a:off x="3289554" y="1435608"/>
+            <a:ext cx="2731770" cy="1225296"/>
           </a:xfrm>
           <a:prstGeom prst="roundRect">
             <a:avLst>
@@ -13163,7 +13135,7 @@
               </a:spcAft>
             </a:pPr>
             <a:r>
-              <a:rPr sz="1150" b="1" i="0">
+              <a:rPr sz="1050" b="1" i="0">
                 <a:solidFill>
                   <a:srgbClr val="1F497D"/>
                 </a:solidFill>
@@ -13178,20 +13150,20 @@
                 <a:spcPct val="98000"/>
               </a:lnSpc>
               <a:spcBef>
-                <a:spcPts val="400"/>
-              </a:spcBef>
-              <a:spcAft>
-                <a:spcPts val="0"/>
-              </a:spcAft>
-            </a:pPr>
-            <a:r>
-              <a:rPr sz="1050" b="0" i="0">
+                <a:spcPts val="300"/>
+              </a:spcBef>
+              <a:spcAft>
+                <a:spcPts val="0"/>
+              </a:spcAft>
+            </a:pPr>
+            <a:r>
+              <a:rPr sz="900" b="0" i="0">
                 <a:solidFill>
                   <a:srgbClr val="262B33"/>
                 </a:solidFill>
                 <a:latin typeface="Arial"/>
               </a:rPr>
-              <a:t>One screen: weak points ranked with the reason each scored, and a queue of reports to confirm.</a:t>
+              <a:t>Weak points ranked with the reason each scored, and a queue of reports to verify.</a:t>
             </a:r>
           </a:p>
         </p:txBody>
@@ -13204,8 +13176,8 @@
         </p:nvSpPr>
         <p:spPr>
           <a:xfrm>
-            <a:off x="6176772" y="1435608"/>
-            <a:ext cx="2718054" cy="1298448"/>
+            <a:off x="6167628" y="1435608"/>
+            <a:ext cx="2731770" cy="1225296"/>
           </a:xfrm>
           <a:prstGeom prst="roundRect">
             <a:avLst>
@@ -13252,13 +13224,13 @@
               </a:spcAft>
             </a:pPr>
             <a:r>
-              <a:rPr sz="1150" b="1" i="0">
+              <a:rPr sz="1050" b="1" i="0">
                 <a:solidFill>
                   <a:srgbClr val="1F497D"/>
                 </a:solidFill>
                 <a:latin typeface="Arial"/>
               </a:rPr>
-              <a:t>Drivers and small operators</a:t>
+              <a:t>Transporters and drivers</a:t>
             </a:r>
           </a:p>
           <a:p>
@@ -13267,20 +13239,20 @@
                 <a:spcPct val="98000"/>
               </a:lnSpc>
               <a:spcBef>
-                <a:spcPts val="400"/>
-              </a:spcBef>
-              <a:spcAft>
-                <a:spcPts val="0"/>
-              </a:spcAft>
-            </a:pPr>
-            <a:r>
-              <a:rPr sz="1050" b="0" i="0">
+                <a:spcPts val="300"/>
+              </a:spcBef>
+              <a:spcAft>
+                <a:spcPts val="0"/>
+              </a:spcAft>
+            </a:pPr>
+            <a:r>
+              <a:rPr sz="900" b="0" i="0">
                 <a:solidFill>
                   <a:srgbClr val="262B33"/>
                 </a:solidFill>
                 <a:latin typeface="Arial"/>
               </a:rPr>
-              <a:t>Income from a journey already being made — no fleet, no contract, no empty return leg.</a:t>
+              <a:t>Income from a journey already being made, and route conditions before setting out.</a:t>
             </a:r>
           </a:p>
         </p:txBody>
@@ -13293,8 +13265,8 @@
         </p:nvSpPr>
         <p:spPr>
           <a:xfrm>
-            <a:off x="9059418" y="1435608"/>
-            <a:ext cx="2718054" cy="1298448"/>
+            <a:off x="9045702" y="1435608"/>
+            <a:ext cx="2731770" cy="1225296"/>
           </a:xfrm>
           <a:prstGeom prst="roundRect">
             <a:avLst>
@@ -13341,7 +13313,7 @@
               </a:spcAft>
             </a:pPr>
             <a:r>
-              <a:rPr sz="1150" b="1" i="0">
+              <a:rPr sz="1050" b="1" i="0">
                 <a:solidFill>
                   <a:srgbClr val="1F497D"/>
                 </a:solidFill>
@@ -13356,20 +13328,20 @@
                 <a:spcPct val="98000"/>
               </a:lnSpc>
               <a:spcBef>
-                <a:spcPts val="400"/>
-              </a:spcBef>
-              <a:spcAft>
-                <a:spcPts val="0"/>
-              </a:spcAft>
-            </a:pPr>
-            <a:r>
-              <a:rPr sz="1050" b="0" i="0">
+                <a:spcPts val="300"/>
+              </a:spcBef>
+              <a:spcAft>
+                <a:spcPts val="0"/>
+              </a:spcAft>
+            </a:pPr>
+            <a:r>
+              <a:rPr sz="900" b="0" i="0">
                 <a:solidFill>
                   <a:srgbClr val="262B33"/>
                 </a:solidFill>
                 <a:latin typeface="Arial"/>
               </a:rPr>
-              <a:t>Medicines, food, produce and construction material arrive — and an alert in the language spoken at home when they will not.</a:t>
+              <a:t>Medicines, food, produce and construction material arrive — with an alert in the language spoken at home when they will not.</a:t>
             </a:r>
           </a:p>
         </p:txBody>
@@ -13382,7 +13354,7 @@
         </p:nvSpPr>
         <p:spPr>
           <a:xfrm>
-            <a:off x="411480" y="2880360"/>
+            <a:off x="411480" y="2788920"/>
             <a:ext cx="11365992" cy="237744"/>
           </a:xfrm>
           <a:prstGeom prst="rect">
@@ -13427,7 +13399,7 @@
         </p:nvSpPr>
         <p:spPr>
           <a:xfrm>
-            <a:off x="411480" y="3067812"/>
+            <a:off x="411480" y="2976372"/>
             <a:ext cx="11365992" cy="12801"/>
           </a:xfrm>
           <a:prstGeom prst="rect">
@@ -13471,8 +13443,8 @@
         </p:nvSpPr>
         <p:spPr>
           <a:xfrm>
-            <a:off x="411480" y="3172968"/>
-            <a:ext cx="1444752" cy="585216"/>
+            <a:off x="411480" y="3081527"/>
+            <a:ext cx="2731770" cy="310896"/>
           </a:xfrm>
           <a:prstGeom prst="roundRect">
             <a:avLst>
@@ -13517,7 +13489,7 @@
               </a:spcAft>
             </a:pPr>
             <a:r>
-              <a:rPr sz="1200" b="1" i="0">
+              <a:rPr sz="1050" b="1" i="0">
                 <a:solidFill>
                   <a:srgbClr val="FFFFFF"/>
                 </a:solidFill>
@@ -13536,8 +13508,8 @@
         </p:nvSpPr>
         <p:spPr>
           <a:xfrm>
-            <a:off x="1965960" y="3172968"/>
-            <a:ext cx="9811512" cy="585216"/>
+            <a:off x="411480" y="3428999"/>
+            <a:ext cx="2731770" cy="896112"/>
           </a:xfrm>
           <a:prstGeom prst="roundRect">
             <a:avLst>
@@ -13574,23 +13546,23 @@
           <a:p>
             <a:pPr algn="l">
               <a:lnSpc>
-                <a:spcPct val="100000"/>
-              </a:lnSpc>
-              <a:spcBef>
-                <a:spcPts val="0"/>
-              </a:spcBef>
-              <a:spcAft>
-                <a:spcPts val="0"/>
-              </a:spcAft>
-            </a:pPr>
-            <a:r>
-              <a:rPr sz="1100" b="0" i="0">
+                <a:spcPct val="98000"/>
+              </a:lnSpc>
+              <a:spcBef>
+                <a:spcPts val="0"/>
+              </a:spcBef>
+              <a:spcAft>
+                <a:spcPts val="0"/>
+              </a:spcAft>
+            </a:pPr>
+            <a:r>
+              <a:rPr sz="900" b="0" i="0">
                 <a:solidFill>
                   <a:srgbClr val="262B33"/>
                 </a:solidFill>
                 <a:latin typeface="Arial"/>
               </a:rPr>
-              <a:t>8 states · 82 districts. Alerts and voice reporting in 10 languages, four of which have almost no other software support.</a:t>
+              <a:t>8 states, 82 districts. Alerts and voice reporting in 10 languages, four with almost no other software support.</a:t>
             </a:r>
           </a:p>
         </p:txBody>
@@ -13603,8 +13575,8 @@
         </p:nvSpPr>
         <p:spPr>
           <a:xfrm>
-            <a:off x="411480" y="3840480"/>
-            <a:ext cx="1444752" cy="585216"/>
+            <a:off x="3289554" y="3081527"/>
+            <a:ext cx="2731770" cy="310896"/>
           </a:xfrm>
           <a:prstGeom prst="roundRect">
             <a:avLst>
@@ -13649,7 +13621,7 @@
               </a:spcAft>
             </a:pPr>
             <a:r>
-              <a:rPr sz="1200" b="1" i="0">
+              <a:rPr sz="1050" b="1" i="0">
                 <a:solidFill>
                   <a:srgbClr val="FFFFFF"/>
                 </a:solidFill>
@@ -13668,8 +13640,8 @@
         </p:nvSpPr>
         <p:spPr>
           <a:xfrm>
-            <a:off x="1965960" y="3840480"/>
-            <a:ext cx="9811512" cy="585216"/>
+            <a:off x="3289554" y="3428999"/>
+            <a:ext cx="2731770" cy="896112"/>
           </a:xfrm>
           <a:prstGeom prst="roundRect">
             <a:avLst>
@@ -13706,23 +13678,23 @@
           <a:p>
             <a:pPr algn="l">
               <a:lnSpc>
-                <a:spcPct val="100000"/>
-              </a:lnSpc>
-              <a:spcBef>
-                <a:spcPts val="0"/>
-              </a:spcBef>
-              <a:spcAft>
-                <a:spcPts val="0"/>
-              </a:spcAft>
-            </a:pPr>
-            <a:r>
-              <a:rPr sz="1100" b="0" i="0">
+                <a:spcPct val="98000"/>
+              </a:lnSpc>
+              <a:spcBef>
+                <a:spcPts val="0"/>
+              </a:spcBef>
+              <a:spcAft>
+                <a:spcPts val="0"/>
+              </a:spcAft>
+            </a:pPr>
+            <a:r>
+              <a:rPr sz="900" b="0" i="0">
                 <a:solidFill>
                   <a:srgbClr val="262B33"/>
                 </a:solidFill>
                 <a:latin typeface="Arial"/>
               </a:rPr>
-              <a:t>No dedicated fleet, so moving one more parcel costs close to nothing. Spare capacity in vehicles already on the road becomes income.</a:t>
+              <a:t>Corridor matching turns spare capacity into income. No dedicated fleet, so cost per extra parcel is near zero.</a:t>
             </a:r>
           </a:p>
         </p:txBody>
@@ -13735,8 +13707,8 @@
         </p:nvSpPr>
         <p:spPr>
           <a:xfrm>
-            <a:off x="411480" y="4507992"/>
-            <a:ext cx="1444752" cy="585216"/>
+            <a:off x="6167628" y="3081527"/>
+            <a:ext cx="2731770" cy="310896"/>
           </a:xfrm>
           <a:prstGeom prst="roundRect">
             <a:avLst>
@@ -13781,7 +13753,7 @@
               </a:spcAft>
             </a:pPr>
             <a:r>
-              <a:rPr sz="1200" b="1" i="0">
+              <a:rPr sz="1050" b="1" i="0">
                 <a:solidFill>
                   <a:srgbClr val="FFFFFF"/>
                 </a:solidFill>
@@ -13800,8 +13772,8 @@
         </p:nvSpPr>
         <p:spPr>
           <a:xfrm>
-            <a:off x="1965960" y="4507992"/>
-            <a:ext cx="9811512" cy="585216"/>
+            <a:off x="6167628" y="3428999"/>
+            <a:ext cx="2731770" cy="896112"/>
           </a:xfrm>
           <a:prstGeom prst="roundRect">
             <a:avLst>
@@ -13838,23 +13810,23 @@
           <a:p>
             <a:pPr algn="l">
               <a:lnSpc>
-                <a:spcPct val="100000"/>
-              </a:lnSpc>
-              <a:spcBef>
-                <a:spcPts val="0"/>
-              </a:spcBef>
-              <a:spcAft>
-                <a:spcPts val="0"/>
-              </a:spcAft>
-            </a:pPr>
-            <a:r>
-              <a:rPr sz="1100" b="0" i="0">
+                <a:spcPct val="98000"/>
+              </a:lnSpc>
+              <a:spcBef>
+                <a:spcPts val="0"/>
+              </a:spcBef>
+              <a:spcAft>
+                <a:spcPts val="0"/>
+              </a:spcAft>
+            </a:pPr>
+            <a:r>
+              <a:rPr sz="900" b="0" i="0">
                 <a:solidFill>
                   <a:srgbClr val="262B33"/>
                 </a:solidFill>
                 <a:latin typeface="Arial"/>
               </a:rPr>
-              <a:t>Fewer dedicated trips — a parcel rides in a vehicle that was making the journey anyway, instead of a second one setting out.</a:t>
+              <a:t>Fewer dedicated trips — a parcel rides in a vehicle already making the journey, not a second one.</a:t>
             </a:r>
           </a:p>
         </p:txBody>
@@ -13867,8 +13839,8 @@
         </p:nvSpPr>
         <p:spPr>
           <a:xfrm>
-            <a:off x="411480" y="5175504"/>
-            <a:ext cx="1444752" cy="585216"/>
+            <a:off x="9045702" y="3081527"/>
+            <a:ext cx="2731770" cy="310896"/>
           </a:xfrm>
           <a:prstGeom prst="roundRect">
             <a:avLst>
@@ -13913,7 +13885,7 @@
               </a:spcAft>
             </a:pPr>
             <a:r>
-              <a:rPr sz="1200" b="1" i="0">
+              <a:rPr sz="1050" b="1" i="0">
                 <a:solidFill>
                   <a:srgbClr val="FFFFFF"/>
                 </a:solidFill>
@@ -13932,8 +13904,8 @@
         </p:nvSpPr>
         <p:spPr>
           <a:xfrm>
-            <a:off x="1965960" y="5175504"/>
-            <a:ext cx="9811512" cy="585216"/>
+            <a:off x="9045702" y="3428999"/>
+            <a:ext cx="2731770" cy="896112"/>
           </a:xfrm>
           <a:prstGeom prst="roundRect">
             <a:avLst>
@@ -13970,6 +13942,51 @@
           <a:p>
             <a:pPr algn="l">
               <a:lnSpc>
+                <a:spcPct val="98000"/>
+              </a:lnSpc>
+              <a:spcBef>
+                <a:spcPts val="0"/>
+              </a:spcBef>
+              <a:spcAft>
+                <a:spcPts val="0"/>
+              </a:spcAft>
+            </a:pPr>
+            <a:r>
+              <a:rPr sz="900" b="0" i="0">
+                <a:solidFill>
+                  <a:srgbClr val="262B33"/>
+                </a:solidFill>
+                <a:latin typeface="Arial"/>
+              </a:rPr>
+              <a:t>Photo, GPS fix, timestamp and the verifying officer on every incident. An evidence trail, not a phone call.</a:t>
+            </a:r>
+          </a:p>
+        </p:txBody>
+      </p:sp>
+      <p:sp>
+        <p:nvSpPr>
+          <p:cNvPr id="17426" name="TextBox 17425"/>
+          <p:cNvSpPr txBox="1"/>
+          <p:nvPr/>
+        </p:nvSpPr>
+        <p:spPr>
+          <a:xfrm>
+            <a:off x="411480" y="4453127"/>
+            <a:ext cx="11365992" cy="219456"/>
+          </a:xfrm>
+          <a:prstGeom prst="rect">
+            <a:avLst/>
+          </a:prstGeom>
+          <a:noFill/>
+        </p:spPr>
+        <p:txBody>
+          <a:bodyPr wrap="square" lIns="0" rIns="0" tIns="0" bIns="0">
+            <a:spAutoFit/>
+          </a:bodyPr>
+          <a:lstStyle/>
+          <a:p>
+            <a:pPr algn="l">
+              <a:lnSpc>
                 <a:spcPct val="100000"/>
               </a:lnSpc>
               <a:spcBef>
@@ -13980,27 +13997,27 @@
               </a:spcAft>
             </a:pPr>
             <a:r>
-              <a:rPr sz="1100" b="0" i="0">
-                <a:solidFill>
-                  <a:srgbClr val="262B33"/>
-                </a:solidFill>
-                <a:latin typeface="Arial"/>
-              </a:rPr>
-              <a:t>Every incident carries a photo, a GPS fix, a timestamp and the officer who confirmed it — an evidence trail, not a phone call.</a:t>
-            </a:r>
-          </a:p>
-        </p:txBody>
-      </p:sp>
-      <p:sp>
-        <p:nvSpPr>
-          <p:cNvPr id="17426" name="Rounded Rectangle 17425"/>
+              <a:rPr sz="900" b="1" i="0">
+                <a:solidFill>
+                  <a:srgbClr val="1F497D"/>
+                </a:solidFill>
+                <a:latin typeface="Arial"/>
+              </a:rPr>
+              <a:t>PRODUCT DEVELOPMENT TIMELINE</a:t>
+            </a:r>
+          </a:p>
+        </p:txBody>
+      </p:sp>
+      <p:sp>
+        <p:nvSpPr>
+          <p:cNvPr id="17427" name="Rounded Rectangle 17426"/>
           <p:cNvSpPr/>
           <p:nvPr/>
         </p:nvSpPr>
         <p:spPr>
           <a:xfrm>
-            <a:off x="411480" y="5879592"/>
-            <a:ext cx="11365992" cy="402336"/>
+            <a:off x="411480" y="4690871"/>
+            <a:ext cx="2185416" cy="950976"/>
           </a:xfrm>
           <a:prstGeom prst="roundRect">
             <a:avLst>
@@ -14010,9 +14027,9 @@
           <a:solidFill>
             <a:srgbClr val="FFFFFF"/>
           </a:solidFill>
-          <a:ln w="15875">
+          <a:ln w="9525">
             <a:solidFill>
-              <a:srgbClr val="4F81BD"/>
+              <a:srgbClr val="C9D6E4"/>
             </a:solidFill>
           </a:ln>
           <a:effectLst/>
@@ -14032,29 +14049,870 @@
           </a:fontRef>
         </p:style>
         <p:txBody>
-          <a:bodyPr rtlCol="0" anchor="ctr" wrap="square" lIns="109728" rIns="109728" tIns="54864" bIns="54864"/>
+          <a:bodyPr rtlCol="0" anchor="t" wrap="square" lIns="109728" rIns="109728" tIns="54864" bIns="54864"/>
           <a:lstStyle/>
           <a:p>
-            <a:pPr algn="ctr">
-              <a:lnSpc>
-                <a:spcPct val="100000"/>
-              </a:lnSpc>
-              <a:spcBef>
-                <a:spcPts val="0"/>
-              </a:spcBef>
-              <a:spcAft>
-                <a:spcPts val="0"/>
-              </a:spcAft>
-            </a:pPr>
-            <a:r>
-              <a:rPr sz="1050" b="1" i="0">
+            <a:pPr algn="l">
+              <a:lnSpc>
+                <a:spcPct val="95000"/>
+              </a:lnSpc>
+              <a:spcBef>
+                <a:spcPts val="0"/>
+              </a:spcBef>
+              <a:spcAft>
+                <a:spcPts val="0"/>
+              </a:spcAft>
+            </a:pPr>
+            <a:r>
+              <a:rPr sz="850" b="1">
                 <a:solidFill>
                   <a:srgbClr val="1F497D"/>
                 </a:solidFill>
                 <a:latin typeface="Arial"/>
               </a:rPr>
-              <a:t>Improved regional connectivity  ·  stronger emergency response  ·  fewer supply-chain disruptions  ·  planning and monitoring on evidence</a:t>
-            </a:r>
+              <a:t>Phase 1   </a:t>
+            </a:r>
+            <a:r>
+              <a:rPr sz="850" b="1">
+                <a:solidFill>
+                  <a:srgbClr val="2E7D4F"/>
+                </a:solidFill>
+                <a:latin typeface="Arial"/>
+              </a:rPr>
+              <a:t>DONE</a:t>
+            </a:r>
+          </a:p>
+          <a:p>
+            <a:pPr algn="l">
+              <a:lnSpc>
+                <a:spcPct val="95000"/>
+              </a:lnSpc>
+              <a:spcBef>
+                <a:spcPts val="200"/>
+              </a:spcBef>
+              <a:spcAft>
+                <a:spcPts val="0"/>
+              </a:spcAft>
+            </a:pPr>
+            <a:r>
+              <a:rPr sz="1000" b="1" i="0">
+                <a:solidFill>
+                  <a:srgbClr val="1F497D"/>
+                </a:solidFill>
+                <a:latin typeface="Arial"/>
+              </a:rPr>
+              <a:t>Core platform</a:t>
+            </a:r>
+          </a:p>
+          <a:p>
+            <a:pPr algn="l">
+              <a:lnSpc>
+                <a:spcPct val="95000"/>
+              </a:lnSpc>
+              <a:spcBef>
+                <a:spcPts val="100"/>
+              </a:spcBef>
+              <a:spcAft>
+                <a:spcPts val="0"/>
+              </a:spcAft>
+            </a:pPr>
+            <a:r>
+              <a:rPr sz="800" b="0" i="0">
+                <a:solidFill>
+                  <a:srgbClr val="5A636E"/>
+                </a:solidFill>
+                <a:latin typeface="Arial"/>
+              </a:rPr>
+              <a:t>4 apps, dashboard, 118 endpoints</a:t>
+            </a:r>
+          </a:p>
+        </p:txBody>
+      </p:sp>
+      <p:sp>
+        <p:nvSpPr>
+          <p:cNvPr id="17428" name="Rectangle 17427"/>
+          <p:cNvSpPr/>
+          <p:nvPr/>
+        </p:nvSpPr>
+        <p:spPr>
+          <a:xfrm>
+            <a:off x="411480" y="5678423"/>
+            <a:ext cx="2185416" cy="45720"/>
+          </a:xfrm>
+          <a:prstGeom prst="rect">
+            <a:avLst/>
+          </a:prstGeom>
+          <a:solidFill>
+            <a:srgbClr val="C9D6E4"/>
+          </a:solidFill>
+          <a:ln>
+            <a:noFill/>
+          </a:ln>
+          <a:effectLst/>
+        </p:spPr>
+        <p:style>
+          <a:lnRef idx="1">
+            <a:schemeClr val="accent1"/>
+          </a:lnRef>
+          <a:fillRef idx="3">
+            <a:schemeClr val="accent1"/>
+          </a:fillRef>
+          <a:effectRef idx="2">
+            <a:schemeClr val="accent1"/>
+          </a:effectRef>
+          <a:fontRef idx="minor">
+            <a:schemeClr val="lt1"/>
+          </a:fontRef>
+        </p:style>
+        <p:txBody>
+          <a:bodyPr rtlCol="0" anchor="ctr"/>
+          <a:lstStyle/>
+          <a:p>
+            <a:pPr algn="ctr"/>
+          </a:p>
+        </p:txBody>
+      </p:sp>
+      <p:sp>
+        <p:nvSpPr>
+          <p:cNvPr id="17429" name="Rectangle 17428"/>
+          <p:cNvSpPr/>
+          <p:nvPr/>
+        </p:nvSpPr>
+        <p:spPr>
+          <a:xfrm>
+            <a:off x="411480" y="5678423"/>
+            <a:ext cx="2185416" cy="45720"/>
+          </a:xfrm>
+          <a:prstGeom prst="rect">
+            <a:avLst/>
+          </a:prstGeom>
+          <a:solidFill>
+            <a:srgbClr val="2E7D4F"/>
+          </a:solidFill>
+          <a:ln>
+            <a:noFill/>
+          </a:ln>
+          <a:effectLst/>
+        </p:spPr>
+        <p:style>
+          <a:lnRef idx="1">
+            <a:schemeClr val="accent1"/>
+          </a:lnRef>
+          <a:fillRef idx="3">
+            <a:schemeClr val="accent1"/>
+          </a:fillRef>
+          <a:effectRef idx="2">
+            <a:schemeClr val="accent1"/>
+          </a:effectRef>
+          <a:fontRef idx="minor">
+            <a:schemeClr val="lt1"/>
+          </a:fontRef>
+        </p:style>
+        <p:txBody>
+          <a:bodyPr rtlCol="0" anchor="ctr"/>
+          <a:lstStyle/>
+          <a:p>
+            <a:pPr algn="ctr"/>
+          </a:p>
+        </p:txBody>
+      </p:sp>
+      <p:sp>
+        <p:nvSpPr>
+          <p:cNvPr id="17430" name="Rounded Rectangle 17429"/>
+          <p:cNvSpPr/>
+          <p:nvPr/>
+        </p:nvSpPr>
+        <p:spPr>
+          <a:xfrm>
+            <a:off x="2706624" y="4690871"/>
+            <a:ext cx="2185416" cy="950976"/>
+          </a:xfrm>
+          <a:prstGeom prst="roundRect">
+            <a:avLst>
+              <a:gd name="adj" fmla="val 8000"/>
+            </a:avLst>
+          </a:prstGeom>
+          <a:solidFill>
+            <a:srgbClr val="FFFFFF"/>
+          </a:solidFill>
+          <a:ln w="9525">
+            <a:solidFill>
+              <a:srgbClr val="C9D6E4"/>
+            </a:solidFill>
+          </a:ln>
+          <a:effectLst/>
+        </p:spPr>
+        <p:style>
+          <a:lnRef idx="1">
+            <a:schemeClr val="accent1"/>
+          </a:lnRef>
+          <a:fillRef idx="3">
+            <a:schemeClr val="accent1"/>
+          </a:fillRef>
+          <a:effectRef idx="2">
+            <a:schemeClr val="accent1"/>
+          </a:effectRef>
+          <a:fontRef idx="minor">
+            <a:schemeClr val="lt1"/>
+          </a:fontRef>
+        </p:style>
+        <p:txBody>
+          <a:bodyPr rtlCol="0" anchor="t" wrap="square" lIns="109728" rIns="109728" tIns="54864" bIns="54864"/>
+          <a:lstStyle/>
+          <a:p>
+            <a:pPr algn="l">
+              <a:lnSpc>
+                <a:spcPct val="95000"/>
+              </a:lnSpc>
+              <a:spcBef>
+                <a:spcPts val="0"/>
+              </a:spcBef>
+              <a:spcAft>
+                <a:spcPts val="0"/>
+              </a:spcAft>
+            </a:pPr>
+            <a:r>
+              <a:rPr sz="850" b="1">
+                <a:solidFill>
+                  <a:srgbClr val="1F497D"/>
+                </a:solidFill>
+                <a:latin typeface="Arial"/>
+              </a:rPr>
+              <a:t>Phase 2   </a:t>
+            </a:r>
+            <a:r>
+              <a:rPr sz="850" b="1">
+                <a:solidFill>
+                  <a:srgbClr val="2E7D4F"/>
+                </a:solidFill>
+                <a:latin typeface="Arial"/>
+              </a:rPr>
+              <a:t>DONE</a:t>
+            </a:r>
+          </a:p>
+          <a:p>
+            <a:pPr algn="l">
+              <a:lnSpc>
+                <a:spcPct val="95000"/>
+              </a:lnSpc>
+              <a:spcBef>
+                <a:spcPts val="200"/>
+              </a:spcBef>
+              <a:spcAft>
+                <a:spcPts val="0"/>
+              </a:spcAft>
+            </a:pPr>
+            <a:r>
+              <a:rPr sz="1000" b="1" i="0">
+                <a:solidFill>
+                  <a:srgbClr val="1F497D"/>
+                </a:solidFill>
+                <a:latin typeface="Arial"/>
+              </a:rPr>
+              <a:t>Intelligence layer</a:t>
+            </a:r>
+          </a:p>
+          <a:p>
+            <a:pPr algn="l">
+              <a:lnSpc>
+                <a:spcPct val="95000"/>
+              </a:lnSpc>
+              <a:spcBef>
+                <a:spcPts val="100"/>
+              </a:spcBef>
+              <a:spcAft>
+                <a:spcPts val="0"/>
+              </a:spcAft>
+            </a:pPr>
+            <a:r>
+              <a:rPr sz="800" b="0" i="0">
+                <a:solidFill>
+                  <a:srgbClr val="5A636E"/>
+                </a:solidFill>
+                <a:latin typeface="Arial"/>
+              </a:rPr>
+              <a:t>probe sensing, forecast model, alerts, 10 languages</a:t>
+            </a:r>
+          </a:p>
+        </p:txBody>
+      </p:sp>
+      <p:sp>
+        <p:nvSpPr>
+          <p:cNvPr id="17431" name="Rectangle 17430"/>
+          <p:cNvSpPr/>
+          <p:nvPr/>
+        </p:nvSpPr>
+        <p:spPr>
+          <a:xfrm>
+            <a:off x="2706624" y="5678423"/>
+            <a:ext cx="2185416" cy="45720"/>
+          </a:xfrm>
+          <a:prstGeom prst="rect">
+            <a:avLst/>
+          </a:prstGeom>
+          <a:solidFill>
+            <a:srgbClr val="C9D6E4"/>
+          </a:solidFill>
+          <a:ln>
+            <a:noFill/>
+          </a:ln>
+          <a:effectLst/>
+        </p:spPr>
+        <p:style>
+          <a:lnRef idx="1">
+            <a:schemeClr val="accent1"/>
+          </a:lnRef>
+          <a:fillRef idx="3">
+            <a:schemeClr val="accent1"/>
+          </a:fillRef>
+          <a:effectRef idx="2">
+            <a:schemeClr val="accent1"/>
+          </a:effectRef>
+          <a:fontRef idx="minor">
+            <a:schemeClr val="lt1"/>
+          </a:fontRef>
+        </p:style>
+        <p:txBody>
+          <a:bodyPr rtlCol="0" anchor="ctr"/>
+          <a:lstStyle/>
+          <a:p>
+            <a:pPr algn="ctr"/>
+          </a:p>
+        </p:txBody>
+      </p:sp>
+      <p:sp>
+        <p:nvSpPr>
+          <p:cNvPr id="17432" name="Rectangle 17431"/>
+          <p:cNvSpPr/>
+          <p:nvPr/>
+        </p:nvSpPr>
+        <p:spPr>
+          <a:xfrm>
+            <a:off x="2706624" y="5678423"/>
+            <a:ext cx="2185416" cy="45720"/>
+          </a:xfrm>
+          <a:prstGeom prst="rect">
+            <a:avLst/>
+          </a:prstGeom>
+          <a:solidFill>
+            <a:srgbClr val="2E7D4F"/>
+          </a:solidFill>
+          <a:ln>
+            <a:noFill/>
+          </a:ln>
+          <a:effectLst/>
+        </p:spPr>
+        <p:style>
+          <a:lnRef idx="1">
+            <a:schemeClr val="accent1"/>
+          </a:lnRef>
+          <a:fillRef idx="3">
+            <a:schemeClr val="accent1"/>
+          </a:fillRef>
+          <a:effectRef idx="2">
+            <a:schemeClr val="accent1"/>
+          </a:effectRef>
+          <a:fontRef idx="minor">
+            <a:schemeClr val="lt1"/>
+          </a:fontRef>
+        </p:style>
+        <p:txBody>
+          <a:bodyPr rtlCol="0" anchor="ctr"/>
+          <a:lstStyle/>
+          <a:p>
+            <a:pPr algn="ctr"/>
+          </a:p>
+        </p:txBody>
+      </p:sp>
+      <p:sp>
+        <p:nvSpPr>
+          <p:cNvPr id="17433" name="Rounded Rectangle 17432"/>
+          <p:cNvSpPr/>
+          <p:nvPr/>
+        </p:nvSpPr>
+        <p:spPr>
+          <a:xfrm>
+            <a:off x="5001768" y="4690871"/>
+            <a:ext cx="2185416" cy="950976"/>
+          </a:xfrm>
+          <a:prstGeom prst="roundRect">
+            <a:avLst>
+              <a:gd name="adj" fmla="val 8000"/>
+            </a:avLst>
+          </a:prstGeom>
+          <a:solidFill>
+            <a:srgbClr val="FFFFFF"/>
+          </a:solidFill>
+          <a:ln w="9525">
+            <a:solidFill>
+              <a:srgbClr val="C9D6E4"/>
+            </a:solidFill>
+          </a:ln>
+          <a:effectLst/>
+        </p:spPr>
+        <p:style>
+          <a:lnRef idx="1">
+            <a:schemeClr val="accent1"/>
+          </a:lnRef>
+          <a:fillRef idx="3">
+            <a:schemeClr val="accent1"/>
+          </a:fillRef>
+          <a:effectRef idx="2">
+            <a:schemeClr val="accent1"/>
+          </a:effectRef>
+          <a:fontRef idx="minor">
+            <a:schemeClr val="lt1"/>
+          </a:fontRef>
+        </p:style>
+        <p:txBody>
+          <a:bodyPr rtlCol="0" anchor="t" wrap="square" lIns="109728" rIns="109728" tIns="54864" bIns="54864"/>
+          <a:lstStyle/>
+          <a:p>
+            <a:pPr algn="l">
+              <a:lnSpc>
+                <a:spcPct val="95000"/>
+              </a:lnSpc>
+              <a:spcBef>
+                <a:spcPts val="0"/>
+              </a:spcBef>
+              <a:spcAft>
+                <a:spcPts val="0"/>
+              </a:spcAft>
+            </a:pPr>
+            <a:r>
+              <a:rPr sz="850" b="1">
+                <a:solidFill>
+                  <a:srgbClr val="1F497D"/>
+                </a:solidFill>
+                <a:latin typeface="Arial"/>
+              </a:rPr>
+              <a:t>Phase 3   </a:t>
+            </a:r>
+            <a:r>
+              <a:rPr sz="850" b="1">
+                <a:solidFill>
+                  <a:srgbClr val="0070C0"/>
+                </a:solidFill>
+                <a:latin typeface="Arial"/>
+              </a:rPr>
+              <a:t>4 WEEKS</a:t>
+            </a:r>
+          </a:p>
+          <a:p>
+            <a:pPr algn="l">
+              <a:lnSpc>
+                <a:spcPct val="95000"/>
+              </a:lnSpc>
+              <a:spcBef>
+                <a:spcPts val="200"/>
+              </a:spcBef>
+              <a:spcAft>
+                <a:spcPts val="0"/>
+              </a:spcAft>
+            </a:pPr>
+            <a:r>
+              <a:rPr sz="1000" b="1" i="0">
+                <a:solidFill>
+                  <a:srgbClr val="1F497D"/>
+                </a:solidFill>
+                <a:latin typeface="Arial"/>
+              </a:rPr>
+              <a:t>Close the loop</a:t>
+            </a:r>
+          </a:p>
+          <a:p>
+            <a:pPr algn="l">
+              <a:lnSpc>
+                <a:spcPct val="95000"/>
+              </a:lnSpc>
+              <a:spcBef>
+                <a:spcPts val="100"/>
+              </a:spcBef>
+              <a:spcAft>
+                <a:spcPts val="0"/>
+              </a:spcAft>
+            </a:pPr>
+            <a:r>
+              <a:rPr sz="800" b="0" i="0">
+                <a:solidFill>
+                  <a:srgbClr val="5A636E"/>
+                </a:solidFill>
+                <a:latin typeface="Arial"/>
+              </a:rPr>
+              <a:t>road-ahead warnings, mid-trip re-route, delay alerts</a:t>
+            </a:r>
+          </a:p>
+        </p:txBody>
+      </p:sp>
+      <p:sp>
+        <p:nvSpPr>
+          <p:cNvPr id="17434" name="Rectangle 17433"/>
+          <p:cNvSpPr/>
+          <p:nvPr/>
+        </p:nvSpPr>
+        <p:spPr>
+          <a:xfrm>
+            <a:off x="5001768" y="5678423"/>
+            <a:ext cx="2185416" cy="45720"/>
+          </a:xfrm>
+          <a:prstGeom prst="rect">
+            <a:avLst/>
+          </a:prstGeom>
+          <a:solidFill>
+            <a:srgbClr val="C9D6E4"/>
+          </a:solidFill>
+          <a:ln>
+            <a:noFill/>
+          </a:ln>
+          <a:effectLst/>
+        </p:spPr>
+        <p:style>
+          <a:lnRef idx="1">
+            <a:schemeClr val="accent1"/>
+          </a:lnRef>
+          <a:fillRef idx="3">
+            <a:schemeClr val="accent1"/>
+          </a:fillRef>
+          <a:effectRef idx="2">
+            <a:schemeClr val="accent1"/>
+          </a:effectRef>
+          <a:fontRef idx="minor">
+            <a:schemeClr val="lt1"/>
+          </a:fontRef>
+        </p:style>
+        <p:txBody>
+          <a:bodyPr rtlCol="0" anchor="ctr"/>
+          <a:lstStyle/>
+          <a:p>
+            <a:pPr algn="ctr"/>
+          </a:p>
+        </p:txBody>
+      </p:sp>
+      <p:sp>
+        <p:nvSpPr>
+          <p:cNvPr id="17435" name="Rounded Rectangle 17434"/>
+          <p:cNvSpPr/>
+          <p:nvPr/>
+        </p:nvSpPr>
+        <p:spPr>
+          <a:xfrm>
+            <a:off x="7296912" y="4690871"/>
+            <a:ext cx="2185416" cy="950976"/>
+          </a:xfrm>
+          <a:prstGeom prst="roundRect">
+            <a:avLst>
+              <a:gd name="adj" fmla="val 8000"/>
+            </a:avLst>
+          </a:prstGeom>
+          <a:solidFill>
+            <a:srgbClr val="F2F5F9"/>
+          </a:solidFill>
+          <a:ln w="9525">
+            <a:solidFill>
+              <a:srgbClr val="C9D6E4"/>
+            </a:solidFill>
+          </a:ln>
+          <a:effectLst/>
+        </p:spPr>
+        <p:style>
+          <a:lnRef idx="1">
+            <a:schemeClr val="accent1"/>
+          </a:lnRef>
+          <a:fillRef idx="3">
+            <a:schemeClr val="accent1"/>
+          </a:fillRef>
+          <a:effectRef idx="2">
+            <a:schemeClr val="accent1"/>
+          </a:effectRef>
+          <a:fontRef idx="minor">
+            <a:schemeClr val="lt1"/>
+          </a:fontRef>
+        </p:style>
+        <p:txBody>
+          <a:bodyPr rtlCol="0" anchor="t" wrap="square" lIns="109728" rIns="109728" tIns="54864" bIns="54864"/>
+          <a:lstStyle/>
+          <a:p>
+            <a:pPr algn="l">
+              <a:lnSpc>
+                <a:spcPct val="95000"/>
+              </a:lnSpc>
+              <a:spcBef>
+                <a:spcPts val="0"/>
+              </a:spcBef>
+              <a:spcAft>
+                <a:spcPts val="0"/>
+              </a:spcAft>
+            </a:pPr>
+            <a:r>
+              <a:rPr sz="850" b="1">
+                <a:solidFill>
+                  <a:srgbClr val="1F497D"/>
+                </a:solidFill>
+                <a:latin typeface="Arial"/>
+              </a:rPr>
+              <a:t>Phase 4   </a:t>
+            </a:r>
+            <a:r>
+              <a:rPr sz="850" b="1">
+                <a:solidFill>
+                  <a:srgbClr val="4F81BD"/>
+                </a:solidFill>
+                <a:latin typeface="Arial"/>
+              </a:rPr>
+              <a:t>3 MONTHS</a:t>
+            </a:r>
+          </a:p>
+          <a:p>
+            <a:pPr algn="l">
+              <a:lnSpc>
+                <a:spcPct val="95000"/>
+              </a:lnSpc>
+              <a:spcBef>
+                <a:spcPts val="200"/>
+              </a:spcBef>
+              <a:spcAft>
+                <a:spcPts val="0"/>
+              </a:spcAft>
+            </a:pPr>
+            <a:r>
+              <a:rPr sz="1000" b="1" i="0">
+                <a:solidFill>
+                  <a:srgbClr val="1F497D"/>
+                </a:solidFill>
+                <a:latin typeface="Arial"/>
+              </a:rPr>
+              <a:t>District pilot</a:t>
+            </a:r>
+          </a:p>
+          <a:p>
+            <a:pPr algn="l">
+              <a:lnSpc>
+                <a:spcPct val="95000"/>
+              </a:lnSpc>
+              <a:spcBef>
+                <a:spcPts val="100"/>
+              </a:spcBef>
+              <a:spcAft>
+                <a:spcPts val="0"/>
+              </a:spcAft>
+            </a:pPr>
+            <a:r>
+              <a:rPr sz="800" b="0" i="0">
+                <a:solidFill>
+                  <a:srgbClr val="5A636E"/>
+                </a:solidFill>
+                <a:latin typeface="Arial"/>
+              </a:rPr>
+              <a:t>one corridor with a state transport department</a:t>
+            </a:r>
+          </a:p>
+        </p:txBody>
+      </p:sp>
+      <p:sp>
+        <p:nvSpPr>
+          <p:cNvPr id="17436" name="Rectangle 17435"/>
+          <p:cNvSpPr/>
+          <p:nvPr/>
+        </p:nvSpPr>
+        <p:spPr>
+          <a:xfrm>
+            <a:off x="7296912" y="5678423"/>
+            <a:ext cx="2185416" cy="45720"/>
+          </a:xfrm>
+          <a:prstGeom prst="rect">
+            <a:avLst/>
+          </a:prstGeom>
+          <a:solidFill>
+            <a:srgbClr val="C9D6E4"/>
+          </a:solidFill>
+          <a:ln>
+            <a:noFill/>
+          </a:ln>
+          <a:effectLst/>
+        </p:spPr>
+        <p:style>
+          <a:lnRef idx="1">
+            <a:schemeClr val="accent1"/>
+          </a:lnRef>
+          <a:fillRef idx="3">
+            <a:schemeClr val="accent1"/>
+          </a:fillRef>
+          <a:effectRef idx="2">
+            <a:schemeClr val="accent1"/>
+          </a:effectRef>
+          <a:fontRef idx="minor">
+            <a:schemeClr val="lt1"/>
+          </a:fontRef>
+        </p:style>
+        <p:txBody>
+          <a:bodyPr rtlCol="0" anchor="ctr"/>
+          <a:lstStyle/>
+          <a:p>
+            <a:pPr algn="ctr"/>
+          </a:p>
+        </p:txBody>
+      </p:sp>
+      <p:sp>
+        <p:nvSpPr>
+          <p:cNvPr id="17437" name="Rounded Rectangle 17436"/>
+          <p:cNvSpPr/>
+          <p:nvPr/>
+        </p:nvSpPr>
+        <p:spPr>
+          <a:xfrm>
+            <a:off x="9592056" y="4690871"/>
+            <a:ext cx="2185416" cy="950976"/>
+          </a:xfrm>
+          <a:prstGeom prst="roundRect">
+            <a:avLst>
+              <a:gd name="adj" fmla="val 8000"/>
+            </a:avLst>
+          </a:prstGeom>
+          <a:solidFill>
+            <a:srgbClr val="F2F5F9"/>
+          </a:solidFill>
+          <a:ln w="9525">
+            <a:solidFill>
+              <a:srgbClr val="C9D6E4"/>
+            </a:solidFill>
+          </a:ln>
+          <a:effectLst/>
+        </p:spPr>
+        <p:style>
+          <a:lnRef idx="1">
+            <a:schemeClr val="accent1"/>
+          </a:lnRef>
+          <a:fillRef idx="3">
+            <a:schemeClr val="accent1"/>
+          </a:fillRef>
+          <a:effectRef idx="2">
+            <a:schemeClr val="accent1"/>
+          </a:effectRef>
+          <a:fontRef idx="minor">
+            <a:schemeClr val="lt1"/>
+          </a:fontRef>
+        </p:style>
+        <p:txBody>
+          <a:bodyPr rtlCol="0" anchor="t" wrap="square" lIns="109728" rIns="109728" tIns="54864" bIns="54864"/>
+          <a:lstStyle/>
+          <a:p>
+            <a:pPr algn="l">
+              <a:lnSpc>
+                <a:spcPct val="95000"/>
+              </a:lnSpc>
+              <a:spcBef>
+                <a:spcPts val="0"/>
+              </a:spcBef>
+              <a:spcAft>
+                <a:spcPts val="0"/>
+              </a:spcAft>
+            </a:pPr>
+            <a:r>
+              <a:rPr sz="850" b="1">
+                <a:solidFill>
+                  <a:srgbClr val="1F497D"/>
+                </a:solidFill>
+                <a:latin typeface="Arial"/>
+              </a:rPr>
+              <a:t>Phase 5   </a:t>
+            </a:r>
+            <a:r>
+              <a:rPr sz="850" b="1">
+                <a:solidFill>
+                  <a:srgbClr val="5A636E"/>
+                </a:solidFill>
+                <a:latin typeface="Arial"/>
+              </a:rPr>
+              <a:t>6-12 MONTHS</a:t>
+            </a:r>
+          </a:p>
+          <a:p>
+            <a:pPr algn="l">
+              <a:lnSpc>
+                <a:spcPct val="95000"/>
+              </a:lnSpc>
+              <a:spcBef>
+                <a:spcPts val="200"/>
+              </a:spcBef>
+              <a:spcAft>
+                <a:spcPts val="0"/>
+              </a:spcAft>
+            </a:pPr>
+            <a:r>
+              <a:rPr sz="1000" b="1" i="0">
+                <a:solidFill>
+                  <a:srgbClr val="1F497D"/>
+                </a:solidFill>
+                <a:latin typeface="Arial"/>
+              </a:rPr>
+              <a:t>Scale</a:t>
+            </a:r>
+          </a:p>
+          <a:p>
+            <a:pPr algn="l">
+              <a:lnSpc>
+                <a:spcPct val="95000"/>
+              </a:lnSpc>
+              <a:spcBef>
+                <a:spcPts val="100"/>
+              </a:spcBef>
+              <a:spcAft>
+                <a:spcPts val="0"/>
+              </a:spcAft>
+            </a:pPr>
+            <a:r>
+              <a:rPr sz="800" b="0" i="0">
+                <a:solidFill>
+                  <a:srgbClr val="5A636E"/>
+                </a:solidFill>
+                <a:latin typeface="Arial"/>
+              </a:rPr>
+              <a:t>multi-state rollout, government system integration</a:t>
+            </a:r>
+          </a:p>
+        </p:txBody>
+      </p:sp>
+      <p:sp>
+        <p:nvSpPr>
+          <p:cNvPr id="17438" name="Rectangle 17437"/>
+          <p:cNvSpPr/>
+          <p:nvPr/>
+        </p:nvSpPr>
+        <p:spPr>
+          <a:xfrm>
+            <a:off x="9592056" y="5678423"/>
+            <a:ext cx="2185416" cy="45720"/>
+          </a:xfrm>
+          <a:prstGeom prst="rect">
+            <a:avLst/>
+          </a:prstGeom>
+          <a:solidFill>
+            <a:srgbClr val="C9D6E4"/>
+          </a:solidFill>
+          <a:ln>
+            <a:noFill/>
+          </a:ln>
+          <a:effectLst/>
+        </p:spPr>
+        <p:style>
+          <a:lnRef idx="1">
+            <a:schemeClr val="accent1"/>
+          </a:lnRef>
+          <a:fillRef idx="3">
+            <a:schemeClr val="accent1"/>
+          </a:fillRef>
+          <a:effectRef idx="2">
+            <a:schemeClr val="accent1"/>
+          </a:effectRef>
+          <a:fontRef idx="minor">
+            <a:schemeClr val="lt1"/>
+          </a:fontRef>
+        </p:style>
+        <p:txBody>
+          <a:bodyPr rtlCol="0" anchor="ctr"/>
+          <a:lstStyle/>
+          <a:p>
+            <a:pPr algn="ctr"/>
           </a:p>
         </p:txBody>
       </p:sp>
@@ -14582,7 +15440,7 @@
         <p:spPr>
           <a:xfrm>
             <a:off x="411480" y="1673352"/>
-            <a:ext cx="5573268" cy="3017520"/>
+            <a:ext cx="5573268" cy="2962656"/>
           </a:xfrm>
           <a:prstGeom prst="roundRect">
             <a:avLst>
@@ -14629,7 +15487,7 @@
               </a:spcAft>
             </a:pPr>
             <a:r>
-              <a:rPr sz="1100" b="1" i="0">
+              <a:rPr sz="1050" b="1" i="0">
                 <a:solidFill>
                   <a:srgbClr val="1F497D"/>
                 </a:solidFill>
@@ -14651,7 +15509,7 @@
               </a:spcAft>
             </a:pPr>
             <a:r>
-              <a:rPr sz="950" b="0" i="0">
+              <a:rPr sz="900" b="0" i="0">
                 <a:solidFill>
                   <a:srgbClr val="5A636E"/>
                 </a:solidFill>
@@ -14666,14 +15524,14 @@
                 <a:spcPct val="95000"/>
               </a:lnSpc>
               <a:spcBef>
-                <a:spcPts val="2200"/>
-              </a:spcBef>
-              <a:spcAft>
-                <a:spcPts val="0"/>
-              </a:spcAft>
-            </a:pPr>
-            <a:r>
-              <a:rPr sz="1100" b="1" i="0">
+                <a:spcPts val="2300"/>
+              </a:spcBef>
+              <a:spcAft>
+                <a:spcPts val="0"/>
+              </a:spcAft>
+            </a:pPr>
+            <a:r>
+              <a:rPr sz="1050" b="1" i="0">
                 <a:solidFill>
                   <a:srgbClr val="1F497D"/>
                 </a:solidFill>
@@ -14695,13 +15553,13 @@
               </a:spcAft>
             </a:pPr>
             <a:r>
-              <a:rPr sz="950" b="0" i="0">
+              <a:rPr sz="900" b="0" i="0">
                 <a:solidFill>
                   <a:srgbClr val="5A636E"/>
                 </a:solidFill>
                 <a:latin typeface="Arial"/>
               </a:rPr>
-              <a:t>project-osrm.org — road geometry and route alternates, 42 stretches</a:t>
+              <a:t>project-osrm.org — real road geometry and route alternates</a:t>
             </a:r>
           </a:p>
           <a:p>
@@ -14710,14 +15568,14 @@
                 <a:spcPct val="95000"/>
               </a:lnSpc>
               <a:spcBef>
-                <a:spcPts val="2200"/>
-              </a:spcBef>
-              <a:spcAft>
-                <a:spcPts val="0"/>
-              </a:spcAft>
-            </a:pPr>
-            <a:r>
-              <a:rPr sz="1100" b="1" i="0">
+                <a:spcPts val="2300"/>
+              </a:spcBef>
+              <a:spcAft>
+                <a:spcPts val="0"/>
+              </a:spcAft>
+            </a:pPr>
+            <a:r>
+              <a:rPr sz="1050" b="1" i="0">
                 <a:solidFill>
                   <a:srgbClr val="1F497D"/>
                 </a:solidFill>
@@ -14739,7 +15597,7 @@
               </a:spcAft>
             </a:pPr>
             <a:r>
-              <a:rPr sz="950" b="0" i="0">
+              <a:rPr sz="900" b="0" i="0">
                 <a:solidFill>
                   <a:srgbClr val="5A636E"/>
                 </a:solidFill>
@@ -14754,14 +15612,14 @@
                 <a:spcPct val="95000"/>
               </a:lnSpc>
               <a:spcBef>
-                <a:spcPts val="2200"/>
-              </a:spcBef>
-              <a:spcAft>
-                <a:spcPts val="0"/>
-              </a:spcAft>
-            </a:pPr>
-            <a:r>
-              <a:rPr sz="1100" b="1" i="0">
+                <a:spcPts val="2300"/>
+              </a:spcBef>
+              <a:spcAft>
+                <a:spcPts val="0"/>
+              </a:spcAft>
+            </a:pPr>
+            <a:r>
+              <a:rPr sz="1050" b="1" i="0">
                 <a:solidFill>
                   <a:srgbClr val="1F497D"/>
                 </a:solidFill>
@@ -14783,7 +15641,7 @@
               </a:spcAft>
             </a:pPr>
             <a:r>
-              <a:rPr sz="950" b="0" i="0">
+              <a:rPr sz="900" b="0" i="0">
                 <a:solidFill>
                   <a:srgbClr val="5A636E"/>
                 </a:solidFill>
@@ -14848,7 +15706,7 @@
         <p:spPr>
           <a:xfrm>
             <a:off x="6204204" y="1673352"/>
-            <a:ext cx="5573268" cy="3017520"/>
+            <a:ext cx="5573268" cy="2962656"/>
           </a:xfrm>
           <a:prstGeom prst="roundRect">
             <a:avLst>
@@ -14895,13 +15753,13 @@
               </a:spcAft>
             </a:pPr>
             <a:r>
-              <a:rPr sz="1100" b="1" i="0">
+              <a:rPr sz="1050" b="1" i="0">
                 <a:solidFill>
                   <a:srgbClr val="1F497D"/>
                 </a:solidFill>
                 <a:latin typeface="Arial"/>
               </a:rPr>
-              <a:t>MDoNER — problem statement and regional context</a:t>
+              <a:t>MDoNER — problem statement 26002</a:t>
             </a:r>
           </a:p>
           <a:p>
@@ -14917,7 +15775,7 @@
               </a:spcAft>
             </a:pPr>
             <a:r>
-              <a:rPr sz="950" b="0" i="0">
+              <a:rPr sz="900" b="0" i="0">
                 <a:solidFill>
                   <a:srgbClr val="5A636E"/>
                 </a:solidFill>
@@ -14932,14 +15790,14 @@
                 <a:spcPct val="95000"/>
               </a:lnSpc>
               <a:spcBef>
-                <a:spcPts val="2200"/>
-              </a:spcBef>
-              <a:spcAft>
-                <a:spcPts val="0"/>
-              </a:spcAft>
-            </a:pPr>
-            <a:r>
-              <a:rPr sz="1100" b="1" i="0">
+                <a:spcPts val="2300"/>
+              </a:spcBef>
+              <a:spcAft>
+                <a:spcPts val="0"/>
+              </a:spcAft>
+            </a:pPr>
+            <a:r>
+              <a:rPr sz="1050" b="1" i="0">
                 <a:solidFill>
                   <a:srgbClr val="1F497D"/>
                 </a:solidFill>
@@ -14961,13 +15819,13 @@
               </a:spcAft>
             </a:pPr>
             <a:r>
-              <a:rPr sz="950" b="0" i="0">
+              <a:rPr sz="900" b="0" i="0">
                 <a:solidFill>
                   <a:srgbClr val="5A636E"/>
                 </a:solidFill>
                 <a:latin typeface="Arial"/>
               </a:rPr>
-              <a:t>nhidcl.com · morth.nic.in — corridor alignments and NH numbering used to seed the road network</a:t>
+              <a:t>nhidcl.com · morth.nic.in — corridor alignments and NH numbering</a:t>
             </a:r>
           </a:p>
           <a:p>
@@ -14976,14 +15834,14 @@
                 <a:spcPct val="95000"/>
               </a:lnSpc>
               <a:spcBef>
-                <a:spcPts val="2200"/>
-              </a:spcBef>
-              <a:spcAft>
-                <a:spcPts val="0"/>
-              </a:spcAft>
-            </a:pPr>
-            <a:r>
-              <a:rPr sz="1100" b="1" i="0">
+                <a:spcPts val="2300"/>
+              </a:spcBef>
+              <a:spcAft>
+                <a:spcPts val="0"/>
+              </a:spcAft>
+            </a:pPr>
+            <a:r>
+              <a:rPr sz="1050" b="1" i="0">
                 <a:solidFill>
                   <a:srgbClr val="1F497D"/>
                 </a:solidFill>
@@ -15005,13 +15863,13 @@
               </a:spcAft>
             </a:pPr>
             <a:r>
-              <a:rPr sz="950" b="0" i="0">
+              <a:rPr sz="900" b="0" i="0">
                 <a:solidFill>
                   <a:srgbClr val="5A636E"/>
                 </a:solidFill>
                 <a:latin typeface="Arial"/>
               </a:rPr>
-              <a:t>mausam.imd.gov.in — monsoon windows and the rain thresholds behind the hazard function</a:t>
+              <a:t>mausam.imd.gov.in — monsoon windows and the rain thresholds used</a:t>
             </a:r>
           </a:p>
           <a:p>
@@ -15020,14 +15878,14 @@
                 <a:spcPct val="95000"/>
               </a:lnSpc>
               <a:spcBef>
-                <a:spcPts val="2200"/>
-              </a:spcBef>
-              <a:spcAft>
-                <a:spcPts val="0"/>
-              </a:spcAft>
-            </a:pPr>
-            <a:r>
-              <a:rPr sz="1100" b="1" i="0">
+                <a:spcPts val="2300"/>
+              </a:spcBef>
+              <a:spcAft>
+                <a:spcPts val="0"/>
+              </a:spcAft>
+            </a:pPr>
+            <a:r>
+              <a:rPr sz="1050" b="1" i="0">
                 <a:solidFill>
                   <a:srgbClr val="1F497D"/>
                 </a:solidFill>
@@ -15049,7 +15907,7 @@
               </a:spcAft>
             </a:pPr>
             <a:r>
-              <a:rPr sz="950" b="0" i="0">
+              <a:rPr sz="900" b="0" i="0">
                 <a:solidFill>
                   <a:srgbClr val="5A636E"/>
                 </a:solidFill>
@@ -15062,14 +15920,59 @@
       </p:sp>
       <p:sp>
         <p:nvSpPr>
-          <p:cNvPr id="17416" name="Rounded Rectangle 17415"/>
+          <p:cNvPr id="17416" name="TextBox 17415"/>
+          <p:cNvSpPr txBox="1"/>
+          <p:nvPr/>
+        </p:nvSpPr>
+        <p:spPr>
+          <a:xfrm>
+            <a:off x="411480" y="4745736"/>
+            <a:ext cx="11365992" cy="219456"/>
+          </a:xfrm>
+          <a:prstGeom prst="rect">
+            <a:avLst/>
+          </a:prstGeom>
+          <a:noFill/>
+        </p:spPr>
+        <p:txBody>
+          <a:bodyPr wrap="square" lIns="0" rIns="0" tIns="0" bIns="0">
+            <a:spAutoFit/>
+          </a:bodyPr>
+          <a:lstStyle/>
+          <a:p>
+            <a:pPr algn="l">
+              <a:lnSpc>
+                <a:spcPct val="100000"/>
+              </a:lnSpc>
+              <a:spcBef>
+                <a:spcPts val="0"/>
+              </a:spcBef>
+              <a:spcAft>
+                <a:spcPts val="0"/>
+              </a:spcAft>
+            </a:pPr>
+            <a:r>
+              <a:rPr sz="900" b="1" i="0">
+                <a:solidFill>
+                  <a:srgbClr val="1F497D"/>
+                </a:solidFill>
+                <a:latin typeface="Arial"/>
+              </a:rPr>
+              <a:t>METHOD — HOW THE MODEL WAS BUILT AND JUDGED</a:t>
+            </a:r>
+          </a:p>
+        </p:txBody>
+      </p:sp>
+      <p:sp>
+        <p:nvSpPr>
+          <p:cNvPr id="17417" name="Rounded Rectangle 17416"/>
           <p:cNvSpPr/>
           <p:nvPr/>
         </p:nvSpPr>
         <p:spPr>
           <a:xfrm>
-            <a:off x="411480" y="4818888"/>
-            <a:ext cx="11365992" cy="841248"/>
+            <a:off x="411480" y="4983480"/>
+            <a:ext cx="11365992" cy="859536"/>
           </a:xfrm>
           <a:prstGeom prst="roundRect">
             <a:avLst>
@@ -15101,37 +16004,68 @@
           </a:fontRef>
         </p:style>
         <p:txBody>
-          <a:bodyPr rtlCol="0" anchor="ctr" wrap="square" lIns="109728" rIns="109728" tIns="54864" bIns="54864"/>
+          <a:bodyPr rtlCol="0" anchor="t" wrap="square" lIns="109728" rIns="109728" tIns="54864" bIns="54864"/>
           <a:lstStyle/>
           <a:p>
             <a:pPr algn="l">
               <a:lnSpc>
-                <a:spcPct val="102000"/>
-              </a:lnSpc>
-              <a:spcBef>
-                <a:spcPts val="0"/>
-              </a:spcBef>
-              <a:spcAft>
-                <a:spcPts val="0"/>
-              </a:spcAft>
-            </a:pPr>
-            <a:r>
-              <a:rPr sz="1050" b="1">
+                <a:spcPct val="100000"/>
+              </a:lnSpc>
+              <a:spcBef>
+                <a:spcPts val="0"/>
+              </a:spcBef>
+              <a:spcAft>
+                <a:spcPts val="0"/>
+              </a:spcAft>
+            </a:pPr>
+            <a:r>
+              <a:rPr sz="1000" b="1">
                 <a:solidFill>
                   <a:srgbClr val="1F497D"/>
                 </a:solidFill>
                 <a:latin typeface="Arial"/>
               </a:rPr>
-              <a:t>Honest note on the model  </a:t>
-            </a:r>
-            <a:r>
-              <a:rPr sz="1050" b="0">
+              <a:t>Date-based evaluation — </a:t>
+            </a:r>
+            <a:r>
+              <a:rPr sz="1000" b="0">
                 <a:solidFill>
                   <a:srgbClr val="262B33"/>
                 </a:solidFill>
                 <a:latin typeface="Arial"/>
               </a:rPr>
-              <a:t>— no public register of past NER road closures exists, so historical labels are drawn from a rainfall-threshold hazard function calibrated on IMD and GSI data. Verified field reports override every drawn label, and the dashboard says so on screen.</a:t>
+              <a:t>trained on 109,116 road-days across 42 stretches x 877 days of observed weather, with everything after 2026-03-01 held out. AUC 0.883, Brier 0.092.</a:t>
+            </a:r>
+          </a:p>
+          <a:p>
+            <a:pPr algn="l">
+              <a:lnSpc>
+                <a:spcPct val="100000"/>
+              </a:lnSpc>
+              <a:spcBef>
+                <a:spcPts val="500"/>
+              </a:spcBef>
+              <a:spcAft>
+                <a:spcPts val="0"/>
+              </a:spcAft>
+            </a:pPr>
+            <a:r>
+              <a:rPr sz="1000" b="1">
+                <a:solidFill>
+                  <a:srgbClr val="C25E1E"/>
+                </a:solidFill>
+                <a:latin typeface="Arial"/>
+              </a:rPr>
+              <a:t>Stated openly: </a:t>
+            </a:r>
+            <a:r>
+              <a:rPr sz="1000" b="0">
+                <a:solidFill>
+                  <a:srgbClr val="262B33"/>
+                </a:solidFill>
+                <a:latin typeface="Arial"/>
+              </a:rPr>
+              <a:t>no public register of past NER road closures exists, so historical labels are drawn from a rainfall-threshold hazard function calibrated on IMD and GSI data. Verified field reports override every drawn label.</a:t>
             </a:r>
           </a:p>
         </p:txBody>

--- a/SIH2026_Sukobin.pptx
+++ b/SIH2026_Sukobin.pptx
@@ -6295,7 +6295,7 @@
         <p:spPr>
           <a:xfrm>
             <a:off x="411480" y="1435608"/>
-            <a:ext cx="6400800" cy="1572768"/>
+            <a:ext cx="6400800" cy="1188720"/>
           </a:xfrm>
           <a:prstGeom prst="rect">
             <a:avLst/>
@@ -6320,22 +6320,22 @@
               </a:spcAft>
             </a:pPr>
             <a:r>
-              <a:rPr sz="1100" b="1">
+              <a:rPr sz="1050" b="1">
                 <a:solidFill>
                   <a:srgbClr val="1F497D"/>
                 </a:solidFill>
                 <a:latin typeface="Arial"/>
               </a:rPr>
-              <a:t>Sukobin </a:t>
-            </a:r>
-            <a:r>
-              <a:rPr sz="1100" b="0">
+              <a:t>Nobody drives for us. </a:t>
+            </a:r>
+            <a:r>
+              <a:rPr sz="1050" b="0">
                 <a:solidFill>
                   <a:srgbClr val="262B33"/>
                 </a:solidFill>
                 <a:latin typeface="Arial"/>
               </a:rPr>
-              <a:t>combines GPS from registered transporters, field reports, weather and road-network data to understand how accessible a route is. Instead of costly roadside sensors, it turns vehicles already travelling the region into mobile road probes.</a:t>
+              <a:t>A driver declares a journey they were making anyway, and is offered only the consignments lying along that road, within capacity. Instead of costly roadside sensors, vehicles already travelling the region become mobile road probes.</a:t>
             </a:r>
           </a:p>
           <a:p>
@@ -6351,53 +6351,22 @@
               </a:spcAft>
             </a:pPr>
             <a:r>
-              <a:rPr sz="1100" b="1">
+              <a:rPr sz="1050" b="1">
                 <a:solidFill>
                   <a:srgbClr val="1F497D"/>
                 </a:solidFill>
                 <a:latin typeface="Arial"/>
               </a:rPr>
-              <a:t>Nobody drives for us. </a:t>
-            </a:r>
-            <a:r>
-              <a:rPr sz="1100" b="0">
+              <a:t>Their movement is the measurement. </a:t>
+            </a:r>
+            <a:r>
+              <a:rPr sz="1050" b="0">
                 <a:solidFill>
                   <a:srgbClr val="262B33"/>
                 </a:solidFill>
                 <a:latin typeface="Arial"/>
               </a:rPr>
-              <a:t>A driver declares a journey they were making anyway and is offered only the consignments lying along that road, within capacity.</a:t>
-            </a:r>
-          </a:p>
-          <a:p>
-            <a:pPr algn="l">
-              <a:lnSpc>
-                <a:spcPct val="100000"/>
-              </a:lnSpc>
-              <a:spcBef>
-                <a:spcPts val="700"/>
-              </a:spcBef>
-              <a:spcAft>
-                <a:spcPts val="0"/>
-              </a:spcAft>
-            </a:pPr>
-            <a:r>
-              <a:rPr sz="1100" b="1">
-                <a:solidFill>
-                  <a:srgbClr val="1F497D"/>
-                </a:solidFill>
-                <a:latin typeface="Arial"/>
-              </a:rPr>
-              <a:t>Their movement is the measurement. </a:t>
-            </a:r>
-            <a:r>
-              <a:rPr sz="1100" b="0">
-                <a:solidFill>
-                  <a:srgbClr val="262B33"/>
-                </a:solidFill>
-                <a:latin typeface="Arial"/>
-              </a:rPr>
-              <a:t>Median speed against each road's baseline gives live accessibility; AI turns it into risk, forecasts and alternate routes.</a:t>
+              <a:t>Median speed against each road's baseline gives live accessibility; AI turns it into risk scores, 72-hour forecasts, alerts and alternate routes.</a:t>
             </a:r>
           </a:p>
         </p:txBody>
@@ -6410,7 +6379,7 @@
         </p:nvSpPr>
         <p:spPr>
           <a:xfrm>
-            <a:off x="411480" y="3081528"/>
+            <a:off x="411480" y="2697480"/>
             <a:ext cx="6400800" cy="237744"/>
           </a:xfrm>
           <a:prstGeom prst="rect">
@@ -6455,7 +6424,7 @@
         </p:nvSpPr>
         <p:spPr>
           <a:xfrm>
-            <a:off x="411480" y="3268980"/>
+            <a:off x="411480" y="2884932"/>
             <a:ext cx="6400800" cy="12801"/>
           </a:xfrm>
           <a:prstGeom prst="rect">
@@ -6499,8 +6468,8 @@
         </p:nvSpPr>
         <p:spPr>
           <a:xfrm>
-            <a:off x="411480" y="3374136"/>
-            <a:ext cx="6400800" cy="1078992"/>
+            <a:off x="411480" y="2990088"/>
+            <a:ext cx="3136392" cy="365760"/>
           </a:xfrm>
           <a:prstGeom prst="roundRect">
             <a:avLst>
@@ -6532,106 +6501,680 @@
           </a:fontRef>
         </p:style>
         <p:txBody>
-          <a:bodyPr rtlCol="0" anchor="t" wrap="square" lIns="109728" rIns="109728" tIns="54864" bIns="54864"/>
+          <a:bodyPr rtlCol="0" anchor="t" wrap="square" lIns="109728" rIns="109728" tIns="27432" bIns="27432"/>
           <a:lstStyle/>
           <a:p>
             <a:pPr algn="l">
               <a:lnSpc>
-                <a:spcPct val="100000"/>
-              </a:lnSpc>
-              <a:spcBef>
-                <a:spcPts val="0"/>
-              </a:spcBef>
-              <a:spcAft>
-                <a:spcPts val="0"/>
-              </a:spcAft>
-            </a:pPr>
-            <a:r>
-              <a:rPr sz="1050" b="1">
+                <a:spcPct val="92000"/>
+              </a:lnSpc>
+              <a:spcBef>
+                <a:spcPts val="0"/>
+              </a:spcBef>
+              <a:spcAft>
+                <a:spcPts val="0"/>
+              </a:spcAft>
+            </a:pPr>
+            <a:r>
+              <a:rPr sz="900" b="1" i="0">
                 <a:solidFill>
                   <a:srgbClr val="1F497D"/>
                 </a:solidFill>
                 <a:latin typeface="Arial"/>
               </a:rPr>
-              <a:t>•  The carrier network IS the sensing network — </a:t>
-            </a:r>
-            <a:r>
-              <a:rPr sz="1050" b="0">
-                <a:solidFill>
-                  <a:srgbClr val="262B33"/>
-                </a:solidFill>
-                <a:latin typeface="Arial"/>
-              </a:rPr>
-              <a:t>one journey delivers goods and reads the road.</a:t>
+              <a:t>Carriers ARE the sensors</a:t>
             </a:r>
           </a:p>
           <a:p>
             <a:pPr algn="l">
               <a:lnSpc>
-                <a:spcPct val="100000"/>
-              </a:lnSpc>
-              <a:spcBef>
-                <a:spcPts val="700"/>
-              </a:spcBef>
-              <a:spcAft>
-                <a:spcPts val="0"/>
-              </a:spcAft>
-            </a:pPr>
-            <a:r>
-              <a:rPr sz="1050" b="1">
+                <a:spcPct val="92000"/>
+              </a:lnSpc>
+              <a:spcBef>
+                <a:spcPts val="100"/>
+              </a:spcBef>
+              <a:spcAft>
+                <a:spcPts val="0"/>
+              </a:spcAft>
+            </a:pPr>
+            <a:r>
+              <a:rPr sz="750" b="0" i="0">
+                <a:solidFill>
+                  <a:srgbClr val="5A636E"/>
+                </a:solidFill>
+                <a:latin typeface="Arial"/>
+              </a:rPr>
+              <a:t>one journey delivers goods and reads the road</a:t>
+            </a:r>
+          </a:p>
+        </p:txBody>
+      </p:sp>
+      <p:sp>
+        <p:nvSpPr>
+          <p:cNvPr id="15368" name="Rounded Rectangle 15367"/>
+          <p:cNvSpPr/>
+          <p:nvPr/>
+        </p:nvSpPr>
+        <p:spPr>
+          <a:xfrm>
+            <a:off x="3675888" y="2990088"/>
+            <a:ext cx="3136392" cy="365760"/>
+          </a:xfrm>
+          <a:prstGeom prst="roundRect">
+            <a:avLst>
+              <a:gd name="adj" fmla="val 8000"/>
+            </a:avLst>
+          </a:prstGeom>
+          <a:solidFill>
+            <a:srgbClr val="F2F5F9"/>
+          </a:solidFill>
+          <a:ln w="9525">
+            <a:solidFill>
+              <a:srgbClr val="C9D6E4"/>
+            </a:solidFill>
+          </a:ln>
+          <a:effectLst/>
+        </p:spPr>
+        <p:style>
+          <a:lnRef idx="1">
+            <a:schemeClr val="accent1"/>
+          </a:lnRef>
+          <a:fillRef idx="3">
+            <a:schemeClr val="accent1"/>
+          </a:fillRef>
+          <a:effectRef idx="2">
+            <a:schemeClr val="accent1"/>
+          </a:effectRef>
+          <a:fontRef idx="minor">
+            <a:schemeClr val="lt1"/>
+          </a:fontRef>
+        </p:style>
+        <p:txBody>
+          <a:bodyPr rtlCol="0" anchor="t" wrap="square" lIns="109728" rIns="109728" tIns="27432" bIns="27432"/>
+          <a:lstStyle/>
+          <a:p>
+            <a:pPr algn="l">
+              <a:lnSpc>
+                <a:spcPct val="92000"/>
+              </a:lnSpc>
+              <a:spcBef>
+                <a:spcPts val="0"/>
+              </a:spcBef>
+              <a:spcAft>
+                <a:spcPts val="0"/>
+              </a:spcAft>
+            </a:pPr>
+            <a:r>
+              <a:rPr sz="900" b="1" i="0">
                 <a:solidFill>
                   <a:srgbClr val="1F497D"/>
                 </a:solidFill>
                 <a:latin typeface="Arial"/>
               </a:rPr>
-              <a:t>•  No hardware, no dedicated fleet — </a:t>
-            </a:r>
-            <a:r>
-              <a:rPr sz="1050" b="0">
-                <a:solidFill>
-                  <a:srgbClr val="262B33"/>
-                </a:solidFill>
-                <a:latin typeface="Arial"/>
-              </a:rPr>
-              <a:t>nothing to install, power or maintain anywhere.</a:t>
+              <a:t>No hardware, no fleet</a:t>
             </a:r>
           </a:p>
           <a:p>
             <a:pPr algn="l">
               <a:lnSpc>
-                <a:spcPct val="100000"/>
-              </a:lnSpc>
-              <a:spcBef>
-                <a:spcPts val="700"/>
-              </a:spcBef>
-              <a:spcAft>
-                <a:spcPts val="0"/>
-              </a:spcAft>
-            </a:pPr>
-            <a:r>
-              <a:rPr sz="1050" b="1">
+                <a:spcPct val="92000"/>
+              </a:lnSpc>
+              <a:spcBef>
+                <a:spcPts val="100"/>
+              </a:spcBef>
+              <a:spcAft>
+                <a:spcPts val="0"/>
+              </a:spcAft>
+            </a:pPr>
+            <a:r>
+              <a:rPr sz="750" b="0" i="0">
+                <a:solidFill>
+                  <a:srgbClr val="5A636E"/>
+                </a:solidFill>
+                <a:latin typeface="Arial"/>
+              </a:rPr>
+              <a:t>nothing to install, power or maintain</a:t>
+            </a:r>
+          </a:p>
+        </p:txBody>
+      </p:sp>
+      <p:sp>
+        <p:nvSpPr>
+          <p:cNvPr id="15369" name="Rounded Rectangle 15368"/>
+          <p:cNvSpPr/>
+          <p:nvPr/>
+        </p:nvSpPr>
+        <p:spPr>
+          <a:xfrm>
+            <a:off x="411480" y="3410712"/>
+            <a:ext cx="3136392" cy="365760"/>
+          </a:xfrm>
+          <a:prstGeom prst="roundRect">
+            <a:avLst>
+              <a:gd name="adj" fmla="val 8000"/>
+            </a:avLst>
+          </a:prstGeom>
+          <a:solidFill>
+            <a:srgbClr val="F2F5F9"/>
+          </a:solidFill>
+          <a:ln w="9525">
+            <a:solidFill>
+              <a:srgbClr val="C9D6E4"/>
+            </a:solidFill>
+          </a:ln>
+          <a:effectLst/>
+        </p:spPr>
+        <p:style>
+          <a:lnRef idx="1">
+            <a:schemeClr val="accent1"/>
+          </a:lnRef>
+          <a:fillRef idx="3">
+            <a:schemeClr val="accent1"/>
+          </a:fillRef>
+          <a:effectRef idx="2">
+            <a:schemeClr val="accent1"/>
+          </a:effectRef>
+          <a:fontRef idx="minor">
+            <a:schemeClr val="lt1"/>
+          </a:fontRef>
+        </p:style>
+        <p:txBody>
+          <a:bodyPr rtlCol="0" anchor="t" wrap="square" lIns="109728" rIns="109728" tIns="27432" bIns="27432"/>
+          <a:lstStyle/>
+          <a:p>
+            <a:pPr algn="l">
+              <a:lnSpc>
+                <a:spcPct val="92000"/>
+              </a:lnSpc>
+              <a:spcBef>
+                <a:spcPts val="0"/>
+              </a:spcBef>
+              <a:spcAft>
+                <a:spcPts val="0"/>
+              </a:spcAft>
+            </a:pPr>
+            <a:r>
+              <a:rPr sz="900" b="1" i="0">
                 <a:solidFill>
                   <a:srgbClr val="1F497D"/>
                 </a:solidFill>
                 <a:latin typeface="Arial"/>
               </a:rPr>
-              <a:t>•  Self-improving — </a:t>
-            </a:r>
-            <a:r>
-              <a:rPr sz="1050" b="0">
-                <a:solidFill>
-                  <a:srgbClr val="262B33"/>
-                </a:solidFill>
-                <a:latin typeface="Arial"/>
-              </a:rPr>
-              <a:t>every new carrier adds sensing density at zero marginal cost.</a:t>
-            </a:r>
-          </a:p>
-        </p:txBody>
-      </p:sp>
-      <p:sp>
-        <p:nvSpPr>
-          <p:cNvPr id="15368" name="TextBox 15367"/>
+              <a:t>Voice reporting, 10 languages</a:t>
+            </a:r>
+          </a:p>
+          <a:p>
+            <a:pPr algn="l">
+              <a:lnSpc>
+                <a:spcPct val="92000"/>
+              </a:lnSpc>
+              <a:spcBef>
+                <a:spcPts val="100"/>
+              </a:spcBef>
+              <a:spcAft>
+                <a:spcPts val="0"/>
+              </a:spcAft>
+            </a:pPr>
+            <a:r>
+              <a:rPr sz="750" b="0" i="0">
+                <a:solidFill>
+                  <a:srgbClr val="5A636E"/>
+                </a:solidFill>
+                <a:latin typeface="Arial"/>
+              </a:rPr>
+              <a:t>speak it; the model classifies and reads it back</a:t>
+            </a:r>
+          </a:p>
+        </p:txBody>
+      </p:sp>
+      <p:sp>
+        <p:nvSpPr>
+          <p:cNvPr id="15370" name="Rounded Rectangle 15369"/>
+          <p:cNvSpPr/>
+          <p:nvPr/>
+        </p:nvSpPr>
+        <p:spPr>
+          <a:xfrm>
+            <a:off x="3675888" y="3410712"/>
+            <a:ext cx="3136392" cy="365760"/>
+          </a:xfrm>
+          <a:prstGeom prst="roundRect">
+            <a:avLst>
+              <a:gd name="adj" fmla="val 8000"/>
+            </a:avLst>
+          </a:prstGeom>
+          <a:solidFill>
+            <a:srgbClr val="F2F5F9"/>
+          </a:solidFill>
+          <a:ln w="9525">
+            <a:solidFill>
+              <a:srgbClr val="C9D6E4"/>
+            </a:solidFill>
+          </a:ln>
+          <a:effectLst/>
+        </p:spPr>
+        <p:style>
+          <a:lnRef idx="1">
+            <a:schemeClr val="accent1"/>
+          </a:lnRef>
+          <a:fillRef idx="3">
+            <a:schemeClr val="accent1"/>
+          </a:fillRef>
+          <a:effectRef idx="2">
+            <a:schemeClr val="accent1"/>
+          </a:effectRef>
+          <a:fontRef idx="minor">
+            <a:schemeClr val="lt1"/>
+          </a:fontRef>
+        </p:style>
+        <p:txBody>
+          <a:bodyPr rtlCol="0" anchor="t" wrap="square" lIns="109728" rIns="109728" tIns="27432" bIns="27432"/>
+          <a:lstStyle/>
+          <a:p>
+            <a:pPr algn="l">
+              <a:lnSpc>
+                <a:spcPct val="92000"/>
+              </a:lnSpc>
+              <a:spcBef>
+                <a:spcPts val="0"/>
+              </a:spcBef>
+              <a:spcAft>
+                <a:spcPts val="0"/>
+              </a:spcAft>
+            </a:pPr>
+            <a:r>
+              <a:rPr sz="900" b="1" i="0">
+                <a:solidFill>
+                  <a:srgbClr val="1F497D"/>
+                </a:solidFill>
+                <a:latin typeface="Arial"/>
+              </a:rPr>
+              <a:t>Offline-first field reports</a:t>
+            </a:r>
+          </a:p>
+          <a:p>
+            <a:pPr algn="l">
+              <a:lnSpc>
+                <a:spcPct val="92000"/>
+              </a:lnSpc>
+              <a:spcBef>
+                <a:spcPts val="100"/>
+              </a:spcBef>
+              <a:spcAft>
+                <a:spcPts val="0"/>
+              </a:spcAft>
+            </a:pPr>
+            <a:r>
+              <a:rPr sz="750" b="0" i="0">
+                <a:solidFill>
+                  <a:srgbClr val="5A636E"/>
+                </a:solidFill>
+                <a:latin typeface="Arial"/>
+              </a:rPr>
+              <a:t>queue on the phone, sync later, never filed twice</a:t>
+            </a:r>
+          </a:p>
+        </p:txBody>
+      </p:sp>
+      <p:sp>
+        <p:nvSpPr>
+          <p:cNvPr id="15371" name="Rounded Rectangle 15370"/>
+          <p:cNvSpPr/>
+          <p:nvPr/>
+        </p:nvSpPr>
+        <p:spPr>
+          <a:xfrm>
+            <a:off x="411480" y="3831336"/>
+            <a:ext cx="3136392" cy="365760"/>
+          </a:xfrm>
+          <a:prstGeom prst="roundRect">
+            <a:avLst>
+              <a:gd name="adj" fmla="val 8000"/>
+            </a:avLst>
+          </a:prstGeom>
+          <a:solidFill>
+            <a:srgbClr val="F2F5F9"/>
+          </a:solidFill>
+          <a:ln w="9525">
+            <a:solidFill>
+              <a:srgbClr val="C9D6E4"/>
+            </a:solidFill>
+          </a:ln>
+          <a:effectLst/>
+        </p:spPr>
+        <p:style>
+          <a:lnRef idx="1">
+            <a:schemeClr val="accent1"/>
+          </a:lnRef>
+          <a:fillRef idx="3">
+            <a:schemeClr val="accent1"/>
+          </a:fillRef>
+          <a:effectRef idx="2">
+            <a:schemeClr val="accent1"/>
+          </a:effectRef>
+          <a:fontRef idx="minor">
+            <a:schemeClr val="lt1"/>
+          </a:fontRef>
+        </p:style>
+        <p:txBody>
+          <a:bodyPr rtlCol="0" anchor="t" wrap="square" lIns="109728" rIns="109728" tIns="27432" bIns="27432"/>
+          <a:lstStyle/>
+          <a:p>
+            <a:pPr algn="l">
+              <a:lnSpc>
+                <a:spcPct val="92000"/>
+              </a:lnSpc>
+              <a:spcBef>
+                <a:spcPts val="0"/>
+              </a:spcBef>
+              <a:spcAft>
+                <a:spcPts val="0"/>
+              </a:spcAft>
+            </a:pPr>
+            <a:r>
+              <a:rPr sz="900" b="1" i="0">
+                <a:solidFill>
+                  <a:srgbClr val="1F497D"/>
+                </a:solidFill>
+                <a:latin typeface="Arial"/>
+              </a:rPr>
+              <a:t>Explainable forecasts</a:t>
+            </a:r>
+          </a:p>
+          <a:p>
+            <a:pPr algn="l">
+              <a:lnSpc>
+                <a:spcPct val="92000"/>
+              </a:lnSpc>
+              <a:spcBef>
+                <a:spcPts val="100"/>
+              </a:spcBef>
+              <a:spcAft>
+                <a:spcPts val="0"/>
+              </a:spcAft>
+            </a:pPr>
+            <a:r>
+              <a:rPr sz="750" b="0" i="0">
+                <a:solidFill>
+                  <a:srgbClr val="5A636E"/>
+                </a:solidFill>
+                <a:latin typeface="Arial"/>
+              </a:rPr>
+              <a:t>every number decomposes into the feature that drove it</a:t>
+            </a:r>
+          </a:p>
+        </p:txBody>
+      </p:sp>
+      <p:sp>
+        <p:nvSpPr>
+          <p:cNvPr id="15372" name="Rounded Rectangle 15371"/>
+          <p:cNvSpPr/>
+          <p:nvPr/>
+        </p:nvSpPr>
+        <p:spPr>
+          <a:xfrm>
+            <a:off x="3675888" y="3831336"/>
+            <a:ext cx="3136392" cy="365760"/>
+          </a:xfrm>
+          <a:prstGeom prst="roundRect">
+            <a:avLst>
+              <a:gd name="adj" fmla="val 8000"/>
+            </a:avLst>
+          </a:prstGeom>
+          <a:solidFill>
+            <a:srgbClr val="F2F5F9"/>
+          </a:solidFill>
+          <a:ln w="9525">
+            <a:solidFill>
+              <a:srgbClr val="C9D6E4"/>
+            </a:solidFill>
+          </a:ln>
+          <a:effectLst/>
+        </p:spPr>
+        <p:style>
+          <a:lnRef idx="1">
+            <a:schemeClr val="accent1"/>
+          </a:lnRef>
+          <a:fillRef idx="3">
+            <a:schemeClr val="accent1"/>
+          </a:fillRef>
+          <a:effectRef idx="2">
+            <a:schemeClr val="accent1"/>
+          </a:effectRef>
+          <a:fontRef idx="minor">
+            <a:schemeClr val="lt1"/>
+          </a:fontRef>
+        </p:style>
+        <p:txBody>
+          <a:bodyPr rtlCol="0" anchor="t" wrap="square" lIns="109728" rIns="109728" tIns="27432" bIns="27432"/>
+          <a:lstStyle/>
+          <a:p>
+            <a:pPr algn="l">
+              <a:lnSpc>
+                <a:spcPct val="92000"/>
+              </a:lnSpc>
+              <a:spcBef>
+                <a:spcPts val="0"/>
+              </a:spcBef>
+              <a:spcAft>
+                <a:spcPts val="0"/>
+              </a:spcAft>
+            </a:pPr>
+            <a:r>
+              <a:rPr sz="900" b="1" i="0">
+                <a:solidFill>
+                  <a:srgbClr val="1F497D"/>
+                </a:solidFill>
+                <a:latin typeface="Arial"/>
+              </a:rPr>
+              <a:t>A trust ladder</a:t>
+            </a:r>
+          </a:p>
+          <a:p>
+            <a:pPr algn="l">
+              <a:lnSpc>
+                <a:spcPct val="92000"/>
+              </a:lnSpc>
+              <a:spcBef>
+                <a:spcPts val="100"/>
+              </a:spcBef>
+              <a:spcAft>
+                <a:spcPts val="0"/>
+              </a:spcAft>
+            </a:pPr>
+            <a:r>
+              <a:rPr sz="750" b="0" i="0">
+                <a:solidFill>
+                  <a:srgbClr val="5A636E"/>
+                </a:solidFill>
+                <a:latin typeface="Arial"/>
+              </a:rPr>
+              <a:t>an unverified report can slow a road, never close one</a:t>
+            </a:r>
+          </a:p>
+        </p:txBody>
+      </p:sp>
+      <p:sp>
+        <p:nvSpPr>
+          <p:cNvPr id="15373" name="Rounded Rectangle 15372"/>
+          <p:cNvSpPr/>
+          <p:nvPr/>
+        </p:nvSpPr>
+        <p:spPr>
+          <a:xfrm>
+            <a:off x="411480" y="4251960"/>
+            <a:ext cx="3136392" cy="365760"/>
+          </a:xfrm>
+          <a:prstGeom prst="roundRect">
+            <a:avLst>
+              <a:gd name="adj" fmla="val 8000"/>
+            </a:avLst>
+          </a:prstGeom>
+          <a:solidFill>
+            <a:srgbClr val="F2F5F9"/>
+          </a:solidFill>
+          <a:ln w="9525">
+            <a:solidFill>
+              <a:srgbClr val="C9D6E4"/>
+            </a:solidFill>
+          </a:ln>
+          <a:effectLst/>
+        </p:spPr>
+        <p:style>
+          <a:lnRef idx="1">
+            <a:schemeClr val="accent1"/>
+          </a:lnRef>
+          <a:fillRef idx="3">
+            <a:schemeClr val="accent1"/>
+          </a:fillRef>
+          <a:effectRef idx="2">
+            <a:schemeClr val="accent1"/>
+          </a:effectRef>
+          <a:fontRef idx="minor">
+            <a:schemeClr val="lt1"/>
+          </a:fontRef>
+        </p:style>
+        <p:txBody>
+          <a:bodyPr rtlCol="0" anchor="t" wrap="square" lIns="109728" rIns="109728" tIns="27432" bIns="27432"/>
+          <a:lstStyle/>
+          <a:p>
+            <a:pPr algn="l">
+              <a:lnSpc>
+                <a:spcPct val="92000"/>
+              </a:lnSpc>
+              <a:spcBef>
+                <a:spcPts val="0"/>
+              </a:spcBef>
+              <a:spcAft>
+                <a:spcPts val="0"/>
+              </a:spcAft>
+            </a:pPr>
+            <a:r>
+              <a:rPr sz="900" b="1" i="0">
+                <a:solidFill>
+                  <a:srgbClr val="1F497D"/>
+                </a:solidFill>
+                <a:latin typeface="Arial"/>
+              </a:rPr>
+              <a:t>Photo + GPS evidence</a:t>
+            </a:r>
+          </a:p>
+          <a:p>
+            <a:pPr algn="l">
+              <a:lnSpc>
+                <a:spcPct val="92000"/>
+              </a:lnSpc>
+              <a:spcBef>
+                <a:spcPts val="100"/>
+              </a:spcBef>
+              <a:spcAft>
+                <a:spcPts val="0"/>
+              </a:spcAft>
+            </a:pPr>
+            <a:r>
+              <a:rPr sz="750" b="0" i="0">
+                <a:solidFill>
+                  <a:srgbClr val="5A636E"/>
+                </a:solidFill>
+                <a:latin typeface="Arial"/>
+              </a:rPr>
+              <a:t>every incident carries proof, not a phone call</a:t>
+            </a:r>
+          </a:p>
+        </p:txBody>
+      </p:sp>
+      <p:sp>
+        <p:nvSpPr>
+          <p:cNvPr id="15374" name="Rounded Rectangle 15373"/>
+          <p:cNvSpPr/>
+          <p:nvPr/>
+        </p:nvSpPr>
+        <p:spPr>
+          <a:xfrm>
+            <a:off x="3675888" y="4251960"/>
+            <a:ext cx="3136392" cy="365760"/>
+          </a:xfrm>
+          <a:prstGeom prst="roundRect">
+            <a:avLst>
+              <a:gd name="adj" fmla="val 8000"/>
+            </a:avLst>
+          </a:prstGeom>
+          <a:solidFill>
+            <a:srgbClr val="F2F5F9"/>
+          </a:solidFill>
+          <a:ln w="9525">
+            <a:solidFill>
+              <a:srgbClr val="C9D6E4"/>
+            </a:solidFill>
+          </a:ln>
+          <a:effectLst/>
+        </p:spPr>
+        <p:style>
+          <a:lnRef idx="1">
+            <a:schemeClr val="accent1"/>
+          </a:lnRef>
+          <a:fillRef idx="3">
+            <a:schemeClr val="accent1"/>
+          </a:fillRef>
+          <a:effectRef idx="2">
+            <a:schemeClr val="accent1"/>
+          </a:effectRef>
+          <a:fontRef idx="minor">
+            <a:schemeClr val="lt1"/>
+          </a:fontRef>
+        </p:style>
+        <p:txBody>
+          <a:bodyPr rtlCol="0" anchor="t" wrap="square" lIns="109728" rIns="109728" tIns="27432" bIns="27432"/>
+          <a:lstStyle/>
+          <a:p>
+            <a:pPr algn="l">
+              <a:lnSpc>
+                <a:spcPct val="92000"/>
+              </a:lnSpc>
+              <a:spcBef>
+                <a:spcPts val="0"/>
+              </a:spcBef>
+              <a:spcAft>
+                <a:spcPts val="0"/>
+              </a:spcAft>
+            </a:pPr>
+            <a:r>
+              <a:rPr sz="900" b="1" i="0">
+                <a:solidFill>
+                  <a:srgbClr val="1F497D"/>
+                </a:solidFill>
+                <a:latin typeface="Arial"/>
+              </a:rPr>
+              <a:t>It admits what it cannot see</a:t>
+            </a:r>
+          </a:p>
+          <a:p>
+            <a:pPr algn="l">
+              <a:lnSpc>
+                <a:spcPct val="92000"/>
+              </a:lnSpc>
+              <a:spcBef>
+                <a:spcPts val="100"/>
+              </a:spcBef>
+              <a:spcAft>
+                <a:spcPts val="0"/>
+              </a:spcAft>
+            </a:pPr>
+            <a:r>
+              <a:rPr sz="750" b="0" i="0">
+                <a:solidFill>
+                  <a:srgbClr val="5A636E"/>
+                </a:solidFill>
+                <a:latin typeface="Arial"/>
+              </a:rPr>
+              <a:t>coverage is published, so grey never looks like broken</a:t>
+            </a:r>
+          </a:p>
+        </p:txBody>
+      </p:sp>
+      <p:sp>
+        <p:nvSpPr>
+          <p:cNvPr id="15375" name="TextBox 15374"/>
           <p:cNvSpPr txBox="1"/>
           <p:nvPr/>
         </p:nvSpPr>
@@ -6676,14 +7219,14 @@
       </p:sp>
       <p:sp>
         <p:nvSpPr>
-          <p:cNvPr id="15369" name="Rounded Rectangle 15368"/>
+          <p:cNvPr id="15376" name="Rounded Rectangle 15375"/>
           <p:cNvSpPr/>
           <p:nvPr/>
         </p:nvSpPr>
         <p:spPr>
           <a:xfrm>
             <a:off x="7086600" y="1655064"/>
-            <a:ext cx="4690872" cy="438912"/>
+            <a:ext cx="4690872" cy="475488"/>
           </a:xfrm>
           <a:prstGeom prst="roundRect">
             <a:avLst>
@@ -6743,14 +7286,14 @@
       </p:sp>
       <p:sp>
         <p:nvSpPr>
-          <p:cNvPr id="15370" name="Down Arrow 15369"/>
+          <p:cNvPr id="15377" name="Down Arrow 15376"/>
           <p:cNvSpPr/>
           <p:nvPr/>
         </p:nvSpPr>
         <p:spPr>
           <a:xfrm>
-            <a:off x="9381744" y="2112264"/>
-            <a:ext cx="100584" cy="100583"/>
+            <a:off x="9381744" y="2148840"/>
+            <a:ext cx="100584" cy="118872"/>
           </a:xfrm>
           <a:prstGeom prst="downArrow">
             <a:avLst/>
@@ -6787,14 +7330,14 @@
       </p:sp>
       <p:sp>
         <p:nvSpPr>
-          <p:cNvPr id="15371" name="Rounded Rectangle 15370"/>
+          <p:cNvPr id="15378" name="Rounded Rectangle 15377"/>
           <p:cNvSpPr/>
           <p:nvPr/>
         </p:nvSpPr>
         <p:spPr>
           <a:xfrm>
-            <a:off x="7086600" y="2231136"/>
-            <a:ext cx="4690872" cy="438912"/>
+            <a:off x="7086600" y="2286000"/>
+            <a:ext cx="4690872" cy="475488"/>
           </a:xfrm>
           <a:prstGeom prst="roundRect">
             <a:avLst>
@@ -6854,14 +7397,14 @@
       </p:sp>
       <p:sp>
         <p:nvSpPr>
-          <p:cNvPr id="15372" name="Down Arrow 15371"/>
+          <p:cNvPr id="15379" name="Down Arrow 15378"/>
           <p:cNvSpPr/>
           <p:nvPr/>
         </p:nvSpPr>
         <p:spPr>
           <a:xfrm>
-            <a:off x="9381744" y="2688336"/>
-            <a:ext cx="100584" cy="100583"/>
+            <a:off x="9381744" y="2779776"/>
+            <a:ext cx="100584" cy="118872"/>
           </a:xfrm>
           <a:prstGeom prst="downArrow">
             <a:avLst/>
@@ -6898,14 +7441,14 @@
       </p:sp>
       <p:sp>
         <p:nvSpPr>
-          <p:cNvPr id="15373" name="Rounded Rectangle 15372"/>
+          <p:cNvPr id="15380" name="Rounded Rectangle 15379"/>
           <p:cNvSpPr/>
           <p:nvPr/>
         </p:nvSpPr>
         <p:spPr>
           <a:xfrm>
-            <a:off x="7086600" y="2807208"/>
-            <a:ext cx="4690872" cy="438912"/>
+            <a:off x="7086600" y="2916936"/>
+            <a:ext cx="4690872" cy="475488"/>
           </a:xfrm>
           <a:prstGeom prst="roundRect">
             <a:avLst>
@@ -6965,14 +7508,14 @@
       </p:sp>
       <p:sp>
         <p:nvSpPr>
-          <p:cNvPr id="15374" name="Down Arrow 15373"/>
+          <p:cNvPr id="15381" name="Down Arrow 15380"/>
           <p:cNvSpPr/>
           <p:nvPr/>
         </p:nvSpPr>
         <p:spPr>
           <a:xfrm>
-            <a:off x="9381744" y="3264408"/>
-            <a:ext cx="100584" cy="100583"/>
+            <a:off x="9381744" y="3410712"/>
+            <a:ext cx="100584" cy="118872"/>
           </a:xfrm>
           <a:prstGeom prst="downArrow">
             <a:avLst/>
@@ -7009,14 +7552,14 @@
       </p:sp>
       <p:sp>
         <p:nvSpPr>
-          <p:cNvPr id="15375" name="Rounded Rectangle 15374"/>
+          <p:cNvPr id="15382" name="Rounded Rectangle 15381"/>
           <p:cNvSpPr/>
           <p:nvPr/>
         </p:nvSpPr>
         <p:spPr>
           <a:xfrm>
-            <a:off x="7086600" y="3383279"/>
-            <a:ext cx="4690872" cy="438912"/>
+            <a:off x="7086600" y="3547872"/>
+            <a:ext cx="4690872" cy="475488"/>
           </a:xfrm>
           <a:prstGeom prst="roundRect">
             <a:avLst>
@@ -7076,14 +7619,14 @@
       </p:sp>
       <p:sp>
         <p:nvSpPr>
-          <p:cNvPr id="15376" name="Down Arrow 15375"/>
+          <p:cNvPr id="15383" name="Down Arrow 15382"/>
           <p:cNvSpPr/>
           <p:nvPr/>
         </p:nvSpPr>
         <p:spPr>
           <a:xfrm>
-            <a:off x="9381744" y="3840479"/>
-            <a:ext cx="100584" cy="100583"/>
+            <a:off x="9381744" y="4041648"/>
+            <a:ext cx="100584" cy="118872"/>
           </a:xfrm>
           <a:prstGeom prst="downArrow">
             <a:avLst/>
@@ -7120,14 +7663,14 @@
       </p:sp>
       <p:sp>
         <p:nvSpPr>
-          <p:cNvPr id="15377" name="Rounded Rectangle 15376"/>
+          <p:cNvPr id="15384" name="Rounded Rectangle 15383"/>
           <p:cNvSpPr/>
           <p:nvPr/>
         </p:nvSpPr>
         <p:spPr>
           <a:xfrm>
-            <a:off x="7086600" y="3959352"/>
-            <a:ext cx="4690872" cy="438912"/>
+            <a:off x="7086600" y="4178808"/>
+            <a:ext cx="4690872" cy="475488"/>
           </a:xfrm>
           <a:prstGeom prst="roundRect">
             <a:avLst>
@@ -7187,13 +7730,13 @@
       </p:sp>
       <p:sp>
         <p:nvSpPr>
-          <p:cNvPr id="15378" name="TextBox 15377"/>
+          <p:cNvPr id="15385" name="TextBox 15384"/>
           <p:cNvSpPr txBox="1"/>
           <p:nvPr/>
         </p:nvSpPr>
         <p:spPr>
           <a:xfrm>
-            <a:off x="411480" y="4562856"/>
+            <a:off x="411480" y="4764024"/>
             <a:ext cx="11365992" cy="237744"/>
           </a:xfrm>
           <a:prstGeom prst="rect">
@@ -7232,13 +7775,13 @@
       </p:sp>
       <p:sp>
         <p:nvSpPr>
-          <p:cNvPr id="15379" name="Rectangle 15378"/>
+          <p:cNvPr id="15386" name="Rectangle 15385"/>
           <p:cNvSpPr/>
           <p:nvPr/>
         </p:nvSpPr>
         <p:spPr>
           <a:xfrm>
-            <a:off x="411480" y="4750308"/>
+            <a:off x="411480" y="4951476"/>
             <a:ext cx="11365992" cy="12801"/>
           </a:xfrm>
           <a:prstGeom prst="rect">
@@ -7276,14 +7819,14 @@
       </p:sp>
       <p:sp>
         <p:nvSpPr>
-          <p:cNvPr id="15380" name="Rounded Rectangle 15379"/>
+          <p:cNvPr id="15387" name="Rounded Rectangle 15386"/>
           <p:cNvSpPr/>
           <p:nvPr/>
         </p:nvSpPr>
         <p:spPr>
           <a:xfrm>
-            <a:off x="411480" y="4855464"/>
-            <a:ext cx="2759202" cy="530352"/>
+            <a:off x="411480" y="5056632"/>
+            <a:ext cx="2759202" cy="502920"/>
           </a:xfrm>
           <a:prstGeom prst="roundRect">
             <a:avLst>
@@ -7374,14 +7917,14 @@
       </p:sp>
       <p:sp>
         <p:nvSpPr>
-          <p:cNvPr id="15381" name="Rounded Rectangle 15380"/>
+          <p:cNvPr id="15388" name="Rounded Rectangle 15387"/>
           <p:cNvSpPr/>
           <p:nvPr/>
         </p:nvSpPr>
         <p:spPr>
           <a:xfrm>
-            <a:off x="3280410" y="4855464"/>
-            <a:ext cx="2759202" cy="530352"/>
+            <a:off x="3280410" y="5056632"/>
+            <a:ext cx="2759202" cy="502920"/>
           </a:xfrm>
           <a:prstGeom prst="roundRect">
             <a:avLst>
@@ -7472,14 +8015,14 @@
       </p:sp>
       <p:sp>
         <p:nvSpPr>
-          <p:cNvPr id="15382" name="Rounded Rectangle 15381"/>
+          <p:cNvPr id="15389" name="Rounded Rectangle 15388"/>
           <p:cNvSpPr/>
           <p:nvPr/>
         </p:nvSpPr>
         <p:spPr>
           <a:xfrm>
-            <a:off x="6149340" y="4855464"/>
-            <a:ext cx="2759202" cy="530352"/>
+            <a:off x="6149340" y="5056632"/>
+            <a:ext cx="2759202" cy="502920"/>
           </a:xfrm>
           <a:prstGeom prst="roundRect">
             <a:avLst>
@@ -7570,14 +8113,14 @@
       </p:sp>
       <p:sp>
         <p:nvSpPr>
-          <p:cNvPr id="15383" name="Rounded Rectangle 15382"/>
+          <p:cNvPr id="15390" name="Rounded Rectangle 15389"/>
           <p:cNvSpPr/>
           <p:nvPr/>
         </p:nvSpPr>
         <p:spPr>
           <a:xfrm>
-            <a:off x="9018270" y="4855464"/>
-            <a:ext cx="2759202" cy="530352"/>
+            <a:off x="9018270" y="5056632"/>
+            <a:ext cx="2759202" cy="502920"/>
           </a:xfrm>
           <a:prstGeom prst="roundRect">
             <a:avLst>
@@ -7668,14 +8211,14 @@
       </p:sp>
       <p:sp>
         <p:nvSpPr>
-          <p:cNvPr id="15384" name="Rounded Rectangle 15383"/>
+          <p:cNvPr id="15391" name="Rounded Rectangle 15390"/>
           <p:cNvSpPr/>
           <p:nvPr/>
         </p:nvSpPr>
         <p:spPr>
           <a:xfrm>
-            <a:off x="411480" y="5458968"/>
-            <a:ext cx="2759202" cy="530352"/>
+            <a:off x="411480" y="5632704"/>
+            <a:ext cx="2759202" cy="502920"/>
           </a:xfrm>
           <a:prstGeom prst="roundRect">
             <a:avLst>
@@ -7766,14 +8309,14 @@
       </p:sp>
       <p:sp>
         <p:nvSpPr>
-          <p:cNvPr id="15385" name="Rounded Rectangle 15384"/>
+          <p:cNvPr id="15392" name="Rounded Rectangle 15391"/>
           <p:cNvSpPr/>
           <p:nvPr/>
         </p:nvSpPr>
         <p:spPr>
           <a:xfrm>
-            <a:off x="3280410" y="5458968"/>
-            <a:ext cx="2759202" cy="530352"/>
+            <a:off x="3280410" y="5632704"/>
+            <a:ext cx="2759202" cy="502920"/>
           </a:xfrm>
           <a:prstGeom prst="roundRect">
             <a:avLst>
@@ -7864,14 +8407,14 @@
       </p:sp>
       <p:sp>
         <p:nvSpPr>
-          <p:cNvPr id="15386" name="Rounded Rectangle 15385"/>
+          <p:cNvPr id="15393" name="Rounded Rectangle 15392"/>
           <p:cNvSpPr/>
           <p:nvPr/>
         </p:nvSpPr>
         <p:spPr>
           <a:xfrm>
-            <a:off x="6149340" y="5458968"/>
-            <a:ext cx="2759202" cy="530352"/>
+            <a:off x="6149340" y="5632704"/>
+            <a:ext cx="2759202" cy="502920"/>
           </a:xfrm>
           <a:prstGeom prst="roundRect">
             <a:avLst>
@@ -7962,14 +8505,14 @@
       </p:sp>
       <p:sp>
         <p:nvSpPr>
-          <p:cNvPr id="15387" name="Rounded Rectangle 15386"/>
+          <p:cNvPr id="15394" name="Rounded Rectangle 15393"/>
           <p:cNvSpPr/>
           <p:nvPr/>
         </p:nvSpPr>
         <p:spPr>
           <a:xfrm>
-            <a:off x="9018270" y="5458968"/>
-            <a:ext cx="2759202" cy="530352"/>
+            <a:off x="9018270" y="5632704"/>
+            <a:ext cx="2759202" cy="502920"/>
           </a:xfrm>
           <a:prstGeom prst="roundRect">
             <a:avLst>
